--- a/guruguru/guruguru_target_tour.pptx
+++ b/guruguru/guruguru_target_tour.pptx
@@ -3280,7 +3280,7 @@
                 </a:solidFill>
                 <a:latin typeface="Yu Gothic"/>
               </a:rPr>
-              <a:t>ぐるぐる人材とは？　― 銅めぐりツアー（象徴IS）で出会いたい人</a:t>
+              <a:t>ぐるぐる人材とは？</a:t>
             </a:r>
           </a:p>
         </p:txBody>
@@ -3315,7 +3315,7 @@
                 </a:solidFill>
                 <a:latin typeface="Yu Gothic"/>
               </a:rPr>
-              <a:t>出典：visions具体的なペルソナ像 / ジャーニー（専卒以上）/ SEEDS選定シート / 地球資源を輝かせていくIS（各シート）、visions college相談スライド</a:t>
+              <a:t>出典：visions具体的なペルソナ像 / ジャーニー（専卒以上）/ SEEDS選定シート</a:t>
             </a:r>
           </a:p>
         </p:txBody>
@@ -3329,7 +3329,7 @@
         <p:spPr>
           <a:xfrm>
             <a:off x="365760" y="777240"/>
-            <a:ext cx="11430000" cy="502920"/>
+            <a:ext cx="11430000" cy="548640"/>
           </a:xfrm>
           <a:prstGeom prst="rect">
             <a:avLst/>
@@ -3344,13 +3344,13 @@
           <a:p>
             <a:pPr algn="l"/>
             <a:r>
-              <a:rPr sz="1800" b="1">
+              <a:rPr sz="2200" b="1">
                 <a:solidFill>
                   <a:srgbClr val="1F497D"/>
                 </a:solidFill>
                 <a:latin typeface="Yu Gothic"/>
               </a:rPr>
-              <a:t>「ぐるぐる人材」＝ 仮説を立てて回し、人との関係をつなぎながら“めぐり”をつくる人</a:t>
+              <a:t>仮説を回し、人をつなぎ、“めぐり”をつくる人</a:t>
             </a:r>
           </a:p>
         </p:txBody>
@@ -3363,8 +3363,8 @@
         </p:nvSpPr>
         <p:spPr>
           <a:xfrm>
-            <a:off x="365760" y="1417320"/>
-            <a:ext cx="3657600" cy="2331720"/>
+            <a:off x="365760" y="1463040"/>
+            <a:ext cx="3703320" cy="2011680"/>
           </a:xfrm>
           <a:prstGeom prst="rect">
             <a:avLst/>
@@ -3407,8 +3407,8 @@
         </p:nvSpPr>
         <p:spPr>
           <a:xfrm>
-            <a:off x="365760" y="1463040"/>
-            <a:ext cx="3657600" cy="347472"/>
+            <a:off x="365760" y="1508760"/>
+            <a:ext cx="3703320" cy="411480"/>
           </a:xfrm>
           <a:prstGeom prst="rect">
             <a:avLst/>
@@ -3423,13 +3423,13 @@
           <a:p>
             <a:pPr algn="l"/>
             <a:r>
-              <a:rPr sz="1300" b="1">
+              <a:rPr sz="1500" b="1">
                 <a:solidFill>
                   <a:srgbClr val="1F497D"/>
                 </a:solidFill>
                 <a:latin typeface="Yu Gothic"/>
               </a:rPr>
-              <a:t>① visionsの定義（シート原文）</a:t>
+              <a:t>① visionsの定義</a:t>
             </a:r>
           </a:p>
         </p:txBody>
@@ -3442,8 +3442,8 @@
         </p:nvSpPr>
         <p:spPr>
           <a:xfrm>
-            <a:off x="365760" y="1828800"/>
-            <a:ext cx="3657600" cy="1874519"/>
+            <a:off x="365760" y="1965960"/>
+            <a:ext cx="3703320" cy="1463040"/>
           </a:xfrm>
           <a:prstGeom prst="rect">
             <a:avLst/>
@@ -3456,39 +3456,51 @@
           </a:bodyPr>
           <a:lstStyle/>
           <a:p>
-            <a:pPr algn="l"/>
-            <a:r>
-              <a:rPr sz="1200" b="0">
+            <a:pPr algn="l">
+              <a:spcBef>
+                <a:spcPts val="400"/>
+              </a:spcBef>
+            </a:pPr>
+            <a:r>
+              <a:rPr sz="1500" b="0">
                 <a:solidFill>
                   <a:srgbClr val="262626"/>
                 </a:solidFill>
                 <a:latin typeface="Yu Gothic"/>
               </a:rPr>
-              <a:t>・コツコツ：小さい頃からものづくりが好きで、計画的に取り組む</a:t>
-            </a:r>
-          </a:p>
-          <a:p>
-            <a:pPr algn="l"/>
-            <a:r>
-              <a:rPr sz="1200" b="1">
+              <a:t>PDCAを回すのが得意</a:t>
+            </a:r>
+          </a:p>
+          <a:p>
+            <a:pPr algn="l">
+              <a:spcBef>
+                <a:spcPts val="400"/>
+              </a:spcBef>
+            </a:pPr>
+            <a:r>
+              <a:rPr sz="1500" b="0">
                 <a:solidFill>
                   <a:srgbClr val="262626"/>
                 </a:solidFill>
                 <a:latin typeface="Yu Gothic"/>
               </a:rPr>
-              <a:t>・ぐるぐる：PDCAを回すのが得意で、循環（関係作り）ができる</a:t>
-            </a:r>
-          </a:p>
-          <a:p>
-            <a:pPr algn="l"/>
-            <a:r>
-              <a:rPr sz="1200" b="0">
-                <a:solidFill>
-                  <a:srgbClr val="262626"/>
-                </a:solidFill>
-                <a:latin typeface="Yu Gothic"/>
-              </a:rPr>
-              <a:t>→ コツコツ＝「深く積む」、ぐるぐる＝「回してつなぐ」</a:t>
+              <a:t>循環（関係作り）ができる</a:t>
+            </a:r>
+          </a:p>
+          <a:p>
+            <a:pPr algn="l">
+              <a:spcBef>
+                <a:spcPts val="400"/>
+              </a:spcBef>
+            </a:pPr>
+            <a:r>
+              <a:rPr sz="1500" b="0">
+                <a:solidFill>
+                  <a:srgbClr val="595959"/>
+                </a:solidFill>
+                <a:latin typeface="Yu Gothic"/>
+              </a:rPr>
+              <a:t>↔ コツコツ＝深く積む</a:t>
             </a:r>
           </a:p>
         </p:txBody>
@@ -3501,8 +3513,8 @@
         </p:nvSpPr>
         <p:spPr>
           <a:xfrm>
-            <a:off x="4160520" y="1417320"/>
-            <a:ext cx="3749039" cy="2331720"/>
+            <a:off x="4251960" y="1463040"/>
+            <a:ext cx="3703320" cy="2011680"/>
           </a:xfrm>
           <a:prstGeom prst="rect">
             <a:avLst/>
@@ -3545,8 +3557,8 @@
         </p:nvSpPr>
         <p:spPr>
           <a:xfrm>
-            <a:off x="4160520" y="1463040"/>
-            <a:ext cx="3749039" cy="347472"/>
+            <a:off x="4251960" y="1508760"/>
+            <a:ext cx="3703320" cy="411480"/>
           </a:xfrm>
           <a:prstGeom prst="rect">
             <a:avLst/>
@@ -3561,13 +3573,13 @@
           <a:p>
             <a:pPr algn="l"/>
             <a:r>
-              <a:rPr sz="1300" b="1">
+              <a:rPr sz="1500" b="1">
                 <a:solidFill>
                   <a:srgbClr val="1F497D"/>
                 </a:solidFill>
                 <a:latin typeface="Yu Gothic"/>
               </a:rPr>
-              <a:t>② 清峰SEEDSの“刺さりどころ”</a:t>
+              <a:t>② 清峰SEEDSの⭐</a:t>
             </a:r>
           </a:p>
         </p:txBody>
@@ -3580,8 +3592,8 @@
         </p:nvSpPr>
         <p:spPr>
           <a:xfrm>
-            <a:off x="4160520" y="1828800"/>
-            <a:ext cx="3749039" cy="1874519"/>
+            <a:off x="4251960" y="1965960"/>
+            <a:ext cx="3703320" cy="1463040"/>
           </a:xfrm>
           <a:prstGeom prst="rect">
             <a:avLst/>
@@ -3594,75 +3606,67 @@
           </a:bodyPr>
           <a:lstStyle/>
           <a:p>
-            <a:pPr algn="l"/>
-            <a:r>
-              <a:rPr sz="1200" b="0">
+            <a:pPr algn="l">
+              <a:spcBef>
+                <a:spcPts val="400"/>
+              </a:spcBef>
+            </a:pPr>
+            <a:r>
+              <a:rPr sz="1500" b="0">
                 <a:solidFill>
                   <a:srgbClr val="262626"/>
                 </a:solidFill>
                 <a:latin typeface="Yu Gothic"/>
               </a:rPr>
-              <a:t>専卒以上ぐるぐるで⭐（最重要）だった魅力：</a:t>
-            </a:r>
-          </a:p>
-          <a:p>
-            <a:pPr algn="l"/>
-            <a:r>
-              <a:rPr sz="1200" b="0">
+              <a:t>地域・社会への貢献</a:t>
+            </a:r>
+          </a:p>
+          <a:p>
+            <a:pPr algn="l">
+              <a:spcBef>
+                <a:spcPts val="400"/>
+              </a:spcBef>
+            </a:pPr>
+            <a:r>
+              <a:rPr sz="1500" b="0">
                 <a:solidFill>
                   <a:srgbClr val="262626"/>
                 </a:solidFill>
                 <a:latin typeface="Yu Gothic"/>
               </a:rPr>
-              <a:t>・地域・社会への貢献　・明確な理念</a:t>
-            </a:r>
-          </a:p>
-          <a:p>
-            <a:pPr algn="l"/>
-            <a:r>
-              <a:rPr sz="1200" b="0">
+              <a:t>明確な理念</a:t>
+            </a:r>
+          </a:p>
+          <a:p>
+            <a:pPr algn="l">
+              <a:spcBef>
+                <a:spcPts val="400"/>
+              </a:spcBef>
+            </a:pPr>
+            <a:r>
+              <a:rPr sz="1500" b="0">
                 <a:solidFill>
                   <a:srgbClr val="262626"/>
                 </a:solidFill>
                 <a:latin typeface="Yu Gothic"/>
               </a:rPr>
-              <a:t>・実は身近／見えないところで支えるロマン</a:t>
-            </a:r>
-          </a:p>
-          <a:p>
-            <a:pPr algn="l"/>
-            <a:r>
-              <a:rPr sz="1200" b="0">
+              <a:t>実は身近、支えるロマン</a:t>
+            </a:r>
+          </a:p>
+          <a:p>
+            <a:pPr algn="l">
+              <a:spcBef>
+                <a:spcPts val="400"/>
+              </a:spcBef>
+            </a:pPr>
+            <a:r>
+              <a:rPr sz="1500" b="0">
                 <a:solidFill>
                   <a:srgbClr val="262626"/>
                 </a:solidFill>
                 <a:latin typeface="Yu Gothic"/>
               </a:rPr>
-              <a:t>・「どう作られるか」のストーリー</a:t>
-            </a:r>
-          </a:p>
-          <a:p>
-            <a:pPr algn="l"/>
-            <a:r>
-              <a:rPr sz="1200" b="0">
-                <a:solidFill>
-                  <a:srgbClr val="262626"/>
-                </a:solidFill>
-                <a:latin typeface="Yu Gothic"/>
-              </a:rPr>
-              <a:t>・お客様に向き合う関係性づくり</a:t>
-            </a:r>
-          </a:p>
-          <a:p>
-            <a:pPr algn="l"/>
-            <a:r>
-              <a:rPr sz="1200" b="0">
-                <a:solidFill>
-                  <a:srgbClr val="262626"/>
-                </a:solidFill>
-                <a:latin typeface="Yu Gothic"/>
-              </a:rPr>
-              <a:t>・型にはまらないチャレンジ精神</a:t>
+              <a:t>どう作られるかの物語</a:t>
             </a:r>
           </a:p>
         </p:txBody>
@@ -3675,8 +3679,8 @@
         </p:nvSpPr>
         <p:spPr>
           <a:xfrm>
-            <a:off x="8046720" y="1417320"/>
-            <a:ext cx="3749039" cy="2331720"/>
+            <a:off x="8138160" y="1463040"/>
+            <a:ext cx="3657600" cy="2011680"/>
           </a:xfrm>
           <a:prstGeom prst="rect">
             <a:avLst/>
@@ -3719,8 +3723,8 @@
         </p:nvSpPr>
         <p:spPr>
           <a:xfrm>
-            <a:off x="8046720" y="1463040"/>
-            <a:ext cx="3749039" cy="347472"/>
+            <a:off x="8138160" y="1508760"/>
+            <a:ext cx="3657600" cy="411480"/>
           </a:xfrm>
           <a:prstGeom prst="rect">
             <a:avLst/>
@@ -3735,7 +3739,7 @@
           <a:p>
             <a:pPr algn="l"/>
             <a:r>
-              <a:rPr sz="1300" b="1">
+              <a:rPr sz="1500" b="1">
                 <a:solidFill>
                   <a:srgbClr val="1F497D"/>
                 </a:solidFill>
@@ -3754,8 +3758,8 @@
         </p:nvSpPr>
         <p:spPr>
           <a:xfrm>
-            <a:off x="8046720" y="1828800"/>
-            <a:ext cx="3749039" cy="1874519"/>
+            <a:off x="8138160" y="1965960"/>
+            <a:ext cx="3657600" cy="1463040"/>
           </a:xfrm>
           <a:prstGeom prst="rect">
             <a:avLst/>
@@ -3768,39 +3772,51 @@
           </a:bodyPr>
           <a:lstStyle/>
           <a:p>
-            <a:pPr algn="l"/>
-            <a:r>
-              <a:rPr sz="1200" b="0">
+            <a:pPr algn="l">
+              <a:spcBef>
+                <a:spcPts val="400"/>
+              </a:spcBef>
+            </a:pPr>
+            <a:r>
+              <a:rPr sz="1500" b="0">
                 <a:solidFill>
                   <a:srgbClr val="262626"/>
                 </a:solidFill>
                 <a:latin typeface="Yu Gothic"/>
               </a:rPr>
-              <a:t>・価値循環（鉱石→電気銅→インゴット→製品→産廃）を「構造」で捉えたがる</a:t>
-            </a:r>
-          </a:p>
-          <a:p>
-            <a:pPr algn="l"/>
-            <a:r>
-              <a:rPr sz="1200" b="0">
+              <a:t>銅の流れを構造で捉える</a:t>
+            </a:r>
+          </a:p>
+          <a:p>
+            <a:pPr algn="l">
+              <a:spcBef>
+                <a:spcPts val="400"/>
+              </a:spcBef>
+            </a:pPr>
+            <a:r>
+              <a:rPr sz="1500" b="0">
                 <a:solidFill>
                   <a:srgbClr val="262626"/>
                 </a:solidFill>
                 <a:latin typeface="Yu Gothic"/>
               </a:rPr>
-              <a:t>・分断された関係者（産廃・加工・精錬）を“つなぐ”ことに動機がある</a:t>
-            </a:r>
-          </a:p>
-          <a:p>
-            <a:pPr algn="l"/>
-            <a:r>
-              <a:rPr sz="1200" b="0">
+              <a:t>分断をつなぐことに燃える</a:t>
+            </a:r>
+          </a:p>
+          <a:p>
+            <a:pPr algn="l">
+              <a:spcBef>
+                <a:spcPts val="400"/>
+              </a:spcBef>
+            </a:pPr>
+            <a:r>
+              <a:rPr sz="1500" b="0">
                 <a:solidFill>
                   <a:srgbClr val="262626"/>
                 </a:solidFill>
                 <a:latin typeface="Yu Gothic"/>
               </a:rPr>
-              <a:t>・答えより「問い」を深めたい（社長の隣で問いを共有できる）</a:t>
+              <a:t>答えより問いを深める</a:t>
             </a:r>
           </a:p>
         </p:txBody>
@@ -3813,7 +3829,7 @@
         </p:nvSpPr>
         <p:spPr>
           <a:xfrm>
-            <a:off x="365760" y="3886200"/>
+            <a:off x="365760" y="3611880"/>
             <a:ext cx="11430000" cy="365760"/>
           </a:xfrm>
           <a:prstGeom prst="rect">
@@ -3829,13 +3845,13 @@
           <a:p>
             <a:pPr algn="l"/>
             <a:r>
-              <a:rPr sz="1400" b="1">
+              <a:rPr sz="1500" b="1">
                 <a:solidFill>
                   <a:srgbClr val="1F497D"/>
                 </a:solidFill>
                 <a:latin typeface="Yu Gothic"/>
               </a:rPr>
-              <a:t>コツコツとの違い（ツアー設計の分かれ道）</a:t>
+              <a:t>コツコツとの違い</a:t>
             </a:r>
           </a:p>
         </p:txBody>
@@ -3848,8 +3864,8 @@
         </p:nvSpPr>
         <p:spPr>
           <a:xfrm>
-            <a:off x="365760" y="4297680"/>
-            <a:ext cx="2340864" cy="365760"/>
+            <a:off x="365760" y="4023360"/>
+            <a:ext cx="2148840" cy="384048"/>
           </a:xfrm>
           <a:prstGeom prst="rect">
             <a:avLst/>
@@ -3864,7 +3880,7 @@
           <a:p>
             <a:pPr algn="l"/>
             <a:r>
-              <a:rPr sz="1100" b="1">
+              <a:rPr sz="1400" b="1">
                 <a:solidFill>
                   <a:srgbClr val="262626"/>
                 </a:solidFill>
@@ -3883,8 +3899,8 @@
         </p:nvSpPr>
         <p:spPr>
           <a:xfrm>
-            <a:off x="2743200" y="4297680"/>
-            <a:ext cx="4443984" cy="365760"/>
+            <a:off x="2560320" y="4023360"/>
+            <a:ext cx="4526280" cy="384048"/>
           </a:xfrm>
           <a:prstGeom prst="rect">
             <a:avLst/>
@@ -3917,13 +3933,13 @@
           <a:p>
             <a:pPr algn="l"/>
             <a:r>
-              <a:rPr sz="1100" b="1">
+              <a:rPr sz="1400" b="1">
                 <a:solidFill>
                   <a:srgbClr val="FFFFFF"/>
                 </a:solidFill>
                 <a:latin typeface="Yu Gothic"/>
               </a:rPr>
-              <a:t>コツコツ人材</a:t>
+              <a:t>コツコツ</a:t>
             </a:r>
           </a:p>
         </p:txBody>
@@ -3936,8 +3952,8 @@
         </p:nvSpPr>
         <p:spPr>
           <a:xfrm>
-            <a:off x="7223760" y="4297680"/>
-            <a:ext cx="4535424" cy="365760"/>
+            <a:off x="7132320" y="4023360"/>
+            <a:ext cx="4617720" cy="384048"/>
           </a:xfrm>
           <a:prstGeom prst="rect">
             <a:avLst/>
@@ -3970,13 +3986,13 @@
           <a:p>
             <a:pPr algn="l"/>
             <a:r>
-              <a:rPr sz="1100" b="1">
+              <a:rPr sz="1400" b="1">
                 <a:solidFill>
                   <a:srgbClr val="FFFFFF"/>
                 </a:solidFill>
                 <a:latin typeface="Yu Gothic"/>
               </a:rPr>
-              <a:t>ぐるぐる人材</a:t>
+              <a:t>ぐるぐる</a:t>
             </a:r>
           </a:p>
         </p:txBody>
@@ -3989,8 +4005,8 @@
         </p:nvSpPr>
         <p:spPr>
           <a:xfrm>
-            <a:off x="365760" y="4681728"/>
-            <a:ext cx="2340864" cy="365760"/>
+            <a:off x="365760" y="4443984"/>
+            <a:ext cx="2148840" cy="384048"/>
           </a:xfrm>
           <a:prstGeom prst="rect">
             <a:avLst/>
@@ -4023,13 +4039,13 @@
           <a:p>
             <a:pPr algn="l"/>
             <a:r>
-              <a:rPr sz="1100" b="1">
+              <a:rPr sz="1400" b="1">
                 <a:solidFill>
                   <a:srgbClr val="262626"/>
                 </a:solidFill>
                 <a:latin typeface="Yu Gothic"/>
               </a:rPr>
-              <a:t>関心の向き</a:t>
+              <a:t>関心</a:t>
             </a:r>
           </a:p>
         </p:txBody>
@@ -4042,8 +4058,8 @@
         </p:nvSpPr>
         <p:spPr>
           <a:xfrm>
-            <a:off x="2743200" y="4681728"/>
-            <a:ext cx="4443984" cy="365760"/>
+            <a:off x="2560320" y="4443984"/>
+            <a:ext cx="4526280" cy="384048"/>
           </a:xfrm>
           <a:prstGeom prst="rect">
             <a:avLst/>
@@ -4076,13 +4092,13 @@
           <a:p>
             <a:pPr algn="l"/>
             <a:r>
-              <a:rPr sz="1100" b="0">
+              <a:rPr sz="1400" b="0">
                 <a:solidFill>
                   <a:srgbClr val="262626"/>
                 </a:solidFill>
                 <a:latin typeface="Yu Gothic"/>
               </a:rPr>
-              <a:t>工程の一点を極める（巻きの出来栄え・手仕事）</a:t>
+              <a:t>工程を極める</a:t>
             </a:r>
           </a:p>
         </p:txBody>
@@ -4095,8 +4111,8 @@
         </p:nvSpPr>
         <p:spPr>
           <a:xfrm>
-            <a:off x="7223760" y="4681728"/>
-            <a:ext cx="4535424" cy="365760"/>
+            <a:off x="7132320" y="4443984"/>
+            <a:ext cx="4617720" cy="384048"/>
           </a:xfrm>
           <a:prstGeom prst="rect">
             <a:avLst/>
@@ -4129,13 +4145,13 @@
           <a:p>
             <a:pPr algn="l"/>
             <a:r>
-              <a:rPr sz="1100" b="0">
+              <a:rPr sz="1400" b="0">
                 <a:solidFill>
                   <a:srgbClr val="262626"/>
                 </a:solidFill>
                 <a:latin typeface="Yu Gothic"/>
               </a:rPr>
-              <a:t>工程と工程、会社と会社の“あいだ”（めぐり・関係）</a:t>
+              <a:t>工程と会社のあいだ</a:t>
             </a:r>
           </a:p>
         </p:txBody>
@@ -4148,8 +4164,8 @@
         </p:nvSpPr>
         <p:spPr>
           <a:xfrm>
-            <a:off x="365760" y="5065776"/>
-            <a:ext cx="2340864" cy="365760"/>
+            <a:off x="365760" y="4864608"/>
+            <a:ext cx="2148840" cy="384048"/>
           </a:xfrm>
           <a:prstGeom prst="rect">
             <a:avLst/>
@@ -4182,7 +4198,7 @@
           <a:p>
             <a:pPr algn="l"/>
             <a:r>
-              <a:rPr sz="1100" b="1">
+              <a:rPr sz="1400" b="1">
                 <a:solidFill>
                   <a:srgbClr val="262626"/>
                 </a:solidFill>
@@ -4201,8 +4217,8 @@
         </p:nvSpPr>
         <p:spPr>
           <a:xfrm>
-            <a:off x="2743200" y="5065776"/>
-            <a:ext cx="4443984" cy="365760"/>
+            <a:off x="2560320" y="4864608"/>
+            <a:ext cx="4526280" cy="384048"/>
           </a:xfrm>
           <a:prstGeom prst="rect">
             <a:avLst/>
@@ -4235,13 +4251,13 @@
           <a:p>
             <a:pPr algn="l"/>
             <a:r>
-              <a:rPr sz="1100" b="0">
+              <a:rPr sz="1400" b="0">
                 <a:solidFill>
                   <a:srgbClr val="262626"/>
                 </a:solidFill>
                 <a:latin typeface="Yu Gothic"/>
               </a:rPr>
-              <a:t>試行錯誤して「綺麗に巻けた」達成感</a:t>
+              <a:t>綺麗に巻けた達成感</a:t>
             </a:r>
           </a:p>
         </p:txBody>
@@ -4254,8 +4270,8 @@
         </p:nvSpPr>
         <p:spPr>
           <a:xfrm>
-            <a:off x="7223760" y="5065776"/>
-            <a:ext cx="4535424" cy="365760"/>
+            <a:off x="7132320" y="4864608"/>
+            <a:ext cx="4617720" cy="384048"/>
           </a:xfrm>
           <a:prstGeom prst="rect">
             <a:avLst/>
@@ -4288,13 +4304,13 @@
           <a:p>
             <a:pPr algn="l"/>
             <a:r>
-              <a:rPr sz="1100" b="0">
+              <a:rPr sz="1400" b="0">
                 <a:solidFill>
                   <a:srgbClr val="262626"/>
                 </a:solidFill>
                 <a:latin typeface="Yu Gothic"/>
               </a:rPr>
-              <a:t>仮説検証して全体が良くなる／人に説明して伝わる</a:t>
+              <a:t>仮説検証・伝わる喜び</a:t>
             </a:r>
           </a:p>
         </p:txBody>
@@ -4307,8 +4323,8 @@
         </p:nvSpPr>
         <p:spPr>
           <a:xfrm>
-            <a:off x="365760" y="5449824"/>
-            <a:ext cx="2340864" cy="365760"/>
+            <a:off x="365760" y="5285232"/>
+            <a:ext cx="2148840" cy="384048"/>
           </a:xfrm>
           <a:prstGeom prst="rect">
             <a:avLst/>
@@ -4341,13 +4357,13 @@
           <a:p>
             <a:pPr algn="l"/>
             <a:r>
-              <a:rPr sz="1100" b="1">
+              <a:rPr sz="1400" b="1">
                 <a:solidFill>
                   <a:srgbClr val="262626"/>
                 </a:solidFill>
                 <a:latin typeface="Yu Gothic"/>
               </a:rPr>
-              <a:t>ツアーで響く場面</a:t>
+              <a:t>響く場面</a:t>
             </a:r>
           </a:p>
         </p:txBody>
@@ -4360,8 +4376,8 @@
         </p:nvSpPr>
         <p:spPr>
           <a:xfrm>
-            <a:off x="2743200" y="5449824"/>
-            <a:ext cx="4443984" cy="365760"/>
+            <a:off x="2560320" y="5285232"/>
+            <a:ext cx="4526280" cy="384048"/>
           </a:xfrm>
           <a:prstGeom prst="rect">
             <a:avLst/>
@@ -4394,13 +4410,13 @@
           <a:p>
             <a:pPr algn="l"/>
             <a:r>
-              <a:rPr sz="1100" b="0">
+              <a:rPr sz="1400" b="0">
                 <a:solidFill>
                   <a:srgbClr val="262626"/>
                 </a:solidFill>
                 <a:latin typeface="Yu Gothic"/>
               </a:rPr>
-              <a:t>工場見学（ライン・設備・品質）</a:t>
+              <a:t>工場見学</a:t>
             </a:r>
           </a:p>
         </p:txBody>
@@ -4413,8 +4429,8 @@
         </p:nvSpPr>
         <p:spPr>
           <a:xfrm>
-            <a:off x="7223760" y="5449824"/>
-            <a:ext cx="4535424" cy="365760"/>
+            <a:off x="7132320" y="5285232"/>
+            <a:ext cx="4617720" cy="384048"/>
           </a:xfrm>
           <a:prstGeom prst="rect">
             <a:avLst/>
@@ -4447,13 +4463,13 @@
           <a:p>
             <a:pPr algn="l"/>
             <a:r>
-              <a:rPr sz="1100" b="0">
+              <a:rPr sz="1400" b="0">
                 <a:solidFill>
                   <a:srgbClr val="262626"/>
                 </a:solidFill>
                 <a:latin typeface="Yu Gothic"/>
               </a:rPr>
-              <a:t>価値循環ワーク／関係者トーク／ディスカッション</a:t>
+              <a:t>循環ワーク・対話</a:t>
             </a:r>
           </a:p>
         </p:txBody>
@@ -4466,8 +4482,8 @@
         </p:nvSpPr>
         <p:spPr>
           <a:xfrm>
-            <a:off x="365760" y="5833872"/>
-            <a:ext cx="2340864" cy="365760"/>
+            <a:off x="365760" y="5705856"/>
+            <a:ext cx="2148840" cy="384048"/>
           </a:xfrm>
           <a:prstGeom prst="rect">
             <a:avLst/>
@@ -4500,13 +4516,13 @@
           <a:p>
             <a:pPr algn="l"/>
             <a:r>
-              <a:rPr sz="1100" b="1">
+              <a:rPr sz="1400" b="1">
                 <a:solidFill>
                   <a:srgbClr val="262626"/>
                 </a:solidFill>
                 <a:latin typeface="Yu Gothic"/>
               </a:rPr>
-              <a:t>キャリア観（visionsタグ）</a:t>
+              <a:t>キャリア観</a:t>
             </a:r>
           </a:p>
         </p:txBody>
@@ -4519,8 +4535,8 @@
         </p:nvSpPr>
         <p:spPr>
           <a:xfrm>
-            <a:off x="2743200" y="5833872"/>
-            <a:ext cx="4443984" cy="365760"/>
+            <a:off x="2560320" y="5705856"/>
+            <a:ext cx="4526280" cy="384048"/>
           </a:xfrm>
           <a:prstGeom prst="rect">
             <a:avLst/>
@@ -4553,13 +4569,13 @@
           <a:p>
             <a:pPr algn="l"/>
             <a:r>
-              <a:rPr sz="1100" b="0">
+              <a:rPr sz="1400" b="0">
                 <a:solidFill>
                   <a:srgbClr val="262626"/>
                 </a:solidFill>
                 <a:latin typeface="Yu Gothic"/>
               </a:rPr>
-              <a:t>一つのことを積み重ねる</a:t>
+              <a:t>一つを積み重ねる</a:t>
             </a:r>
           </a:p>
         </p:txBody>
@@ -4572,8 +4588,8 @@
         </p:nvSpPr>
         <p:spPr>
           <a:xfrm>
-            <a:off x="7223760" y="5833872"/>
-            <a:ext cx="4535424" cy="365760"/>
+            <a:off x="7132320" y="5705856"/>
+            <a:ext cx="4617720" cy="384048"/>
           </a:xfrm>
           <a:prstGeom prst="rect">
             <a:avLst/>
@@ -4606,13 +4622,13 @@
           <a:p>
             <a:pPr algn="l"/>
             <a:r>
-              <a:rPr sz="1100" b="0">
+              <a:rPr sz="1400" b="0">
                 <a:solidFill>
                   <a:srgbClr val="262626"/>
                 </a:solidFill>
                 <a:latin typeface="Yu Gothic"/>
               </a:rPr>
-              <a:t>目の前の人の役に立つ／たくさんの人と繋がる</a:t>
+              <a:t>役に立つ／人と繋がる</a:t>
             </a:r>
           </a:p>
         </p:txBody>
@@ -4822,7 +4838,7 @@
                 </a:solidFill>
                 <a:latin typeface="Yu Gothic"/>
               </a:rPr>
-              <a:t>清峰のデータから見えた「ぐるぐる」の現在地</a:t>
+              <a:t>清峰データで見えた、ぐるぐるの現在地</a:t>
             </a:r>
           </a:p>
         </p:txBody>
@@ -4857,7 +4873,7 @@
                 </a:solidFill>
                 <a:latin typeface="Yu Gothic"/>
               </a:rPr>
-              <a:t>出典：sch_0202 / 学生管理シート（27）/ 過去実績 / 年間目標・実数 / visions学生リストアップ / 具体的なペルソナ像（visionsユーザー）。個人情報は集計のみ記載</a:t>
+              <a:t>出典：sch_0202 / 学生管理シート（27）/ 年間目標・実数 / visions学生リストアップ / 具体的なペルソナ像</a:t>
             </a:r>
           </a:p>
         </p:txBody>
@@ -4871,7 +4887,7 @@
         <p:spPr>
           <a:xfrm>
             <a:off x="365760" y="822960"/>
-            <a:ext cx="11430000" cy="987552"/>
+            <a:ext cx="11430000" cy="914400"/>
           </a:xfrm>
           <a:prstGeom prst="rect">
             <a:avLst/>
@@ -4914,8 +4930,8 @@
         </p:nvSpPr>
         <p:spPr>
           <a:xfrm>
-            <a:off x="411480" y="868680"/>
-            <a:ext cx="2651760" cy="548640"/>
+            <a:off x="411480" y="841248"/>
+            <a:ext cx="3017520" cy="530352"/>
           </a:xfrm>
           <a:prstGeom prst="rect">
             <a:avLst/>
@@ -4949,8 +4965,8 @@
         </p:nvSpPr>
         <p:spPr>
           <a:xfrm>
-            <a:off x="411480" y="1389888"/>
-            <a:ext cx="2651760" cy="384048"/>
+            <a:off x="411480" y="1371600"/>
+            <a:ext cx="3017520" cy="320040"/>
           </a:xfrm>
           <a:prstGeom prst="rect">
             <a:avLst/>
@@ -4965,7 +4981,7 @@
           <a:p>
             <a:pPr algn="ctr"/>
             <a:r>
-              <a:rPr sz="1000" b="0">
+              <a:rPr sz="1100" b="0">
                 <a:solidFill>
                   <a:srgbClr val="595959"/>
                 </a:solidFill>
@@ -4984,8 +5000,8 @@
         </p:nvSpPr>
         <p:spPr>
           <a:xfrm>
-            <a:off x="3200400" y="868680"/>
-            <a:ext cx="8503920" cy="896112"/>
+            <a:off x="3657600" y="841248"/>
+            <a:ext cx="8046720" cy="877824"/>
           </a:xfrm>
           <a:prstGeom prst="rect">
             <a:avLst/>
@@ -5000,13 +5016,25 @@
           <a:p>
             <a:pPr algn="l"/>
             <a:r>
-              <a:rPr sz="1300" b="0">
+              <a:rPr sz="1600" b="0">
                 <a:solidFill>
                   <a:srgbClr val="262626"/>
                 </a:solidFill>
                 <a:latin typeface="Yu Gothic"/>
               </a:rPr>
-              <a:t>28卒の直接接触は3名（人文・社会・通信系）。ぐるぐる系は未接触。visionsリストアップ表は空欄（10月目標30名／11月40／12月50）</a:t>
+              <a:t>リストアップ表は空欄</a:t>
+            </a:r>
+          </a:p>
+          <a:p>
+            <a:pPr algn="l"/>
+            <a:r>
+              <a:rPr sz="1600" b="0">
+                <a:solidFill>
+                  <a:srgbClr val="262626"/>
+                </a:solidFill>
+                <a:latin typeface="Yu Gothic"/>
+              </a:rPr>
+              <a:t>目標：10月30名 → 12月50名</a:t>
             </a:r>
           </a:p>
         </p:txBody>
@@ -5019,8 +5047,8 @@
         </p:nvSpPr>
         <p:spPr>
           <a:xfrm>
-            <a:off x="365760" y="1901952"/>
-            <a:ext cx="11430000" cy="987552"/>
+            <a:off x="365760" y="1828800"/>
+            <a:ext cx="11430000" cy="914400"/>
           </a:xfrm>
           <a:prstGeom prst="rect">
             <a:avLst/>
@@ -5063,8 +5091,8 @@
         </p:nvSpPr>
         <p:spPr>
           <a:xfrm>
-            <a:off x="411480" y="1947672"/>
-            <a:ext cx="2651760" cy="548640"/>
+            <a:off x="411480" y="1847088"/>
+            <a:ext cx="3017520" cy="530352"/>
           </a:xfrm>
           <a:prstGeom prst="rect">
             <a:avLst/>
@@ -5085,7 +5113,7 @@
                 </a:solidFill>
                 <a:latin typeface="Yu Gothic"/>
               </a:rPr>
-              <a:t>24名中1名</a:t>
+              <a:t>1 / 5名</a:t>
             </a:r>
           </a:p>
         </p:txBody>
@@ -5098,8 +5126,8 @@
         </p:nvSpPr>
         <p:spPr>
           <a:xfrm>
-            <a:off x="411480" y="2468880"/>
-            <a:ext cx="2651760" cy="384048"/>
+            <a:off x="411480" y="2377440"/>
+            <a:ext cx="3017520" cy="320040"/>
           </a:xfrm>
           <a:prstGeom prst="rect">
             <a:avLst/>
@@ -5114,13 +5142,13 @@
           <a:p>
             <a:pPr algn="ctr"/>
             <a:r>
-              <a:rPr sz="1000" b="0">
+              <a:rPr sz="1100" b="0">
                 <a:solidFill>
                   <a:srgbClr val="595959"/>
                 </a:solidFill>
                 <a:latin typeface="Yu Gothic"/>
               </a:rPr>
-              <a:t>27卒で理系→説明会以降に進んだ人</a:t>
+              <a:t>27卒の理系で説明会へ進んだ人</a:t>
             </a:r>
           </a:p>
         </p:txBody>
@@ -5133,8 +5161,8 @@
         </p:nvSpPr>
         <p:spPr>
           <a:xfrm>
-            <a:off x="3200400" y="1947672"/>
-            <a:ext cx="8503920" cy="896112"/>
+            <a:off x="3657600" y="1847088"/>
+            <a:ext cx="8046720" cy="877824"/>
           </a:xfrm>
           <a:prstGeom prst="rect">
             <a:avLst/>
@@ -5149,13 +5177,25 @@
           <a:p>
             <a:pPr algn="l"/>
             <a:r>
-              <a:rPr sz="1300" b="0">
+              <a:rPr sz="1600" b="0">
                 <a:solidFill>
                   <a:srgbClr val="262626"/>
                 </a:solidFill>
                 <a:latin typeface="Yu Gothic"/>
               </a:rPr>
-              <a:t>理系・工学系は5名エントリー（筑波・秋田・茨城・日大・専門）。説明会以降に進んだのは筑波大 地球学類の1名のみ（のちに内定承諾）</a:t>
+              <a:t>筑波大 地球学類のみ</a:t>
+            </a:r>
+          </a:p>
+          <a:p>
+            <a:pPr algn="l"/>
+            <a:r>
+              <a:rPr sz="1600" b="0">
+                <a:solidFill>
+                  <a:srgbClr val="262626"/>
+                </a:solidFill>
+                <a:latin typeface="Yu Gothic"/>
+              </a:rPr>
+              <a:t>（のち内定承諾）</a:t>
             </a:r>
           </a:p>
         </p:txBody>
@@ -5168,8 +5208,8 @@
         </p:nvSpPr>
         <p:spPr>
           <a:xfrm>
-            <a:off x="365760" y="2980944"/>
-            <a:ext cx="11430000" cy="987552"/>
+            <a:off x="365760" y="2834640"/>
+            <a:ext cx="11430000" cy="914400"/>
           </a:xfrm>
           <a:prstGeom prst="rect">
             <a:avLst/>
@@ -5212,8 +5252,8 @@
         </p:nvSpPr>
         <p:spPr>
           <a:xfrm>
-            <a:off x="411480" y="3026663"/>
-            <a:ext cx="2651760" cy="548640"/>
+            <a:off x="411480" y="2852928"/>
+            <a:ext cx="3017520" cy="530352"/>
           </a:xfrm>
           <a:prstGeom prst="rect">
             <a:avLst/>
@@ -5234,7 +5274,7 @@
                 </a:solidFill>
                 <a:latin typeface="Yu Gothic"/>
               </a:rPr>
-              <a:t>1名</a:t>
+              <a:t>理念で承諾</a:t>
             </a:r>
           </a:p>
         </p:txBody>
@@ -5247,8 +5287,8 @@
         </p:nvSpPr>
         <p:spPr>
           <a:xfrm>
-            <a:off x="411480" y="3547872"/>
-            <a:ext cx="2651760" cy="384048"/>
+            <a:off x="411480" y="3383280"/>
+            <a:ext cx="3017520" cy="320040"/>
           </a:xfrm>
           <a:prstGeom prst="rect">
             <a:avLst/>
@@ -5263,13 +5303,13 @@
           <a:p>
             <a:pPr algn="ctr"/>
             <a:r>
-              <a:rPr sz="1000" b="0">
+              <a:rPr sz="1100" b="0">
                 <a:solidFill>
                   <a:srgbClr val="595959"/>
                 </a:solidFill>
                 <a:latin typeface="Yu Gothic"/>
               </a:rPr>
-              <a:t>ぐるぐる的な成功事例</a:t>
+              <a:t>成功事例</a:t>
             </a:r>
           </a:p>
         </p:txBody>
@@ -5282,8 +5322,8 @@
         </p:nvSpPr>
         <p:spPr>
           <a:xfrm>
-            <a:off x="3200400" y="3026663"/>
-            <a:ext cx="8503920" cy="896112"/>
+            <a:off x="3657600" y="2852928"/>
+            <a:ext cx="8046720" cy="877824"/>
           </a:xfrm>
           <a:prstGeom prst="rect">
             <a:avLst/>
@@ -5298,13 +5338,25 @@
           <a:p>
             <a:pPr algn="l"/>
             <a:r>
-              <a:rPr sz="1300" b="0">
+              <a:rPr sz="1600" b="0">
                 <a:solidFill>
                   <a:srgbClr val="262626"/>
                 </a:solidFill>
                 <a:latin typeface="Yu Gothic"/>
               </a:rPr>
-              <a:t>筑波大 地球学類（27卒）：理念「地球資源を輝かせていく」に共感し、8/18のISに参加して内定承諾。経路はマイナビ</a:t>
+              <a:t>「地球資源を輝かせていく」に共感</a:t>
+            </a:r>
+          </a:p>
+          <a:p>
+            <a:pPr algn="l"/>
+            <a:r>
+              <a:rPr sz="1600" b="0">
+                <a:solidFill>
+                  <a:srgbClr val="262626"/>
+                </a:solidFill>
+                <a:latin typeface="Yu Gothic"/>
+              </a:rPr>
+              <a:t>ISに参加して承諾</a:t>
             </a:r>
           </a:p>
         </p:txBody>
@@ -5317,8 +5369,8 @@
         </p:nvSpPr>
         <p:spPr>
           <a:xfrm>
-            <a:off x="365760" y="4059935"/>
-            <a:ext cx="11430000" cy="987552"/>
+            <a:off x="365760" y="3840480"/>
+            <a:ext cx="11430000" cy="914400"/>
           </a:xfrm>
           <a:prstGeom prst="rect">
             <a:avLst/>
@@ -5361,8 +5413,8 @@
         </p:nvSpPr>
         <p:spPr>
           <a:xfrm>
-            <a:off x="411480" y="4105655"/>
-            <a:ext cx="2651760" cy="548640"/>
+            <a:off x="411480" y="3858768"/>
+            <a:ext cx="3017520" cy="530352"/>
           </a:xfrm>
           <a:prstGeom prst="rect">
             <a:avLst/>
@@ -5383,7 +5435,7 @@
                 </a:solidFill>
                 <a:latin typeface="Yu Gothic"/>
               </a:rPr>
-              <a:t>8／9名</a:t>
+              <a:t>8 / 9名</a:t>
             </a:r>
           </a:p>
         </p:txBody>
@@ -5396,8 +5448,8 @@
         </p:nvSpPr>
         <p:spPr>
           <a:xfrm>
-            <a:off x="411480" y="4626864"/>
-            <a:ext cx="2651760" cy="384048"/>
+            <a:off x="411480" y="4389120"/>
+            <a:ext cx="3017520" cy="320040"/>
           </a:xfrm>
           <a:prstGeom prst="rect">
             <a:avLst/>
@@ -5412,13 +5464,13 @@
           <a:p>
             <a:pPr algn="ctr"/>
             <a:r>
-              <a:rPr sz="1000" b="0">
+              <a:rPr sz="1100" b="0">
                 <a:solidFill>
                   <a:srgbClr val="595959"/>
                 </a:solidFill>
                 <a:latin typeface="Yu Gothic"/>
               </a:rPr>
-              <a:t>リスト学生が選んだ『自然と共生・循環型社会』</a:t>
+              <a:t>リスト学生の関心テーマ</a:t>
             </a:r>
           </a:p>
         </p:txBody>
@@ -5431,8 +5483,8 @@
         </p:nvSpPr>
         <p:spPr>
           <a:xfrm>
-            <a:off x="3200400" y="4105655"/>
-            <a:ext cx="8503920" cy="896112"/>
+            <a:off x="3657600" y="3858768"/>
+            <a:ext cx="8046720" cy="877824"/>
           </a:xfrm>
           <a:prstGeom prst="rect">
             <a:avLst/>
@@ -5447,13 +5499,25 @@
           <a:p>
             <a:pPr algn="l"/>
             <a:r>
-              <a:rPr sz="1300" b="0">
+              <a:rPr sz="1600" b="0">
                 <a:solidFill>
                   <a:srgbClr val="262626"/>
                 </a:solidFill>
                 <a:latin typeface="Yu Gothic"/>
               </a:rPr>
-              <a:t>visionsの具体ペルソナ9名中8名がこのソーシャルテーマ。清峰（加藤・藤森・社長）全員が◎にした最重要テーマと一致</a:t>
+              <a:t>自然と共生・循環型社会</a:t>
+            </a:r>
+          </a:p>
+          <a:p>
+            <a:pPr algn="l"/>
+            <a:r>
+              <a:rPr sz="1600" b="0">
+                <a:solidFill>
+                  <a:srgbClr val="262626"/>
+                </a:solidFill>
+                <a:latin typeface="Yu Gothic"/>
+              </a:rPr>
+              <a:t>清峰の最重要テーマと一致</a:t>
             </a:r>
           </a:p>
         </p:txBody>
@@ -5466,8 +5530,8 @@
         </p:nvSpPr>
         <p:spPr>
           <a:xfrm>
-            <a:off x="365760" y="5212080"/>
-            <a:ext cx="11430000" cy="1051560"/>
+            <a:off x="365760" y="4937760"/>
+            <a:ext cx="11430000" cy="1234440"/>
           </a:xfrm>
           <a:prstGeom prst="rect">
             <a:avLst/>
@@ -5495,12 +5559,12 @@
           </a:fontRef>
         </p:style>
         <p:txBody>
-          <a:bodyPr rtlCol="0" anchor="t" wrap="square" lIns="73152" rIns="73152"/>
+          <a:bodyPr rtlCol="0" anchor="t" wrap="square" lIns="182880" rIns="182880"/>
           <a:lstStyle/>
           <a:p>
             <a:pPr algn="l"/>
             <a:r>
-              <a:rPr sz="1400" b="1">
+              <a:rPr sz="1600" b="1">
                 <a:solidFill>
                   <a:srgbClr val="1F497D"/>
                 </a:solidFill>
@@ -5510,27 +5574,35 @@
             </a:r>
           </a:p>
           <a:p>
-            <a:pPr algn="l"/>
-            <a:r>
-              <a:rPr sz="1200" b="0">
+            <a:pPr algn="l">
+              <a:spcBef>
+                <a:spcPts val="600"/>
+              </a:spcBef>
+            </a:pPr>
+            <a:r>
+              <a:rPr sz="1600" b="0">
                 <a:solidFill>
                   <a:srgbClr val="262626"/>
                 </a:solidFill>
                 <a:latin typeface="Yu Gothic"/>
               </a:rPr>
-              <a:t>① 既存チャネル（マイナビ／OfferBox）だけでは、ぐるぐる層に届いていない。ターゲットの“居場所”（学部・学校群・visions）から取りに行く必要がある。</a:t>
-            </a:r>
-          </a:p>
-          <a:p>
-            <a:pPr algn="l"/>
-            <a:r>
-              <a:rPr sz="1200" b="0">
+              <a:t>既存チャネルでは、ぐるぐる層に届いていない</a:t>
+            </a:r>
+          </a:p>
+          <a:p>
+            <a:pPr algn="l">
+              <a:spcBef>
+                <a:spcPts val="400"/>
+              </a:spcBef>
+            </a:pPr>
+            <a:r>
+              <a:rPr sz="1600" b="0">
                 <a:solidFill>
                   <a:srgbClr val="262626"/>
                 </a:solidFill>
                 <a:latin typeface="Yu Gothic"/>
               </a:rPr>
-              <a:t>② 一方、理念への共感で承諾に至った前例があり、「地球資源を輝かせていく」という文脈そのものがぐるぐる層への強い入口になる。</a:t>
+              <a:t>理念への共感が、最強の入口になる</a:t>
             </a:r>
           </a:p>
         </p:txBody>
@@ -5740,7 +5812,7 @@
                 </a:solidFill>
                 <a:latin typeface="Yu Gothic"/>
               </a:rPr>
-              <a:t>ぐるぐるターゲット像：3タイプ（主ターゲット＋周辺）</a:t>
+              <a:t>ぐるぐるターゲット像：3タイプ</a:t>
             </a:r>
           </a:p>
         </p:txBody>
@@ -5775,7 +5847,7 @@
                 </a:solidFill>
                 <a:latin typeface="Yu Gothic"/>
               </a:rPr>
-              <a:t>出典：具体的なペルソナ像（visionsユーザー）、既存ペルソナ①〜③のスライド、ペルソナ像（企業選びの軸）。タイプ分けとツアー反応は当方の整理（案）</a:t>
+              <a:t>出典：具体的なペルソナ像（visionsユーザー）/ 既存ペルソナ①〜③。タイプ分けは当方の整理（案）</a:t>
             </a:r>
           </a:p>
         </p:txBody>
@@ -5789,7 +5861,7 @@
         <p:spPr>
           <a:xfrm>
             <a:off x="365760" y="777240"/>
-            <a:ext cx="3749039" cy="4572000"/>
+            <a:ext cx="3749039" cy="4343400"/>
           </a:xfrm>
           <a:prstGeom prst="rect">
             <a:avLst/>
@@ -5833,7 +5905,7 @@
         <p:spPr>
           <a:xfrm>
             <a:off x="365760" y="777240"/>
-            <a:ext cx="3749039" cy="502920"/>
+            <a:ext cx="3749039" cy="548640"/>
           </a:xfrm>
           <a:prstGeom prst="rect">
             <a:avLst/>
@@ -5866,13 +5938,13 @@
           <a:p>
             <a:pPr algn="l"/>
             <a:r>
-              <a:rPr sz="1300" b="1">
+              <a:rPr sz="1600" b="1">
                 <a:solidFill>
                   <a:srgbClr val="FFFFFF"/>
                 </a:solidFill>
                 <a:latin typeface="Yu Gothic"/>
               </a:rPr>
-              <a:t>A　資源めぐり探究型【主ターゲット】</a:t>
+              <a:t>A　資源めぐり探究型</a:t>
             </a:r>
           </a:p>
         </p:txBody>
@@ -5885,7 +5957,7 @@
         </p:nvSpPr>
         <p:spPr>
           <a:xfrm>
-            <a:off x="365760" y="1325880"/>
+            <a:off x="365760" y="1417320"/>
             <a:ext cx="3749039" cy="365760"/>
           </a:xfrm>
           <a:prstGeom prst="rect">
@@ -5907,7 +5979,7 @@
                 </a:solidFill>
                 <a:latin typeface="Yu Gothic"/>
               </a:rPr>
-              <a:t>環境資源・物質循環・地球科学・応用化学 系</a:t>
+              <a:t>主ターゲット</a:t>
             </a:r>
           </a:p>
         </p:txBody>
@@ -5920,8 +5992,8 @@
         </p:nvSpPr>
         <p:spPr>
           <a:xfrm>
-            <a:off x="365760" y="1737360"/>
-            <a:ext cx="3749039" cy="914400"/>
+            <a:off x="365760" y="1783080"/>
+            <a:ext cx="3749039" cy="457200"/>
           </a:xfrm>
           <a:prstGeom prst="rect">
             <a:avLst/>
@@ -5936,13 +6008,13 @@
           <a:p>
             <a:pPr algn="l"/>
             <a:r>
-              <a:rPr sz="1050" b="0">
-                <a:solidFill>
-                  <a:srgbClr val="595959"/>
-                </a:solidFill>
-                <a:latin typeface="Yu Gothic"/>
-              </a:rPr>
-              <a:t>根拠：visions「ぐるぐる同志」2名（農工大院 物質循環環境科学／早大 環境資源工学）、筑波 地球学類の承諾実績</a:t>
+              <a:rPr sz="1600" b="1">
+                <a:solidFill>
+                  <a:srgbClr val="262626"/>
+                </a:solidFill>
+                <a:latin typeface="Yu Gothic"/>
+              </a:rPr>
+              <a:t>環境資源・物質循環・地球科学</a:t>
             </a:r>
           </a:p>
         </p:txBody>
@@ -5955,8 +6027,8 @@
         </p:nvSpPr>
         <p:spPr>
           <a:xfrm>
-            <a:off x="365760" y="2697480"/>
-            <a:ext cx="3749039" cy="2606040"/>
+            <a:off x="365760" y="2286000"/>
+            <a:ext cx="3749039" cy="365760"/>
           </a:xfrm>
           <a:prstGeom prst="rect">
             <a:avLst/>
@@ -5969,81 +6041,100 @@
           </a:bodyPr>
           <a:lstStyle/>
           <a:p>
+            <a:pPr algn="l"/>
+            <a:r>
+              <a:rPr sz="1100" b="0">
+                <a:solidFill>
+                  <a:srgbClr val="595959"/>
+                </a:solidFill>
+                <a:latin typeface="Yu Gothic"/>
+              </a:rPr>
+              <a:t>根拠：visions同志2名・筑波の承諾実績</a:t>
+            </a:r>
+          </a:p>
+        </p:txBody>
+      </p:sp>
+      <p:sp>
+        <p:nvSpPr>
+          <p:cNvPr id="12" name="TextBox 11"/>
+          <p:cNvSpPr txBox="1"/>
+          <p:nvPr/>
+        </p:nvSpPr>
+        <p:spPr>
+          <a:xfrm>
+            <a:off x="365760" y="2834640"/>
+            <a:ext cx="3749039" cy="2194560"/>
+          </a:xfrm>
+          <a:prstGeom prst="rect">
+            <a:avLst/>
+          </a:prstGeom>
+          <a:noFill/>
+        </p:spPr>
+        <p:txBody>
+          <a:bodyPr wrap="square" anchor="t" lIns="73152" rIns="73152">
+            <a:spAutoFit/>
+          </a:bodyPr>
+          <a:lstStyle/>
+          <a:p>
             <a:pPr algn="l">
               <a:spcBef>
-                <a:spcPts val="400"/>
+                <a:spcPts val="1000"/>
               </a:spcBef>
             </a:pPr>
             <a:r>
-              <a:rPr sz="1200" b="0">
+              <a:rPr sz="1600" b="0">
                 <a:solidFill>
                   <a:srgbClr val="262626"/>
                 </a:solidFill>
                 <a:latin typeface="Yu Gothic"/>
               </a:rPr>
-              <a:t>・環境リテラシー、製品ライフサイクルへの関心</a:t>
+              <a:t>・循環・ライフサイクルに関心</a:t>
             </a:r>
           </a:p>
           <a:p>
             <a:pPr algn="l">
               <a:spcBef>
-                <a:spcPts val="400"/>
+                <a:spcPts val="1000"/>
               </a:spcBef>
             </a:pPr>
             <a:r>
-              <a:rPr sz="1200" b="0">
+              <a:rPr sz="1600" b="0">
                 <a:solidFill>
                   <a:srgbClr val="262626"/>
                 </a:solidFill>
                 <a:latin typeface="Yu Gothic"/>
               </a:rPr>
-              <a:t>・自然と共生・循環型社会がソーシャルテーマ</a:t>
+              <a:t>・銅の有限性を自分ごとに</a:t>
             </a:r>
           </a:p>
           <a:p>
             <a:pPr algn="l">
               <a:spcBef>
-                <a:spcPts val="400"/>
+                <a:spcPts val="1000"/>
               </a:spcBef>
             </a:pPr>
             <a:r>
-              <a:rPr sz="1200" b="0">
+              <a:rPr sz="1600" b="0">
                 <a:solidFill>
                   <a:srgbClr val="262626"/>
                 </a:solidFill>
                 <a:latin typeface="Yu Gothic"/>
               </a:rPr>
-              <a:t>・銅の有限性（可採年数約40年）を“自分ごと”にできる</a:t>
-            </a:r>
-          </a:p>
-          <a:p>
-            <a:pPr algn="l">
-              <a:spcBef>
-                <a:spcPts val="400"/>
-              </a:spcBef>
-            </a:pPr>
-            <a:r>
-              <a:rPr sz="1200" b="1">
-                <a:solidFill>
-                  <a:srgbClr val="262626"/>
-                </a:solidFill>
-                <a:latin typeface="Yu Gothic"/>
-              </a:rPr>
-              <a:t>→ ツアーで一番「そこを知りたかった」と動く層</a:t>
-            </a:r>
-          </a:p>
-        </p:txBody>
-      </p:sp>
-      <p:sp>
-        <p:nvSpPr>
-          <p:cNvPr id="12" name="Rectangle 11"/>
+              <a:t>・価値循環ワークで動く</a:t>
+            </a:r>
+          </a:p>
+        </p:txBody>
+      </p:sp>
+      <p:sp>
+        <p:nvSpPr>
+          <p:cNvPr id="13" name="Rectangle 12"/>
           <p:cNvSpPr/>
           <p:nvPr/>
         </p:nvSpPr>
         <p:spPr>
           <a:xfrm>
             <a:off x="4206240" y="777240"/>
-            <a:ext cx="3749039" cy="4572000"/>
+            <a:ext cx="3749039" cy="4343400"/>
           </a:xfrm>
           <a:prstGeom prst="rect">
             <a:avLst/>
@@ -6080,14 +6171,14 @@
       </p:sp>
       <p:sp>
         <p:nvSpPr>
-          <p:cNvPr id="13" name="Rectangle 12"/>
+          <p:cNvPr id="14" name="Rectangle 13"/>
           <p:cNvSpPr/>
           <p:nvPr/>
         </p:nvSpPr>
         <p:spPr>
           <a:xfrm>
             <a:off x="4206240" y="777240"/>
-            <a:ext cx="3749039" cy="502920"/>
+            <a:ext cx="3749039" cy="548640"/>
           </a:xfrm>
           <a:prstGeom prst="rect">
             <a:avLst/>
@@ -6120,7 +6211,7 @@
           <a:p>
             <a:pPr algn="l"/>
             <a:r>
-              <a:rPr sz="1300" b="1">
+              <a:rPr sz="1600" b="1">
                 <a:solidFill>
                   <a:srgbClr val="FFFFFF"/>
                 </a:solidFill>
@@ -6133,13 +6224,13 @@
       </p:sp>
       <p:sp>
         <p:nvSpPr>
-          <p:cNvPr id="14" name="TextBox 13"/>
+          <p:cNvPr id="15" name="TextBox 14"/>
           <p:cNvSpPr txBox="1"/>
           <p:nvPr/>
         </p:nvSpPr>
         <p:spPr>
           <a:xfrm>
-            <a:off x="4206240" y="1325880"/>
+            <a:off x="4206240" y="1417320"/>
             <a:ext cx="3749039" cy="365760"/>
           </a:xfrm>
           <a:prstGeom prst="rect">
@@ -6161,21 +6252,21 @@
                 </a:solidFill>
                 <a:latin typeface="Yu Gothic"/>
               </a:rPr>
-              <a:t>環境学・総合科学・農学 系（既存ペルソナ②）</a:t>
-            </a:r>
-          </a:p>
-        </p:txBody>
-      </p:sp>
-      <p:sp>
-        <p:nvSpPr>
-          <p:cNvPr id="15" name="TextBox 14"/>
+              <a:t>既存ペルソナ②</a:t>
+            </a:r>
+          </a:p>
+        </p:txBody>
+      </p:sp>
+      <p:sp>
+        <p:nvSpPr>
+          <p:cNvPr id="16" name="TextBox 15"/>
           <p:cNvSpPr txBox="1"/>
           <p:nvPr/>
         </p:nvSpPr>
         <p:spPr>
           <a:xfrm>
-            <a:off x="4206240" y="1737360"/>
-            <a:ext cx="3749039" cy="914400"/>
+            <a:off x="4206240" y="1783080"/>
+            <a:ext cx="3749039" cy="457200"/>
           </a:xfrm>
           <a:prstGeom prst="rect">
             <a:avLst/>
@@ -6190,27 +6281,27 @@
           <a:p>
             <a:pPr algn="l"/>
             <a:r>
-              <a:rPr sz="1050" b="0">
-                <a:solidFill>
-                  <a:srgbClr val="595959"/>
-                </a:solidFill>
-                <a:latin typeface="Yu Gothic"/>
-              </a:rPr>
-              <a:t>根拠：既存ペルソナ②（公立鳥取環境大・環境学部）、visions 27卒の広島大 総合科学（自然と共生）</a:t>
-            </a:r>
-          </a:p>
-        </p:txBody>
-      </p:sp>
-      <p:sp>
-        <p:nvSpPr>
-          <p:cNvPr id="16" name="TextBox 15"/>
+              <a:rPr sz="1600" b="1">
+                <a:solidFill>
+                  <a:srgbClr val="262626"/>
+                </a:solidFill>
+                <a:latin typeface="Yu Gothic"/>
+              </a:rPr>
+              <a:t>環境学・総合科学・農学</a:t>
+            </a:r>
+          </a:p>
+        </p:txBody>
+      </p:sp>
+      <p:sp>
+        <p:nvSpPr>
+          <p:cNvPr id="17" name="TextBox 16"/>
           <p:cNvSpPr txBox="1"/>
           <p:nvPr/>
         </p:nvSpPr>
         <p:spPr>
           <a:xfrm>
-            <a:off x="4206240" y="2697480"/>
-            <a:ext cx="3749039" cy="2606040"/>
+            <a:off x="4206240" y="2286000"/>
+            <a:ext cx="3749039" cy="365760"/>
           </a:xfrm>
           <a:prstGeom prst="rect">
             <a:avLst/>
@@ -6223,81 +6314,100 @@
           </a:bodyPr>
           <a:lstStyle/>
           <a:p>
+            <a:pPr algn="l"/>
+            <a:r>
+              <a:rPr sz="1100" b="0">
+                <a:solidFill>
+                  <a:srgbClr val="595959"/>
+                </a:solidFill>
+                <a:latin typeface="Yu Gothic"/>
+              </a:rPr>
+              <a:t>根拠：公立鳥取環境大ペルソナ</a:t>
+            </a:r>
+          </a:p>
+        </p:txBody>
+      </p:sp>
+      <p:sp>
+        <p:nvSpPr>
+          <p:cNvPr id="18" name="TextBox 17"/>
+          <p:cNvSpPr txBox="1"/>
+          <p:nvPr/>
+        </p:nvSpPr>
+        <p:spPr>
+          <a:xfrm>
+            <a:off x="4206240" y="2834640"/>
+            <a:ext cx="3749039" cy="2194560"/>
+          </a:xfrm>
+          <a:prstGeom prst="rect">
+            <a:avLst/>
+          </a:prstGeom>
+          <a:noFill/>
+        </p:spPr>
+        <p:txBody>
+          <a:bodyPr wrap="square" anchor="t" lIns="73152" rIns="73152">
+            <a:spAutoFit/>
+          </a:bodyPr>
+          <a:lstStyle/>
+          <a:p>
             <a:pPr algn="l">
               <a:spcBef>
-                <a:spcPts val="400"/>
+                <a:spcPts val="1000"/>
               </a:spcBef>
             </a:pPr>
             <a:r>
-              <a:rPr sz="1200" b="0">
+              <a:rPr sz="1600" b="0">
                 <a:solidFill>
                   <a:srgbClr val="262626"/>
                 </a:solidFill>
                 <a:latin typeface="Yu Gothic"/>
               </a:rPr>
-              <a:t>・就活軸：自然に直接向き合う／問い続けられる</a:t>
+              <a:t>・自然に向き合い問い続ける</a:t>
             </a:r>
           </a:p>
           <a:p>
             <a:pPr algn="l">
               <a:spcBef>
-                <a:spcPts val="400"/>
+                <a:spcPts val="1000"/>
               </a:spcBef>
             </a:pPr>
             <a:r>
-              <a:rPr sz="1200" b="0">
+              <a:rPr sz="1600" b="0">
                 <a:solidFill>
                   <a:srgbClr val="262626"/>
                 </a:solidFill>
                 <a:latin typeface="Yu Gothic"/>
               </a:rPr>
-              <a:t>・仮説検証・論理整理・人に説明するのが好き</a:t>
+              <a:t>・仮説検証・説明が好き</a:t>
             </a:r>
           </a:p>
           <a:p>
             <a:pPr algn="l">
               <a:spcBef>
-                <a:spcPts val="400"/>
+                <a:spcPts val="1000"/>
               </a:spcBef>
             </a:pPr>
             <a:r>
-              <a:rPr sz="1200" b="0">
+              <a:rPr sz="1600" b="0">
                 <a:solidFill>
                   <a:srgbClr val="262626"/>
                 </a:solidFill>
                 <a:latin typeface="Yu Gothic"/>
               </a:rPr>
-              <a:t>・企業の外部発信・地域ならではの生産を重視</a:t>
-            </a:r>
-          </a:p>
-          <a:p>
-            <a:pPr algn="l">
-              <a:spcBef>
-                <a:spcPts val="400"/>
-              </a:spcBef>
-            </a:pPr>
-            <a:r>
-              <a:rPr sz="1200" b="1">
-                <a:solidFill>
-                  <a:srgbClr val="262626"/>
-                </a:solidFill>
-                <a:latin typeface="Yu Gothic"/>
-              </a:rPr>
-              <a:t>→ ディスカッションと記事化（Beyond the wall）で光る</a:t>
-            </a:r>
-          </a:p>
-        </p:txBody>
-      </p:sp>
-      <p:sp>
-        <p:nvSpPr>
-          <p:cNvPr id="17" name="Rectangle 16"/>
+              <a:t>・議論と記事化で光る</a:t>
+            </a:r>
+          </a:p>
+        </p:txBody>
+      </p:sp>
+      <p:sp>
+        <p:nvSpPr>
+          <p:cNvPr id="19" name="Rectangle 18"/>
           <p:cNvSpPr/>
           <p:nvPr/>
         </p:nvSpPr>
         <p:spPr>
           <a:xfrm>
             <a:off x="8046720" y="777240"/>
-            <a:ext cx="3749039" cy="4572000"/>
+            <a:ext cx="3749039" cy="4343400"/>
           </a:xfrm>
           <a:prstGeom prst="rect">
             <a:avLst/>
@@ -6334,14 +6444,14 @@
       </p:sp>
       <p:sp>
         <p:nvSpPr>
-          <p:cNvPr id="18" name="Rectangle 17"/>
+          <p:cNvPr id="20" name="Rectangle 19"/>
           <p:cNvSpPr/>
           <p:nvPr/>
         </p:nvSpPr>
         <p:spPr>
           <a:xfrm>
             <a:off x="8046720" y="777240"/>
-            <a:ext cx="3749039" cy="502920"/>
+            <a:ext cx="3749039" cy="548640"/>
           </a:xfrm>
           <a:prstGeom prst="rect">
             <a:avLst/>
@@ -6374,26 +6484,26 @@
           <a:p>
             <a:pPr algn="l"/>
             <a:r>
-              <a:rPr sz="1300" b="1">
+              <a:rPr sz="1600" b="1">
                 <a:solidFill>
                   <a:srgbClr val="FFFFFF"/>
                 </a:solidFill>
                 <a:latin typeface="Yu Gothic"/>
               </a:rPr>
-              <a:t>C　コツコツ×ぐるぐる複合型</a:t>
-            </a:r>
-          </a:p>
-        </p:txBody>
-      </p:sp>
-      <p:sp>
-        <p:nvSpPr>
-          <p:cNvPr id="19" name="TextBox 18"/>
+              <a:t>C　コツコツ×ぐるぐる</a:t>
+            </a:r>
+          </a:p>
+        </p:txBody>
+      </p:sp>
+      <p:sp>
+        <p:nvSpPr>
+          <p:cNvPr id="21" name="TextBox 20"/>
           <p:cNvSpPr txBox="1"/>
           <p:nvPr/>
         </p:nvSpPr>
         <p:spPr>
           <a:xfrm>
-            <a:off x="8046720" y="1325880"/>
+            <a:off x="8046720" y="1417320"/>
             <a:ext cx="3749039" cy="365760"/>
           </a:xfrm>
           <a:prstGeom prst="rect">
@@ -6415,21 +6525,21 @@
                 </a:solidFill>
                 <a:latin typeface="Yu Gothic"/>
               </a:rPr>
-              <a:t>森林・農学・手仕事志向（既存ペルソナ③）</a:t>
-            </a:r>
-          </a:p>
-        </p:txBody>
-      </p:sp>
-      <p:sp>
-        <p:nvSpPr>
-          <p:cNvPr id="20" name="TextBox 19"/>
+              <a:t>既存ペルソナ③</a:t>
+            </a:r>
+          </a:p>
+        </p:txBody>
+      </p:sp>
+      <p:sp>
+        <p:nvSpPr>
+          <p:cNvPr id="22" name="TextBox 21"/>
           <p:cNvSpPr txBox="1"/>
           <p:nvPr/>
         </p:nvSpPr>
         <p:spPr>
           <a:xfrm>
-            <a:off x="8046720" y="1737360"/>
-            <a:ext cx="3749039" cy="914400"/>
+            <a:off x="8046720" y="1783080"/>
+            <a:ext cx="3749039" cy="457200"/>
           </a:xfrm>
           <a:prstGeom prst="rect">
             <a:avLst/>
@@ -6444,27 +6554,27 @@
           <a:p>
             <a:pPr algn="l"/>
             <a:r>
-              <a:rPr sz="1050" b="0">
-                <a:solidFill>
-                  <a:srgbClr val="595959"/>
-                </a:solidFill>
-                <a:latin typeface="Yu Gothic"/>
-              </a:rPr>
-              <a:t>根拠：信州大 農学部（28卒）、筑波 地球学類（承諾）。ペルソナ③は両面を持つ</a:t>
-            </a:r>
-          </a:p>
-        </p:txBody>
-      </p:sp>
-      <p:sp>
-        <p:nvSpPr>
-          <p:cNvPr id="21" name="TextBox 20"/>
+              <a:rPr sz="1600" b="1">
+                <a:solidFill>
+                  <a:srgbClr val="262626"/>
+                </a:solidFill>
+                <a:latin typeface="Yu Gothic"/>
+              </a:rPr>
+              <a:t>森林・農学・手仕事志向</a:t>
+            </a:r>
+          </a:p>
+        </p:txBody>
+      </p:sp>
+      <p:sp>
+        <p:nvSpPr>
+          <p:cNvPr id="23" name="TextBox 22"/>
           <p:cNvSpPr txBox="1"/>
           <p:nvPr/>
         </p:nvSpPr>
         <p:spPr>
           <a:xfrm>
-            <a:off x="8046720" y="2697480"/>
-            <a:ext cx="3749039" cy="2606040"/>
+            <a:off x="8046720" y="2286000"/>
+            <a:ext cx="3749039" cy="365760"/>
           </a:xfrm>
           <a:prstGeom prst="rect">
             <a:avLst/>
@@ -6477,81 +6587,100 @@
           </a:bodyPr>
           <a:lstStyle/>
           <a:p>
+            <a:pPr algn="l"/>
+            <a:r>
+              <a:rPr sz="1100" b="0">
+                <a:solidFill>
+                  <a:srgbClr val="595959"/>
+                </a:solidFill>
+                <a:latin typeface="Yu Gothic"/>
+              </a:rPr>
+              <a:t>根拠：信州大 農学部・筑波</a:t>
+            </a:r>
+          </a:p>
+        </p:txBody>
+      </p:sp>
+      <p:sp>
+        <p:nvSpPr>
+          <p:cNvPr id="24" name="TextBox 23"/>
+          <p:cNvSpPr txBox="1"/>
+          <p:nvPr/>
+        </p:nvSpPr>
+        <p:spPr>
+          <a:xfrm>
+            <a:off x="8046720" y="2834640"/>
+            <a:ext cx="3749039" cy="2194560"/>
+          </a:xfrm>
+          <a:prstGeom prst="rect">
+            <a:avLst/>
+          </a:prstGeom>
+          <a:noFill/>
+        </p:spPr>
+        <p:txBody>
+          <a:bodyPr wrap="square" anchor="t" lIns="73152" rIns="73152">
+            <a:spAutoFit/>
+          </a:bodyPr>
+          <a:lstStyle/>
+          <a:p>
             <a:pPr algn="l">
               <a:spcBef>
-                <a:spcPts val="400"/>
+                <a:spcPts val="1000"/>
               </a:spcBef>
             </a:pPr>
             <a:r>
-              <a:rPr sz="1200" b="0">
+              <a:rPr sz="1600" b="0">
                 <a:solidFill>
                   <a:srgbClr val="262626"/>
                 </a:solidFill>
                 <a:latin typeface="Yu Gothic"/>
               </a:rPr>
-              <a:t>・自然の課題をものづくりで発信したい</a:t>
+              <a:t>・手仕事＋改善を回す</a:t>
             </a:r>
           </a:p>
           <a:p>
             <a:pPr algn="l">
               <a:spcBef>
-                <a:spcPts val="400"/>
+                <a:spcPts val="1000"/>
               </a:spcBef>
             </a:pPr>
             <a:r>
-              <a:rPr sz="1200" b="0">
+              <a:rPr sz="1600" b="0">
                 <a:solidFill>
                   <a:srgbClr val="262626"/>
                 </a:solidFill>
                 <a:latin typeface="Yu Gothic"/>
               </a:rPr>
-              <a:t>・手仕事への愛着＋改善を回すのが好き</a:t>
+              <a:t>・自然の課題を発信したい</a:t>
             </a:r>
           </a:p>
           <a:p>
             <a:pPr algn="l">
               <a:spcBef>
-                <a:spcPts val="400"/>
+                <a:spcPts val="1000"/>
               </a:spcBef>
             </a:pPr>
             <a:r>
-              <a:rPr sz="1200" b="0">
+              <a:rPr sz="1600" b="0">
                 <a:solidFill>
                   <a:srgbClr val="262626"/>
                 </a:solidFill>
                 <a:latin typeface="Yu Gothic"/>
               </a:rPr>
-              <a:t>・ローテーションで経験→一つを極めたい</a:t>
-            </a:r>
-          </a:p>
-          <a:p>
-            <a:pPr algn="l">
-              <a:spcBef>
-                <a:spcPts val="400"/>
-              </a:spcBef>
-            </a:pPr>
-            <a:r>
-              <a:rPr sz="1200" b="1">
-                <a:solidFill>
-                  <a:srgbClr val="262626"/>
-                </a:solidFill>
-                <a:latin typeface="Yu Gothic"/>
-              </a:rPr>
-              <a:t>→ 工場見学の「もったいない」ワークで両面が出る</a:t>
-            </a:r>
-          </a:p>
-        </p:txBody>
-      </p:sp>
-      <p:sp>
-        <p:nvSpPr>
-          <p:cNvPr id="22" name="Rectangle 21"/>
+              <a:t>・工場見学ワークで両面が出る</a:t>
+            </a:r>
+          </a:p>
+        </p:txBody>
+      </p:sp>
+      <p:sp>
+        <p:nvSpPr>
+          <p:cNvPr id="25" name="Rectangle 24"/>
           <p:cNvSpPr/>
           <p:nvPr/>
         </p:nvSpPr>
         <p:spPr>
           <a:xfrm>
-            <a:off x="365760" y="5440680"/>
-            <a:ext cx="11430000" cy="777240"/>
+            <a:off x="365760" y="5257800"/>
+            <a:ext cx="11430000" cy="914400"/>
           </a:xfrm>
           <a:prstGeom prst="rect">
             <a:avLst/>
@@ -6579,30 +6708,34 @@
           </a:fontRef>
         </p:style>
         <p:txBody>
-          <a:bodyPr rtlCol="0" anchor="t" wrap="square" lIns="73152" rIns="73152"/>
+          <a:bodyPr rtlCol="0" anchor="t" wrap="square" lIns="182880" rIns="182880"/>
           <a:lstStyle/>
           <a:p>
             <a:pPr algn="l"/>
             <a:r>
-              <a:rPr sz="1200" b="0">
+              <a:rPr sz="1400" b="1">
+                <a:solidFill>
+                  <a:srgbClr val="1F497D"/>
+                </a:solidFill>
+                <a:latin typeface="Yu Gothic"/>
+              </a:rPr>
+              <a:t>対象外（案）</a:t>
+            </a:r>
+          </a:p>
+          <a:p>
+            <a:pPr algn="l">
+              <a:spcBef>
+                <a:spcPts val="400"/>
+              </a:spcBef>
+            </a:pPr>
+            <a:r>
+              <a:rPr sz="1500" b="0">
                 <a:solidFill>
                   <a:srgbClr val="262626"/>
                 </a:solidFill>
                 <a:latin typeface="Yu Gothic"/>
               </a:rPr>
-              <a:t>ターゲットにしない人（案）：「循環や環境に興味」はあるが、現場の人と関わる・手を動かす意志が見えない人／殺伐とした競争環境を好む人</a:t>
-            </a:r>
-          </a:p>
-          <a:p>
-            <a:pPr algn="l"/>
-            <a:r>
-              <a:rPr sz="1200" b="1">
-                <a:solidFill>
-                  <a:srgbClr val="1F497D"/>
-                </a:solidFill>
-                <a:latin typeface="Yu Gothic"/>
-              </a:rPr>
-              <a:t>→ 社長の懸念（面接では見抜けず、社風と合わない採用で揉める）への対策として、ツアー内の協働場面で見極める</a:t>
+              <a:t>現場の人と関わる・手を動かす意志が見えない人</a:t>
             </a:r>
           </a:p>
         </p:txBody>
@@ -6777,7 +6910,7 @@
                 </a:solidFill>
                 <a:latin typeface="Yu Gothic"/>
               </a:rPr>
-              <a:t>学校群・母集団</a:t>
+              <a:t>学校群</a:t>
             </a:r>
           </a:p>
         </p:txBody>
@@ -6812,7 +6945,7 @@
                 </a:solidFill>
                 <a:latin typeface="Yu Gothic"/>
               </a:rPr>
-              <a:t>ぐるぐる学校群：優先度つきリストと日程の配慮</a:t>
+              <a:t>ぐるぐる学校群と、日程の配慮</a:t>
             </a:r>
           </a:p>
         </p:txBody>
@@ -6847,7 +6980,7 @@
                 </a:solidFill>
                 <a:latin typeface="Yu Gothic"/>
               </a:rPr>
-              <a:t>出典：既存ペルソナ④学校群スライド、visions具体的なペルソナ像、年間目標・実数（各大学の年間スケジュール）。優先度とS/A群の追加校は当方の提案（要確認）</a:t>
+              <a:t>出典：既存ペルソナ④学校群 / visions具体的なペルソナ像 / 年間目標・実数（各大学の年間スケジュール）。優先度は当方の提案</a:t>
             </a:r>
           </a:p>
         </p:txBody>
@@ -6861,7 +6994,7 @@
         <p:spPr>
           <a:xfrm>
             <a:off x="365760" y="822960"/>
-            <a:ext cx="7589520" cy="1600200"/>
+            <a:ext cx="7498079" cy="1691640"/>
           </a:xfrm>
           <a:prstGeom prst="rect">
             <a:avLst/>
@@ -6905,7 +7038,7 @@
         <p:spPr>
           <a:xfrm>
             <a:off x="365760" y="822960"/>
-            <a:ext cx="1188720" cy="1600200"/>
+            <a:ext cx="1005840" cy="1691640"/>
           </a:xfrm>
           <a:prstGeom prst="rect">
             <a:avLst/>
@@ -6938,13 +7071,13 @@
           <a:p>
             <a:pPr algn="ctr"/>
             <a:r>
-              <a:rPr sz="1500" b="1">
+              <a:rPr sz="2800" b="1">
                 <a:solidFill>
                   <a:srgbClr val="FFFFFF"/>
                 </a:solidFill>
                 <a:latin typeface="Yu Gothic"/>
               </a:rPr>
-              <a:t>S 優先</a:t>
+              <a:t>S</a:t>
             </a:r>
           </a:p>
         </p:txBody>
@@ -6957,8 +7090,8 @@
         </p:nvSpPr>
         <p:spPr>
           <a:xfrm>
-            <a:off x="1645920" y="868680"/>
-            <a:ext cx="6217920" cy="320040"/>
+            <a:off x="1508760" y="868680"/>
+            <a:ext cx="6217920" cy="365760"/>
           </a:xfrm>
           <a:prstGeom prst="rect">
             <a:avLst/>
@@ -6973,13 +7106,13 @@
           <a:p>
             <a:pPr algn="l"/>
             <a:r>
-              <a:rPr sz="1300" b="1">
+              <a:rPr sz="1500" b="1">
                 <a:solidFill>
                   <a:srgbClr val="1F497D"/>
                 </a:solidFill>
                 <a:latin typeface="Yu Gothic"/>
               </a:rPr>
-              <a:t>資源・循環系の学部（タイプA）</a:t>
+              <a:t>資源・循環系</a:t>
             </a:r>
           </a:p>
         </p:txBody>
@@ -6992,8 +7125,8 @@
         </p:nvSpPr>
         <p:spPr>
           <a:xfrm>
-            <a:off x="1645920" y="1207008"/>
-            <a:ext cx="6217920" cy="914400"/>
+            <a:off x="1508760" y="1280160"/>
+            <a:ext cx="3108960" cy="1188720"/>
           </a:xfrm>
           <a:prstGeom prst="rect">
             <a:avLst/>
@@ -7006,18 +7139,35 @@
           </a:bodyPr>
           <a:lstStyle/>
           <a:p>
-            <a:pPr algn="l"/>
-            <a:r>
-              <a:rPr sz="1100" b="0">
+            <a:pPr algn="l">
+              <a:spcBef>
+                <a:spcPts val="600"/>
+              </a:spcBef>
+            </a:pPr>
+            <a:r>
+              <a:rPr sz="1500" b="0">
                 <a:solidFill>
                   <a:srgbClr val="262626"/>
                 </a:solidFill>
                 <a:latin typeface="Yu Gothic"/>
               </a:rPr>
-              <a:t>・早稲田大 創造理工（環境資源工学）
-・東京農工大 農学府（物質循環環境科学）
-・筑波大 生命環境学群 地球学類（実績）
-・秋田大／茨城大（理工・物質科学・応用化学）※27卒エントリー実績</a:t>
+              <a:t>早稲田大（環境資源工学）</a:t>
+            </a:r>
+          </a:p>
+          <a:p>
+            <a:pPr algn="l">
+              <a:spcBef>
+                <a:spcPts val="600"/>
+              </a:spcBef>
+            </a:pPr>
+            <a:r>
+              <a:rPr sz="1500" b="0">
+                <a:solidFill>
+                  <a:srgbClr val="262626"/>
+                </a:solidFill>
+                <a:latin typeface="Yu Gothic"/>
+              </a:rPr>
+              <a:t>東京農工大院（物質循環）</a:t>
             </a:r>
           </a:p>
         </p:txBody>
@@ -7030,8 +7180,8 @@
         </p:nvSpPr>
         <p:spPr>
           <a:xfrm>
-            <a:off x="1645920" y="2103120"/>
-            <a:ext cx="6217920" cy="292608"/>
+            <a:off x="4663440" y="1280160"/>
+            <a:ext cx="3200400" cy="1188720"/>
           </a:xfrm>
           <a:prstGeom prst="rect">
             <a:avLst/>
@@ -7044,15 +7194,35 @@
           </a:bodyPr>
           <a:lstStyle/>
           <a:p>
-            <a:pPr algn="l"/>
-            <a:r>
-              <a:rPr sz="1050" b="0">
-                <a:solidFill>
-                  <a:srgbClr val="595959"/>
-                </a:solidFill>
-                <a:latin typeface="Yu Gothic"/>
-              </a:rPr>
-              <a:t>地理：筑波・茨城は現場訪問で日帰り可</a:t>
+            <a:pPr algn="l">
+              <a:spcBef>
+                <a:spcPts val="600"/>
+              </a:spcBef>
+            </a:pPr>
+            <a:r>
+              <a:rPr sz="1500" b="0">
+                <a:solidFill>
+                  <a:srgbClr val="262626"/>
+                </a:solidFill>
+                <a:latin typeface="Yu Gothic"/>
+              </a:rPr>
+              <a:t>筑波大（地球学類）</a:t>
+            </a:r>
+          </a:p>
+          <a:p>
+            <a:pPr algn="l">
+              <a:spcBef>
+                <a:spcPts val="600"/>
+              </a:spcBef>
+            </a:pPr>
+            <a:r>
+              <a:rPr sz="1500" b="0">
+                <a:solidFill>
+                  <a:srgbClr val="262626"/>
+                </a:solidFill>
+                <a:latin typeface="Yu Gothic"/>
+              </a:rPr>
+              <a:t>秋田大・茨城大（理工）</a:t>
             </a:r>
           </a:p>
         </p:txBody>
@@ -7065,8 +7235,8 @@
         </p:nvSpPr>
         <p:spPr>
           <a:xfrm>
-            <a:off x="365760" y="2560320"/>
-            <a:ext cx="7589520" cy="1600200"/>
+            <a:off x="365760" y="2606040"/>
+            <a:ext cx="7498079" cy="1691640"/>
           </a:xfrm>
           <a:prstGeom prst="rect">
             <a:avLst/>
@@ -7109,8 +7279,8 @@
         </p:nvSpPr>
         <p:spPr>
           <a:xfrm>
-            <a:off x="365760" y="2560320"/>
-            <a:ext cx="1188720" cy="1600200"/>
+            <a:off x="365760" y="2606040"/>
+            <a:ext cx="1005840" cy="1691640"/>
           </a:xfrm>
           <a:prstGeom prst="rect">
             <a:avLst/>
@@ -7143,13 +7313,13 @@
           <a:p>
             <a:pPr algn="ctr"/>
             <a:r>
-              <a:rPr sz="1500" b="1">
+              <a:rPr sz="2800" b="1">
                 <a:solidFill>
                   <a:srgbClr val="FFFFFF"/>
                 </a:solidFill>
                 <a:latin typeface="Yu Gothic"/>
               </a:rPr>
-              <a:t>A 重点</a:t>
+              <a:t>A</a:t>
             </a:r>
           </a:p>
         </p:txBody>
@@ -7162,8 +7332,8 @@
         </p:nvSpPr>
         <p:spPr>
           <a:xfrm>
-            <a:off x="1645920" y="2606039"/>
-            <a:ext cx="6217920" cy="320040"/>
+            <a:off x="1508760" y="2651760"/>
+            <a:ext cx="6217920" cy="365760"/>
           </a:xfrm>
           <a:prstGeom prst="rect">
             <a:avLst/>
@@ -7178,13 +7348,13 @@
           <a:p>
             <a:pPr algn="l"/>
             <a:r>
-              <a:rPr sz="1300" b="1">
+              <a:rPr sz="1500" b="1">
                 <a:solidFill>
                   <a:srgbClr val="1F497D"/>
                 </a:solidFill>
                 <a:latin typeface="Yu Gothic"/>
               </a:rPr>
-              <a:t>環境・農・森林系（タイプB・C）</a:t>
+              <a:t>環境・農・森林系</a:t>
             </a:r>
           </a:p>
         </p:txBody>
@@ -7197,8 +7367,8 @@
         </p:nvSpPr>
         <p:spPr>
           <a:xfrm>
-            <a:off x="1645920" y="2944368"/>
-            <a:ext cx="6217920" cy="914400"/>
+            <a:off x="1508760" y="3063240"/>
+            <a:ext cx="3108960" cy="1188720"/>
           </a:xfrm>
           <a:prstGeom prst="rect">
             <a:avLst/>
@@ -7211,17 +7381,35 @@
           </a:bodyPr>
           <a:lstStyle/>
           <a:p>
-            <a:pPr algn="l"/>
-            <a:r>
-              <a:rPr sz="1100" b="0">
+            <a:pPr algn="l">
+              <a:spcBef>
+                <a:spcPts val="600"/>
+              </a:spcBef>
+            </a:pPr>
+            <a:r>
+              <a:rPr sz="1500" b="0">
                 <a:solidFill>
                   <a:srgbClr val="262626"/>
                 </a:solidFill>
                 <a:latin typeface="Yu Gothic"/>
               </a:rPr>
-              <a:t>・公立鳥取環境大 環境学部　・信州大 農学部
-・東京農業大 生物資源開発　・広島大 総合科学
-・宇都宮／群馬／福島／茨城の農・理工</a:t>
+              <a:t>公立鳥取環境大</a:t>
+            </a:r>
+          </a:p>
+          <a:p>
+            <a:pPr algn="l">
+              <a:spcBef>
+                <a:spcPts val="600"/>
+              </a:spcBef>
+            </a:pPr>
+            <a:r>
+              <a:rPr sz="1500" b="0">
+                <a:solidFill>
+                  <a:srgbClr val="262626"/>
+                </a:solidFill>
+                <a:latin typeface="Yu Gothic"/>
+              </a:rPr>
+              <a:t>信州大（農）</a:t>
             </a:r>
           </a:p>
         </p:txBody>
@@ -7234,8 +7422,8 @@
         </p:nvSpPr>
         <p:spPr>
           <a:xfrm>
-            <a:off x="1645920" y="3840479"/>
-            <a:ext cx="6217920" cy="292608"/>
+            <a:off x="4663440" y="3063240"/>
+            <a:ext cx="3200400" cy="1188720"/>
           </a:xfrm>
           <a:prstGeom prst="rect">
             <a:avLst/>
@@ -7248,15 +7436,35 @@
           </a:bodyPr>
           <a:lstStyle/>
           <a:p>
-            <a:pPr algn="l"/>
-            <a:r>
-              <a:rPr sz="1050" b="0">
-                <a:solidFill>
-                  <a:srgbClr val="595959"/>
-                </a:solidFill>
-                <a:latin typeface="Yu Gothic"/>
-              </a:rPr>
-              <a:t>遠方は12月オンラインを必須に</a:t>
+            <a:pPr algn="l">
+              <a:spcBef>
+                <a:spcPts val="600"/>
+              </a:spcBef>
+            </a:pPr>
+            <a:r>
+              <a:rPr sz="1500" b="0">
+                <a:solidFill>
+                  <a:srgbClr val="262626"/>
+                </a:solidFill>
+                <a:latin typeface="Yu Gothic"/>
+              </a:rPr>
+              <a:t>東京農業大</a:t>
+            </a:r>
+          </a:p>
+          <a:p>
+            <a:pPr algn="l">
+              <a:spcBef>
+                <a:spcPts val="600"/>
+              </a:spcBef>
+            </a:pPr>
+            <a:r>
+              <a:rPr sz="1500" b="0">
+                <a:solidFill>
+                  <a:srgbClr val="262626"/>
+                </a:solidFill>
+                <a:latin typeface="Yu Gothic"/>
+              </a:rPr>
+              <a:t>宇都宮・群馬・福島の農・理工</a:t>
             </a:r>
           </a:p>
         </p:txBody>
@@ -7269,8 +7477,8 @@
         </p:nvSpPr>
         <p:spPr>
           <a:xfrm>
-            <a:off x="365760" y="4297679"/>
-            <a:ext cx="7589520" cy="1600200"/>
+            <a:off x="365760" y="4389120"/>
+            <a:ext cx="7498079" cy="1691640"/>
           </a:xfrm>
           <a:prstGeom prst="rect">
             <a:avLst/>
@@ -7313,8 +7521,8 @@
         </p:nvSpPr>
         <p:spPr>
           <a:xfrm>
-            <a:off x="365760" y="4297679"/>
-            <a:ext cx="1188720" cy="1600200"/>
+            <a:off x="365760" y="4389120"/>
+            <a:ext cx="1005840" cy="1691640"/>
           </a:xfrm>
           <a:prstGeom prst="rect">
             <a:avLst/>
@@ -7347,13 +7555,13 @@
           <a:p>
             <a:pPr algn="ctr"/>
             <a:r>
-              <a:rPr sz="1500" b="1">
+              <a:rPr sz="2800" b="1">
                 <a:solidFill>
                   <a:srgbClr val="FFFFFF"/>
                 </a:solidFill>
                 <a:latin typeface="Yu Gothic"/>
               </a:rPr>
-              <a:t>B 拡張</a:t>
+              <a:t>B</a:t>
             </a:r>
           </a:p>
         </p:txBody>
@@ -7366,8 +7574,8 @@
         </p:nvSpPr>
         <p:spPr>
           <a:xfrm>
-            <a:off x="1645920" y="4343399"/>
-            <a:ext cx="6217920" cy="320040"/>
+            <a:off x="1508760" y="4434840"/>
+            <a:ext cx="6217920" cy="365760"/>
           </a:xfrm>
           <a:prstGeom prst="rect">
             <a:avLst/>
@@ -7382,13 +7590,13 @@
           <a:p>
             <a:pPr algn="l"/>
             <a:r>
-              <a:rPr sz="1300" b="1">
+              <a:rPr sz="1500" b="1">
                 <a:solidFill>
                   <a:srgbClr val="1F497D"/>
                 </a:solidFill>
                 <a:latin typeface="Yu Gothic"/>
               </a:rPr>
-              <a:t>理系私立・理系公立（既存リスト）</a:t>
+              <a:t>理系私立・公立</a:t>
             </a:r>
           </a:p>
         </p:txBody>
@@ -7401,8 +7609,8 @@
         </p:nvSpPr>
         <p:spPr>
           <a:xfrm>
-            <a:off x="1645920" y="4681727"/>
-            <a:ext cx="6217920" cy="914400"/>
+            <a:off x="1508760" y="4846320"/>
+            <a:ext cx="3108960" cy="1188720"/>
           </a:xfrm>
           <a:prstGeom prst="rect">
             <a:avLst/>
@@ -7415,16 +7623,35 @@
           </a:bodyPr>
           <a:lstStyle/>
           <a:p>
-            <a:pPr algn="l"/>
-            <a:r>
-              <a:rPr sz="1100" b="0">
+            <a:pPr algn="l">
+              <a:spcBef>
+                <a:spcPts val="600"/>
+              </a:spcBef>
+            </a:pPr>
+            <a:r>
+              <a:rPr sz="1500" b="0">
                 <a:solidFill>
                   <a:srgbClr val="262626"/>
                 </a:solidFill>
                 <a:latin typeface="Yu Gothic"/>
               </a:rPr>
-              <a:t>・都立大／横浜市立大／長野県立大／諏訪東京理科
-・明治／芝浦工大／電機大／日大／法政／東洋</a:t>
+              <a:t>都立大・横浜市大</a:t>
+            </a:r>
+          </a:p>
+          <a:p>
+            <a:pPr algn="l">
+              <a:spcBef>
+                <a:spcPts val="600"/>
+              </a:spcBef>
+            </a:pPr>
+            <a:r>
+              <a:rPr sz="1500" b="0">
+                <a:solidFill>
+                  <a:srgbClr val="262626"/>
+                </a:solidFill>
+                <a:latin typeface="Yu Gothic"/>
+              </a:rPr>
+              <a:t>長野県立大・諏訪東京理科</a:t>
             </a:r>
           </a:p>
         </p:txBody>
@@ -7437,8 +7664,8 @@
         </p:nvSpPr>
         <p:spPr>
           <a:xfrm>
-            <a:off x="1645920" y="5577840"/>
-            <a:ext cx="6217920" cy="292608"/>
+            <a:off x="4663440" y="4846320"/>
+            <a:ext cx="3200400" cy="1188720"/>
           </a:xfrm>
           <a:prstGeom prst="rect">
             <a:avLst/>
@@ -7451,15 +7678,35 @@
           </a:bodyPr>
           <a:lstStyle/>
           <a:p>
-            <a:pPr algn="l"/>
-            <a:r>
-              <a:rPr sz="1050" b="0">
-                <a:solidFill>
-                  <a:srgbClr val="595959"/>
-                </a:solidFill>
-                <a:latin typeface="Yu Gothic"/>
-              </a:rPr>
-              <a:t>工学系は「業界構造」訴求で補完</a:t>
+            <a:pPr algn="l">
+              <a:spcBef>
+                <a:spcPts val="600"/>
+              </a:spcBef>
+            </a:pPr>
+            <a:r>
+              <a:rPr sz="1500" b="0">
+                <a:solidFill>
+                  <a:srgbClr val="262626"/>
+                </a:solidFill>
+                <a:latin typeface="Yu Gothic"/>
+              </a:rPr>
+              <a:t>明治・芝浦工・電機大</a:t>
+            </a:r>
+          </a:p>
+          <a:p>
+            <a:pPr algn="l">
+              <a:spcBef>
+                <a:spcPts val="600"/>
+              </a:spcBef>
+            </a:pPr>
+            <a:r>
+              <a:rPr sz="1500" b="0">
+                <a:solidFill>
+                  <a:srgbClr val="262626"/>
+                </a:solidFill>
+                <a:latin typeface="Yu Gothic"/>
+              </a:rPr>
+              <a:t>日大・法政・東洋</a:t>
             </a:r>
           </a:p>
         </p:txBody>
@@ -7472,8 +7719,8 @@
         </p:nvSpPr>
         <p:spPr>
           <a:xfrm>
-            <a:off x="8138160" y="822960"/>
-            <a:ext cx="3657600" cy="2286000"/>
+            <a:off x="8046720" y="822960"/>
+            <a:ext cx="3749039" cy="2377440"/>
           </a:xfrm>
           <a:prstGeom prst="rect">
             <a:avLst/>
@@ -7516,8 +7763,8 @@
         </p:nvSpPr>
         <p:spPr>
           <a:xfrm>
-            <a:off x="8138160" y="868680"/>
-            <a:ext cx="3657600" cy="347472"/>
+            <a:off x="8046720" y="868680"/>
+            <a:ext cx="3749039" cy="411480"/>
           </a:xfrm>
           <a:prstGeom prst="rect">
             <a:avLst/>
@@ -7532,13 +7779,13 @@
           <a:p>
             <a:pPr algn="l"/>
             <a:r>
-              <a:rPr sz="1200" b="1">
+              <a:rPr sz="1500" b="1">
                 <a:solidFill>
                   <a:srgbClr val="1F497D"/>
                 </a:solidFill>
                 <a:latin typeface="Yu Gothic"/>
               </a:rPr>
-              <a:t>日程の配慮（学生のテスト期間を避ける）</a:t>
+              <a:t>日程</a:t>
             </a:r>
           </a:p>
         </p:txBody>
@@ -7551,8 +7798,8 @@
         </p:nvSpPr>
         <p:spPr>
           <a:xfrm>
-            <a:off x="8138160" y="1234440"/>
-            <a:ext cx="3657600" cy="1828800"/>
+            <a:off x="8046720" y="1325880"/>
+            <a:ext cx="3749039" cy="1828800"/>
           </a:xfrm>
           <a:prstGeom prst="rect">
             <a:avLst/>
@@ -7565,29 +7812,51 @@
           </a:bodyPr>
           <a:lstStyle/>
           <a:p>
-            <a:pPr algn="l"/>
-            <a:r>
-              <a:rPr sz="1150" b="0">
+            <a:pPr algn="l">
+              <a:spcBef>
+                <a:spcPts val="400"/>
+              </a:spcBef>
+            </a:pPr>
+            <a:r>
+              <a:rPr sz="1400" b="0">
                 <a:solidFill>
                   <a:srgbClr val="262626"/>
                 </a:solidFill>
                 <a:latin typeface="Yu Gothic"/>
               </a:rPr>
-              <a:t>・Part1オンライン：12月中旬
-　（冬季休業は12/22〜12/27頃から）</a:t>
-            </a:r>
-          </a:p>
-          <a:p>
-            <a:pPr algn="l"/>
-            <a:r>
-              <a:rPr sz="1150" b="0">
+              <a:t>オンライン：12月中旬</a:t>
+            </a:r>
+          </a:p>
+          <a:p>
+            <a:pPr algn="l">
+              <a:spcBef>
+                <a:spcPts val="400"/>
+              </a:spcBef>
+            </a:pPr>
+            <a:r>
+              <a:rPr sz="1400" b="0">
                 <a:solidFill>
                   <a:srgbClr val="262626"/>
                 </a:solidFill>
                 <a:latin typeface="Yu Gothic"/>
               </a:rPr>
-              <a:t>・Part2現場訪問：1月上旬〜中旬の週末が候補
-　（電機大の期末は1/13〜、芝浦・日大・東洋は1月下旬に授業終了）</a:t>
+              <a:t>現場訪問：1月上旬〜中旬</a:t>
+            </a:r>
+          </a:p>
+          <a:p>
+            <a:pPr algn="l">
+              <a:spcBef>
+                <a:spcPts val="600"/>
+              </a:spcBef>
+            </a:pPr>
+            <a:r>
+              <a:rPr sz="1200" b="0">
+                <a:solidFill>
+                  <a:srgbClr val="595959"/>
+                </a:solidFill>
+                <a:latin typeface="Yu Gothic"/>
+              </a:rPr>
+              <a:t>期末・冬季休業を避ける</a:t>
             </a:r>
           </a:p>
         </p:txBody>
@@ -7600,8 +7869,8 @@
         </p:nvSpPr>
         <p:spPr>
           <a:xfrm>
-            <a:off x="8138160" y="3246120"/>
-            <a:ext cx="3657600" cy="3017520"/>
+            <a:off x="8046720" y="3337560"/>
+            <a:ext cx="3749039" cy="2926080"/>
           </a:xfrm>
           <a:prstGeom prst="rect">
             <a:avLst/>
@@ -7644,8 +7913,8 @@
         </p:nvSpPr>
         <p:spPr>
           <a:xfrm>
-            <a:off x="8138160" y="3291839"/>
-            <a:ext cx="3657600" cy="347472"/>
+            <a:off x="8046720" y="3383279"/>
+            <a:ext cx="3749039" cy="411480"/>
           </a:xfrm>
           <a:prstGeom prst="rect">
             <a:avLst/>
@@ -7660,13 +7929,13 @@
           <a:p>
             <a:pPr algn="l"/>
             <a:r>
-              <a:rPr sz="1200" b="1">
+              <a:rPr sz="1500" b="1">
                 <a:solidFill>
                   <a:srgbClr val="1F497D"/>
                 </a:solidFill>
                 <a:latin typeface="Yu Gothic"/>
               </a:rPr>
-              <a:t>リストアップ基準（visionsで検索）</a:t>
+              <a:t>visions検索基準</a:t>
             </a:r>
           </a:p>
         </p:txBody>
@@ -7679,8 +7948,8 @@
         </p:nvSpPr>
         <p:spPr>
           <a:xfrm>
-            <a:off x="8138160" y="3657600"/>
-            <a:ext cx="3657600" cy="2560320"/>
+            <a:off x="8046720" y="3840480"/>
+            <a:ext cx="3749039" cy="2377440"/>
           </a:xfrm>
           <a:prstGeom prst="rect">
             <a:avLst/>
@@ -7693,51 +7962,67 @@
           </a:bodyPr>
           <a:lstStyle/>
           <a:p>
-            <a:pPr algn="l"/>
-            <a:r>
-              <a:rPr sz="1150" b="0">
+            <a:pPr algn="l">
+              <a:spcBef>
+                <a:spcPts val="400"/>
+              </a:spcBef>
+            </a:pPr>
+            <a:r>
+              <a:rPr sz="1400" b="0">
                 <a:solidFill>
                   <a:srgbClr val="262626"/>
                 </a:solidFill>
                 <a:latin typeface="Yu Gothic"/>
               </a:rPr>
-              <a:t>・ソーシャルテーマ：自然と共生・循環型社会の創造（必須）</a:t>
-            </a:r>
-          </a:p>
-          <a:p>
-            <a:pPr algn="l"/>
-            <a:r>
-              <a:rPr sz="1150" b="0">
+              <a:t>自然と共生・循環型社会</a:t>
+            </a:r>
+          </a:p>
+          <a:p>
+            <a:pPr algn="l">
+              <a:spcBef>
+                <a:spcPts val="400"/>
+              </a:spcBef>
+            </a:pPr>
+            <a:r>
+              <a:rPr sz="1400" b="0">
                 <a:solidFill>
                   <a:srgbClr val="262626"/>
                 </a:solidFill>
                 <a:latin typeface="Yu Gothic"/>
               </a:rPr>
-              <a:t>・清峰が選んだキャリア観：一つのことを積み重ねる／目の前の人の役に立つ／たくさんの人と繋がる／チームで協力</a:t>
-            </a:r>
-          </a:p>
-          <a:p>
-            <a:pPr algn="l"/>
-            <a:r>
-              <a:rPr sz="1150" b="0">
+              <a:t>積み重ねる／人の役に立つ</a:t>
+            </a:r>
+          </a:p>
+          <a:p>
+            <a:pPr algn="l">
+              <a:spcBef>
+                <a:spcPts val="400"/>
+              </a:spcBef>
+            </a:pPr>
+            <a:r>
+              <a:rPr sz="1400" b="0">
                 <a:solidFill>
                   <a:srgbClr val="262626"/>
                 </a:solidFill>
                 <a:latin typeface="Yu Gothic"/>
               </a:rPr>
-              <a:t>・学部キーワード：環境・資源・物質・循環・地球・農・森林</a:t>
-            </a:r>
-          </a:p>
-          <a:p>
-            <a:pPr algn="l"/>
-            <a:r>
-              <a:rPr sz="1150" b="0">
+              <a:t>環境・資源・物質・農</a:t>
+            </a:r>
+          </a:p>
+          <a:p>
+            <a:pPr algn="l">
+              <a:spcBef>
+                <a:spcPts val="400"/>
+              </a:spcBef>
+            </a:pPr>
+            <a:r>
+              <a:rPr sz="1400" b="0">
                 <a:solidFill>
                   <a:srgbClr val="262626"/>
                 </a:solidFill>
                 <a:latin typeface="Yu Gothic"/>
               </a:rPr>
-              <a:t>・目標：28卒 10月30名 → 11月40名 → 12月50名</a:t>
+              <a:t>目標：30 → 40 → 50名</a:t>
             </a:r>
           </a:p>
         </p:txBody>
@@ -7947,7 +8232,7 @@
                 </a:solidFill>
                 <a:latin typeface="Yu Gothic"/>
               </a:rPr>
-              <a:t>ツアー設計との接点：ぐるぐるの『こころの動き』と見極めポイント</a:t>
+              <a:t>ツアーでの、ぐるぐるの動きと見極め</a:t>
             </a:r>
           </a:p>
         </p:txBody>
@@ -7982,7 +8267,7 @@
                 </a:solidFill>
                 <a:latin typeface="Yu Gothic"/>
               </a:rPr>
-              <a:t>出典：地球資源を輝かせていくIS / 内定者研修 / visions collegeのご相談（銅巡りインターン議事録・企画スライド）。見極めポイントは当方の提案（案）</a:t>
+              <a:t>出典：地球資源を輝かせていくIS / 銅巡りインターン議事録・企画スライド。見極めポイントは当方の提案（案）</a:t>
             </a:r>
           </a:p>
         </p:txBody>
@@ -7995,8 +8280,8 @@
         </p:nvSpPr>
         <p:spPr>
           <a:xfrm>
-            <a:off x="365760" y="749808"/>
-            <a:ext cx="1517904" cy="347472"/>
+            <a:off x="365760" y="777240"/>
+            <a:ext cx="2423160" cy="384048"/>
           </a:xfrm>
           <a:prstGeom prst="rect">
             <a:avLst/>
@@ -8029,7 +8314,7 @@
           <a:p>
             <a:pPr algn="ctr"/>
             <a:r>
-              <a:rPr sz="1100" b="1">
+              <a:rPr sz="1300" b="1">
                 <a:solidFill>
                   <a:srgbClr val="FFFFFF"/>
                 </a:solidFill>
@@ -8048,8 +8333,8 @@
         </p:nvSpPr>
         <p:spPr>
           <a:xfrm>
-            <a:off x="1920240" y="749808"/>
-            <a:ext cx="2706624" cy="347472"/>
+            <a:off x="2834640" y="777240"/>
+            <a:ext cx="3337560" cy="384048"/>
           </a:xfrm>
           <a:prstGeom prst="rect">
             <a:avLst/>
@@ -8082,13 +8367,13 @@
           <a:p>
             <a:pPr algn="ctr"/>
             <a:r>
-              <a:rPr sz="1100" b="1">
+              <a:rPr sz="1300" b="1">
                 <a:solidFill>
                   <a:srgbClr val="FFFFFF"/>
                 </a:solidFill>
                 <a:latin typeface="Yu Gothic"/>
               </a:rPr>
-              <a:t>やること（企画案）</a:t>
+              <a:t>内容</a:t>
             </a:r>
           </a:p>
         </p:txBody>
@@ -8101,8 +8386,8 @@
         </p:nvSpPr>
         <p:spPr>
           <a:xfrm>
-            <a:off x="4663440" y="749808"/>
-            <a:ext cx="2340864" cy="347472"/>
+            <a:off x="6217920" y="777240"/>
+            <a:ext cx="2971800" cy="384048"/>
           </a:xfrm>
           <a:prstGeom prst="rect">
             <a:avLst/>
@@ -8135,13 +8420,13 @@
           <a:p>
             <a:pPr algn="ctr"/>
             <a:r>
-              <a:rPr sz="1100" b="1">
+              <a:rPr sz="1300" b="1">
                 <a:solidFill>
                   <a:srgbClr val="FFFFFF"/>
                 </a:solidFill>
                 <a:latin typeface="Yu Gothic"/>
               </a:rPr>
-              <a:t>ぐるぐるの こころの動き</a:t>
+              <a:t>こころの動き</a:t>
             </a:r>
           </a:p>
         </p:txBody>
@@ -8154,8 +8439,8 @@
         </p:nvSpPr>
         <p:spPr>
           <a:xfrm>
-            <a:off x="7040879" y="749808"/>
-            <a:ext cx="2340864" cy="347472"/>
+            <a:off x="9235440" y="777240"/>
+            <a:ext cx="2514600" cy="384048"/>
           </a:xfrm>
           <a:prstGeom prst="rect">
             <a:avLst/>
@@ -8188,13 +8473,13 @@
           <a:p>
             <a:pPr algn="ctr"/>
             <a:r>
-              <a:rPr sz="1100" b="1">
+              <a:rPr sz="1300" b="1">
                 <a:solidFill>
                   <a:srgbClr val="FFFFFF"/>
                 </a:solidFill>
                 <a:latin typeface="Yu Gothic"/>
               </a:rPr>
-              <a:t>刺さる訴求（SEEDS⭐）</a:t>
+              <a:t>見たい行動</a:t>
             </a:r>
           </a:p>
         </p:txBody>
@@ -8207,61 +8492,8 @@
         </p:nvSpPr>
         <p:spPr>
           <a:xfrm>
-            <a:off x="9418319" y="749808"/>
-            <a:ext cx="2340864" cy="347472"/>
-          </a:xfrm>
-          <a:prstGeom prst="rect">
-            <a:avLst/>
-          </a:prstGeom>
-          <a:solidFill>
-            <a:srgbClr val="1F497D"/>
-          </a:solidFill>
-          <a:ln>
-            <a:noFill/>
-          </a:ln>
-          <a:effectLst/>
-        </p:spPr>
-        <p:style>
-          <a:lnRef idx="1">
-            <a:schemeClr val="accent1"/>
-          </a:lnRef>
-          <a:fillRef idx="3">
-            <a:schemeClr val="accent1"/>
-          </a:fillRef>
-          <a:effectRef idx="2">
-            <a:schemeClr val="accent1"/>
-          </a:effectRef>
-          <a:fontRef idx="minor">
-            <a:schemeClr val="lt1"/>
-          </a:fontRef>
-        </p:style>
-        <p:txBody>
-          <a:bodyPr rtlCol="0" anchor="ctr" wrap="square" lIns="73152" rIns="73152"/>
-          <a:lstStyle/>
-          <a:p>
-            <a:pPr algn="ctr"/>
-            <a:r>
-              <a:rPr sz="1100" b="1">
-                <a:solidFill>
-                  <a:srgbClr val="FFFFFF"/>
-                </a:solidFill>
-                <a:latin typeface="Yu Gothic"/>
-              </a:rPr>
-              <a:t>見たい行動（見極め）</a:t>
-            </a:r>
-          </a:p>
-        </p:txBody>
-      </p:sp>
-      <p:sp>
-        <p:nvSpPr>
-          <p:cNvPr id="12" name="Rectangle 11"/>
-          <p:cNvSpPr/>
-          <p:nvPr/>
-        </p:nvSpPr>
-        <p:spPr>
-          <a:xfrm>
-            <a:off x="365760" y="1133856"/>
-            <a:ext cx="1517904" cy="987552"/>
+            <a:off x="365760" y="1216152"/>
+            <a:ext cx="2423160" cy="914400"/>
           </a:xfrm>
           <a:prstGeom prst="rect">
             <a:avLst/>
@@ -8294,29 +8526,39 @@
           <a:p>
             <a:pPr algn="l"/>
             <a:r>
-              <a:rPr sz="1050" b="1">
+              <a:rPr sz="1400" b="1">
                 <a:solidFill>
                   <a:srgbClr val="1F497D"/>
                 </a:solidFill>
                 <a:latin typeface="Yu Gothic"/>
               </a:rPr>
-              <a:t>Part0
-オンライン
-ガイダンス（12月）</a:t>
-            </a:r>
-          </a:p>
-        </p:txBody>
-      </p:sp>
-      <p:sp>
-        <p:nvSpPr>
-          <p:cNvPr id="13" name="Rectangle 12"/>
+              <a:t>Part0　12月</a:t>
+            </a:r>
+          </a:p>
+          <a:p>
+            <a:pPr algn="l"/>
+            <a:r>
+              <a:rPr sz="1400" b="1">
+                <a:solidFill>
+                  <a:srgbClr val="1F497D"/>
+                </a:solidFill>
+                <a:latin typeface="Yu Gothic"/>
+              </a:rPr>
+              <a:t>オンライン</a:t>
+            </a:r>
+          </a:p>
+        </p:txBody>
+      </p:sp>
+      <p:sp>
+        <p:nvSpPr>
+          <p:cNvPr id="12" name="Rectangle 11"/>
           <p:cNvSpPr/>
           <p:nvPr/>
         </p:nvSpPr>
         <p:spPr>
           <a:xfrm>
-            <a:off x="1920240" y="1133856"/>
-            <a:ext cx="2706624" cy="987552"/>
+            <a:off x="2834640" y="1216152"/>
+            <a:ext cx="3337560" cy="914400"/>
           </a:xfrm>
           <a:prstGeom prst="rect">
             <a:avLst/>
@@ -8349,27 +8591,39 @@
           <a:p>
             <a:pPr algn="l"/>
             <a:r>
-              <a:rPr sz="1000" b="0">
+              <a:rPr sz="1400" b="0">
                 <a:solidFill>
                   <a:srgbClr val="262626"/>
                 </a:solidFill>
                 <a:latin typeface="Yu Gothic"/>
               </a:rPr>
-              <a:t>銅業界の課題／社会インフラ産業の役割／目指すべき未来。価値循環モデル（鉱石→電気銅→インゴット→製品→産廃）</a:t>
-            </a:r>
-          </a:p>
-        </p:txBody>
-      </p:sp>
-      <p:sp>
-        <p:nvSpPr>
-          <p:cNvPr id="14" name="Rectangle 13"/>
+              <a:t>銅業界の課題</a:t>
+            </a:r>
+          </a:p>
+          <a:p>
+            <a:pPr algn="l"/>
+            <a:r>
+              <a:rPr sz="1400" b="0">
+                <a:solidFill>
+                  <a:srgbClr val="262626"/>
+                </a:solidFill>
+                <a:latin typeface="Yu Gothic"/>
+              </a:rPr>
+              <a:t>価値循環モデル</a:t>
+            </a:r>
+          </a:p>
+        </p:txBody>
+      </p:sp>
+      <p:sp>
+        <p:nvSpPr>
+          <p:cNvPr id="13" name="Rectangle 12"/>
           <p:cNvSpPr/>
           <p:nvPr/>
         </p:nvSpPr>
         <p:spPr>
           <a:xfrm>
-            <a:off x="4663440" y="1133856"/>
-            <a:ext cx="2340864" cy="987552"/>
+            <a:off x="6217920" y="1216152"/>
+            <a:ext cx="2971800" cy="914400"/>
           </a:xfrm>
           <a:prstGeom prst="rect">
             <a:avLst/>
@@ -8402,27 +8656,27 @@
           <a:p>
             <a:pPr algn="l"/>
             <a:r>
-              <a:rPr sz="1000" b="0">
+              <a:rPr sz="1400" b="0">
                 <a:solidFill>
                   <a:srgbClr val="262626"/>
                 </a:solidFill>
                 <a:latin typeface="Yu Gothic"/>
               </a:rPr>
-              <a:t>「銅って有限なんだ…！可採年数は約40年」→ 構造を知りたくなる</a:t>
-            </a:r>
-          </a:p>
-        </p:txBody>
-      </p:sp>
-      <p:sp>
-        <p:nvSpPr>
-          <p:cNvPr id="15" name="Rectangle 14"/>
+              <a:t>「銅は有限なんだ…！」</a:t>
+            </a:r>
+          </a:p>
+        </p:txBody>
+      </p:sp>
+      <p:sp>
+        <p:nvSpPr>
+          <p:cNvPr id="14" name="Rectangle 13"/>
           <p:cNvSpPr/>
           <p:nvPr/>
         </p:nvSpPr>
         <p:spPr>
           <a:xfrm>
-            <a:off x="7040879" y="1133856"/>
-            <a:ext cx="2340864" cy="987552"/>
+            <a:off x="9235440" y="1216152"/>
+            <a:ext cx="2514600" cy="914400"/>
           </a:xfrm>
           <a:prstGeom prst="rect">
             <a:avLst/>
@@ -8455,14 +8709,78 @@
           <a:p>
             <a:pPr algn="l"/>
             <a:r>
-              <a:rPr sz="1000" b="0">
+              <a:rPr sz="1400" b="0">
                 <a:solidFill>
                   <a:srgbClr val="262626"/>
                 </a:solidFill>
                 <a:latin typeface="Yu Gothic"/>
               </a:rPr>
-              <a:t>明確な理念
-地域・社会への貢献</a:t>
+              <a:t>事前課題・質問</a:t>
+            </a:r>
+          </a:p>
+        </p:txBody>
+      </p:sp>
+      <p:sp>
+        <p:nvSpPr>
+          <p:cNvPr id="15" name="Rectangle 14"/>
+          <p:cNvSpPr/>
+          <p:nvPr/>
+        </p:nvSpPr>
+        <p:spPr>
+          <a:xfrm>
+            <a:off x="365760" y="2194560"/>
+            <a:ext cx="2423160" cy="914400"/>
+          </a:xfrm>
+          <a:prstGeom prst="rect">
+            <a:avLst/>
+          </a:prstGeom>
+          <a:solidFill>
+            <a:srgbClr val="FBE3CB"/>
+          </a:solidFill>
+          <a:ln>
+            <a:noFill/>
+          </a:ln>
+          <a:effectLst/>
+        </p:spPr>
+        <p:style>
+          <a:lnRef idx="1">
+            <a:schemeClr val="accent1"/>
+          </a:lnRef>
+          <a:fillRef idx="3">
+            <a:schemeClr val="accent1"/>
+          </a:fillRef>
+          <a:effectRef idx="2">
+            <a:schemeClr val="accent1"/>
+          </a:effectRef>
+          <a:fontRef idx="minor">
+            <a:schemeClr val="lt1"/>
+          </a:fontRef>
+        </p:style>
+        <p:txBody>
+          <a:bodyPr rtlCol="0" anchor="ctr" wrap="square" lIns="73152" rIns="73152"/>
+          <a:lstStyle/>
+          <a:p>
+            <a:pPr algn="l"/>
+            <a:r>
+              <a:rPr sz="1400" b="1">
+                <a:solidFill>
+                  <a:srgbClr val="1F497D"/>
+                </a:solidFill>
+                <a:latin typeface="Yu Gothic"/>
+              </a:rPr>
+              <a:t>Part1　12月中旬</a:t>
+            </a:r>
+          </a:p>
+          <a:p>
+            <a:pPr algn="l"/>
+            <a:r>
+              <a:rPr sz="1400" b="1">
+                <a:solidFill>
+                  <a:srgbClr val="1F497D"/>
+                </a:solidFill>
+                <a:latin typeface="Yu Gothic"/>
+              </a:rPr>
+              <a:t>関係者トーク</a:t>
             </a:r>
           </a:p>
         </p:txBody>
@@ -8475,8 +8793,8 @@
         </p:nvSpPr>
         <p:spPr>
           <a:xfrm>
-            <a:off x="9418319" y="1133856"/>
-            <a:ext cx="2340864" cy="987552"/>
+            <a:off x="2834640" y="2194560"/>
+            <a:ext cx="3337560" cy="914400"/>
           </a:xfrm>
           <a:prstGeom prst="rect">
             <a:avLst/>
@@ -8509,13 +8827,25 @@
           <a:p>
             <a:pPr algn="l"/>
             <a:r>
-              <a:rPr sz="1000" b="0">
+              <a:rPr sz="1400" b="0">
                 <a:solidFill>
                   <a:srgbClr val="262626"/>
                 </a:solidFill>
                 <a:latin typeface="Yu Gothic"/>
               </a:rPr>
-              <a:t>事前課題への取り組み方／質問の質</a:t>
+              <a:t>産廃・加工・精錬所の</a:t>
+            </a:r>
+          </a:p>
+          <a:p>
+            <a:pPr algn="l"/>
+            <a:r>
+              <a:rPr sz="1400" b="0">
+                <a:solidFill>
+                  <a:srgbClr val="262626"/>
+                </a:solidFill>
+                <a:latin typeface="Yu Gothic"/>
+              </a:rPr>
+              <a:t>方に話を聞く</a:t>
             </a:r>
           </a:p>
         </p:txBody>
@@ -8528,8 +8858,114 @@
         </p:nvSpPr>
         <p:spPr>
           <a:xfrm>
-            <a:off x="365760" y="2157984"/>
-            <a:ext cx="1517904" cy="987552"/>
+            <a:off x="6217920" y="2194560"/>
+            <a:ext cx="2971800" cy="914400"/>
+          </a:xfrm>
+          <a:prstGeom prst="rect">
+            <a:avLst/>
+          </a:prstGeom>
+          <a:solidFill>
+            <a:srgbClr val="F2F2F2"/>
+          </a:solidFill>
+          <a:ln>
+            <a:noFill/>
+          </a:ln>
+          <a:effectLst/>
+        </p:spPr>
+        <p:style>
+          <a:lnRef idx="1">
+            <a:schemeClr val="accent1"/>
+          </a:lnRef>
+          <a:fillRef idx="3">
+            <a:schemeClr val="accent1"/>
+          </a:fillRef>
+          <a:effectRef idx="2">
+            <a:schemeClr val="accent1"/>
+          </a:effectRef>
+          <a:fontRef idx="minor">
+            <a:schemeClr val="lt1"/>
+          </a:fontRef>
+        </p:style>
+        <p:txBody>
+          <a:bodyPr rtlCol="0" anchor="ctr" wrap="square" lIns="73152" rIns="73152"/>
+          <a:lstStyle/>
+          <a:p>
+            <a:pPr algn="l"/>
+            <a:r>
+              <a:rPr sz="1400" b="0">
+                <a:solidFill>
+                  <a:srgbClr val="262626"/>
+                </a:solidFill>
+                <a:latin typeface="Yu Gothic"/>
+              </a:rPr>
+              <a:t>「立場で景色が違う」</a:t>
+            </a:r>
+          </a:p>
+        </p:txBody>
+      </p:sp>
+      <p:sp>
+        <p:nvSpPr>
+          <p:cNvPr id="18" name="Rectangle 17"/>
+          <p:cNvSpPr/>
+          <p:nvPr/>
+        </p:nvSpPr>
+        <p:spPr>
+          <a:xfrm>
+            <a:off x="9235440" y="2194560"/>
+            <a:ext cx="2514600" cy="914400"/>
+          </a:xfrm>
+          <a:prstGeom prst="rect">
+            <a:avLst/>
+          </a:prstGeom>
+          <a:solidFill>
+            <a:srgbClr val="F2F2F2"/>
+          </a:solidFill>
+          <a:ln>
+            <a:noFill/>
+          </a:ln>
+          <a:effectLst/>
+        </p:spPr>
+        <p:style>
+          <a:lnRef idx="1">
+            <a:schemeClr val="accent1"/>
+          </a:lnRef>
+          <a:fillRef idx="3">
+            <a:schemeClr val="accent1"/>
+          </a:fillRef>
+          <a:effectRef idx="2">
+            <a:schemeClr val="accent1"/>
+          </a:effectRef>
+          <a:fontRef idx="minor">
+            <a:schemeClr val="lt1"/>
+          </a:fontRef>
+        </p:style>
+        <p:txBody>
+          <a:bodyPr rtlCol="0" anchor="ctr" wrap="square" lIns="73152" rIns="73152"/>
+          <a:lstStyle/>
+          <a:p>
+            <a:pPr algn="l"/>
+            <a:r>
+              <a:rPr sz="1400" b="0">
+                <a:solidFill>
+                  <a:srgbClr val="262626"/>
+                </a:solidFill>
+                <a:latin typeface="Yu Gothic"/>
+              </a:rPr>
+              <a:t>聞く力</a:t>
+            </a:r>
+          </a:p>
+        </p:txBody>
+      </p:sp>
+      <p:sp>
+        <p:nvSpPr>
+          <p:cNvPr id="19" name="Rectangle 18"/>
+          <p:cNvSpPr/>
+          <p:nvPr/>
+        </p:nvSpPr>
+        <p:spPr>
+          <a:xfrm>
+            <a:off x="365760" y="3172968"/>
+            <a:ext cx="2423160" cy="914400"/>
           </a:xfrm>
           <a:prstGeom prst="rect">
             <a:avLst/>
@@ -8562,29 +8998,39 @@
           <a:p>
             <a:pPr algn="l"/>
             <a:r>
-              <a:rPr sz="1050" b="1">
+              <a:rPr sz="1400" b="1">
                 <a:solidFill>
                   <a:srgbClr val="1F497D"/>
                 </a:solidFill>
                 <a:latin typeface="Yu Gothic"/>
               </a:rPr>
-              <a:t>Part1
-オンライン
-関係者トーク（12月中旬）</a:t>
-            </a:r>
-          </a:p>
-        </p:txBody>
-      </p:sp>
-      <p:sp>
-        <p:nvSpPr>
-          <p:cNvPr id="18" name="Rectangle 17"/>
+              <a:t>Part2　1月</a:t>
+            </a:r>
+          </a:p>
+          <a:p>
+            <a:pPr algn="l"/>
+            <a:r>
+              <a:rPr sz="1400" b="1">
+                <a:solidFill>
+                  <a:srgbClr val="1F497D"/>
+                </a:solidFill>
+                <a:latin typeface="Yu Gothic"/>
+              </a:rPr>
+              <a:t>工場見学</a:t>
+            </a:r>
+          </a:p>
+        </p:txBody>
+      </p:sp>
+      <p:sp>
+        <p:nvSpPr>
+          <p:cNvPr id="20" name="Rectangle 19"/>
           <p:cNvSpPr/>
           <p:nvPr/>
         </p:nvSpPr>
         <p:spPr>
           <a:xfrm>
-            <a:off x="1920240" y="2157984"/>
-            <a:ext cx="2706624" cy="987552"/>
+            <a:off x="2834640" y="3172968"/>
+            <a:ext cx="3337560" cy="914400"/>
           </a:xfrm>
           <a:prstGeom prst="rect">
             <a:avLst/>
@@ -8617,27 +9063,39 @@
           <a:p>
             <a:pPr algn="l"/>
             <a:r>
-              <a:rPr sz="1000" b="0">
+              <a:rPr sz="1400" b="0">
                 <a:solidFill>
                   <a:srgbClr val="262626"/>
                 </a:solidFill>
                 <a:latin typeface="Yu Gothic"/>
               </a:rPr>
-              <a:t>産廃業者・加工系・精錬所の方の話。分断された循環の“つなぎ目”を聞く</a:t>
-            </a:r>
-          </a:p>
-        </p:txBody>
-      </p:sp>
-      <p:sp>
-        <p:nvSpPr>
-          <p:cNvPr id="19" name="Rectangle 18"/>
+              <a:t>もったいない</a:t>
+            </a:r>
+          </a:p>
+          <a:p>
+            <a:pPr algn="l"/>
+            <a:r>
+              <a:rPr sz="1400" b="0">
+                <a:solidFill>
+                  <a:srgbClr val="262626"/>
+                </a:solidFill>
+                <a:latin typeface="Yu Gothic"/>
+              </a:rPr>
+              <a:t>ポイントを探す</a:t>
+            </a:r>
+          </a:p>
+        </p:txBody>
+      </p:sp>
+      <p:sp>
+        <p:nvSpPr>
+          <p:cNvPr id="21" name="Rectangle 20"/>
           <p:cNvSpPr/>
           <p:nvPr/>
         </p:nvSpPr>
         <p:spPr>
           <a:xfrm>
-            <a:off x="4663440" y="2157984"/>
-            <a:ext cx="2340864" cy="987552"/>
+            <a:off x="6217920" y="3172968"/>
+            <a:ext cx="2971800" cy="914400"/>
           </a:xfrm>
           <a:prstGeom prst="rect">
             <a:avLst/>
@@ -8670,27 +9128,27 @@
           <a:p>
             <a:pPr algn="l"/>
             <a:r>
-              <a:rPr sz="1000" b="0">
+              <a:rPr sz="1400" b="0">
                 <a:solidFill>
                   <a:srgbClr val="262626"/>
                 </a:solidFill>
                 <a:latin typeface="Yu Gothic"/>
               </a:rPr>
-              <a:t>「同じ銅なのに、立場でこんなに見えている景色が違う」</a:t>
-            </a:r>
-          </a:p>
-        </p:txBody>
-      </p:sp>
-      <p:sp>
-        <p:nvSpPr>
-          <p:cNvPr id="20" name="Rectangle 19"/>
+              <a:t>「どこで回せる？」</a:t>
+            </a:r>
+          </a:p>
+        </p:txBody>
+      </p:sp>
+      <p:sp>
+        <p:nvSpPr>
+          <p:cNvPr id="22" name="Rectangle 21"/>
           <p:cNvSpPr/>
           <p:nvPr/>
         </p:nvSpPr>
         <p:spPr>
           <a:xfrm>
-            <a:off x="7040879" y="2157984"/>
-            <a:ext cx="2340864" cy="987552"/>
+            <a:off x="9235440" y="3172968"/>
+            <a:ext cx="2514600" cy="914400"/>
           </a:xfrm>
           <a:prstGeom prst="rect">
             <a:avLst/>
@@ -8723,28 +9181,80 @@
           <a:p>
             <a:pPr algn="l"/>
             <a:r>
-              <a:rPr sz="1000" b="0">
+              <a:rPr sz="1400" b="0">
                 <a:solidFill>
                   <a:srgbClr val="262626"/>
                 </a:solidFill>
                 <a:latin typeface="Yu Gothic"/>
               </a:rPr>
-              <a:t>実は身近で支えるロマン
-お客様に向き合う関係性</a:t>
-            </a:r>
-          </a:p>
-        </p:txBody>
-      </p:sp>
-      <p:sp>
-        <p:nvSpPr>
-          <p:cNvPr id="21" name="Rectangle 20"/>
+              <a:t>観察の細かさ</a:t>
+            </a:r>
+          </a:p>
+        </p:txBody>
+      </p:sp>
+      <p:sp>
+        <p:nvSpPr>
+          <p:cNvPr id="23" name="Rectangle 22"/>
           <p:cNvSpPr/>
           <p:nvPr/>
         </p:nvSpPr>
         <p:spPr>
           <a:xfrm>
-            <a:off x="9418319" y="2157984"/>
-            <a:ext cx="2340864" cy="987552"/>
+            <a:off x="365760" y="4151376"/>
+            <a:ext cx="2423160" cy="914400"/>
+          </a:xfrm>
+          <a:prstGeom prst="rect">
+            <a:avLst/>
+          </a:prstGeom>
+          <a:solidFill>
+            <a:srgbClr val="FBE3CB"/>
+          </a:solidFill>
+          <a:ln>
+            <a:noFill/>
+          </a:ln>
+          <a:effectLst/>
+        </p:spPr>
+        <p:style>
+          <a:lnRef idx="1">
+            <a:schemeClr val="accent1"/>
+          </a:lnRef>
+          <a:fillRef idx="3">
+            <a:schemeClr val="accent1"/>
+          </a:fillRef>
+          <a:effectRef idx="2">
+            <a:schemeClr val="accent1"/>
+          </a:effectRef>
+          <a:fontRef idx="minor">
+            <a:schemeClr val="lt1"/>
+          </a:fontRef>
+        </p:style>
+        <p:txBody>
+          <a:bodyPr rtlCol="0" anchor="ctr" wrap="square" lIns="73152" rIns="73152"/>
+          <a:lstStyle/>
+          <a:p>
+            <a:pPr algn="l"/>
+            <a:r>
+              <a:rPr sz="1400" b="1">
+                <a:solidFill>
+                  <a:srgbClr val="1F497D"/>
+                </a:solidFill>
+                <a:latin typeface="Yu Gothic"/>
+              </a:rPr>
+              <a:t>ディスカッション</a:t>
+            </a:r>
+          </a:p>
+        </p:txBody>
+      </p:sp>
+      <p:sp>
+        <p:nvSpPr>
+          <p:cNvPr id="24" name="Rectangle 23"/>
+          <p:cNvSpPr/>
+          <p:nvPr/>
+        </p:nvSpPr>
+        <p:spPr>
+          <a:xfrm>
+            <a:off x="2834640" y="4151376"/>
+            <a:ext cx="3337560" cy="914400"/>
           </a:xfrm>
           <a:prstGeom prst="rect">
             <a:avLst/>
@@ -8777,27 +9287,133 @@
           <a:p>
             <a:pPr algn="l"/>
             <a:r>
-              <a:rPr sz="1000" b="0">
+              <a:rPr sz="1400" b="0">
                 <a:solidFill>
                   <a:srgbClr val="262626"/>
                 </a:solidFill>
                 <a:latin typeface="Yu Gothic"/>
               </a:rPr>
-              <a:t>聞く力／相手の立場での質問</a:t>
-            </a:r>
-          </a:p>
-        </p:txBody>
-      </p:sp>
-      <p:sp>
-        <p:nvSpPr>
-          <p:cNvPr id="22" name="Rectangle 21"/>
+              <a:t>改善案を発表</a:t>
+            </a:r>
+          </a:p>
+        </p:txBody>
+      </p:sp>
+      <p:sp>
+        <p:nvSpPr>
+          <p:cNvPr id="25" name="Rectangle 24"/>
           <p:cNvSpPr/>
           <p:nvPr/>
         </p:nvSpPr>
         <p:spPr>
           <a:xfrm>
-            <a:off x="365760" y="3182112"/>
-            <a:ext cx="1517904" cy="987552"/>
+            <a:off x="6217920" y="4151376"/>
+            <a:ext cx="2971800" cy="914400"/>
+          </a:xfrm>
+          <a:prstGeom prst="rect">
+            <a:avLst/>
+          </a:prstGeom>
+          <a:solidFill>
+            <a:srgbClr val="F2F2F2"/>
+          </a:solidFill>
+          <a:ln>
+            <a:noFill/>
+          </a:ln>
+          <a:effectLst/>
+        </p:spPr>
+        <p:style>
+          <a:lnRef idx="1">
+            <a:schemeClr val="accent1"/>
+          </a:lnRef>
+          <a:fillRef idx="3">
+            <a:schemeClr val="accent1"/>
+          </a:fillRef>
+          <a:effectRef idx="2">
+            <a:schemeClr val="accent1"/>
+          </a:effectRef>
+          <a:fontRef idx="minor">
+            <a:schemeClr val="lt1"/>
+          </a:fontRef>
+        </p:style>
+        <p:txBody>
+          <a:bodyPr rtlCol="0" anchor="ctr" wrap="square" lIns="73152" rIns="73152"/>
+          <a:lstStyle/>
+          <a:p>
+            <a:pPr algn="l"/>
+            <a:r>
+              <a:rPr sz="1400" b="0">
+                <a:solidFill>
+                  <a:srgbClr val="262626"/>
+                </a:solidFill>
+                <a:latin typeface="Yu Gothic"/>
+              </a:rPr>
+              <a:t>「回し方を提案したい」</a:t>
+            </a:r>
+          </a:p>
+        </p:txBody>
+      </p:sp>
+      <p:sp>
+        <p:nvSpPr>
+          <p:cNvPr id="26" name="Rectangle 25"/>
+          <p:cNvSpPr/>
+          <p:nvPr/>
+        </p:nvSpPr>
+        <p:spPr>
+          <a:xfrm>
+            <a:off x="9235440" y="4151376"/>
+            <a:ext cx="2514600" cy="914400"/>
+          </a:xfrm>
+          <a:prstGeom prst="rect">
+            <a:avLst/>
+          </a:prstGeom>
+          <a:solidFill>
+            <a:srgbClr val="F2F2F2"/>
+          </a:solidFill>
+          <a:ln>
+            <a:noFill/>
+          </a:ln>
+          <a:effectLst/>
+        </p:spPr>
+        <p:style>
+          <a:lnRef idx="1">
+            <a:schemeClr val="accent1"/>
+          </a:lnRef>
+          <a:fillRef idx="3">
+            <a:schemeClr val="accent1"/>
+          </a:fillRef>
+          <a:effectRef idx="2">
+            <a:schemeClr val="accent1"/>
+          </a:effectRef>
+          <a:fontRef idx="minor">
+            <a:schemeClr val="lt1"/>
+          </a:fontRef>
+        </p:style>
+        <p:txBody>
+          <a:bodyPr rtlCol="0" anchor="ctr" wrap="square" lIns="73152" rIns="73152"/>
+          <a:lstStyle/>
+          <a:p>
+            <a:pPr algn="l"/>
+            <a:r>
+              <a:rPr sz="1400" b="0">
+                <a:solidFill>
+                  <a:srgbClr val="262626"/>
+                </a:solidFill>
+                <a:latin typeface="Yu Gothic"/>
+              </a:rPr>
+              <a:t>仮説と巻き込み</a:t>
+            </a:r>
+          </a:p>
+        </p:txBody>
+      </p:sp>
+      <p:sp>
+        <p:nvSpPr>
+          <p:cNvPr id="27" name="Rectangle 26"/>
+          <p:cNvSpPr/>
+          <p:nvPr/>
+        </p:nvSpPr>
+        <p:spPr>
+          <a:xfrm>
+            <a:off x="365760" y="5129784"/>
+            <a:ext cx="2423160" cy="914400"/>
           </a:xfrm>
           <a:prstGeom prst="rect">
             <a:avLst/>
@@ -8830,29 +9446,27 @@
           <a:p>
             <a:pPr algn="l"/>
             <a:r>
-              <a:rPr sz="1050" b="1">
+              <a:rPr sz="1400" b="1">
                 <a:solidFill>
                   <a:srgbClr val="1F497D"/>
                 </a:solidFill>
                 <a:latin typeface="Yu Gothic"/>
               </a:rPr>
-              <a:t>Part2
-現場訪問（1月）
-工場見学</a:t>
-            </a:r>
-          </a:p>
-        </p:txBody>
-      </p:sp>
-      <p:sp>
-        <p:nvSpPr>
-          <p:cNvPr id="23" name="Rectangle 22"/>
+              <a:t>社長・社内懇親会</a:t>
+            </a:r>
+          </a:p>
+        </p:txBody>
+      </p:sp>
+      <p:sp>
+        <p:nvSpPr>
+          <p:cNvPr id="28" name="Rectangle 27"/>
           <p:cNvSpPr/>
           <p:nvPr/>
         </p:nvSpPr>
         <p:spPr>
           <a:xfrm>
-            <a:off x="1920240" y="3182112"/>
-            <a:ext cx="2706624" cy="987552"/>
+            <a:off x="2834640" y="5129784"/>
+            <a:ext cx="3337560" cy="914400"/>
           </a:xfrm>
           <a:prstGeom prst="rect">
             <a:avLst/>
@@ -8885,27 +9499,27 @@
           <a:p>
             <a:pPr algn="l"/>
             <a:r>
-              <a:rPr sz="1000" b="0">
+              <a:rPr sz="1400" b="0">
                 <a:solidFill>
                   <a:srgbClr val="262626"/>
                 </a:solidFill>
                 <a:latin typeface="Yu Gothic"/>
               </a:rPr>
-              <a:t>スクラップが出る工程を巡り「もったいないポイント」を写真で拾う（成分違い・厚さ違い・品質不良）</a:t>
-            </a:r>
-          </a:p>
-        </p:txBody>
-      </p:sp>
-      <p:sp>
-        <p:nvSpPr>
-          <p:cNvPr id="24" name="Rectangle 23"/>
+              <a:t>社長と問いを深める</a:t>
+            </a:r>
+          </a:p>
+        </p:txBody>
+      </p:sp>
+      <p:sp>
+        <p:nvSpPr>
+          <p:cNvPr id="29" name="Rectangle 28"/>
           <p:cNvSpPr/>
           <p:nvPr/>
         </p:nvSpPr>
         <p:spPr>
           <a:xfrm>
-            <a:off x="4663440" y="3182112"/>
-            <a:ext cx="2340864" cy="987552"/>
+            <a:off x="6217920" y="5129784"/>
+            <a:ext cx="2971800" cy="914400"/>
           </a:xfrm>
           <a:prstGeom prst="rect">
             <a:avLst/>
@@ -8938,27 +9552,27 @@
           <a:p>
             <a:pPr algn="l"/>
             <a:r>
-              <a:rPr sz="1000" b="0">
+              <a:rPr sz="1400" b="0">
                 <a:solidFill>
                   <a:srgbClr val="262626"/>
                 </a:solidFill>
                 <a:latin typeface="Yu Gothic"/>
               </a:rPr>
-              <a:t>「戻せるもの／戻せないものがある。どこで回せる？」</a:t>
-            </a:r>
-          </a:p>
-        </p:txBody>
-      </p:sp>
-      <p:sp>
-        <p:nvSpPr>
-          <p:cNvPr id="25" name="Rectangle 24"/>
+              <a:t>「問い続けたい」</a:t>
+            </a:r>
+          </a:p>
+        </p:txBody>
+      </p:sp>
+      <p:sp>
+        <p:nvSpPr>
+          <p:cNvPr id="30" name="Rectangle 29"/>
           <p:cNvSpPr/>
           <p:nvPr/>
         </p:nvSpPr>
         <p:spPr>
           <a:xfrm>
-            <a:off x="7040879" y="3182112"/>
-            <a:ext cx="2340864" cy="987552"/>
+            <a:off x="9235440" y="5129784"/>
+            <a:ext cx="2514600" cy="914400"/>
           </a:xfrm>
           <a:prstGeom prst="rect">
             <a:avLst/>
@@ -8991,633 +9605,13 @@
           <a:p>
             <a:pPr algn="l"/>
             <a:r>
-              <a:rPr sz="1000" b="0">
+              <a:rPr sz="1400" b="0">
                 <a:solidFill>
                   <a:srgbClr val="262626"/>
                 </a:solidFill>
                 <a:latin typeface="Yu Gothic"/>
               </a:rPr>
-              <a:t>どう作られるかのストーリー
-人の手と気遣い</a:t>
-            </a:r>
-          </a:p>
-        </p:txBody>
-      </p:sp>
-      <p:sp>
-        <p:nvSpPr>
-          <p:cNvPr id="26" name="Rectangle 25"/>
-          <p:cNvSpPr/>
-          <p:nvPr/>
-        </p:nvSpPr>
-        <p:spPr>
-          <a:xfrm>
-            <a:off x="9418319" y="3182112"/>
-            <a:ext cx="2340864" cy="987552"/>
-          </a:xfrm>
-          <a:prstGeom prst="rect">
-            <a:avLst/>
-          </a:prstGeom>
-          <a:solidFill>
-            <a:srgbClr val="F2F2F2"/>
-          </a:solidFill>
-          <a:ln>
-            <a:noFill/>
-          </a:ln>
-          <a:effectLst/>
-        </p:spPr>
-        <p:style>
-          <a:lnRef idx="1">
-            <a:schemeClr val="accent1"/>
-          </a:lnRef>
-          <a:fillRef idx="3">
-            <a:schemeClr val="accent1"/>
-          </a:fillRef>
-          <a:effectRef idx="2">
-            <a:schemeClr val="accent1"/>
-          </a:effectRef>
-          <a:fontRef idx="minor">
-            <a:schemeClr val="lt1"/>
-          </a:fontRef>
-        </p:style>
-        <p:txBody>
-          <a:bodyPr rtlCol="0" anchor="ctr" wrap="square" lIns="73152" rIns="73152"/>
-          <a:lstStyle/>
-          <a:p>
-            <a:pPr algn="l"/>
-            <a:r>
-              <a:rPr sz="1000" b="0">
-                <a:solidFill>
-                  <a:srgbClr val="262626"/>
-                </a:solidFill>
-                <a:latin typeface="Yu Gothic"/>
-              </a:rPr>
-              <a:t>観察の細かさ／現場の人への声かけ</a:t>
-            </a:r>
-          </a:p>
-        </p:txBody>
-      </p:sp>
-      <p:sp>
-        <p:nvSpPr>
-          <p:cNvPr id="27" name="Rectangle 26"/>
-          <p:cNvSpPr/>
-          <p:nvPr/>
-        </p:nvSpPr>
-        <p:spPr>
-          <a:xfrm>
-            <a:off x="365760" y="4206240"/>
-            <a:ext cx="1517904" cy="987552"/>
-          </a:xfrm>
-          <a:prstGeom prst="rect">
-            <a:avLst/>
-          </a:prstGeom>
-          <a:solidFill>
-            <a:srgbClr val="FBE3CB"/>
-          </a:solidFill>
-          <a:ln>
-            <a:noFill/>
-          </a:ln>
-          <a:effectLst/>
-        </p:spPr>
-        <p:style>
-          <a:lnRef idx="1">
-            <a:schemeClr val="accent1"/>
-          </a:lnRef>
-          <a:fillRef idx="3">
-            <a:schemeClr val="accent1"/>
-          </a:fillRef>
-          <a:effectRef idx="2">
-            <a:schemeClr val="accent1"/>
-          </a:effectRef>
-          <a:fontRef idx="minor">
-            <a:schemeClr val="lt1"/>
-          </a:fontRef>
-        </p:style>
-        <p:txBody>
-          <a:bodyPr rtlCol="0" anchor="ctr" wrap="square" lIns="73152" rIns="73152"/>
-          <a:lstStyle/>
-          <a:p>
-            <a:pPr algn="l"/>
-            <a:r>
-              <a:rPr sz="1050" b="1">
-                <a:solidFill>
-                  <a:srgbClr val="1F497D"/>
-                </a:solidFill>
-                <a:latin typeface="Yu Gothic"/>
-              </a:rPr>
-              <a:t>ディスカッション</a:t>
-            </a:r>
-          </a:p>
-        </p:txBody>
-      </p:sp>
-      <p:sp>
-        <p:nvSpPr>
-          <p:cNvPr id="28" name="Rectangle 27"/>
-          <p:cNvSpPr/>
-          <p:nvPr/>
-        </p:nvSpPr>
-        <p:spPr>
-          <a:xfrm>
-            <a:off x="1920240" y="4206240"/>
-            <a:ext cx="2706624" cy="987552"/>
-          </a:xfrm>
-          <a:prstGeom prst="rect">
-            <a:avLst/>
-          </a:prstGeom>
-          <a:solidFill>
-            <a:srgbClr val="F2F2F2"/>
-          </a:solidFill>
-          <a:ln>
-            <a:noFill/>
-          </a:ln>
-          <a:effectLst/>
-        </p:spPr>
-        <p:style>
-          <a:lnRef idx="1">
-            <a:schemeClr val="accent1"/>
-          </a:lnRef>
-          <a:fillRef idx="3">
-            <a:schemeClr val="accent1"/>
-          </a:fillRef>
-          <a:effectRef idx="2">
-            <a:schemeClr val="accent1"/>
-          </a:effectRef>
-          <a:fontRef idx="minor">
-            <a:schemeClr val="lt1"/>
-          </a:fontRef>
-        </p:style>
-        <p:txBody>
-          <a:bodyPr rtlCol="0" anchor="ctr" wrap="square" lIns="73152" rIns="73152"/>
-          <a:lstStyle/>
-          <a:p>
-            <a:pPr algn="l"/>
-            <a:r>
-              <a:rPr sz="1000" b="0">
-                <a:solidFill>
-                  <a:srgbClr val="262626"/>
-                </a:solidFill>
-                <a:latin typeface="Yu Gothic"/>
-              </a:rPr>
-              <a:t>もったいないをなくすには？対象→方法→目標（◯％改善）を発表。賞を用意</a:t>
-            </a:r>
-          </a:p>
-        </p:txBody>
-      </p:sp>
-      <p:sp>
-        <p:nvSpPr>
-          <p:cNvPr id="29" name="Rectangle 28"/>
-          <p:cNvSpPr/>
-          <p:nvPr/>
-        </p:nvSpPr>
-        <p:spPr>
-          <a:xfrm>
-            <a:off x="4663440" y="4206240"/>
-            <a:ext cx="2340864" cy="987552"/>
-          </a:xfrm>
-          <a:prstGeom prst="rect">
-            <a:avLst/>
-          </a:prstGeom>
-          <a:solidFill>
-            <a:srgbClr val="F2F2F2"/>
-          </a:solidFill>
-          <a:ln>
-            <a:noFill/>
-          </a:ln>
-          <a:effectLst/>
-        </p:spPr>
-        <p:style>
-          <a:lnRef idx="1">
-            <a:schemeClr val="accent1"/>
-          </a:lnRef>
-          <a:fillRef idx="3">
-            <a:schemeClr val="accent1"/>
-          </a:fillRef>
-          <a:effectRef idx="2">
-            <a:schemeClr val="accent1"/>
-          </a:effectRef>
-          <a:fontRef idx="minor">
-            <a:schemeClr val="lt1"/>
-          </a:fontRef>
-        </p:style>
-        <p:txBody>
-          <a:bodyPr rtlCol="0" anchor="ctr" wrap="square" lIns="73152" rIns="73152"/>
-          <a:lstStyle/>
-          <a:p>
-            <a:pPr algn="l"/>
-            <a:r>
-              <a:rPr sz="1000" b="0">
-                <a:solidFill>
-                  <a:srgbClr val="262626"/>
-                </a:solidFill>
-                <a:latin typeface="Yu Gothic"/>
-              </a:rPr>
-              <a:t>仮説を立て、回し方を提案したい</a:t>
-            </a:r>
-          </a:p>
-        </p:txBody>
-      </p:sp>
-      <p:sp>
-        <p:nvSpPr>
-          <p:cNvPr id="30" name="Rectangle 29"/>
-          <p:cNvSpPr/>
-          <p:nvPr/>
-        </p:nvSpPr>
-        <p:spPr>
-          <a:xfrm>
-            <a:off x="7040879" y="4206240"/>
-            <a:ext cx="2340864" cy="987552"/>
-          </a:xfrm>
-          <a:prstGeom prst="rect">
-            <a:avLst/>
-          </a:prstGeom>
-          <a:solidFill>
-            <a:srgbClr val="F2F2F2"/>
-          </a:solidFill>
-          <a:ln>
-            <a:noFill/>
-          </a:ln>
-          <a:effectLst/>
-        </p:spPr>
-        <p:style>
-          <a:lnRef idx="1">
-            <a:schemeClr val="accent1"/>
-          </a:lnRef>
-          <a:fillRef idx="3">
-            <a:schemeClr val="accent1"/>
-          </a:fillRef>
-          <a:effectRef idx="2">
-            <a:schemeClr val="accent1"/>
-          </a:effectRef>
-          <a:fontRef idx="minor">
-            <a:schemeClr val="lt1"/>
-          </a:fontRef>
-        </p:style>
-        <p:txBody>
-          <a:bodyPr rtlCol="0" anchor="ctr" wrap="square" lIns="73152" rIns="73152"/>
-          <a:lstStyle/>
-          <a:p>
-            <a:pPr algn="l"/>
-            <a:r>
-              <a:rPr sz="1000" b="0">
-                <a:solidFill>
-                  <a:srgbClr val="262626"/>
-                </a:solidFill>
-                <a:latin typeface="Yu Gothic"/>
-              </a:rPr>
-              <a:t>型にはまらないチャレンジ精神</a:t>
-            </a:r>
-          </a:p>
-        </p:txBody>
-      </p:sp>
-      <p:sp>
-        <p:nvSpPr>
-          <p:cNvPr id="31" name="Rectangle 30"/>
-          <p:cNvSpPr/>
-          <p:nvPr/>
-        </p:nvSpPr>
-        <p:spPr>
-          <a:xfrm>
-            <a:off x="9418319" y="4206240"/>
-            <a:ext cx="2340864" cy="987552"/>
-          </a:xfrm>
-          <a:prstGeom prst="rect">
-            <a:avLst/>
-          </a:prstGeom>
-          <a:solidFill>
-            <a:srgbClr val="F2F2F2"/>
-          </a:solidFill>
-          <a:ln>
-            <a:noFill/>
-          </a:ln>
-          <a:effectLst/>
-        </p:spPr>
-        <p:style>
-          <a:lnRef idx="1">
-            <a:schemeClr val="accent1"/>
-          </a:lnRef>
-          <a:fillRef idx="3">
-            <a:schemeClr val="accent1"/>
-          </a:fillRef>
-          <a:effectRef idx="2">
-            <a:schemeClr val="accent1"/>
-          </a:effectRef>
-          <a:fontRef idx="minor">
-            <a:schemeClr val="lt1"/>
-          </a:fontRef>
-        </p:style>
-        <p:txBody>
-          <a:bodyPr rtlCol="0" anchor="ctr" wrap="square" lIns="73152" rIns="73152"/>
-          <a:lstStyle/>
-          <a:p>
-            <a:pPr algn="l"/>
-            <a:r>
-              <a:rPr sz="1000" b="0">
-                <a:solidFill>
-                  <a:srgbClr val="262626"/>
-                </a:solidFill>
-                <a:latin typeface="Yu Gothic"/>
-              </a:rPr>
-              <a:t>仮説→根拠→改善案の筋／他者を巻き込む</a:t>
-            </a:r>
-          </a:p>
-        </p:txBody>
-      </p:sp>
-      <p:sp>
-        <p:nvSpPr>
-          <p:cNvPr id="32" name="Rectangle 31"/>
-          <p:cNvSpPr/>
-          <p:nvPr/>
-        </p:nvSpPr>
-        <p:spPr>
-          <a:xfrm>
-            <a:off x="365760" y="5230368"/>
-            <a:ext cx="1517904" cy="987552"/>
-          </a:xfrm>
-          <a:prstGeom prst="rect">
-            <a:avLst/>
-          </a:prstGeom>
-          <a:solidFill>
-            <a:srgbClr val="FBE3CB"/>
-          </a:solidFill>
-          <a:ln>
-            <a:noFill/>
-          </a:ln>
-          <a:effectLst/>
-        </p:spPr>
-        <p:style>
-          <a:lnRef idx="1">
-            <a:schemeClr val="accent1"/>
-          </a:lnRef>
-          <a:fillRef idx="3">
-            <a:schemeClr val="accent1"/>
-          </a:fillRef>
-          <a:effectRef idx="2">
-            <a:schemeClr val="accent1"/>
-          </a:effectRef>
-          <a:fontRef idx="minor">
-            <a:schemeClr val="lt1"/>
-          </a:fontRef>
-        </p:style>
-        <p:txBody>
-          <a:bodyPr rtlCol="0" anchor="ctr" wrap="square" lIns="73152" rIns="73152"/>
-          <a:lstStyle/>
-          <a:p>
-            <a:pPr algn="l"/>
-            <a:r>
-              <a:rPr sz="1050" b="1">
-                <a:solidFill>
-                  <a:srgbClr val="1F497D"/>
-                </a:solidFill>
-                <a:latin typeface="Yu Gothic"/>
-              </a:rPr>
-              <a:t>社長・社内との懇親会</a:t>
-            </a:r>
-          </a:p>
-        </p:txBody>
-      </p:sp>
-      <p:sp>
-        <p:nvSpPr>
-          <p:cNvPr id="33" name="Rectangle 32"/>
-          <p:cNvSpPr/>
-          <p:nvPr/>
-        </p:nvSpPr>
-        <p:spPr>
-          <a:xfrm>
-            <a:off x="1920240" y="5230368"/>
-            <a:ext cx="2706624" cy="987552"/>
-          </a:xfrm>
-          <a:prstGeom prst="rect">
-            <a:avLst/>
-          </a:prstGeom>
-          <a:solidFill>
-            <a:srgbClr val="F2F2F2"/>
-          </a:solidFill>
-          <a:ln>
-            <a:noFill/>
-          </a:ln>
-          <a:effectLst/>
-        </p:spPr>
-        <p:style>
-          <a:lnRef idx="1">
-            <a:schemeClr val="accent1"/>
-          </a:lnRef>
-          <a:fillRef idx="3">
-            <a:schemeClr val="accent1"/>
-          </a:fillRef>
-          <a:effectRef idx="2">
-            <a:schemeClr val="accent1"/>
-          </a:effectRef>
-          <a:fontRef idx="minor">
-            <a:schemeClr val="lt1"/>
-          </a:fontRef>
-        </p:style>
-        <p:txBody>
-          <a:bodyPr rtlCol="0" anchor="ctr" wrap="square" lIns="73152" rIns="73152"/>
-          <a:lstStyle/>
-          <a:p>
-            <a:pPr algn="l"/>
-            <a:r>
-              <a:rPr sz="1000" b="0">
-                <a:solidFill>
-                  <a:srgbClr val="262626"/>
-                </a:solidFill>
-                <a:latin typeface="Yu Gothic"/>
-              </a:rPr>
-              <a:t>社長の隣で難題（理念・物との関係）を問い直す。成果はBeyond the wallで記事化</a:t>
-            </a:r>
-          </a:p>
-        </p:txBody>
-      </p:sp>
-      <p:sp>
-        <p:nvSpPr>
-          <p:cNvPr id="34" name="Rectangle 33"/>
-          <p:cNvSpPr/>
-          <p:nvPr/>
-        </p:nvSpPr>
-        <p:spPr>
-          <a:xfrm>
-            <a:off x="4663440" y="5230368"/>
-            <a:ext cx="2340864" cy="987552"/>
-          </a:xfrm>
-          <a:prstGeom prst="rect">
-            <a:avLst/>
-          </a:prstGeom>
-          <a:solidFill>
-            <a:srgbClr val="F2F2F2"/>
-          </a:solidFill>
-          <a:ln>
-            <a:noFill/>
-          </a:ln>
-          <a:effectLst/>
-        </p:spPr>
-        <p:style>
-          <a:lnRef idx="1">
-            <a:schemeClr val="accent1"/>
-          </a:lnRef>
-          <a:fillRef idx="3">
-            <a:schemeClr val="accent1"/>
-          </a:fillRef>
-          <a:effectRef idx="2">
-            <a:schemeClr val="accent1"/>
-          </a:effectRef>
-          <a:fontRef idx="minor">
-            <a:schemeClr val="lt1"/>
-          </a:fontRef>
-        </p:style>
-        <p:txBody>
-          <a:bodyPr rtlCol="0" anchor="ctr" wrap="square" lIns="73152" rIns="73152"/>
-          <a:lstStyle/>
-          <a:p>
-            <a:pPr algn="l"/>
-            <a:r>
-              <a:rPr sz="1000" b="0">
-                <a:solidFill>
-                  <a:srgbClr val="262626"/>
-                </a:solidFill>
-                <a:latin typeface="Yu Gothic"/>
-              </a:rPr>
-              <a:t>「ここなら問いを深め続けられる」</a:t>
-            </a:r>
-          </a:p>
-        </p:txBody>
-      </p:sp>
-      <p:sp>
-        <p:nvSpPr>
-          <p:cNvPr id="35" name="Rectangle 34"/>
-          <p:cNvSpPr/>
-          <p:nvPr/>
-        </p:nvSpPr>
-        <p:spPr>
-          <a:xfrm>
-            <a:off x="7040879" y="5230368"/>
-            <a:ext cx="2340864" cy="987552"/>
-          </a:xfrm>
-          <a:prstGeom prst="rect">
-            <a:avLst/>
-          </a:prstGeom>
-          <a:solidFill>
-            <a:srgbClr val="F2F2F2"/>
-          </a:solidFill>
-          <a:ln>
-            <a:noFill/>
-          </a:ln>
-          <a:effectLst/>
-        </p:spPr>
-        <p:style>
-          <a:lnRef idx="1">
-            <a:schemeClr val="accent1"/>
-          </a:lnRef>
-          <a:fillRef idx="3">
-            <a:schemeClr val="accent1"/>
-          </a:fillRef>
-          <a:effectRef idx="2">
-            <a:schemeClr val="accent1"/>
-          </a:effectRef>
-          <a:fontRef idx="minor">
-            <a:schemeClr val="lt1"/>
-          </a:fontRef>
-        </p:style>
-        <p:txBody>
-          <a:bodyPr rtlCol="0" anchor="ctr" wrap="square" lIns="73152" rIns="73152"/>
-          <a:lstStyle/>
-          <a:p>
-            <a:pPr algn="l"/>
-            <a:r>
-              <a:rPr sz="1000" b="0">
-                <a:solidFill>
-                  <a:srgbClr val="262626"/>
-                </a:solidFill>
-                <a:latin typeface="Yu Gothic"/>
-              </a:rPr>
-              <a:t>明確な理念
-アットホームな社風</a:t>
-            </a:r>
-          </a:p>
-        </p:txBody>
-      </p:sp>
-      <p:sp>
-        <p:nvSpPr>
-          <p:cNvPr id="36" name="Rectangle 35"/>
-          <p:cNvSpPr/>
-          <p:nvPr/>
-        </p:nvSpPr>
-        <p:spPr>
-          <a:xfrm>
-            <a:off x="9418319" y="5230368"/>
-            <a:ext cx="2340864" cy="987552"/>
-          </a:xfrm>
-          <a:prstGeom prst="rect">
-            <a:avLst/>
-          </a:prstGeom>
-          <a:solidFill>
-            <a:srgbClr val="F2F2F2"/>
-          </a:solidFill>
-          <a:ln>
-            <a:noFill/>
-          </a:ln>
-          <a:effectLst/>
-        </p:spPr>
-        <p:style>
-          <a:lnRef idx="1">
-            <a:schemeClr val="accent1"/>
-          </a:lnRef>
-          <a:fillRef idx="3">
-            <a:schemeClr val="accent1"/>
-          </a:fillRef>
-          <a:effectRef idx="2">
-            <a:schemeClr val="accent1"/>
-          </a:effectRef>
-          <a:fontRef idx="minor">
-            <a:schemeClr val="lt1"/>
-          </a:fontRef>
-        </p:style>
-        <p:txBody>
-          <a:bodyPr rtlCol="0" anchor="ctr" wrap="square" lIns="73152" rIns="73152"/>
-          <a:lstStyle/>
-          <a:p>
-            <a:pPr algn="l"/>
-            <a:r>
-              <a:rPr sz="1000" b="0">
-                <a:solidFill>
-                  <a:srgbClr val="262626"/>
-                </a:solidFill>
-                <a:latin typeface="Yu Gothic"/>
-              </a:rPr>
-              <a:t>温かさ・対話の姿勢（社風との相性）</a:t>
-            </a:r>
-          </a:p>
-        </p:txBody>
-      </p:sp>
-      <p:sp>
-        <p:nvSpPr>
-          <p:cNvPr id="37" name="TextBox 36"/>
-          <p:cNvSpPr txBox="1"/>
-          <p:nvPr/>
-        </p:nvSpPr>
-        <p:spPr>
-          <a:xfrm>
-            <a:off x="365760" y="6126480"/>
-            <a:ext cx="11430000" cy="182880"/>
-          </a:xfrm>
-          <a:prstGeom prst="rect">
-            <a:avLst/>
-          </a:prstGeom>
-          <a:noFill/>
-        </p:spPr>
-        <p:txBody>
-          <a:bodyPr wrap="square" anchor="t" lIns="73152" rIns="73152">
-            <a:spAutoFit/>
-          </a:bodyPr>
-          <a:lstStyle/>
-          <a:p>
-            <a:pPr algn="l"/>
-            <a:r>
-              <a:rPr sz="800" b="0">
-                <a:solidFill>
-                  <a:srgbClr val="262626"/>
-                </a:solidFill>
-                <a:latin typeface="Yu Gothic"/>
-              </a:rPr>
-              <a:t/>
+              <a:t>対話・温かさ</a:t>
             </a:r>
           </a:p>
         </p:txBody>
@@ -9827,7 +9821,7 @@
                 </a:solidFill>
                 <a:latin typeface="Yu Gothic"/>
               </a:rPr>
-              <a:t>集客導線と、決めたいこと・次のアクション</a:t>
+              <a:t>集客導線と、次のアクション</a:t>
             </a:r>
           </a:p>
         </p:txBody>
@@ -9862,7 +9856,7 @@
                 </a:solidFill>
                 <a:latin typeface="Yu Gothic"/>
               </a:rPr>
-              <a:t>出典：年間目標・実数 / 学生管理シート（27）上部メモ / 地球資源を輝かせていくIS / 銅巡りインターン議事録 / visions collegeのご相談</a:t>
+              <a:t>出典：年間目標・実数 / 銅巡りインターン議事録 / visions collegeのご相談</a:t>
             </a:r>
           </a:p>
         </p:txBody>
@@ -9920,7 +9914,7 @@
         <p:spPr>
           <a:xfrm>
             <a:off x="365760" y="868680"/>
-            <a:ext cx="5577840" cy="347472"/>
+            <a:ext cx="5577840" cy="411480"/>
           </a:xfrm>
           <a:prstGeom prst="rect">
             <a:avLst/>
@@ -9935,13 +9929,13 @@
           <a:p>
             <a:pPr algn="l"/>
             <a:r>
-              <a:rPr sz="1300" b="1">
+              <a:rPr sz="1700" b="1">
                 <a:solidFill>
                   <a:srgbClr val="1F497D"/>
                 </a:solidFill>
                 <a:latin typeface="Yu Gothic"/>
               </a:rPr>
-              <a:t>ぐるぐる接点の導線（案）</a:t>
+              <a:t>集客の導線（案）</a:t>
             </a:r>
           </a:p>
         </p:txBody>
@@ -9954,8 +9948,8 @@
         </p:nvSpPr>
         <p:spPr>
           <a:xfrm>
-            <a:off x="365760" y="1234440"/>
-            <a:ext cx="5577840" cy="2194560"/>
+            <a:off x="365760" y="1325880"/>
+            <a:ext cx="5577840" cy="2103120"/>
           </a:xfrm>
           <a:prstGeom prst="rect">
             <a:avLst/>
@@ -9968,63 +9962,83 @@
           </a:bodyPr>
           <a:lstStyle/>
           <a:p>
-            <a:pPr algn="l"/>
-            <a:r>
-              <a:rPr sz="1350" b="0">
+            <a:pPr algn="l">
+              <a:spcBef>
+                <a:spcPts val="600"/>
+              </a:spcBef>
+            </a:pPr>
+            <a:r>
+              <a:rPr sz="1700" b="0">
                 <a:solidFill>
                   <a:srgbClr val="262626"/>
                 </a:solidFill>
                 <a:latin typeface="Yu Gothic"/>
               </a:rPr>
-              <a:t>① visions college（10月下旬）：ぐるぐる層に「銅めぐりツアー」を予告</a:t>
-            </a:r>
-          </a:p>
-          <a:p>
-            <a:pPr algn="l"/>
-            <a:r>
-              <a:rPr sz="1350" b="0">
+              <a:t>① visions college（10月下旬）で予告</a:t>
+            </a:r>
+          </a:p>
+          <a:p>
+            <a:pPr algn="l">
+              <a:spcBef>
+                <a:spcPts val="600"/>
+              </a:spcBef>
+            </a:pPr>
+            <a:r>
+              <a:rPr sz="1700" b="0">
                 <a:solidFill>
                   <a:srgbClr val="262626"/>
                 </a:solidFill>
                 <a:latin typeface="Yu Gothic"/>
               </a:rPr>
-              <a:t>② visionsリストアップ30→50名に、ツアー案内（個別オファー）</a:t>
-            </a:r>
-          </a:p>
-          <a:p>
-            <a:pPr algn="l"/>
-            <a:r>
-              <a:rPr sz="1350" b="0">
+              <a:t>② リストアップ30→50名に案内</a:t>
+            </a:r>
+          </a:p>
+          <a:p>
+            <a:pPr algn="l">
+              <a:spcBef>
+                <a:spcPts val="600"/>
+              </a:spcBef>
+            </a:pPr>
+            <a:r>
+              <a:rPr sz="1700" b="0">
                 <a:solidFill>
                   <a:srgbClr val="262626"/>
                 </a:solidFill>
                 <a:latin typeface="Yu Gothic"/>
               </a:rPr>
-              <a:t>③ イベントページ公開（骨子は議事録に準拠）→ 集客担当リリコへ共有</a:t>
-            </a:r>
-          </a:p>
-          <a:p>
-            <a:pPr algn="l"/>
-            <a:r>
-              <a:rPr sz="1350" b="0">
+              <a:t>③ イベントページ公開</a:t>
+            </a:r>
+          </a:p>
+          <a:p>
+            <a:pPr algn="l">
+              <a:spcBef>
+                <a:spcPts val="600"/>
+              </a:spcBef>
+            </a:pPr>
+            <a:r>
+              <a:rPr sz="1700" b="0">
                 <a:solidFill>
                   <a:srgbClr val="262626"/>
                 </a:solidFill>
                 <a:latin typeface="Yu Gothic"/>
               </a:rPr>
-              <a:t>④ 筑波大へご連絡（年間計画に記載）／茨城県内の大学へ年度替わりに声がけ</a:t>
-            </a:r>
-          </a:p>
-          <a:p>
-            <a:pPr algn="l"/>
-            <a:r>
-              <a:rPr sz="1350" b="0">
+              <a:t>④ 筑波大・茨城県内へ声がけ</a:t>
+            </a:r>
+          </a:p>
+          <a:p>
+            <a:pPr algn="l">
+              <a:spcBef>
+                <a:spcPts val="600"/>
+              </a:spcBef>
+            </a:pPr>
+            <a:r>
+              <a:rPr sz="1700" b="0">
                 <a:solidFill>
                   <a:srgbClr val="262626"/>
                 </a:solidFill>
                 <a:latin typeface="Yu Gothic"/>
               </a:rPr>
-              <a:t>⑤ ツアー参加 → 選考流入（目標：28卒 選考流入5・内定2・承諾1）</a:t>
+              <a:t>⑤ ツアー → 選考流入</a:t>
             </a:r>
           </a:p>
         </p:txBody>
@@ -10082,7 +10096,7 @@
         <p:spPr>
           <a:xfrm>
             <a:off x="6126480" y="868680"/>
-            <a:ext cx="5669280" cy="347472"/>
+            <a:ext cx="5669280" cy="411480"/>
           </a:xfrm>
           <a:prstGeom prst="rect">
             <a:avLst/>
@@ -10097,13 +10111,13 @@
           <a:p>
             <a:pPr algn="l"/>
             <a:r>
-              <a:rPr sz="1300" b="1">
+              <a:rPr sz="1700" b="1">
                 <a:solidFill>
                   <a:srgbClr val="1F497D"/>
                 </a:solidFill>
                 <a:latin typeface="Yu Gothic"/>
               </a:rPr>
-              <a:t>28卒 年間目標（現状との差）</a:t>
+              <a:t>28卒の年間目標</a:t>
             </a:r>
           </a:p>
         </p:txBody>
@@ -10116,8 +10130,8 @@
         </p:nvSpPr>
         <p:spPr>
           <a:xfrm>
-            <a:off x="6126480" y="1234440"/>
-            <a:ext cx="5669280" cy="2194560"/>
+            <a:off x="6126480" y="1325880"/>
+            <a:ext cx="5669280" cy="2103120"/>
           </a:xfrm>
           <a:prstGeom prst="rect">
             <a:avLst/>
@@ -10130,51 +10144,67 @@
           </a:bodyPr>
           <a:lstStyle/>
           <a:p>
-            <a:pPr algn="l"/>
-            <a:r>
-              <a:rPr sz="1350" b="0">
+            <a:pPr algn="l">
+              <a:spcBef>
+                <a:spcPts val="600"/>
+              </a:spcBef>
+            </a:pPr>
+            <a:r>
+              <a:rPr sz="1700" b="0">
                 <a:solidFill>
                   <a:srgbClr val="262626"/>
                 </a:solidFill>
                 <a:latin typeface="Yu Gothic"/>
               </a:rPr>
-              <a:t>・延べ接触47／直接接触22／高評価11／相思相愛8／選考流入5／内定2／承諾1</a:t>
-            </a:r>
-          </a:p>
-          <a:p>
-            <a:pPr algn="l"/>
-            <a:r>
-              <a:rPr sz="1350" b="0">
+              <a:t>接触47 → 面談22 → 高評価11</a:t>
+            </a:r>
+          </a:p>
+          <a:p>
+            <a:pPr algn="l">
+              <a:spcBef>
+                <a:spcPts val="600"/>
+              </a:spcBef>
+            </a:pPr>
+            <a:r>
+              <a:rPr sz="1700" b="0">
                 <a:solidFill>
                   <a:srgbClr val="262626"/>
                 </a:solidFill>
                 <a:latin typeface="Yu Gothic"/>
               </a:rPr>
-              <a:t>・現状：直接接触は27卒19名・28卒3名で、ぐるぐる接点は未着手</a:t>
-            </a:r>
-          </a:p>
-          <a:p>
-            <a:pPr algn="l"/>
-            <a:r>
-              <a:rPr sz="1350" b="0">
+              <a:t>相思相愛8 → 選考流入5</a:t>
+            </a:r>
+          </a:p>
+          <a:p>
+            <a:pPr algn="l">
+              <a:spcBef>
+                <a:spcPts val="600"/>
+              </a:spcBef>
+            </a:pPr>
+            <a:r>
+              <a:rPr sz="1700" b="0">
                 <a:solidFill>
                   <a:srgbClr val="262626"/>
                 </a:solidFill>
                 <a:latin typeface="Yu Gothic"/>
               </a:rPr>
-              <a:t>・受け皿イベント：ぐるぐる企画FIX→集客（10〜11月）→ コンテンツ①（12月）</a:t>
-            </a:r>
-          </a:p>
-          <a:p>
-            <a:pPr algn="l"/>
-            <a:r>
-              <a:rPr sz="1350" b="0">
+              <a:t>内定2 → 承諾1</a:t>
+            </a:r>
+          </a:p>
+          <a:p>
+            <a:pPr algn="l">
+              <a:spcBef>
+                <a:spcPts val="600"/>
+              </a:spcBef>
+            </a:pPr>
+            <a:r>
+              <a:rPr sz="1700" b="0">
                 <a:solidFill>
                   <a:srgbClr val="262626"/>
                 </a:solidFill>
                 <a:latin typeface="Yu Gothic"/>
               </a:rPr>
-              <a:t>・ツアーは接触〜高評価の山をつくる最重要施策</a:t>
+              <a:t>現状：ぐるぐる接点は未着手</a:t>
             </a:r>
           </a:p>
         </p:txBody>
@@ -10232,7 +10262,7 @@
         <p:spPr>
           <a:xfrm>
             <a:off x="365760" y="3657600"/>
-            <a:ext cx="5577840" cy="347472"/>
+            <a:ext cx="5577840" cy="411480"/>
           </a:xfrm>
           <a:prstGeom prst="rect">
             <a:avLst/>
@@ -10247,13 +10277,13 @@
           <a:p>
             <a:pPr algn="l"/>
             <a:r>
-              <a:rPr sz="1300" b="1">
+              <a:rPr sz="1700" b="1">
                 <a:solidFill>
                   <a:srgbClr val="1F497D"/>
                 </a:solidFill>
                 <a:latin typeface="Yu Gothic"/>
               </a:rPr>
-              <a:t>要確認（決めたいこと）</a:t>
+              <a:t>決めたいこと</a:t>
             </a:r>
           </a:p>
         </p:txBody>
@@ -10266,8 +10296,8 @@
         </p:nvSpPr>
         <p:spPr>
           <a:xfrm>
-            <a:off x="365760" y="4023360"/>
-            <a:ext cx="5577840" cy="2194560"/>
+            <a:off x="365760" y="4114800"/>
+            <a:ext cx="5577840" cy="2103120"/>
           </a:xfrm>
           <a:prstGeom prst="rect">
             <a:avLst/>
@@ -10280,51 +10310,67 @@
           </a:bodyPr>
           <a:lstStyle/>
           <a:p>
-            <a:pPr algn="l"/>
-            <a:r>
-              <a:rPr sz="1300" b="0">
+            <a:pPr algn="l">
+              <a:spcBef>
+                <a:spcPts val="600"/>
+              </a:spcBef>
+            </a:pPr>
+            <a:r>
+              <a:rPr sz="1700" b="0">
                 <a:solidFill>
                   <a:srgbClr val="262626"/>
                 </a:solidFill>
                 <a:latin typeface="Yu Gothic"/>
               </a:rPr>
-              <a:t>1. グルグルの定義を確認：既存ペルソナ②（鳥取環境）は27卒。28卒の実在候補はリストの6名＋新規リストアップ</a:t>
-            </a:r>
-          </a:p>
-          <a:p>
-            <a:pPr algn="l"/>
-            <a:r>
-              <a:rPr sz="1300" b="0">
+              <a:t>① ぐるぐるの定義</a:t>
+            </a:r>
+          </a:p>
+          <a:p>
+            <a:pPr algn="l">
+              <a:spcBef>
+                <a:spcPts val="600"/>
+              </a:spcBef>
+            </a:pPr>
+            <a:r>
+              <a:rPr sz="1700" b="0">
                 <a:solidFill>
                   <a:srgbClr val="262626"/>
                 </a:solidFill>
                 <a:latin typeface="Yu Gothic"/>
               </a:rPr>
-              <a:t>2. 遠方学生（九大・阪大・信州・広島）の現場参加：交通費の扱い／オンライン参加の可否</a:t>
-            </a:r>
-          </a:p>
-          <a:p>
-            <a:pPr algn="l"/>
-            <a:r>
-              <a:rPr sz="1300" b="0">
+              <a:t>② 遠方学生の参加方法</a:t>
+            </a:r>
+          </a:p>
+          <a:p>
+            <a:pPr algn="l">
+              <a:spcBef>
+                <a:spcPts val="600"/>
+              </a:spcBef>
+            </a:pPr>
+            <a:r>
+              <a:rPr sz="1700" b="0">
                 <a:solidFill>
                   <a:srgbClr val="262626"/>
                 </a:solidFill>
                 <a:latin typeface="Yu Gothic"/>
               </a:rPr>
-              <a:t>3. 開催日（1月の平日 or 土日）と学生の希望ヒアリング</a:t>
-            </a:r>
-          </a:p>
-          <a:p>
-            <a:pPr algn="l"/>
-            <a:r>
-              <a:rPr sz="1300" b="0">
+              <a:t>③ 開催日（平日／土日）</a:t>
+            </a:r>
+          </a:p>
+          <a:p>
+            <a:pPr algn="l">
+              <a:spcBef>
+                <a:spcPts val="600"/>
+              </a:spcBef>
+            </a:pPr>
+            <a:r>
+              <a:rPr sz="1700" b="0">
                 <a:solidFill>
                   <a:srgbClr val="262626"/>
                 </a:solidFill>
                 <a:latin typeface="Yu Gothic"/>
               </a:rPr>
-              <a:t>4. 事前課題（わたしのものづくり遍歴）をぐるぐるにも課すか</a:t>
+              <a:t>④ 事前課題の有無</a:t>
             </a:r>
           </a:p>
         </p:txBody>
@@ -10382,7 +10428,7 @@
         <p:spPr>
           <a:xfrm>
             <a:off x="6126480" y="3657600"/>
-            <a:ext cx="5669280" cy="347472"/>
+            <a:ext cx="5669280" cy="411480"/>
           </a:xfrm>
           <a:prstGeom prst="rect">
             <a:avLst/>
@@ -10397,13 +10443,13 @@
           <a:p>
             <a:pPr algn="l"/>
             <a:r>
-              <a:rPr sz="1300" b="1">
+              <a:rPr sz="1700" b="1">
                 <a:solidFill>
                   <a:srgbClr val="1F497D"/>
                 </a:solidFill>
                 <a:latin typeface="Yu Gothic"/>
               </a:rPr>
-              <a:t>次のアクション（案）</a:t>
+              <a:t>次のアクション</a:t>
             </a:r>
           </a:p>
         </p:txBody>
@@ -10416,8 +10462,8 @@
         </p:nvSpPr>
         <p:spPr>
           <a:xfrm>
-            <a:off x="6126480" y="4023360"/>
-            <a:ext cx="5669280" cy="2194560"/>
+            <a:off x="6126480" y="4114800"/>
+            <a:ext cx="5669280" cy="2103120"/>
           </a:xfrm>
           <a:prstGeom prst="rect">
             <a:avLst/>
@@ -10430,63 +10476,67 @@
           </a:bodyPr>
           <a:lstStyle/>
           <a:p>
-            <a:pPr algn="l"/>
-            <a:r>
-              <a:rPr sz="1300" b="0">
+            <a:pPr algn="l">
+              <a:spcBef>
+                <a:spcPts val="600"/>
+              </a:spcBef>
+            </a:pPr>
+            <a:r>
+              <a:rPr sz="1700" b="0">
                 <a:solidFill>
                   <a:srgbClr val="262626"/>
                 </a:solidFill>
                 <a:latin typeface="Yu Gothic"/>
               </a:rPr>
-              <a:t>・今週：visionsでS／A群を検索し、リストアップ表を埋める（まず30名）</a:t>
-            </a:r>
-          </a:p>
-          <a:p>
-            <a:pPr algn="l"/>
-            <a:r>
-              <a:rPr sz="1300" b="0">
+              <a:t>今週：S／A群をリストアップ</a:t>
+            </a:r>
+          </a:p>
+          <a:p>
+            <a:pPr algn="l">
+              <a:spcBef>
+                <a:spcPts val="600"/>
+              </a:spcBef>
+            </a:pPr>
+            <a:r>
+              <a:rPr sz="1700" b="0">
                 <a:solidFill>
                   <a:srgbClr val="262626"/>
                 </a:solidFill>
                 <a:latin typeface="Yu Gothic"/>
               </a:rPr>
-              <a:t>・今週：タイプA／B／C別の声がけ文面（LINE・メール）を作成</a:t>
-            </a:r>
-          </a:p>
-          <a:p>
-            <a:pPr algn="l"/>
-            <a:r>
-              <a:rPr sz="1300" b="0">
+              <a:t>今週：タイプ別の声がけ文面</a:t>
+            </a:r>
+          </a:p>
+          <a:p>
+            <a:pPr algn="l">
+              <a:spcBef>
+                <a:spcPts val="600"/>
+              </a:spcBef>
+            </a:pPr>
+            <a:r>
+              <a:rPr sz="1700" b="0">
                 <a:solidFill>
                   <a:srgbClr val="262626"/>
                 </a:solidFill>
                 <a:latin typeface="Yu Gothic"/>
               </a:rPr>
-              <a:t>・11月：イベントページ骨子（課題感と超重要領域を強調）→ 集客開始</a:t>
-            </a:r>
-          </a:p>
-          <a:p>
-            <a:pPr algn="l"/>
-            <a:r>
-              <a:rPr sz="1300" b="0">
+              <a:t>11月：イベントページ公開</a:t>
+            </a:r>
+          </a:p>
+          <a:p>
+            <a:pPr algn="l">
+              <a:spcBef>
+                <a:spcPts val="600"/>
+              </a:spcBef>
+            </a:pPr>
+            <a:r>
+              <a:rPr sz="1700" b="0">
                 <a:solidFill>
                   <a:srgbClr val="262626"/>
                 </a:solidFill>
                 <a:latin typeface="Yu Gothic"/>
               </a:rPr>
-              <a:t>・12月：Part0／Part1を実施、反応でターゲット像を更新</a:t>
-            </a:r>
-          </a:p>
-          <a:p>
-            <a:pPr algn="l"/>
-            <a:r>
-              <a:rPr sz="1300" b="0">
-                <a:solidFill>
-                  <a:srgbClr val="262626"/>
-                </a:solidFill>
-                <a:latin typeface="Yu Gothic"/>
-              </a:rPr>
-              <a:t>・データ注意：27卒の理系ほか実数は、記録の抜けが多く要補完</a:t>
+              <a:t>12月：Part0／1を実施</a:t>
             </a:r>
           </a:p>
         </p:txBody>

--- a/guruguru/guruguru_target_tour.pptx
+++ b/guruguru/guruguru_target_tour.pptx
@@ -3086,6 +3086,14 @@
 <file path=ppt/slides/slide1.xml><?xml version="1.0" encoding="utf-8"?>
 <p:sld xmlns:a="http://schemas.openxmlformats.org/drawingml/2006/main" xmlns:p="http://schemas.openxmlformats.org/presentationml/2006/main" xmlns:r="http://schemas.openxmlformats.org/officeDocument/2006/relationships">
   <p:cSld>
+    <p:bg>
+      <p:bgPr>
+        <a:solidFill>
+          <a:srgbClr val="FFEEE4"/>
+        </a:solidFill>
+        <a:effectLst/>
+      </p:bgPr>
+    </p:bg>
     <p:spTree>
       <p:nvGrpSpPr>
         <p:cNvPr id="1" name=""/>
@@ -3101,42 +3109,20 @@
         </p:nvSpPr>
         <p:spPr>
           <a:xfrm>
-            <a:off x="54864" y="64008"/>
-            <a:ext cx="12079224" cy="521207"/>
-          </a:xfrm>
-          <a:prstGeom prst="rect">
-            <a:avLst/>
-          </a:prstGeom>
-          <a:gradFill rotWithShape="1">
-            <a:gsLst>
-              <a:gs pos="0">
-                <a:srgbClr val="F28C38"/>
-              </a:gs>
-              <a:gs pos="100000">
-                <a:srgbClr val="FBE3CB"/>
-              </a:gs>
-            </a:gsLst>
-            <a:lin scaled="0" ang="0"/>
-          </a:gradFill>
+            <a:off x="0" y="6675120"/>
+            <a:ext cx="12191695" cy="182880"/>
+          </a:xfrm>
+          <a:prstGeom prst="rect">
+            <a:avLst/>
+          </a:prstGeom>
+          <a:solidFill>
+            <a:srgbClr val="FF5D3B"/>
+          </a:solidFill>
           <a:ln>
             <a:noFill/>
           </a:ln>
           <a:effectLst/>
         </p:spPr>
-        <p:style>
-          <a:lnRef idx="1">
-            <a:schemeClr val="accent1"/>
-          </a:lnRef>
-          <a:fillRef idx="3">
-            <a:schemeClr val="accent1"/>
-          </a:fillRef>
-          <a:effectRef idx="2">
-            <a:schemeClr val="accent1"/>
-          </a:effectRef>
-          <a:fontRef idx="minor">
-            <a:schemeClr val="lt1"/>
-          </a:fontRef>
-        </p:style>
         <p:txBody>
           <a:bodyPr rtlCol="0" anchor="ctr"/>
           <a:lstStyle/>
@@ -3153,148 +3139,182 @@
         </p:nvSpPr>
         <p:spPr>
           <a:xfrm>
-            <a:off x="54864" y="6629400"/>
-            <a:ext cx="12079224" cy="182880"/>
-          </a:xfrm>
-          <a:prstGeom prst="rect">
-            <a:avLst/>
-          </a:prstGeom>
-          <a:gradFill rotWithShape="1">
-            <a:gsLst>
-              <a:gs pos="0">
-                <a:srgbClr val="F28C38"/>
-              </a:gs>
-              <a:gs pos="100000">
-                <a:srgbClr val="FBE3CB"/>
-              </a:gs>
-            </a:gsLst>
-            <a:lin scaled="0" ang="0"/>
-          </a:gradFill>
+            <a:off x="356616" y="137160"/>
+            <a:ext cx="2103120" cy="365760"/>
+          </a:xfrm>
+          <a:prstGeom prst="rect">
+            <a:avLst/>
+          </a:prstGeom>
+          <a:solidFill>
+            <a:srgbClr val="FF5D3B"/>
+          </a:solidFill>
           <a:ln>
             <a:noFill/>
           </a:ln>
           <a:effectLst/>
         </p:spPr>
-        <p:style>
-          <a:lnRef idx="1">
-            <a:schemeClr val="accent1"/>
-          </a:lnRef>
-          <a:fillRef idx="3">
-            <a:schemeClr val="accent1"/>
-          </a:fillRef>
-          <a:effectRef idx="2">
-            <a:schemeClr val="accent1"/>
-          </a:effectRef>
-          <a:fontRef idx="minor">
-            <a:schemeClr val="lt1"/>
-          </a:fontRef>
-        </p:style>
-        <p:txBody>
-          <a:bodyPr rtlCol="0" anchor="ctr"/>
+        <p:txBody>
+          <a:bodyPr rtlCol="0" anchor="ctr" wrap="square" lIns="73152" rIns="73152"/>
           <a:lstStyle/>
           <a:p>
             <a:pPr algn="ctr"/>
-          </a:p>
-        </p:txBody>
-      </p:sp>
-      <p:sp>
-        <p:nvSpPr>
-          <p:cNvPr id="4" name="Rectangle 3"/>
+            <a:r>
+              <a:rPr sz="1300" b="1">
+                <a:solidFill>
+                  <a:srgbClr val="FFFFFF"/>
+                </a:solidFill>
+                <a:latin typeface="Yu Gothic"/>
+              </a:rPr>
+              <a:t>ぐるぐる人材</a:t>
+            </a:r>
+          </a:p>
+        </p:txBody>
+      </p:sp>
+      <p:sp>
+        <p:nvSpPr>
+          <p:cNvPr id="4" name="TextBox 3"/>
+          <p:cNvSpPr txBox="1"/>
+          <p:nvPr/>
+        </p:nvSpPr>
+        <p:spPr>
+          <a:xfrm>
+            <a:off x="2606040" y="109728"/>
+            <a:ext cx="9144000" cy="420624"/>
+          </a:xfrm>
+          <a:prstGeom prst="rect">
+            <a:avLst/>
+          </a:prstGeom>
+          <a:noFill/>
+        </p:spPr>
+        <p:txBody>
+          <a:bodyPr wrap="square" anchor="ctr" lIns="73152" rIns="73152">
+            <a:spAutoFit/>
+          </a:bodyPr>
+          <a:lstStyle/>
+          <a:p>
+            <a:pPr algn="l"/>
+            <a:r>
+              <a:rPr sz="2000" b="1">
+                <a:solidFill>
+                  <a:srgbClr val="F06142"/>
+                </a:solidFill>
+                <a:latin typeface="Yu Gothic"/>
+              </a:rPr>
+              <a:t>ぐるぐる人材とは？</a:t>
+            </a:r>
+          </a:p>
+        </p:txBody>
+      </p:sp>
+      <p:sp>
+        <p:nvSpPr>
+          <p:cNvPr id="5" name="TextBox 4"/>
+          <p:cNvSpPr txBox="1"/>
+          <p:nvPr/>
+        </p:nvSpPr>
+        <p:spPr>
+          <a:xfrm>
+            <a:off x="274320" y="6291072"/>
+            <a:ext cx="11612880" cy="310896"/>
+          </a:xfrm>
+          <a:prstGeom prst="rect">
+            <a:avLst/>
+          </a:prstGeom>
+          <a:noFill/>
+        </p:spPr>
+        <p:txBody>
+          <a:bodyPr wrap="square" anchor="t" lIns="73152" rIns="73152">
+            <a:spAutoFit/>
+          </a:bodyPr>
+          <a:lstStyle/>
+          <a:p>
+            <a:pPr algn="l"/>
+            <a:r>
+              <a:rPr sz="900" b="0">
+                <a:solidFill>
+                  <a:srgbClr val="7A6E66"/>
+                </a:solidFill>
+                <a:latin typeface="Yu Gothic"/>
+              </a:rPr>
+              <a:t>出典：visions具体的なペルソナ像 / ジャーニー（専卒以上）/ SEEDS選定シート</a:t>
+            </a:r>
+          </a:p>
+        </p:txBody>
+      </p:sp>
+      <p:sp>
+        <p:nvSpPr>
+          <p:cNvPr id="6" name="TextBox 5"/>
+          <p:cNvSpPr txBox="1"/>
+          <p:nvPr/>
+        </p:nvSpPr>
+        <p:spPr>
+          <a:xfrm>
+            <a:off x="365760" y="777240"/>
+            <a:ext cx="11430000" cy="548640"/>
+          </a:xfrm>
+          <a:prstGeom prst="rect">
+            <a:avLst/>
+          </a:prstGeom>
+          <a:noFill/>
+        </p:spPr>
+        <p:txBody>
+          <a:bodyPr wrap="square" anchor="t" lIns="73152" rIns="73152">
+            <a:spAutoFit/>
+          </a:bodyPr>
+          <a:lstStyle/>
+          <a:p>
+            <a:pPr algn="l"/>
+            <a:r>
+              <a:rPr sz="2200" b="1">
+                <a:solidFill>
+                  <a:srgbClr val="F06142"/>
+                </a:solidFill>
+                <a:latin typeface="Yu Gothic"/>
+              </a:rPr>
+              <a:t>仮説を回し、人をつなぎ、“めぐり”をつくる人</a:t>
+            </a:r>
+          </a:p>
+        </p:txBody>
+      </p:sp>
+      <p:sp>
+        <p:nvSpPr>
+          <p:cNvPr id="7" name="Rectangle 6"/>
           <p:cNvSpPr/>
           <p:nvPr/>
         </p:nvSpPr>
         <p:spPr>
           <a:xfrm>
-            <a:off x="356616" y="155448"/>
-            <a:ext cx="2103120" cy="329184"/>
-          </a:xfrm>
-          <a:prstGeom prst="rect">
-            <a:avLst/>
-          </a:prstGeom>
-          <a:solidFill>
-            <a:srgbClr val="1F497D"/>
+            <a:off x="365760" y="1463040"/>
+            <a:ext cx="3703320" cy="2011680"/>
+          </a:xfrm>
+          <a:prstGeom prst="rect">
+            <a:avLst/>
+          </a:prstGeom>
+          <a:solidFill>
+            <a:srgbClr val="FFFFFF"/>
           </a:solidFill>
           <a:ln>
             <a:noFill/>
           </a:ln>
           <a:effectLst/>
         </p:spPr>
-        <p:style>
-          <a:lnRef idx="1">
-            <a:schemeClr val="accent1"/>
-          </a:lnRef>
-          <a:fillRef idx="3">
-            <a:schemeClr val="accent1"/>
-          </a:fillRef>
-          <a:effectRef idx="2">
-            <a:schemeClr val="accent1"/>
-          </a:effectRef>
-          <a:fontRef idx="minor">
-            <a:schemeClr val="lt1"/>
-          </a:fontRef>
-        </p:style>
-        <p:txBody>
-          <a:bodyPr rtlCol="0" anchor="ctr" wrap="square" lIns="73152" rIns="73152"/>
+        <p:txBody>
+          <a:bodyPr rtlCol="0" anchor="ctr"/>
           <a:lstStyle/>
           <a:p>
             <a:pPr algn="ctr"/>
-            <a:r>
-              <a:rPr sz="1300" b="1">
-                <a:solidFill>
-                  <a:srgbClr val="FFFFFF"/>
-                </a:solidFill>
-                <a:latin typeface="Yu Gothic"/>
-              </a:rPr>
-              <a:t>ぐるぐる人材</a:t>
-            </a:r>
-          </a:p>
-        </p:txBody>
-      </p:sp>
-      <p:sp>
-        <p:nvSpPr>
-          <p:cNvPr id="5" name="TextBox 4"/>
+          </a:p>
+        </p:txBody>
+      </p:sp>
+      <p:sp>
+        <p:nvSpPr>
+          <p:cNvPr id="8" name="TextBox 7"/>
           <p:cNvSpPr txBox="1"/>
           <p:nvPr/>
         </p:nvSpPr>
         <p:spPr>
           <a:xfrm>
-            <a:off x="2606040" y="128016"/>
-            <a:ext cx="9144000" cy="365760"/>
-          </a:xfrm>
-          <a:prstGeom prst="rect">
-            <a:avLst/>
-          </a:prstGeom>
-          <a:noFill/>
-        </p:spPr>
-        <p:txBody>
-          <a:bodyPr wrap="square" anchor="ctr" lIns="73152" rIns="73152">
-            <a:spAutoFit/>
-          </a:bodyPr>
-          <a:lstStyle/>
-          <a:p>
-            <a:pPr algn="l"/>
-            <a:r>
-              <a:rPr sz="1700" b="1">
-                <a:solidFill>
-                  <a:srgbClr val="262626"/>
-                </a:solidFill>
-                <a:latin typeface="Yu Gothic"/>
-              </a:rPr>
-              <a:t>ぐるぐる人材とは？</a:t>
-            </a:r>
-          </a:p>
-        </p:txBody>
-      </p:sp>
-      <p:sp>
-        <p:nvSpPr>
-          <p:cNvPr id="6" name="TextBox 5"/>
-          <p:cNvSpPr txBox="1"/>
-          <p:nvPr/>
-        </p:nvSpPr>
-        <p:spPr>
-          <a:xfrm>
-            <a:off x="274320" y="6291072"/>
-            <a:ext cx="11612880" cy="310896"/>
+            <a:off x="365760" y="1508760"/>
+            <a:ext cx="3703320" cy="411480"/>
           </a:xfrm>
           <a:prstGeom prst="rect">
             <a:avLst/>
@@ -3309,134 +3329,20 @@
           <a:p>
             <a:pPr algn="l"/>
             <a:r>
-              <a:rPr sz="900" b="0">
-                <a:solidFill>
-                  <a:srgbClr val="595959"/>
-                </a:solidFill>
-                <a:latin typeface="Yu Gothic"/>
-              </a:rPr>
-              <a:t>出典：visions具体的なペルソナ像 / ジャーニー（専卒以上）/ SEEDS選定シート</a:t>
-            </a:r>
-          </a:p>
-        </p:txBody>
-      </p:sp>
-      <p:sp>
-        <p:nvSpPr>
-          <p:cNvPr id="7" name="TextBox 6"/>
-          <p:cNvSpPr txBox="1"/>
-          <p:nvPr/>
-        </p:nvSpPr>
-        <p:spPr>
-          <a:xfrm>
-            <a:off x="365760" y="777240"/>
-            <a:ext cx="11430000" cy="548640"/>
-          </a:xfrm>
-          <a:prstGeom prst="rect">
-            <a:avLst/>
-          </a:prstGeom>
-          <a:noFill/>
-        </p:spPr>
-        <p:txBody>
-          <a:bodyPr wrap="square" anchor="t" lIns="73152" rIns="73152">
-            <a:spAutoFit/>
-          </a:bodyPr>
-          <a:lstStyle/>
-          <a:p>
-            <a:pPr algn="l"/>
-            <a:r>
-              <a:rPr sz="2200" b="1">
-                <a:solidFill>
-                  <a:srgbClr val="1F497D"/>
-                </a:solidFill>
-                <a:latin typeface="Yu Gothic"/>
-              </a:rPr>
-              <a:t>仮説を回し、人をつなぎ、“めぐり”をつくる人</a:t>
-            </a:r>
-          </a:p>
-        </p:txBody>
-      </p:sp>
-      <p:sp>
-        <p:nvSpPr>
-          <p:cNvPr id="8" name="Rectangle 7"/>
-          <p:cNvSpPr/>
-          <p:nvPr/>
-        </p:nvSpPr>
-        <p:spPr>
-          <a:xfrm>
-            <a:off x="365760" y="1463040"/>
-            <a:ext cx="3703320" cy="2011680"/>
-          </a:xfrm>
-          <a:prstGeom prst="rect">
-            <a:avLst/>
-          </a:prstGeom>
-          <a:solidFill>
-            <a:srgbClr val="F2F2F2"/>
-          </a:solidFill>
-          <a:ln>
-            <a:noFill/>
-          </a:ln>
-          <a:effectLst/>
-        </p:spPr>
-        <p:style>
-          <a:lnRef idx="1">
-            <a:schemeClr val="accent1"/>
-          </a:lnRef>
-          <a:fillRef idx="3">
-            <a:schemeClr val="accent1"/>
-          </a:fillRef>
-          <a:effectRef idx="2">
-            <a:schemeClr val="accent1"/>
-          </a:effectRef>
-          <a:fontRef idx="minor">
-            <a:schemeClr val="lt1"/>
-          </a:fontRef>
-        </p:style>
-        <p:txBody>
-          <a:bodyPr rtlCol="0" anchor="ctr"/>
-          <a:lstStyle/>
-          <a:p>
-            <a:pPr algn="ctr"/>
+              <a:rPr sz="1500" b="1">
+                <a:solidFill>
+                  <a:srgbClr val="F06142"/>
+                </a:solidFill>
+                <a:latin typeface="Yu Gothic"/>
+              </a:rPr>
+              <a:t>① visionsの定義</a:t>
+            </a:r>
           </a:p>
         </p:txBody>
       </p:sp>
       <p:sp>
         <p:nvSpPr>
           <p:cNvPr id="9" name="TextBox 8"/>
-          <p:cNvSpPr txBox="1"/>
-          <p:nvPr/>
-        </p:nvSpPr>
-        <p:spPr>
-          <a:xfrm>
-            <a:off x="365760" y="1508760"/>
-            <a:ext cx="3703320" cy="411480"/>
-          </a:xfrm>
-          <a:prstGeom prst="rect">
-            <a:avLst/>
-          </a:prstGeom>
-          <a:noFill/>
-        </p:spPr>
-        <p:txBody>
-          <a:bodyPr wrap="square" anchor="t" lIns="73152" rIns="73152">
-            <a:spAutoFit/>
-          </a:bodyPr>
-          <a:lstStyle/>
-          <a:p>
-            <a:pPr algn="l"/>
-            <a:r>
-              <a:rPr sz="1500" b="1">
-                <a:solidFill>
-                  <a:srgbClr val="1F497D"/>
-                </a:solidFill>
-                <a:latin typeface="Yu Gothic"/>
-              </a:rPr>
-              <a:t>① visionsの定義</a:t>
-            </a:r>
-          </a:p>
-        </p:txBody>
-      </p:sp>
-      <p:sp>
-        <p:nvSpPr>
-          <p:cNvPr id="10" name="TextBox 9"/>
           <p:cNvSpPr txBox="1"/>
           <p:nvPr/>
         </p:nvSpPr>
@@ -3464,7 +3370,7 @@
             <a:r>
               <a:rPr sz="1500" b="0">
                 <a:solidFill>
-                  <a:srgbClr val="262626"/>
+                  <a:srgbClr val="3A2A24"/>
                 </a:solidFill>
                 <a:latin typeface="Yu Gothic"/>
               </a:rPr>
@@ -3480,7 +3386,7 @@
             <a:r>
               <a:rPr sz="1500" b="0">
                 <a:solidFill>
-                  <a:srgbClr val="262626"/>
+                  <a:srgbClr val="3A2A24"/>
                 </a:solidFill>
                 <a:latin typeface="Yu Gothic"/>
               </a:rPr>
@@ -3496,7 +3402,7 @@
             <a:r>
               <a:rPr sz="1500" b="0">
                 <a:solidFill>
-                  <a:srgbClr val="595959"/>
+                  <a:srgbClr val="7A6E66"/>
                 </a:solidFill>
                 <a:latin typeface="Yu Gothic"/>
               </a:rPr>
@@ -3507,7 +3413,7 @@
       </p:sp>
       <p:sp>
         <p:nvSpPr>
-          <p:cNvPr id="11" name="Rectangle 10"/>
+          <p:cNvPr id="10" name="Rectangle 9"/>
           <p:cNvSpPr/>
           <p:nvPr/>
         </p:nvSpPr>
@@ -3520,27 +3426,13 @@
             <a:avLst/>
           </a:prstGeom>
           <a:solidFill>
-            <a:srgbClr val="F2F2F2"/>
+            <a:srgbClr val="FFFFFF"/>
           </a:solidFill>
           <a:ln>
             <a:noFill/>
           </a:ln>
           <a:effectLst/>
         </p:spPr>
-        <p:style>
-          <a:lnRef idx="1">
-            <a:schemeClr val="accent1"/>
-          </a:lnRef>
-          <a:fillRef idx="3">
-            <a:schemeClr val="accent1"/>
-          </a:fillRef>
-          <a:effectRef idx="2">
-            <a:schemeClr val="accent1"/>
-          </a:effectRef>
-          <a:fontRef idx="minor">
-            <a:schemeClr val="lt1"/>
-          </a:fontRef>
-        </p:style>
         <p:txBody>
           <a:bodyPr rtlCol="0" anchor="ctr"/>
           <a:lstStyle/>
@@ -3551,7 +3443,7 @@
       </p:sp>
       <p:sp>
         <p:nvSpPr>
-          <p:cNvPr id="12" name="TextBox 11"/>
+          <p:cNvPr id="11" name="TextBox 10"/>
           <p:cNvSpPr txBox="1"/>
           <p:nvPr/>
         </p:nvSpPr>
@@ -3575,7 +3467,7 @@
             <a:r>
               <a:rPr sz="1500" b="1">
                 <a:solidFill>
-                  <a:srgbClr val="1F497D"/>
+                  <a:srgbClr val="F06142"/>
                 </a:solidFill>
                 <a:latin typeface="Yu Gothic"/>
               </a:rPr>
@@ -3586,7 +3478,7 @@
       </p:sp>
       <p:sp>
         <p:nvSpPr>
-          <p:cNvPr id="13" name="TextBox 12"/>
+          <p:cNvPr id="12" name="TextBox 11"/>
           <p:cNvSpPr txBox="1"/>
           <p:nvPr/>
         </p:nvSpPr>
@@ -3614,7 +3506,7 @@
             <a:r>
               <a:rPr sz="1500" b="0">
                 <a:solidFill>
-                  <a:srgbClr val="262626"/>
+                  <a:srgbClr val="3A2A24"/>
                 </a:solidFill>
                 <a:latin typeface="Yu Gothic"/>
               </a:rPr>
@@ -3630,7 +3522,7 @@
             <a:r>
               <a:rPr sz="1500" b="0">
                 <a:solidFill>
-                  <a:srgbClr val="262626"/>
+                  <a:srgbClr val="3A2A24"/>
                 </a:solidFill>
                 <a:latin typeface="Yu Gothic"/>
               </a:rPr>
@@ -3646,7 +3538,7 @@
             <a:r>
               <a:rPr sz="1500" b="0">
                 <a:solidFill>
-                  <a:srgbClr val="262626"/>
+                  <a:srgbClr val="3A2A24"/>
                 </a:solidFill>
                 <a:latin typeface="Yu Gothic"/>
               </a:rPr>
@@ -3662,7 +3554,7 @@
             <a:r>
               <a:rPr sz="1500" b="0">
                 <a:solidFill>
-                  <a:srgbClr val="262626"/>
+                  <a:srgbClr val="3A2A24"/>
                 </a:solidFill>
                 <a:latin typeface="Yu Gothic"/>
               </a:rPr>
@@ -3673,7 +3565,7 @@
       </p:sp>
       <p:sp>
         <p:nvSpPr>
-          <p:cNvPr id="14" name="Rectangle 13"/>
+          <p:cNvPr id="13" name="Rectangle 12"/>
           <p:cNvSpPr/>
           <p:nvPr/>
         </p:nvSpPr>
@@ -3686,27 +3578,13 @@
             <a:avLst/>
           </a:prstGeom>
           <a:solidFill>
-            <a:srgbClr val="F2F2F2"/>
+            <a:srgbClr val="FFFFFF"/>
           </a:solidFill>
           <a:ln>
             <a:noFill/>
           </a:ln>
           <a:effectLst/>
         </p:spPr>
-        <p:style>
-          <a:lnRef idx="1">
-            <a:schemeClr val="accent1"/>
-          </a:lnRef>
-          <a:fillRef idx="3">
-            <a:schemeClr val="accent1"/>
-          </a:fillRef>
-          <a:effectRef idx="2">
-            <a:schemeClr val="accent1"/>
-          </a:effectRef>
-          <a:fontRef idx="minor">
-            <a:schemeClr val="lt1"/>
-          </a:fontRef>
-        </p:style>
         <p:txBody>
           <a:bodyPr rtlCol="0" anchor="ctr"/>
           <a:lstStyle/>
@@ -3717,7 +3595,7 @@
       </p:sp>
       <p:sp>
         <p:nvSpPr>
-          <p:cNvPr id="15" name="TextBox 14"/>
+          <p:cNvPr id="14" name="TextBox 13"/>
           <p:cNvSpPr txBox="1"/>
           <p:nvPr/>
         </p:nvSpPr>
@@ -3741,7 +3619,7 @@
             <a:r>
               <a:rPr sz="1500" b="1">
                 <a:solidFill>
-                  <a:srgbClr val="1F497D"/>
+                  <a:srgbClr val="F06142"/>
                 </a:solidFill>
                 <a:latin typeface="Yu Gothic"/>
               </a:rPr>
@@ -3752,7 +3630,7 @@
       </p:sp>
       <p:sp>
         <p:nvSpPr>
-          <p:cNvPr id="16" name="TextBox 15"/>
+          <p:cNvPr id="15" name="TextBox 14"/>
           <p:cNvSpPr txBox="1"/>
           <p:nvPr/>
         </p:nvSpPr>
@@ -3780,7 +3658,7 @@
             <a:r>
               <a:rPr sz="1500" b="0">
                 <a:solidFill>
-                  <a:srgbClr val="262626"/>
+                  <a:srgbClr val="3A2A24"/>
                 </a:solidFill>
                 <a:latin typeface="Yu Gothic"/>
               </a:rPr>
@@ -3796,7 +3674,7 @@
             <a:r>
               <a:rPr sz="1500" b="0">
                 <a:solidFill>
-                  <a:srgbClr val="262626"/>
+                  <a:srgbClr val="3A2A24"/>
                 </a:solidFill>
                 <a:latin typeface="Yu Gothic"/>
               </a:rPr>
@@ -3812,7 +3690,7 @@
             <a:r>
               <a:rPr sz="1500" b="0">
                 <a:solidFill>
-                  <a:srgbClr val="262626"/>
+                  <a:srgbClr val="3A2A24"/>
                 </a:solidFill>
                 <a:latin typeface="Yu Gothic"/>
               </a:rPr>
@@ -3823,7 +3701,7 @@
       </p:sp>
       <p:sp>
         <p:nvSpPr>
-          <p:cNvPr id="17" name="TextBox 16"/>
+          <p:cNvPr id="16" name="TextBox 15"/>
           <p:cNvSpPr txBox="1"/>
           <p:nvPr/>
         </p:nvSpPr>
@@ -3847,7 +3725,7 @@
             <a:r>
               <a:rPr sz="1500" b="1">
                 <a:solidFill>
-                  <a:srgbClr val="1F497D"/>
+                  <a:srgbClr val="F06142"/>
                 </a:solidFill>
                 <a:latin typeface="Yu Gothic"/>
               </a:rPr>
@@ -3858,7 +3736,7 @@
       </p:sp>
       <p:sp>
         <p:nvSpPr>
-          <p:cNvPr id="18" name="TextBox 17"/>
+          <p:cNvPr id="17" name="TextBox 16"/>
           <p:cNvSpPr txBox="1"/>
           <p:nvPr/>
         </p:nvSpPr>
@@ -3882,7 +3760,7 @@
             <a:r>
               <a:rPr sz="1400" b="1">
                 <a:solidFill>
-                  <a:srgbClr val="262626"/>
+                  <a:srgbClr val="3A2A24"/>
                 </a:solidFill>
                 <a:latin typeface="Yu Gothic"/>
               </a:rPr>
@@ -3893,7 +3771,7 @@
       </p:sp>
       <p:sp>
         <p:nvSpPr>
-          <p:cNvPr id="19" name="Rectangle 18"/>
+          <p:cNvPr id="18" name="Rectangle 17"/>
           <p:cNvSpPr/>
           <p:nvPr/>
         </p:nvSpPr>
@@ -3906,27 +3784,13 @@
             <a:avLst/>
           </a:prstGeom>
           <a:solidFill>
-            <a:srgbClr val="1F497D"/>
+            <a:srgbClr val="F06142"/>
           </a:solidFill>
           <a:ln>
             <a:noFill/>
           </a:ln>
           <a:effectLst/>
         </p:spPr>
-        <p:style>
-          <a:lnRef idx="1">
-            <a:schemeClr val="accent1"/>
-          </a:lnRef>
-          <a:fillRef idx="3">
-            <a:schemeClr val="accent1"/>
-          </a:fillRef>
-          <a:effectRef idx="2">
-            <a:schemeClr val="accent1"/>
-          </a:effectRef>
-          <a:fontRef idx="minor">
-            <a:schemeClr val="lt1"/>
-          </a:fontRef>
-        </p:style>
         <p:txBody>
           <a:bodyPr rtlCol="0" anchor="ctr" wrap="square" lIns="73152" rIns="73152"/>
           <a:lstStyle/>
@@ -3946,7 +3810,7 @@
       </p:sp>
       <p:sp>
         <p:nvSpPr>
-          <p:cNvPr id="20" name="Rectangle 19"/>
+          <p:cNvPr id="19" name="Rectangle 18"/>
           <p:cNvSpPr/>
           <p:nvPr/>
         </p:nvSpPr>
@@ -3959,27 +3823,13 @@
             <a:avLst/>
           </a:prstGeom>
           <a:solidFill>
-            <a:srgbClr val="1F497D"/>
+            <a:srgbClr val="F06142"/>
           </a:solidFill>
           <a:ln>
             <a:noFill/>
           </a:ln>
           <a:effectLst/>
         </p:spPr>
-        <p:style>
-          <a:lnRef idx="1">
-            <a:schemeClr val="accent1"/>
-          </a:lnRef>
-          <a:fillRef idx="3">
-            <a:schemeClr val="accent1"/>
-          </a:fillRef>
-          <a:effectRef idx="2">
-            <a:schemeClr val="accent1"/>
-          </a:effectRef>
-          <a:fontRef idx="minor">
-            <a:schemeClr val="lt1"/>
-          </a:fontRef>
-        </p:style>
         <p:txBody>
           <a:bodyPr rtlCol="0" anchor="ctr" wrap="square" lIns="73152" rIns="73152"/>
           <a:lstStyle/>
@@ -3999,7 +3849,7 @@
       </p:sp>
       <p:sp>
         <p:nvSpPr>
-          <p:cNvPr id="21" name="Rectangle 20"/>
+          <p:cNvPr id="20" name="Rectangle 19"/>
           <p:cNvSpPr/>
           <p:nvPr/>
         </p:nvSpPr>
@@ -4012,27 +3862,13 @@
             <a:avLst/>
           </a:prstGeom>
           <a:solidFill>
-            <a:srgbClr val="FBE3CB"/>
+            <a:srgbClr val="FFE0D0"/>
           </a:solidFill>
           <a:ln>
             <a:noFill/>
           </a:ln>
           <a:effectLst/>
         </p:spPr>
-        <p:style>
-          <a:lnRef idx="1">
-            <a:schemeClr val="accent1"/>
-          </a:lnRef>
-          <a:fillRef idx="3">
-            <a:schemeClr val="accent1"/>
-          </a:fillRef>
-          <a:effectRef idx="2">
-            <a:schemeClr val="accent1"/>
-          </a:effectRef>
-          <a:fontRef idx="minor">
-            <a:schemeClr val="lt1"/>
-          </a:fontRef>
-        </p:style>
         <p:txBody>
           <a:bodyPr rtlCol="0" anchor="ctr" wrap="square" lIns="73152" rIns="73152"/>
           <a:lstStyle/>
@@ -4041,7 +3877,7 @@
             <a:r>
               <a:rPr sz="1400" b="1">
                 <a:solidFill>
-                  <a:srgbClr val="262626"/>
+                  <a:srgbClr val="3A2A24"/>
                 </a:solidFill>
                 <a:latin typeface="Yu Gothic"/>
               </a:rPr>
@@ -4052,7 +3888,7 @@
       </p:sp>
       <p:sp>
         <p:nvSpPr>
-          <p:cNvPr id="22" name="Rectangle 21"/>
+          <p:cNvPr id="21" name="Rectangle 20"/>
           <p:cNvSpPr/>
           <p:nvPr/>
         </p:nvSpPr>
@@ -4065,27 +3901,13 @@
             <a:avLst/>
           </a:prstGeom>
           <a:solidFill>
-            <a:srgbClr val="F2F2F2"/>
+            <a:srgbClr val="FFFFFF"/>
           </a:solidFill>
           <a:ln>
             <a:noFill/>
           </a:ln>
           <a:effectLst/>
         </p:spPr>
-        <p:style>
-          <a:lnRef idx="1">
-            <a:schemeClr val="accent1"/>
-          </a:lnRef>
-          <a:fillRef idx="3">
-            <a:schemeClr val="accent1"/>
-          </a:fillRef>
-          <a:effectRef idx="2">
-            <a:schemeClr val="accent1"/>
-          </a:effectRef>
-          <a:fontRef idx="minor">
-            <a:schemeClr val="lt1"/>
-          </a:fontRef>
-        </p:style>
         <p:txBody>
           <a:bodyPr rtlCol="0" anchor="ctr" wrap="square" lIns="73152" rIns="73152"/>
           <a:lstStyle/>
@@ -4094,7 +3916,7 @@
             <a:r>
               <a:rPr sz="1400" b="0">
                 <a:solidFill>
-                  <a:srgbClr val="262626"/>
+                  <a:srgbClr val="3A2A24"/>
                 </a:solidFill>
                 <a:latin typeface="Yu Gothic"/>
               </a:rPr>
@@ -4105,7 +3927,7 @@
       </p:sp>
       <p:sp>
         <p:nvSpPr>
-          <p:cNvPr id="23" name="Rectangle 22"/>
+          <p:cNvPr id="22" name="Rectangle 21"/>
           <p:cNvSpPr/>
           <p:nvPr/>
         </p:nvSpPr>
@@ -4118,27 +3940,13 @@
             <a:avLst/>
           </a:prstGeom>
           <a:solidFill>
-            <a:srgbClr val="F2F2F2"/>
+            <a:srgbClr val="FFFFFF"/>
           </a:solidFill>
           <a:ln>
             <a:noFill/>
           </a:ln>
           <a:effectLst/>
         </p:spPr>
-        <p:style>
-          <a:lnRef idx="1">
-            <a:schemeClr val="accent1"/>
-          </a:lnRef>
-          <a:fillRef idx="3">
-            <a:schemeClr val="accent1"/>
-          </a:fillRef>
-          <a:effectRef idx="2">
-            <a:schemeClr val="accent1"/>
-          </a:effectRef>
-          <a:fontRef idx="minor">
-            <a:schemeClr val="lt1"/>
-          </a:fontRef>
-        </p:style>
         <p:txBody>
           <a:bodyPr rtlCol="0" anchor="ctr" wrap="square" lIns="73152" rIns="73152"/>
           <a:lstStyle/>
@@ -4147,7 +3955,7 @@
             <a:r>
               <a:rPr sz="1400" b="0">
                 <a:solidFill>
-                  <a:srgbClr val="262626"/>
+                  <a:srgbClr val="3A2A24"/>
                 </a:solidFill>
                 <a:latin typeface="Yu Gothic"/>
               </a:rPr>
@@ -4158,7 +3966,7 @@
       </p:sp>
       <p:sp>
         <p:nvSpPr>
-          <p:cNvPr id="24" name="Rectangle 23"/>
+          <p:cNvPr id="23" name="Rectangle 22"/>
           <p:cNvSpPr/>
           <p:nvPr/>
         </p:nvSpPr>
@@ -4171,27 +3979,13 @@
             <a:avLst/>
           </a:prstGeom>
           <a:solidFill>
-            <a:srgbClr val="FBE3CB"/>
+            <a:srgbClr val="FFE0D0"/>
           </a:solidFill>
           <a:ln>
             <a:noFill/>
           </a:ln>
           <a:effectLst/>
         </p:spPr>
-        <p:style>
-          <a:lnRef idx="1">
-            <a:schemeClr val="accent1"/>
-          </a:lnRef>
-          <a:fillRef idx="3">
-            <a:schemeClr val="accent1"/>
-          </a:fillRef>
-          <a:effectRef idx="2">
-            <a:schemeClr val="accent1"/>
-          </a:effectRef>
-          <a:fontRef idx="minor">
-            <a:schemeClr val="lt1"/>
-          </a:fontRef>
-        </p:style>
         <p:txBody>
           <a:bodyPr rtlCol="0" anchor="ctr" wrap="square" lIns="73152" rIns="73152"/>
           <a:lstStyle/>
@@ -4200,7 +3994,7 @@
             <a:r>
               <a:rPr sz="1400" b="1">
                 <a:solidFill>
-                  <a:srgbClr val="262626"/>
+                  <a:srgbClr val="3A2A24"/>
                 </a:solidFill>
                 <a:latin typeface="Yu Gothic"/>
               </a:rPr>
@@ -4211,7 +4005,7 @@
       </p:sp>
       <p:sp>
         <p:nvSpPr>
-          <p:cNvPr id="25" name="Rectangle 24"/>
+          <p:cNvPr id="24" name="Rectangle 23"/>
           <p:cNvSpPr/>
           <p:nvPr/>
         </p:nvSpPr>
@@ -4224,27 +4018,13 @@
             <a:avLst/>
           </a:prstGeom>
           <a:solidFill>
-            <a:srgbClr val="F2F2F2"/>
+            <a:srgbClr val="FFFFFF"/>
           </a:solidFill>
           <a:ln>
             <a:noFill/>
           </a:ln>
           <a:effectLst/>
         </p:spPr>
-        <p:style>
-          <a:lnRef idx="1">
-            <a:schemeClr val="accent1"/>
-          </a:lnRef>
-          <a:fillRef idx="3">
-            <a:schemeClr val="accent1"/>
-          </a:fillRef>
-          <a:effectRef idx="2">
-            <a:schemeClr val="accent1"/>
-          </a:effectRef>
-          <a:fontRef idx="minor">
-            <a:schemeClr val="lt1"/>
-          </a:fontRef>
-        </p:style>
         <p:txBody>
           <a:bodyPr rtlCol="0" anchor="ctr" wrap="square" lIns="73152" rIns="73152"/>
           <a:lstStyle/>
@@ -4253,7 +4033,7 @@
             <a:r>
               <a:rPr sz="1400" b="0">
                 <a:solidFill>
-                  <a:srgbClr val="262626"/>
+                  <a:srgbClr val="3A2A24"/>
                 </a:solidFill>
                 <a:latin typeface="Yu Gothic"/>
               </a:rPr>
@@ -4264,7 +4044,7 @@
       </p:sp>
       <p:sp>
         <p:nvSpPr>
-          <p:cNvPr id="26" name="Rectangle 25"/>
+          <p:cNvPr id="25" name="Rectangle 24"/>
           <p:cNvSpPr/>
           <p:nvPr/>
         </p:nvSpPr>
@@ -4277,27 +4057,13 @@
             <a:avLst/>
           </a:prstGeom>
           <a:solidFill>
-            <a:srgbClr val="F2F2F2"/>
+            <a:srgbClr val="FFFFFF"/>
           </a:solidFill>
           <a:ln>
             <a:noFill/>
           </a:ln>
           <a:effectLst/>
         </p:spPr>
-        <p:style>
-          <a:lnRef idx="1">
-            <a:schemeClr val="accent1"/>
-          </a:lnRef>
-          <a:fillRef idx="3">
-            <a:schemeClr val="accent1"/>
-          </a:fillRef>
-          <a:effectRef idx="2">
-            <a:schemeClr val="accent1"/>
-          </a:effectRef>
-          <a:fontRef idx="minor">
-            <a:schemeClr val="lt1"/>
-          </a:fontRef>
-        </p:style>
         <p:txBody>
           <a:bodyPr rtlCol="0" anchor="ctr" wrap="square" lIns="73152" rIns="73152"/>
           <a:lstStyle/>
@@ -4306,7 +4072,7 @@
             <a:r>
               <a:rPr sz="1400" b="0">
                 <a:solidFill>
-                  <a:srgbClr val="262626"/>
+                  <a:srgbClr val="3A2A24"/>
                 </a:solidFill>
                 <a:latin typeface="Yu Gothic"/>
               </a:rPr>
@@ -4317,7 +4083,7 @@
       </p:sp>
       <p:sp>
         <p:nvSpPr>
-          <p:cNvPr id="27" name="Rectangle 26"/>
+          <p:cNvPr id="26" name="Rectangle 25"/>
           <p:cNvSpPr/>
           <p:nvPr/>
         </p:nvSpPr>
@@ -4330,27 +4096,13 @@
             <a:avLst/>
           </a:prstGeom>
           <a:solidFill>
-            <a:srgbClr val="FBE3CB"/>
+            <a:srgbClr val="FFE0D0"/>
           </a:solidFill>
           <a:ln>
             <a:noFill/>
           </a:ln>
           <a:effectLst/>
         </p:spPr>
-        <p:style>
-          <a:lnRef idx="1">
-            <a:schemeClr val="accent1"/>
-          </a:lnRef>
-          <a:fillRef idx="3">
-            <a:schemeClr val="accent1"/>
-          </a:fillRef>
-          <a:effectRef idx="2">
-            <a:schemeClr val="accent1"/>
-          </a:effectRef>
-          <a:fontRef idx="minor">
-            <a:schemeClr val="lt1"/>
-          </a:fontRef>
-        </p:style>
         <p:txBody>
           <a:bodyPr rtlCol="0" anchor="ctr" wrap="square" lIns="73152" rIns="73152"/>
           <a:lstStyle/>
@@ -4359,7 +4111,7 @@
             <a:r>
               <a:rPr sz="1400" b="1">
                 <a:solidFill>
-                  <a:srgbClr val="262626"/>
+                  <a:srgbClr val="3A2A24"/>
                 </a:solidFill>
                 <a:latin typeface="Yu Gothic"/>
               </a:rPr>
@@ -4370,7 +4122,7 @@
       </p:sp>
       <p:sp>
         <p:nvSpPr>
-          <p:cNvPr id="28" name="Rectangle 27"/>
+          <p:cNvPr id="27" name="Rectangle 26"/>
           <p:cNvSpPr/>
           <p:nvPr/>
         </p:nvSpPr>
@@ -4383,27 +4135,13 @@
             <a:avLst/>
           </a:prstGeom>
           <a:solidFill>
-            <a:srgbClr val="F2F2F2"/>
+            <a:srgbClr val="FFFFFF"/>
           </a:solidFill>
           <a:ln>
             <a:noFill/>
           </a:ln>
           <a:effectLst/>
         </p:spPr>
-        <p:style>
-          <a:lnRef idx="1">
-            <a:schemeClr val="accent1"/>
-          </a:lnRef>
-          <a:fillRef idx="3">
-            <a:schemeClr val="accent1"/>
-          </a:fillRef>
-          <a:effectRef idx="2">
-            <a:schemeClr val="accent1"/>
-          </a:effectRef>
-          <a:fontRef idx="minor">
-            <a:schemeClr val="lt1"/>
-          </a:fontRef>
-        </p:style>
         <p:txBody>
           <a:bodyPr rtlCol="0" anchor="ctr" wrap="square" lIns="73152" rIns="73152"/>
           <a:lstStyle/>
@@ -4412,7 +4150,7 @@
             <a:r>
               <a:rPr sz="1400" b="0">
                 <a:solidFill>
-                  <a:srgbClr val="262626"/>
+                  <a:srgbClr val="3A2A24"/>
                 </a:solidFill>
                 <a:latin typeface="Yu Gothic"/>
               </a:rPr>
@@ -4423,7 +4161,7 @@
       </p:sp>
       <p:sp>
         <p:nvSpPr>
-          <p:cNvPr id="29" name="Rectangle 28"/>
+          <p:cNvPr id="28" name="Rectangle 27"/>
           <p:cNvSpPr/>
           <p:nvPr/>
         </p:nvSpPr>
@@ -4436,27 +4174,13 @@
             <a:avLst/>
           </a:prstGeom>
           <a:solidFill>
-            <a:srgbClr val="F2F2F2"/>
+            <a:srgbClr val="FFFFFF"/>
           </a:solidFill>
           <a:ln>
             <a:noFill/>
           </a:ln>
           <a:effectLst/>
         </p:spPr>
-        <p:style>
-          <a:lnRef idx="1">
-            <a:schemeClr val="accent1"/>
-          </a:lnRef>
-          <a:fillRef idx="3">
-            <a:schemeClr val="accent1"/>
-          </a:fillRef>
-          <a:effectRef idx="2">
-            <a:schemeClr val="accent1"/>
-          </a:effectRef>
-          <a:fontRef idx="minor">
-            <a:schemeClr val="lt1"/>
-          </a:fontRef>
-        </p:style>
         <p:txBody>
           <a:bodyPr rtlCol="0" anchor="ctr" wrap="square" lIns="73152" rIns="73152"/>
           <a:lstStyle/>
@@ -4465,7 +4189,7 @@
             <a:r>
               <a:rPr sz="1400" b="0">
                 <a:solidFill>
-                  <a:srgbClr val="262626"/>
+                  <a:srgbClr val="3A2A24"/>
                 </a:solidFill>
                 <a:latin typeface="Yu Gothic"/>
               </a:rPr>
@@ -4476,7 +4200,7 @@
       </p:sp>
       <p:sp>
         <p:nvSpPr>
-          <p:cNvPr id="30" name="Rectangle 29"/>
+          <p:cNvPr id="29" name="Rectangle 28"/>
           <p:cNvSpPr/>
           <p:nvPr/>
         </p:nvSpPr>
@@ -4489,27 +4213,13 @@
             <a:avLst/>
           </a:prstGeom>
           <a:solidFill>
-            <a:srgbClr val="FBE3CB"/>
+            <a:srgbClr val="FFE0D0"/>
           </a:solidFill>
           <a:ln>
             <a:noFill/>
           </a:ln>
           <a:effectLst/>
         </p:spPr>
-        <p:style>
-          <a:lnRef idx="1">
-            <a:schemeClr val="accent1"/>
-          </a:lnRef>
-          <a:fillRef idx="3">
-            <a:schemeClr val="accent1"/>
-          </a:fillRef>
-          <a:effectRef idx="2">
-            <a:schemeClr val="accent1"/>
-          </a:effectRef>
-          <a:fontRef idx="minor">
-            <a:schemeClr val="lt1"/>
-          </a:fontRef>
-        </p:style>
         <p:txBody>
           <a:bodyPr rtlCol="0" anchor="ctr" wrap="square" lIns="73152" rIns="73152"/>
           <a:lstStyle/>
@@ -4518,7 +4228,7 @@
             <a:r>
               <a:rPr sz="1400" b="1">
                 <a:solidFill>
-                  <a:srgbClr val="262626"/>
+                  <a:srgbClr val="3A2A24"/>
                 </a:solidFill>
                 <a:latin typeface="Yu Gothic"/>
               </a:rPr>
@@ -4529,7 +4239,7 @@
       </p:sp>
       <p:sp>
         <p:nvSpPr>
-          <p:cNvPr id="31" name="Rectangle 30"/>
+          <p:cNvPr id="30" name="Rectangle 29"/>
           <p:cNvSpPr/>
           <p:nvPr/>
         </p:nvSpPr>
@@ -4542,27 +4252,13 @@
             <a:avLst/>
           </a:prstGeom>
           <a:solidFill>
-            <a:srgbClr val="F2F2F2"/>
+            <a:srgbClr val="FFFFFF"/>
           </a:solidFill>
           <a:ln>
             <a:noFill/>
           </a:ln>
           <a:effectLst/>
         </p:spPr>
-        <p:style>
-          <a:lnRef idx="1">
-            <a:schemeClr val="accent1"/>
-          </a:lnRef>
-          <a:fillRef idx="3">
-            <a:schemeClr val="accent1"/>
-          </a:fillRef>
-          <a:effectRef idx="2">
-            <a:schemeClr val="accent1"/>
-          </a:effectRef>
-          <a:fontRef idx="minor">
-            <a:schemeClr val="lt1"/>
-          </a:fontRef>
-        </p:style>
         <p:txBody>
           <a:bodyPr rtlCol="0" anchor="ctr" wrap="square" lIns="73152" rIns="73152"/>
           <a:lstStyle/>
@@ -4571,7 +4267,7 @@
             <a:r>
               <a:rPr sz="1400" b="0">
                 <a:solidFill>
-                  <a:srgbClr val="262626"/>
+                  <a:srgbClr val="3A2A24"/>
                 </a:solidFill>
                 <a:latin typeface="Yu Gothic"/>
               </a:rPr>
@@ -4582,7 +4278,7 @@
       </p:sp>
       <p:sp>
         <p:nvSpPr>
-          <p:cNvPr id="32" name="Rectangle 31"/>
+          <p:cNvPr id="31" name="Rectangle 30"/>
           <p:cNvSpPr/>
           <p:nvPr/>
         </p:nvSpPr>
@@ -4595,27 +4291,13 @@
             <a:avLst/>
           </a:prstGeom>
           <a:solidFill>
-            <a:srgbClr val="F2F2F2"/>
+            <a:srgbClr val="FFFFFF"/>
           </a:solidFill>
           <a:ln>
             <a:noFill/>
           </a:ln>
           <a:effectLst/>
         </p:spPr>
-        <p:style>
-          <a:lnRef idx="1">
-            <a:schemeClr val="accent1"/>
-          </a:lnRef>
-          <a:fillRef idx="3">
-            <a:schemeClr val="accent1"/>
-          </a:fillRef>
-          <a:effectRef idx="2">
-            <a:schemeClr val="accent1"/>
-          </a:effectRef>
-          <a:fontRef idx="minor">
-            <a:schemeClr val="lt1"/>
-          </a:fontRef>
-        </p:style>
         <p:txBody>
           <a:bodyPr rtlCol="0" anchor="ctr" wrap="square" lIns="73152" rIns="73152"/>
           <a:lstStyle/>
@@ -4624,7 +4306,7 @@
             <a:r>
               <a:rPr sz="1400" b="0">
                 <a:solidFill>
-                  <a:srgbClr val="262626"/>
+                  <a:srgbClr val="3A2A24"/>
                 </a:solidFill>
                 <a:latin typeface="Yu Gothic"/>
               </a:rPr>
@@ -4644,6 +4326,14 @@
 <file path=ppt/slides/slide2.xml><?xml version="1.0" encoding="utf-8"?>
 <p:sld xmlns:a="http://schemas.openxmlformats.org/drawingml/2006/main" xmlns:p="http://schemas.openxmlformats.org/presentationml/2006/main" xmlns:r="http://schemas.openxmlformats.org/officeDocument/2006/relationships">
   <p:cSld>
+    <p:bg>
+      <p:bgPr>
+        <a:solidFill>
+          <a:srgbClr val="FFEEE4"/>
+        </a:solidFill>
+        <a:effectLst/>
+      </p:bgPr>
+    </p:bg>
     <p:spTree>
       <p:nvGrpSpPr>
         <p:cNvPr id="1" name=""/>
@@ -4659,42 +4349,20 @@
         </p:nvSpPr>
         <p:spPr>
           <a:xfrm>
-            <a:off x="54864" y="64008"/>
-            <a:ext cx="12079224" cy="521207"/>
-          </a:xfrm>
-          <a:prstGeom prst="rect">
-            <a:avLst/>
-          </a:prstGeom>
-          <a:gradFill rotWithShape="1">
-            <a:gsLst>
-              <a:gs pos="0">
-                <a:srgbClr val="F28C38"/>
-              </a:gs>
-              <a:gs pos="100000">
-                <a:srgbClr val="FBE3CB"/>
-              </a:gs>
-            </a:gsLst>
-            <a:lin scaled="0" ang="0"/>
-          </a:gradFill>
+            <a:off x="0" y="6675120"/>
+            <a:ext cx="12191695" cy="182880"/>
+          </a:xfrm>
+          <a:prstGeom prst="rect">
+            <a:avLst/>
+          </a:prstGeom>
+          <a:solidFill>
+            <a:srgbClr val="FF5D3B"/>
+          </a:solidFill>
           <a:ln>
             <a:noFill/>
           </a:ln>
           <a:effectLst/>
         </p:spPr>
-        <p:style>
-          <a:lnRef idx="1">
-            <a:schemeClr val="accent1"/>
-          </a:lnRef>
-          <a:fillRef idx="3">
-            <a:schemeClr val="accent1"/>
-          </a:fillRef>
-          <a:effectRef idx="2">
-            <a:schemeClr val="accent1"/>
-          </a:effectRef>
-          <a:fontRef idx="minor">
-            <a:schemeClr val="lt1"/>
-          </a:fontRef>
-        </p:style>
         <p:txBody>
           <a:bodyPr rtlCol="0" anchor="ctr"/>
           <a:lstStyle/>
@@ -4711,113 +4379,147 @@
         </p:nvSpPr>
         <p:spPr>
           <a:xfrm>
-            <a:off x="54864" y="6629400"/>
-            <a:ext cx="12079224" cy="182880"/>
-          </a:xfrm>
-          <a:prstGeom prst="rect">
-            <a:avLst/>
-          </a:prstGeom>
-          <a:gradFill rotWithShape="1">
-            <a:gsLst>
-              <a:gs pos="0">
-                <a:srgbClr val="F28C38"/>
-              </a:gs>
-              <a:gs pos="100000">
-                <a:srgbClr val="FBE3CB"/>
-              </a:gs>
-            </a:gsLst>
-            <a:lin scaled="0" ang="0"/>
-          </a:gradFill>
+            <a:off x="356616" y="137160"/>
+            <a:ext cx="2103120" cy="365760"/>
+          </a:xfrm>
+          <a:prstGeom prst="rect">
+            <a:avLst/>
+          </a:prstGeom>
+          <a:solidFill>
+            <a:srgbClr val="FF5D3B"/>
+          </a:solidFill>
           <a:ln>
             <a:noFill/>
           </a:ln>
           <a:effectLst/>
         </p:spPr>
-        <p:style>
-          <a:lnRef idx="1">
-            <a:schemeClr val="accent1"/>
-          </a:lnRef>
-          <a:fillRef idx="3">
-            <a:schemeClr val="accent1"/>
-          </a:fillRef>
-          <a:effectRef idx="2">
-            <a:schemeClr val="accent1"/>
-          </a:effectRef>
-          <a:fontRef idx="minor">
-            <a:schemeClr val="lt1"/>
-          </a:fontRef>
-        </p:style>
-        <p:txBody>
-          <a:bodyPr rtlCol="0" anchor="ctr"/>
+        <p:txBody>
+          <a:bodyPr rtlCol="0" anchor="ctr" wrap="square" lIns="73152" rIns="73152"/>
           <a:lstStyle/>
           <a:p>
             <a:pPr algn="ctr"/>
-          </a:p>
-        </p:txBody>
-      </p:sp>
-      <p:sp>
-        <p:nvSpPr>
-          <p:cNvPr id="4" name="Rectangle 3"/>
+            <a:r>
+              <a:rPr sz="1300" b="1">
+                <a:solidFill>
+                  <a:srgbClr val="FFFFFF"/>
+                </a:solidFill>
+                <a:latin typeface="Yu Gothic"/>
+              </a:rPr>
+              <a:t>現状データ</a:t>
+            </a:r>
+          </a:p>
+        </p:txBody>
+      </p:sp>
+      <p:sp>
+        <p:nvSpPr>
+          <p:cNvPr id="4" name="TextBox 3"/>
+          <p:cNvSpPr txBox="1"/>
+          <p:nvPr/>
+        </p:nvSpPr>
+        <p:spPr>
+          <a:xfrm>
+            <a:off x="2606040" y="109728"/>
+            <a:ext cx="9144000" cy="420624"/>
+          </a:xfrm>
+          <a:prstGeom prst="rect">
+            <a:avLst/>
+          </a:prstGeom>
+          <a:noFill/>
+        </p:spPr>
+        <p:txBody>
+          <a:bodyPr wrap="square" anchor="ctr" lIns="73152" rIns="73152">
+            <a:spAutoFit/>
+          </a:bodyPr>
+          <a:lstStyle/>
+          <a:p>
+            <a:pPr algn="l"/>
+            <a:r>
+              <a:rPr sz="2000" b="1">
+                <a:solidFill>
+                  <a:srgbClr val="F06142"/>
+                </a:solidFill>
+                <a:latin typeface="Yu Gothic"/>
+              </a:rPr>
+              <a:t>清峰データで見えた、ぐるぐるの現在地</a:t>
+            </a:r>
+          </a:p>
+        </p:txBody>
+      </p:sp>
+      <p:sp>
+        <p:nvSpPr>
+          <p:cNvPr id="5" name="TextBox 4"/>
+          <p:cNvSpPr txBox="1"/>
+          <p:nvPr/>
+        </p:nvSpPr>
+        <p:spPr>
+          <a:xfrm>
+            <a:off x="274320" y="6291072"/>
+            <a:ext cx="11612880" cy="310896"/>
+          </a:xfrm>
+          <a:prstGeom prst="rect">
+            <a:avLst/>
+          </a:prstGeom>
+          <a:noFill/>
+        </p:spPr>
+        <p:txBody>
+          <a:bodyPr wrap="square" anchor="t" lIns="73152" rIns="73152">
+            <a:spAutoFit/>
+          </a:bodyPr>
+          <a:lstStyle/>
+          <a:p>
+            <a:pPr algn="l"/>
+            <a:r>
+              <a:rPr sz="900" b="0">
+                <a:solidFill>
+                  <a:srgbClr val="7A6E66"/>
+                </a:solidFill>
+                <a:latin typeface="Yu Gothic"/>
+              </a:rPr>
+              <a:t>出典：sch_0202 / 学生管理シート（27）/ 年間目標・実数 / visions学生リストアップ / 具体的なペルソナ像</a:t>
+            </a:r>
+          </a:p>
+        </p:txBody>
+      </p:sp>
+      <p:sp>
+        <p:nvSpPr>
+          <p:cNvPr id="6" name="Rectangle 5"/>
           <p:cNvSpPr/>
           <p:nvPr/>
         </p:nvSpPr>
         <p:spPr>
           <a:xfrm>
-            <a:off x="356616" y="155448"/>
-            <a:ext cx="2103120" cy="329184"/>
-          </a:xfrm>
-          <a:prstGeom prst="rect">
-            <a:avLst/>
-          </a:prstGeom>
-          <a:solidFill>
-            <a:srgbClr val="1F497D"/>
+            <a:off x="365760" y="822960"/>
+            <a:ext cx="11430000" cy="914400"/>
+          </a:xfrm>
+          <a:prstGeom prst="rect">
+            <a:avLst/>
+          </a:prstGeom>
+          <a:solidFill>
+            <a:srgbClr val="FFFFFF"/>
           </a:solidFill>
           <a:ln>
             <a:noFill/>
           </a:ln>
           <a:effectLst/>
         </p:spPr>
-        <p:style>
-          <a:lnRef idx="1">
-            <a:schemeClr val="accent1"/>
-          </a:lnRef>
-          <a:fillRef idx="3">
-            <a:schemeClr val="accent1"/>
-          </a:fillRef>
-          <a:effectRef idx="2">
-            <a:schemeClr val="accent1"/>
-          </a:effectRef>
-          <a:fontRef idx="minor">
-            <a:schemeClr val="lt1"/>
-          </a:fontRef>
-        </p:style>
-        <p:txBody>
-          <a:bodyPr rtlCol="0" anchor="ctr" wrap="square" lIns="73152" rIns="73152"/>
+        <p:txBody>
+          <a:bodyPr rtlCol="0" anchor="ctr"/>
           <a:lstStyle/>
           <a:p>
             <a:pPr algn="ctr"/>
-            <a:r>
-              <a:rPr sz="1300" b="1">
-                <a:solidFill>
-                  <a:srgbClr val="FFFFFF"/>
-                </a:solidFill>
-                <a:latin typeface="Yu Gothic"/>
-              </a:rPr>
-              <a:t>現状データ</a:t>
-            </a:r>
-          </a:p>
-        </p:txBody>
-      </p:sp>
-      <p:sp>
-        <p:nvSpPr>
-          <p:cNvPr id="5" name="TextBox 4"/>
+          </a:p>
+        </p:txBody>
+      </p:sp>
+      <p:sp>
+        <p:nvSpPr>
+          <p:cNvPr id="7" name="TextBox 6"/>
           <p:cNvSpPr txBox="1"/>
           <p:nvPr/>
         </p:nvSpPr>
         <p:spPr>
           <a:xfrm>
-            <a:off x="2606040" y="128016"/>
-            <a:ext cx="9144000" cy="365760"/>
+            <a:off x="411480" y="841248"/>
+            <a:ext cx="3017520" cy="530352"/>
           </a:xfrm>
           <a:prstGeom prst="rect">
             <a:avLst/>
@@ -4830,29 +4532,29 @@
           </a:bodyPr>
           <a:lstStyle/>
           <a:p>
-            <a:pPr algn="l"/>
-            <a:r>
-              <a:rPr sz="1700" b="1">
-                <a:solidFill>
-                  <a:srgbClr val="262626"/>
-                </a:solidFill>
-                <a:latin typeface="Yu Gothic"/>
-              </a:rPr>
-              <a:t>清峰データで見えた、ぐるぐるの現在地</a:t>
-            </a:r>
-          </a:p>
-        </p:txBody>
-      </p:sp>
-      <p:sp>
-        <p:nvSpPr>
-          <p:cNvPr id="6" name="TextBox 5"/>
+            <a:pPr algn="ctr"/>
+            <a:r>
+              <a:rPr sz="2600" b="1">
+                <a:solidFill>
+                  <a:srgbClr val="8C4A36"/>
+                </a:solidFill>
+                <a:latin typeface="Yu Gothic"/>
+              </a:rPr>
+              <a:t>0名</a:t>
+            </a:r>
+          </a:p>
+        </p:txBody>
+      </p:sp>
+      <p:sp>
+        <p:nvSpPr>
+          <p:cNvPr id="8" name="TextBox 7"/>
           <p:cNvSpPr txBox="1"/>
           <p:nvPr/>
         </p:nvSpPr>
         <p:spPr>
           <a:xfrm>
-            <a:off x="274320" y="6291072"/>
-            <a:ext cx="11612880" cy="310896"/>
+            <a:off x="411480" y="1371600"/>
+            <a:ext cx="3017520" cy="320040"/>
           </a:xfrm>
           <a:prstGeom prst="rect">
             <a:avLst/>
@@ -4865,55 +4567,88 @@
           </a:bodyPr>
           <a:lstStyle/>
           <a:p>
+            <a:pPr algn="ctr"/>
+            <a:r>
+              <a:rPr sz="1100" b="0">
+                <a:solidFill>
+                  <a:srgbClr val="7A6E66"/>
+                </a:solidFill>
+                <a:latin typeface="Yu Gothic"/>
+              </a:rPr>
+              <a:t>28卒のぐるぐる接点</a:t>
+            </a:r>
+          </a:p>
+        </p:txBody>
+      </p:sp>
+      <p:sp>
+        <p:nvSpPr>
+          <p:cNvPr id="9" name="TextBox 8"/>
+          <p:cNvSpPr txBox="1"/>
+          <p:nvPr/>
+        </p:nvSpPr>
+        <p:spPr>
+          <a:xfrm>
+            <a:off x="3657600" y="841248"/>
+            <a:ext cx="8046720" cy="877824"/>
+          </a:xfrm>
+          <a:prstGeom prst="rect">
+            <a:avLst/>
+          </a:prstGeom>
+          <a:noFill/>
+        </p:spPr>
+        <p:txBody>
+          <a:bodyPr wrap="square" anchor="ctr" lIns="73152" rIns="73152">
+            <a:spAutoFit/>
+          </a:bodyPr>
+          <a:lstStyle/>
+          <a:p>
             <a:pPr algn="l"/>
             <a:r>
-              <a:rPr sz="900" b="0">
-                <a:solidFill>
-                  <a:srgbClr val="595959"/>
-                </a:solidFill>
-                <a:latin typeface="Yu Gothic"/>
-              </a:rPr>
-              <a:t>出典：sch_0202 / 学生管理シート（27）/ 年間目標・実数 / visions学生リストアップ / 具体的なペルソナ像</a:t>
-            </a:r>
-          </a:p>
-        </p:txBody>
-      </p:sp>
-      <p:sp>
-        <p:nvSpPr>
-          <p:cNvPr id="7" name="Rectangle 6"/>
+              <a:rPr sz="1600" b="0">
+                <a:solidFill>
+                  <a:srgbClr val="3A2A24"/>
+                </a:solidFill>
+                <a:latin typeface="Yu Gothic"/>
+              </a:rPr>
+              <a:t>リストアップ表は空欄</a:t>
+            </a:r>
+          </a:p>
+          <a:p>
+            <a:pPr algn="l"/>
+            <a:r>
+              <a:rPr sz="1600" b="0">
+                <a:solidFill>
+                  <a:srgbClr val="3A2A24"/>
+                </a:solidFill>
+                <a:latin typeface="Yu Gothic"/>
+              </a:rPr>
+              <a:t>目標：10月30名 → 12月50名</a:t>
+            </a:r>
+          </a:p>
+        </p:txBody>
+      </p:sp>
+      <p:sp>
+        <p:nvSpPr>
+          <p:cNvPr id="10" name="Rectangle 9"/>
           <p:cNvSpPr/>
           <p:nvPr/>
         </p:nvSpPr>
         <p:spPr>
           <a:xfrm>
-            <a:off x="365760" y="822960"/>
+            <a:off x="365760" y="1828800"/>
             <a:ext cx="11430000" cy="914400"/>
           </a:xfrm>
           <a:prstGeom prst="rect">
             <a:avLst/>
           </a:prstGeom>
           <a:solidFill>
-            <a:srgbClr val="F2F2F2"/>
+            <a:srgbClr val="FFFFFF"/>
           </a:solidFill>
           <a:ln>
             <a:noFill/>
           </a:ln>
           <a:effectLst/>
         </p:spPr>
-        <p:style>
-          <a:lnRef idx="1">
-            <a:schemeClr val="accent1"/>
-          </a:lnRef>
-          <a:fillRef idx="3">
-            <a:schemeClr val="accent1"/>
-          </a:fillRef>
-          <a:effectRef idx="2">
-            <a:schemeClr val="accent1"/>
-          </a:effectRef>
-          <a:fontRef idx="minor">
-            <a:schemeClr val="lt1"/>
-          </a:fontRef>
-        </p:style>
         <p:txBody>
           <a:bodyPr rtlCol="0" anchor="ctr"/>
           <a:lstStyle/>
@@ -4924,13 +4659,13 @@
       </p:sp>
       <p:sp>
         <p:nvSpPr>
-          <p:cNvPr id="8" name="TextBox 7"/>
+          <p:cNvPr id="11" name="TextBox 10"/>
           <p:cNvSpPr txBox="1"/>
           <p:nvPr/>
         </p:nvSpPr>
         <p:spPr>
           <a:xfrm>
-            <a:off x="411480" y="841248"/>
+            <a:off x="411480" y="1847088"/>
             <a:ext cx="3017520" cy="530352"/>
           </a:xfrm>
           <a:prstGeom prst="rect">
@@ -4948,24 +4683,24 @@
             <a:r>
               <a:rPr sz="2600" b="1">
                 <a:solidFill>
-                  <a:srgbClr val="F28C38"/>
-                </a:solidFill>
-                <a:latin typeface="Yu Gothic"/>
-              </a:rPr>
-              <a:t>0名</a:t>
-            </a:r>
-          </a:p>
-        </p:txBody>
-      </p:sp>
-      <p:sp>
-        <p:nvSpPr>
-          <p:cNvPr id="9" name="TextBox 8"/>
+                  <a:srgbClr val="8C4A36"/>
+                </a:solidFill>
+                <a:latin typeface="Yu Gothic"/>
+              </a:rPr>
+              <a:t>1 / 5名</a:t>
+            </a:r>
+          </a:p>
+        </p:txBody>
+      </p:sp>
+      <p:sp>
+        <p:nvSpPr>
+          <p:cNvPr id="12" name="TextBox 11"/>
           <p:cNvSpPr txBox="1"/>
           <p:nvPr/>
         </p:nvSpPr>
         <p:spPr>
           <a:xfrm>
-            <a:off x="411480" y="1371600"/>
+            <a:off x="411480" y="2377440"/>
             <a:ext cx="3017520" cy="320040"/>
           </a:xfrm>
           <a:prstGeom prst="rect">
@@ -4983,24 +4718,24 @@
             <a:r>
               <a:rPr sz="1100" b="0">
                 <a:solidFill>
-                  <a:srgbClr val="595959"/>
-                </a:solidFill>
-                <a:latin typeface="Yu Gothic"/>
-              </a:rPr>
-              <a:t>28卒のぐるぐる接点</a:t>
-            </a:r>
-          </a:p>
-        </p:txBody>
-      </p:sp>
-      <p:sp>
-        <p:nvSpPr>
-          <p:cNvPr id="10" name="TextBox 9"/>
+                  <a:srgbClr val="7A6E66"/>
+                </a:solidFill>
+                <a:latin typeface="Yu Gothic"/>
+              </a:rPr>
+              <a:t>27卒の理系で説明会へ進んだ人</a:t>
+            </a:r>
+          </a:p>
+        </p:txBody>
+      </p:sp>
+      <p:sp>
+        <p:nvSpPr>
+          <p:cNvPr id="13" name="TextBox 12"/>
           <p:cNvSpPr txBox="1"/>
           <p:nvPr/>
         </p:nvSpPr>
         <p:spPr>
           <a:xfrm>
-            <a:off x="3657600" y="841248"/>
+            <a:off x="3657600" y="1847088"/>
             <a:ext cx="8046720" cy="877824"/>
           </a:xfrm>
           <a:prstGeom prst="rect">
@@ -5018,11 +4753,11 @@
             <a:r>
               <a:rPr sz="1600" b="0">
                 <a:solidFill>
-                  <a:srgbClr val="262626"/>
-                </a:solidFill>
-                <a:latin typeface="Yu Gothic"/>
-              </a:rPr>
-              <a:t>リストアップ表は空欄</a:t>
+                  <a:srgbClr val="3A2A24"/>
+                </a:solidFill>
+                <a:latin typeface="Yu Gothic"/>
+              </a:rPr>
+              <a:t>筑波大 地球学類のみ</a:t>
             </a:r>
           </a:p>
           <a:p>
@@ -5030,51 +4765,37 @@
             <a:r>
               <a:rPr sz="1600" b="0">
                 <a:solidFill>
-                  <a:srgbClr val="262626"/>
-                </a:solidFill>
-                <a:latin typeface="Yu Gothic"/>
-              </a:rPr>
-              <a:t>目標：10月30名 → 12月50名</a:t>
-            </a:r>
-          </a:p>
-        </p:txBody>
-      </p:sp>
-      <p:sp>
-        <p:nvSpPr>
-          <p:cNvPr id="11" name="Rectangle 10"/>
+                  <a:srgbClr val="3A2A24"/>
+                </a:solidFill>
+                <a:latin typeface="Yu Gothic"/>
+              </a:rPr>
+              <a:t>（のち内定承諾）</a:t>
+            </a:r>
+          </a:p>
+        </p:txBody>
+      </p:sp>
+      <p:sp>
+        <p:nvSpPr>
+          <p:cNvPr id="14" name="Rectangle 13"/>
           <p:cNvSpPr/>
           <p:nvPr/>
         </p:nvSpPr>
         <p:spPr>
           <a:xfrm>
-            <a:off x="365760" y="1828800"/>
+            <a:off x="365760" y="2834640"/>
             <a:ext cx="11430000" cy="914400"/>
           </a:xfrm>
           <a:prstGeom prst="rect">
             <a:avLst/>
           </a:prstGeom>
           <a:solidFill>
-            <a:srgbClr val="F2F2F2"/>
+            <a:srgbClr val="FFFFFF"/>
           </a:solidFill>
           <a:ln>
             <a:noFill/>
           </a:ln>
           <a:effectLst/>
         </p:spPr>
-        <p:style>
-          <a:lnRef idx="1">
-            <a:schemeClr val="accent1"/>
-          </a:lnRef>
-          <a:fillRef idx="3">
-            <a:schemeClr val="accent1"/>
-          </a:fillRef>
-          <a:effectRef idx="2">
-            <a:schemeClr val="accent1"/>
-          </a:effectRef>
-          <a:fontRef idx="minor">
-            <a:schemeClr val="lt1"/>
-          </a:fontRef>
-        </p:style>
         <p:txBody>
           <a:bodyPr rtlCol="0" anchor="ctr"/>
           <a:lstStyle/>
@@ -5085,13 +4806,13 @@
       </p:sp>
       <p:sp>
         <p:nvSpPr>
-          <p:cNvPr id="12" name="TextBox 11"/>
+          <p:cNvPr id="15" name="TextBox 14"/>
           <p:cNvSpPr txBox="1"/>
           <p:nvPr/>
         </p:nvSpPr>
         <p:spPr>
           <a:xfrm>
-            <a:off x="411480" y="1847088"/>
+            <a:off x="411480" y="2852928"/>
             <a:ext cx="3017520" cy="530352"/>
           </a:xfrm>
           <a:prstGeom prst="rect">
@@ -5109,24 +4830,24 @@
             <a:r>
               <a:rPr sz="2600" b="1">
                 <a:solidFill>
-                  <a:srgbClr val="F28C38"/>
-                </a:solidFill>
-                <a:latin typeface="Yu Gothic"/>
-              </a:rPr>
-              <a:t>1 / 5名</a:t>
-            </a:r>
-          </a:p>
-        </p:txBody>
-      </p:sp>
-      <p:sp>
-        <p:nvSpPr>
-          <p:cNvPr id="13" name="TextBox 12"/>
+                  <a:srgbClr val="8C4A36"/>
+                </a:solidFill>
+                <a:latin typeface="Yu Gothic"/>
+              </a:rPr>
+              <a:t>理念で承諾</a:t>
+            </a:r>
+          </a:p>
+        </p:txBody>
+      </p:sp>
+      <p:sp>
+        <p:nvSpPr>
+          <p:cNvPr id="16" name="TextBox 15"/>
           <p:cNvSpPr txBox="1"/>
           <p:nvPr/>
         </p:nvSpPr>
         <p:spPr>
           <a:xfrm>
-            <a:off x="411480" y="2377440"/>
+            <a:off x="411480" y="3383280"/>
             <a:ext cx="3017520" cy="320040"/>
           </a:xfrm>
           <a:prstGeom prst="rect">
@@ -5144,24 +4865,24 @@
             <a:r>
               <a:rPr sz="1100" b="0">
                 <a:solidFill>
-                  <a:srgbClr val="595959"/>
-                </a:solidFill>
-                <a:latin typeface="Yu Gothic"/>
-              </a:rPr>
-              <a:t>27卒の理系で説明会へ進んだ人</a:t>
-            </a:r>
-          </a:p>
-        </p:txBody>
-      </p:sp>
-      <p:sp>
-        <p:nvSpPr>
-          <p:cNvPr id="14" name="TextBox 13"/>
+                  <a:srgbClr val="7A6E66"/>
+                </a:solidFill>
+                <a:latin typeface="Yu Gothic"/>
+              </a:rPr>
+              <a:t>成功事例</a:t>
+            </a:r>
+          </a:p>
+        </p:txBody>
+      </p:sp>
+      <p:sp>
+        <p:nvSpPr>
+          <p:cNvPr id="17" name="TextBox 16"/>
           <p:cNvSpPr txBox="1"/>
           <p:nvPr/>
         </p:nvSpPr>
         <p:spPr>
           <a:xfrm>
-            <a:off x="3657600" y="1847088"/>
+            <a:off x="3657600" y="2852928"/>
             <a:ext cx="8046720" cy="877824"/>
           </a:xfrm>
           <a:prstGeom prst="rect">
@@ -5179,11 +4900,11 @@
             <a:r>
               <a:rPr sz="1600" b="0">
                 <a:solidFill>
-                  <a:srgbClr val="262626"/>
-                </a:solidFill>
-                <a:latin typeface="Yu Gothic"/>
-              </a:rPr>
-              <a:t>筑波大 地球学類のみ</a:t>
+                  <a:srgbClr val="3A2A24"/>
+                </a:solidFill>
+                <a:latin typeface="Yu Gothic"/>
+              </a:rPr>
+              <a:t>「地球資源を輝かせていく」に共感</a:t>
             </a:r>
           </a:p>
           <a:p>
@@ -5191,51 +4912,37 @@
             <a:r>
               <a:rPr sz="1600" b="0">
                 <a:solidFill>
-                  <a:srgbClr val="262626"/>
-                </a:solidFill>
-                <a:latin typeface="Yu Gothic"/>
-              </a:rPr>
-              <a:t>（のち内定承諾）</a:t>
-            </a:r>
-          </a:p>
-        </p:txBody>
-      </p:sp>
-      <p:sp>
-        <p:nvSpPr>
-          <p:cNvPr id="15" name="Rectangle 14"/>
+                  <a:srgbClr val="3A2A24"/>
+                </a:solidFill>
+                <a:latin typeface="Yu Gothic"/>
+              </a:rPr>
+              <a:t>ISに参加して承諾</a:t>
+            </a:r>
+          </a:p>
+        </p:txBody>
+      </p:sp>
+      <p:sp>
+        <p:nvSpPr>
+          <p:cNvPr id="18" name="Rectangle 17"/>
           <p:cNvSpPr/>
           <p:nvPr/>
         </p:nvSpPr>
         <p:spPr>
           <a:xfrm>
-            <a:off x="365760" y="2834640"/>
+            <a:off x="365760" y="3840480"/>
             <a:ext cx="11430000" cy="914400"/>
           </a:xfrm>
           <a:prstGeom prst="rect">
             <a:avLst/>
           </a:prstGeom>
           <a:solidFill>
-            <a:srgbClr val="F2F2F2"/>
+            <a:srgbClr val="FFFFFF"/>
           </a:solidFill>
           <a:ln>
             <a:noFill/>
           </a:ln>
           <a:effectLst/>
         </p:spPr>
-        <p:style>
-          <a:lnRef idx="1">
-            <a:schemeClr val="accent1"/>
-          </a:lnRef>
-          <a:fillRef idx="3">
-            <a:schemeClr val="accent1"/>
-          </a:fillRef>
-          <a:effectRef idx="2">
-            <a:schemeClr val="accent1"/>
-          </a:effectRef>
-          <a:fontRef idx="minor">
-            <a:schemeClr val="lt1"/>
-          </a:fontRef>
-        </p:style>
         <p:txBody>
           <a:bodyPr rtlCol="0" anchor="ctr"/>
           <a:lstStyle/>
@@ -5246,13 +4953,13 @@
       </p:sp>
       <p:sp>
         <p:nvSpPr>
-          <p:cNvPr id="16" name="TextBox 15"/>
+          <p:cNvPr id="19" name="TextBox 18"/>
           <p:cNvSpPr txBox="1"/>
           <p:nvPr/>
         </p:nvSpPr>
         <p:spPr>
           <a:xfrm>
-            <a:off x="411480" y="2852928"/>
+            <a:off x="411480" y="3858768"/>
             <a:ext cx="3017520" cy="530352"/>
           </a:xfrm>
           <a:prstGeom prst="rect">
@@ -5270,24 +4977,24 @@
             <a:r>
               <a:rPr sz="2600" b="1">
                 <a:solidFill>
-                  <a:srgbClr val="F28C38"/>
-                </a:solidFill>
-                <a:latin typeface="Yu Gothic"/>
-              </a:rPr>
-              <a:t>理念で承諾</a:t>
-            </a:r>
-          </a:p>
-        </p:txBody>
-      </p:sp>
-      <p:sp>
-        <p:nvSpPr>
-          <p:cNvPr id="17" name="TextBox 16"/>
+                  <a:srgbClr val="8C4A36"/>
+                </a:solidFill>
+                <a:latin typeface="Yu Gothic"/>
+              </a:rPr>
+              <a:t>8 / 9名</a:t>
+            </a:r>
+          </a:p>
+        </p:txBody>
+      </p:sp>
+      <p:sp>
+        <p:nvSpPr>
+          <p:cNvPr id="20" name="TextBox 19"/>
           <p:cNvSpPr txBox="1"/>
           <p:nvPr/>
         </p:nvSpPr>
         <p:spPr>
           <a:xfrm>
-            <a:off x="411480" y="3383280"/>
+            <a:off x="411480" y="4389120"/>
             <a:ext cx="3017520" cy="320040"/>
           </a:xfrm>
           <a:prstGeom prst="rect">
@@ -5305,24 +5012,24 @@
             <a:r>
               <a:rPr sz="1100" b="0">
                 <a:solidFill>
-                  <a:srgbClr val="595959"/>
-                </a:solidFill>
-                <a:latin typeface="Yu Gothic"/>
-              </a:rPr>
-              <a:t>成功事例</a:t>
-            </a:r>
-          </a:p>
-        </p:txBody>
-      </p:sp>
-      <p:sp>
-        <p:nvSpPr>
-          <p:cNvPr id="18" name="TextBox 17"/>
+                  <a:srgbClr val="7A6E66"/>
+                </a:solidFill>
+                <a:latin typeface="Yu Gothic"/>
+              </a:rPr>
+              <a:t>リスト学生の関心テーマ</a:t>
+            </a:r>
+          </a:p>
+        </p:txBody>
+      </p:sp>
+      <p:sp>
+        <p:nvSpPr>
+          <p:cNvPr id="21" name="TextBox 20"/>
           <p:cNvSpPr txBox="1"/>
           <p:nvPr/>
         </p:nvSpPr>
         <p:spPr>
           <a:xfrm>
-            <a:off x="3657600" y="2852928"/>
+            <a:off x="3657600" y="3858768"/>
             <a:ext cx="8046720" cy="877824"/>
           </a:xfrm>
           <a:prstGeom prst="rect">
@@ -5340,11 +5047,11 @@
             <a:r>
               <a:rPr sz="1600" b="0">
                 <a:solidFill>
-                  <a:srgbClr val="262626"/>
-                </a:solidFill>
-                <a:latin typeface="Yu Gothic"/>
-              </a:rPr>
-              <a:t>「地球資源を輝かせていく」に共感</a:t>
+                  <a:srgbClr val="3A2A24"/>
+                </a:solidFill>
+                <a:latin typeface="Yu Gothic"/>
+              </a:rPr>
+              <a:t>自然と共生・循環型社会</a:t>
             </a:r>
           </a:p>
           <a:p>
@@ -5352,221 +5059,46 @@
             <a:r>
               <a:rPr sz="1600" b="0">
                 <a:solidFill>
-                  <a:srgbClr val="262626"/>
-                </a:solidFill>
-                <a:latin typeface="Yu Gothic"/>
-              </a:rPr>
-              <a:t>ISに参加して承諾</a:t>
-            </a:r>
-          </a:p>
-        </p:txBody>
-      </p:sp>
-      <p:sp>
-        <p:nvSpPr>
-          <p:cNvPr id="19" name="Rectangle 18"/>
+                  <a:srgbClr val="3A2A24"/>
+                </a:solidFill>
+                <a:latin typeface="Yu Gothic"/>
+              </a:rPr>
+              <a:t>清峰の最重要テーマと一致</a:t>
+            </a:r>
+          </a:p>
+        </p:txBody>
+      </p:sp>
+      <p:sp>
+        <p:nvSpPr>
+          <p:cNvPr id="22" name="Rectangle 21"/>
           <p:cNvSpPr/>
           <p:nvPr/>
         </p:nvSpPr>
         <p:spPr>
           <a:xfrm>
-            <a:off x="365760" y="3840480"/>
-            <a:ext cx="11430000" cy="914400"/>
-          </a:xfrm>
-          <a:prstGeom prst="rect">
-            <a:avLst/>
-          </a:prstGeom>
-          <a:solidFill>
-            <a:srgbClr val="F2F2F2"/>
+            <a:off x="365760" y="4937760"/>
+            <a:ext cx="11430000" cy="1234440"/>
+          </a:xfrm>
+          <a:prstGeom prst="rect">
+            <a:avLst/>
+          </a:prstGeom>
+          <a:solidFill>
+            <a:srgbClr val="FFE0D0"/>
           </a:solidFill>
           <a:ln>
             <a:noFill/>
           </a:ln>
           <a:effectLst/>
         </p:spPr>
-        <p:style>
-          <a:lnRef idx="1">
-            <a:schemeClr val="accent1"/>
-          </a:lnRef>
-          <a:fillRef idx="3">
-            <a:schemeClr val="accent1"/>
-          </a:fillRef>
-          <a:effectRef idx="2">
-            <a:schemeClr val="accent1"/>
-          </a:effectRef>
-          <a:fontRef idx="minor">
-            <a:schemeClr val="lt1"/>
-          </a:fontRef>
-        </p:style>
-        <p:txBody>
-          <a:bodyPr rtlCol="0" anchor="ctr"/>
-          <a:lstStyle/>
-          <a:p>
-            <a:pPr algn="ctr"/>
-          </a:p>
-        </p:txBody>
-      </p:sp>
-      <p:sp>
-        <p:nvSpPr>
-          <p:cNvPr id="20" name="TextBox 19"/>
-          <p:cNvSpPr txBox="1"/>
-          <p:nvPr/>
-        </p:nvSpPr>
-        <p:spPr>
-          <a:xfrm>
-            <a:off x="411480" y="3858768"/>
-            <a:ext cx="3017520" cy="530352"/>
-          </a:xfrm>
-          <a:prstGeom prst="rect">
-            <a:avLst/>
-          </a:prstGeom>
-          <a:noFill/>
-        </p:spPr>
-        <p:txBody>
-          <a:bodyPr wrap="square" anchor="ctr" lIns="73152" rIns="73152">
-            <a:spAutoFit/>
-          </a:bodyPr>
-          <a:lstStyle/>
-          <a:p>
-            <a:pPr algn="ctr"/>
-            <a:r>
-              <a:rPr sz="2600" b="1">
-                <a:solidFill>
-                  <a:srgbClr val="F28C38"/>
-                </a:solidFill>
-                <a:latin typeface="Yu Gothic"/>
-              </a:rPr>
-              <a:t>8 / 9名</a:t>
-            </a:r>
-          </a:p>
-        </p:txBody>
-      </p:sp>
-      <p:sp>
-        <p:nvSpPr>
-          <p:cNvPr id="21" name="TextBox 20"/>
-          <p:cNvSpPr txBox="1"/>
-          <p:nvPr/>
-        </p:nvSpPr>
-        <p:spPr>
-          <a:xfrm>
-            <a:off x="411480" y="4389120"/>
-            <a:ext cx="3017520" cy="320040"/>
-          </a:xfrm>
-          <a:prstGeom prst="rect">
-            <a:avLst/>
-          </a:prstGeom>
-          <a:noFill/>
-        </p:spPr>
-        <p:txBody>
-          <a:bodyPr wrap="square" anchor="t" lIns="73152" rIns="73152">
-            <a:spAutoFit/>
-          </a:bodyPr>
-          <a:lstStyle/>
-          <a:p>
-            <a:pPr algn="ctr"/>
-            <a:r>
-              <a:rPr sz="1100" b="0">
-                <a:solidFill>
-                  <a:srgbClr val="595959"/>
-                </a:solidFill>
-                <a:latin typeface="Yu Gothic"/>
-              </a:rPr>
-              <a:t>リスト学生の関心テーマ</a:t>
-            </a:r>
-          </a:p>
-        </p:txBody>
-      </p:sp>
-      <p:sp>
-        <p:nvSpPr>
-          <p:cNvPr id="22" name="TextBox 21"/>
-          <p:cNvSpPr txBox="1"/>
-          <p:nvPr/>
-        </p:nvSpPr>
-        <p:spPr>
-          <a:xfrm>
-            <a:off x="3657600" y="3858768"/>
-            <a:ext cx="8046720" cy="877824"/>
-          </a:xfrm>
-          <a:prstGeom prst="rect">
-            <a:avLst/>
-          </a:prstGeom>
-          <a:noFill/>
-        </p:spPr>
-        <p:txBody>
-          <a:bodyPr wrap="square" anchor="ctr" lIns="73152" rIns="73152">
-            <a:spAutoFit/>
-          </a:bodyPr>
+        <p:txBody>
+          <a:bodyPr rtlCol="0" anchor="t" wrap="square" lIns="182880" rIns="182880"/>
           <a:lstStyle/>
           <a:p>
             <a:pPr algn="l"/>
             <a:r>
-              <a:rPr sz="1600" b="0">
-                <a:solidFill>
-                  <a:srgbClr val="262626"/>
-                </a:solidFill>
-                <a:latin typeface="Yu Gothic"/>
-              </a:rPr>
-              <a:t>自然と共生・循環型社会</a:t>
-            </a:r>
-          </a:p>
-          <a:p>
-            <a:pPr algn="l"/>
-            <a:r>
-              <a:rPr sz="1600" b="0">
-                <a:solidFill>
-                  <a:srgbClr val="262626"/>
-                </a:solidFill>
-                <a:latin typeface="Yu Gothic"/>
-              </a:rPr>
-              <a:t>清峰の最重要テーマと一致</a:t>
-            </a:r>
-          </a:p>
-        </p:txBody>
-      </p:sp>
-      <p:sp>
-        <p:nvSpPr>
-          <p:cNvPr id="23" name="Rectangle 22"/>
-          <p:cNvSpPr/>
-          <p:nvPr/>
-        </p:nvSpPr>
-        <p:spPr>
-          <a:xfrm>
-            <a:off x="365760" y="4937760"/>
-            <a:ext cx="11430000" cy="1234440"/>
-          </a:xfrm>
-          <a:prstGeom prst="rect">
-            <a:avLst/>
-          </a:prstGeom>
-          <a:solidFill>
-            <a:srgbClr val="FBE3CB"/>
-          </a:solidFill>
-          <a:ln>
-            <a:noFill/>
-          </a:ln>
-          <a:effectLst/>
-        </p:spPr>
-        <p:style>
-          <a:lnRef idx="1">
-            <a:schemeClr val="accent1"/>
-          </a:lnRef>
-          <a:fillRef idx="3">
-            <a:schemeClr val="accent1"/>
-          </a:fillRef>
-          <a:effectRef idx="2">
-            <a:schemeClr val="accent1"/>
-          </a:effectRef>
-          <a:fontRef idx="minor">
-            <a:schemeClr val="lt1"/>
-          </a:fontRef>
-        </p:style>
-        <p:txBody>
-          <a:bodyPr rtlCol="0" anchor="t" wrap="square" lIns="182880" rIns="182880"/>
-          <a:lstStyle/>
-          <a:p>
-            <a:pPr algn="l"/>
-            <a:r>
               <a:rPr sz="1600" b="1">
                 <a:solidFill>
-                  <a:srgbClr val="1F497D"/>
+                  <a:srgbClr val="F06142"/>
                 </a:solidFill>
                 <a:latin typeface="Yu Gothic"/>
               </a:rPr>
@@ -5582,7 +5114,7 @@
             <a:r>
               <a:rPr sz="1600" b="0">
                 <a:solidFill>
-                  <a:srgbClr val="262626"/>
+                  <a:srgbClr val="3A2A24"/>
                 </a:solidFill>
                 <a:latin typeface="Yu Gothic"/>
               </a:rPr>
@@ -5598,7 +5130,7 @@
             <a:r>
               <a:rPr sz="1600" b="0">
                 <a:solidFill>
-                  <a:srgbClr val="262626"/>
+                  <a:srgbClr val="3A2A24"/>
                 </a:solidFill>
                 <a:latin typeface="Yu Gothic"/>
               </a:rPr>
@@ -5618,6 +5150,14 @@
 <file path=ppt/slides/slide3.xml><?xml version="1.0" encoding="utf-8"?>
 <p:sld xmlns:a="http://schemas.openxmlformats.org/drawingml/2006/main" xmlns:p="http://schemas.openxmlformats.org/presentationml/2006/main" xmlns:r="http://schemas.openxmlformats.org/officeDocument/2006/relationships">
   <p:cSld>
+    <p:bg>
+      <p:bgPr>
+        <a:solidFill>
+          <a:srgbClr val="FFEEE4"/>
+        </a:solidFill>
+        <a:effectLst/>
+      </p:bgPr>
+    </p:bg>
     <p:spTree>
       <p:nvGrpSpPr>
         <p:cNvPr id="1" name=""/>
@@ -5633,42 +5173,20 @@
         </p:nvSpPr>
         <p:spPr>
           <a:xfrm>
-            <a:off x="54864" y="64008"/>
-            <a:ext cx="12079224" cy="521207"/>
-          </a:xfrm>
-          <a:prstGeom prst="rect">
-            <a:avLst/>
-          </a:prstGeom>
-          <a:gradFill rotWithShape="1">
-            <a:gsLst>
-              <a:gs pos="0">
-                <a:srgbClr val="F28C38"/>
-              </a:gs>
-              <a:gs pos="100000">
-                <a:srgbClr val="FBE3CB"/>
-              </a:gs>
-            </a:gsLst>
-            <a:lin scaled="0" ang="0"/>
-          </a:gradFill>
+            <a:off x="0" y="6675120"/>
+            <a:ext cx="12191695" cy="182880"/>
+          </a:xfrm>
+          <a:prstGeom prst="rect">
+            <a:avLst/>
+          </a:prstGeom>
+          <a:solidFill>
+            <a:srgbClr val="FF5D3B"/>
+          </a:solidFill>
           <a:ln>
             <a:noFill/>
           </a:ln>
           <a:effectLst/>
         </p:spPr>
-        <p:style>
-          <a:lnRef idx="1">
-            <a:schemeClr val="accent1"/>
-          </a:lnRef>
-          <a:fillRef idx="3">
-            <a:schemeClr val="accent1"/>
-          </a:fillRef>
-          <a:effectRef idx="2">
-            <a:schemeClr val="accent1"/>
-          </a:effectRef>
-          <a:fontRef idx="minor">
-            <a:schemeClr val="lt1"/>
-          </a:fontRef>
-        </p:style>
         <p:txBody>
           <a:bodyPr rtlCol="0" anchor="ctr"/>
           <a:lstStyle/>
@@ -5685,170 +5203,134 @@
         </p:nvSpPr>
         <p:spPr>
           <a:xfrm>
-            <a:off x="54864" y="6629400"/>
-            <a:ext cx="12079224" cy="182880"/>
-          </a:xfrm>
-          <a:prstGeom prst="rect">
-            <a:avLst/>
-          </a:prstGeom>
-          <a:gradFill rotWithShape="1">
-            <a:gsLst>
-              <a:gs pos="0">
-                <a:srgbClr val="F28C38"/>
-              </a:gs>
-              <a:gs pos="100000">
-                <a:srgbClr val="FBE3CB"/>
-              </a:gs>
-            </a:gsLst>
-            <a:lin scaled="0" ang="0"/>
-          </a:gradFill>
+            <a:off x="356616" y="137160"/>
+            <a:ext cx="2103120" cy="365760"/>
+          </a:xfrm>
+          <a:prstGeom prst="rect">
+            <a:avLst/>
+          </a:prstGeom>
+          <a:solidFill>
+            <a:srgbClr val="FF5D3B"/>
+          </a:solidFill>
           <a:ln>
             <a:noFill/>
           </a:ln>
           <a:effectLst/>
         </p:spPr>
-        <p:style>
-          <a:lnRef idx="1">
-            <a:schemeClr val="accent1"/>
-          </a:lnRef>
-          <a:fillRef idx="3">
-            <a:schemeClr val="accent1"/>
-          </a:fillRef>
-          <a:effectRef idx="2">
-            <a:schemeClr val="accent1"/>
-          </a:effectRef>
-          <a:fontRef idx="minor">
-            <a:schemeClr val="lt1"/>
-          </a:fontRef>
-        </p:style>
-        <p:txBody>
-          <a:bodyPr rtlCol="0" anchor="ctr"/>
+        <p:txBody>
+          <a:bodyPr rtlCol="0" anchor="ctr" wrap="square" lIns="73152" rIns="73152"/>
           <a:lstStyle/>
           <a:p>
             <a:pPr algn="ctr"/>
-          </a:p>
-        </p:txBody>
-      </p:sp>
-      <p:sp>
-        <p:nvSpPr>
-          <p:cNvPr id="4" name="Rectangle 3"/>
+            <a:r>
+              <a:rPr sz="1300" b="1">
+                <a:solidFill>
+                  <a:srgbClr val="FFFFFF"/>
+                </a:solidFill>
+                <a:latin typeface="Yu Gothic"/>
+              </a:rPr>
+              <a:t>ターゲット像</a:t>
+            </a:r>
+          </a:p>
+        </p:txBody>
+      </p:sp>
+      <p:sp>
+        <p:nvSpPr>
+          <p:cNvPr id="4" name="TextBox 3"/>
+          <p:cNvSpPr txBox="1"/>
+          <p:nvPr/>
+        </p:nvSpPr>
+        <p:spPr>
+          <a:xfrm>
+            <a:off x="2606040" y="109728"/>
+            <a:ext cx="9144000" cy="420624"/>
+          </a:xfrm>
+          <a:prstGeom prst="rect">
+            <a:avLst/>
+          </a:prstGeom>
+          <a:noFill/>
+        </p:spPr>
+        <p:txBody>
+          <a:bodyPr wrap="square" anchor="ctr" lIns="73152" rIns="73152">
+            <a:spAutoFit/>
+          </a:bodyPr>
+          <a:lstStyle/>
+          <a:p>
+            <a:pPr algn="l"/>
+            <a:r>
+              <a:rPr sz="2000" b="1">
+                <a:solidFill>
+                  <a:srgbClr val="F06142"/>
+                </a:solidFill>
+                <a:latin typeface="Yu Gothic"/>
+              </a:rPr>
+              <a:t>ぐるぐるターゲット像：3タイプ</a:t>
+            </a:r>
+          </a:p>
+        </p:txBody>
+      </p:sp>
+      <p:sp>
+        <p:nvSpPr>
+          <p:cNvPr id="5" name="TextBox 4"/>
+          <p:cNvSpPr txBox="1"/>
+          <p:nvPr/>
+        </p:nvSpPr>
+        <p:spPr>
+          <a:xfrm>
+            <a:off x="274320" y="6291072"/>
+            <a:ext cx="11612880" cy="310896"/>
+          </a:xfrm>
+          <a:prstGeom prst="rect">
+            <a:avLst/>
+          </a:prstGeom>
+          <a:noFill/>
+        </p:spPr>
+        <p:txBody>
+          <a:bodyPr wrap="square" anchor="t" lIns="73152" rIns="73152">
+            <a:spAutoFit/>
+          </a:bodyPr>
+          <a:lstStyle/>
+          <a:p>
+            <a:pPr algn="l"/>
+            <a:r>
+              <a:rPr sz="900" b="0">
+                <a:solidFill>
+                  <a:srgbClr val="7A6E66"/>
+                </a:solidFill>
+                <a:latin typeface="Yu Gothic"/>
+              </a:rPr>
+              <a:t>出典：具体的なペルソナ像（visionsユーザー）/ 既存ペルソナ①〜③。タイプ分けは当方の整理（案）</a:t>
+            </a:r>
+          </a:p>
+        </p:txBody>
+      </p:sp>
+      <p:sp>
+        <p:nvSpPr>
+          <p:cNvPr id="6" name="Rectangle 5"/>
           <p:cNvSpPr/>
           <p:nvPr/>
         </p:nvSpPr>
         <p:spPr>
           <a:xfrm>
-            <a:off x="356616" y="155448"/>
-            <a:ext cx="2103120" cy="329184"/>
-          </a:xfrm>
-          <a:prstGeom prst="rect">
-            <a:avLst/>
-          </a:prstGeom>
-          <a:solidFill>
-            <a:srgbClr val="1F497D"/>
+            <a:off x="365760" y="777240"/>
+            <a:ext cx="3749039" cy="4343400"/>
+          </a:xfrm>
+          <a:prstGeom prst="rect">
+            <a:avLst/>
+          </a:prstGeom>
+          <a:solidFill>
+            <a:srgbClr val="FFFFFF"/>
           </a:solidFill>
           <a:ln>
             <a:noFill/>
           </a:ln>
           <a:effectLst/>
         </p:spPr>
-        <p:style>
-          <a:lnRef idx="1">
-            <a:schemeClr val="accent1"/>
-          </a:lnRef>
-          <a:fillRef idx="3">
-            <a:schemeClr val="accent1"/>
-          </a:fillRef>
-          <a:effectRef idx="2">
-            <a:schemeClr val="accent1"/>
-          </a:effectRef>
-          <a:fontRef idx="minor">
-            <a:schemeClr val="lt1"/>
-          </a:fontRef>
-        </p:style>
-        <p:txBody>
-          <a:bodyPr rtlCol="0" anchor="ctr" wrap="square" lIns="73152" rIns="73152"/>
+        <p:txBody>
+          <a:bodyPr rtlCol="0" anchor="ctr"/>
           <a:lstStyle/>
           <a:p>
             <a:pPr algn="ctr"/>
-            <a:r>
-              <a:rPr sz="1300" b="1">
-                <a:solidFill>
-                  <a:srgbClr val="FFFFFF"/>
-                </a:solidFill>
-                <a:latin typeface="Yu Gothic"/>
-              </a:rPr>
-              <a:t>ターゲット像</a:t>
-            </a:r>
-          </a:p>
-        </p:txBody>
-      </p:sp>
-      <p:sp>
-        <p:nvSpPr>
-          <p:cNvPr id="5" name="TextBox 4"/>
-          <p:cNvSpPr txBox="1"/>
-          <p:nvPr/>
-        </p:nvSpPr>
-        <p:spPr>
-          <a:xfrm>
-            <a:off x="2606040" y="128016"/>
-            <a:ext cx="9144000" cy="365760"/>
-          </a:xfrm>
-          <a:prstGeom prst="rect">
-            <a:avLst/>
-          </a:prstGeom>
-          <a:noFill/>
-        </p:spPr>
-        <p:txBody>
-          <a:bodyPr wrap="square" anchor="ctr" lIns="73152" rIns="73152">
-            <a:spAutoFit/>
-          </a:bodyPr>
-          <a:lstStyle/>
-          <a:p>
-            <a:pPr algn="l"/>
-            <a:r>
-              <a:rPr sz="1700" b="1">
-                <a:solidFill>
-                  <a:srgbClr val="262626"/>
-                </a:solidFill>
-                <a:latin typeface="Yu Gothic"/>
-              </a:rPr>
-              <a:t>ぐるぐるターゲット像：3タイプ</a:t>
-            </a:r>
-          </a:p>
-        </p:txBody>
-      </p:sp>
-      <p:sp>
-        <p:nvSpPr>
-          <p:cNvPr id="6" name="TextBox 5"/>
-          <p:cNvSpPr txBox="1"/>
-          <p:nvPr/>
-        </p:nvSpPr>
-        <p:spPr>
-          <a:xfrm>
-            <a:off x="274320" y="6291072"/>
-            <a:ext cx="11612880" cy="310896"/>
-          </a:xfrm>
-          <a:prstGeom prst="rect">
-            <a:avLst/>
-          </a:prstGeom>
-          <a:noFill/>
-        </p:spPr>
-        <p:txBody>
-          <a:bodyPr wrap="square" anchor="t" lIns="73152" rIns="73152">
-            <a:spAutoFit/>
-          </a:bodyPr>
-          <a:lstStyle/>
-          <a:p>
-            <a:pPr algn="l"/>
-            <a:r>
-              <a:rPr sz="900" b="0">
-                <a:solidFill>
-                  <a:srgbClr val="595959"/>
-                </a:solidFill>
-                <a:latin typeface="Yu Gothic"/>
-              </a:rPr>
-              <a:t>出典：具体的なペルソナ像（visionsユーザー）/ 既存ペルソナ①〜③。タイプ分けは当方の整理（案）</a:t>
-            </a:r>
           </a:p>
         </p:txBody>
       </p:sp>
@@ -5861,77 +5343,19 @@
         <p:spPr>
           <a:xfrm>
             <a:off x="365760" y="777240"/>
-            <a:ext cx="3749039" cy="4343400"/>
-          </a:xfrm>
-          <a:prstGeom prst="rect">
-            <a:avLst/>
-          </a:prstGeom>
-          <a:solidFill>
-            <a:srgbClr val="F2F2F2"/>
+            <a:ext cx="3749039" cy="548640"/>
+          </a:xfrm>
+          <a:prstGeom prst="rect">
+            <a:avLst/>
+          </a:prstGeom>
+          <a:solidFill>
+            <a:srgbClr val="F06142"/>
           </a:solidFill>
           <a:ln>
             <a:noFill/>
           </a:ln>
           <a:effectLst/>
         </p:spPr>
-        <p:style>
-          <a:lnRef idx="1">
-            <a:schemeClr val="accent1"/>
-          </a:lnRef>
-          <a:fillRef idx="3">
-            <a:schemeClr val="accent1"/>
-          </a:fillRef>
-          <a:effectRef idx="2">
-            <a:schemeClr val="accent1"/>
-          </a:effectRef>
-          <a:fontRef idx="minor">
-            <a:schemeClr val="lt1"/>
-          </a:fontRef>
-        </p:style>
-        <p:txBody>
-          <a:bodyPr rtlCol="0" anchor="ctr"/>
-          <a:lstStyle/>
-          <a:p>
-            <a:pPr algn="ctr"/>
-          </a:p>
-        </p:txBody>
-      </p:sp>
-      <p:sp>
-        <p:nvSpPr>
-          <p:cNvPr id="8" name="Rectangle 7"/>
-          <p:cNvSpPr/>
-          <p:nvPr/>
-        </p:nvSpPr>
-        <p:spPr>
-          <a:xfrm>
-            <a:off x="365760" y="777240"/>
-            <a:ext cx="3749039" cy="548640"/>
-          </a:xfrm>
-          <a:prstGeom prst="rect">
-            <a:avLst/>
-          </a:prstGeom>
-          <a:solidFill>
-            <a:srgbClr val="1F497D"/>
-          </a:solidFill>
-          <a:ln>
-            <a:noFill/>
-          </a:ln>
-          <a:effectLst/>
-        </p:spPr>
-        <p:style>
-          <a:lnRef idx="1">
-            <a:schemeClr val="accent1"/>
-          </a:lnRef>
-          <a:fillRef idx="3">
-            <a:schemeClr val="accent1"/>
-          </a:fillRef>
-          <a:effectRef idx="2">
-            <a:schemeClr val="accent1"/>
-          </a:effectRef>
-          <a:fontRef idx="minor">
-            <a:schemeClr val="lt1"/>
-          </a:fontRef>
-        </p:style>
         <p:txBody>
           <a:bodyPr rtlCol="0" anchor="ctr" wrap="square" lIns="73152" rIns="73152"/>
           <a:lstStyle/>
@@ -5951,7 +5375,7 @@
       </p:sp>
       <p:sp>
         <p:nvSpPr>
-          <p:cNvPr id="9" name="TextBox 8"/>
+          <p:cNvPr id="8" name="TextBox 7"/>
           <p:cNvSpPr txBox="1"/>
           <p:nvPr/>
         </p:nvSpPr>
@@ -5975,7 +5399,7 @@
             <a:r>
               <a:rPr sz="1200" b="1">
                 <a:solidFill>
-                  <a:srgbClr val="1F497D"/>
+                  <a:srgbClr val="F06142"/>
                 </a:solidFill>
                 <a:latin typeface="Yu Gothic"/>
               </a:rPr>
@@ -5986,7 +5410,7 @@
       </p:sp>
       <p:sp>
         <p:nvSpPr>
-          <p:cNvPr id="10" name="TextBox 9"/>
+          <p:cNvPr id="9" name="TextBox 8"/>
           <p:cNvSpPr txBox="1"/>
           <p:nvPr/>
         </p:nvSpPr>
@@ -6010,7 +5434,7 @@
             <a:r>
               <a:rPr sz="1600" b="1">
                 <a:solidFill>
-                  <a:srgbClr val="262626"/>
+                  <a:srgbClr val="3A2A24"/>
                 </a:solidFill>
                 <a:latin typeface="Yu Gothic"/>
               </a:rPr>
@@ -6021,7 +5445,7 @@
       </p:sp>
       <p:sp>
         <p:nvSpPr>
-          <p:cNvPr id="11" name="TextBox 10"/>
+          <p:cNvPr id="10" name="TextBox 9"/>
           <p:cNvSpPr txBox="1"/>
           <p:nvPr/>
         </p:nvSpPr>
@@ -6045,7 +5469,7 @@
             <a:r>
               <a:rPr sz="1100" b="0">
                 <a:solidFill>
-                  <a:srgbClr val="595959"/>
+                  <a:srgbClr val="7A6E66"/>
                 </a:solidFill>
                 <a:latin typeface="Yu Gothic"/>
               </a:rPr>
@@ -6056,7 +5480,7 @@
       </p:sp>
       <p:sp>
         <p:nvSpPr>
-          <p:cNvPr id="12" name="TextBox 11"/>
+          <p:cNvPr id="11" name="TextBox 10"/>
           <p:cNvSpPr txBox="1"/>
           <p:nvPr/>
         </p:nvSpPr>
@@ -6084,7 +5508,7 @@
             <a:r>
               <a:rPr sz="1600" b="0">
                 <a:solidFill>
-                  <a:srgbClr val="262626"/>
+                  <a:srgbClr val="3A2A24"/>
                 </a:solidFill>
                 <a:latin typeface="Yu Gothic"/>
               </a:rPr>
@@ -6100,7 +5524,7 @@
             <a:r>
               <a:rPr sz="1600" b="0">
                 <a:solidFill>
-                  <a:srgbClr val="262626"/>
+                  <a:srgbClr val="3A2A24"/>
                 </a:solidFill>
                 <a:latin typeface="Yu Gothic"/>
               </a:rPr>
@@ -6116,7 +5540,7 @@
             <a:r>
               <a:rPr sz="1600" b="0">
                 <a:solidFill>
-                  <a:srgbClr val="262626"/>
+                  <a:srgbClr val="3A2A24"/>
                 </a:solidFill>
                 <a:latin typeface="Yu Gothic"/>
               </a:rPr>
@@ -6127,7 +5551,7 @@
       </p:sp>
       <p:sp>
         <p:nvSpPr>
-          <p:cNvPr id="13" name="Rectangle 12"/>
+          <p:cNvPr id="12" name="Rectangle 11"/>
           <p:cNvSpPr/>
           <p:nvPr/>
         </p:nvSpPr>
@@ -6140,27 +5564,13 @@
             <a:avLst/>
           </a:prstGeom>
           <a:solidFill>
-            <a:srgbClr val="F2F2F2"/>
+            <a:srgbClr val="FFFFFF"/>
           </a:solidFill>
           <a:ln>
             <a:noFill/>
           </a:ln>
           <a:effectLst/>
         </p:spPr>
-        <p:style>
-          <a:lnRef idx="1">
-            <a:schemeClr val="accent1"/>
-          </a:lnRef>
-          <a:fillRef idx="3">
-            <a:schemeClr val="accent1"/>
-          </a:fillRef>
-          <a:effectRef idx="2">
-            <a:schemeClr val="accent1"/>
-          </a:effectRef>
-          <a:fontRef idx="minor">
-            <a:schemeClr val="lt1"/>
-          </a:fontRef>
-        </p:style>
         <p:txBody>
           <a:bodyPr rtlCol="0" anchor="ctr"/>
           <a:lstStyle/>
@@ -6171,7 +5581,7 @@
       </p:sp>
       <p:sp>
         <p:nvSpPr>
-          <p:cNvPr id="14" name="Rectangle 13"/>
+          <p:cNvPr id="13" name="Rectangle 12"/>
           <p:cNvSpPr/>
           <p:nvPr/>
         </p:nvSpPr>
@@ -6184,27 +5594,13 @@
             <a:avLst/>
           </a:prstGeom>
           <a:solidFill>
-            <a:srgbClr val="F28C38"/>
+            <a:srgbClr val="8C4A36"/>
           </a:solidFill>
           <a:ln>
             <a:noFill/>
           </a:ln>
           <a:effectLst/>
         </p:spPr>
-        <p:style>
-          <a:lnRef idx="1">
-            <a:schemeClr val="accent1"/>
-          </a:lnRef>
-          <a:fillRef idx="3">
-            <a:schemeClr val="accent1"/>
-          </a:fillRef>
-          <a:effectRef idx="2">
-            <a:schemeClr val="accent1"/>
-          </a:effectRef>
-          <a:fontRef idx="minor">
-            <a:schemeClr val="lt1"/>
-          </a:fontRef>
-        </p:style>
         <p:txBody>
           <a:bodyPr rtlCol="0" anchor="ctr" wrap="square" lIns="73152" rIns="73152"/>
           <a:lstStyle/>
@@ -6224,7 +5620,7 @@
       </p:sp>
       <p:sp>
         <p:nvSpPr>
-          <p:cNvPr id="15" name="TextBox 14"/>
+          <p:cNvPr id="14" name="TextBox 13"/>
           <p:cNvSpPr txBox="1"/>
           <p:nvPr/>
         </p:nvSpPr>
@@ -6248,7 +5644,7 @@
             <a:r>
               <a:rPr sz="1200" b="1">
                 <a:solidFill>
-                  <a:srgbClr val="F28C38"/>
+                  <a:srgbClr val="8C4A36"/>
                 </a:solidFill>
                 <a:latin typeface="Yu Gothic"/>
               </a:rPr>
@@ -6259,7 +5655,7 @@
       </p:sp>
       <p:sp>
         <p:nvSpPr>
-          <p:cNvPr id="16" name="TextBox 15"/>
+          <p:cNvPr id="15" name="TextBox 14"/>
           <p:cNvSpPr txBox="1"/>
           <p:nvPr/>
         </p:nvSpPr>
@@ -6283,7 +5679,7 @@
             <a:r>
               <a:rPr sz="1600" b="1">
                 <a:solidFill>
-                  <a:srgbClr val="262626"/>
+                  <a:srgbClr val="3A2A24"/>
                 </a:solidFill>
                 <a:latin typeface="Yu Gothic"/>
               </a:rPr>
@@ -6294,7 +5690,7 @@
       </p:sp>
       <p:sp>
         <p:nvSpPr>
-          <p:cNvPr id="17" name="TextBox 16"/>
+          <p:cNvPr id="16" name="TextBox 15"/>
           <p:cNvSpPr txBox="1"/>
           <p:nvPr/>
         </p:nvSpPr>
@@ -6318,7 +5714,7 @@
             <a:r>
               <a:rPr sz="1100" b="0">
                 <a:solidFill>
-                  <a:srgbClr val="595959"/>
+                  <a:srgbClr val="7A6E66"/>
                 </a:solidFill>
                 <a:latin typeface="Yu Gothic"/>
               </a:rPr>
@@ -6329,7 +5725,7 @@
       </p:sp>
       <p:sp>
         <p:nvSpPr>
-          <p:cNvPr id="18" name="TextBox 17"/>
+          <p:cNvPr id="17" name="TextBox 16"/>
           <p:cNvSpPr txBox="1"/>
           <p:nvPr/>
         </p:nvSpPr>
@@ -6357,7 +5753,7 @@
             <a:r>
               <a:rPr sz="1600" b="0">
                 <a:solidFill>
-                  <a:srgbClr val="262626"/>
+                  <a:srgbClr val="3A2A24"/>
                 </a:solidFill>
                 <a:latin typeface="Yu Gothic"/>
               </a:rPr>
@@ -6373,7 +5769,7 @@
             <a:r>
               <a:rPr sz="1600" b="0">
                 <a:solidFill>
-                  <a:srgbClr val="262626"/>
+                  <a:srgbClr val="3A2A24"/>
                 </a:solidFill>
                 <a:latin typeface="Yu Gothic"/>
               </a:rPr>
@@ -6389,7 +5785,7 @@
             <a:r>
               <a:rPr sz="1600" b="0">
                 <a:solidFill>
-                  <a:srgbClr val="262626"/>
+                  <a:srgbClr val="3A2A24"/>
                 </a:solidFill>
                 <a:latin typeface="Yu Gothic"/>
               </a:rPr>
@@ -6400,7 +5796,7 @@
       </p:sp>
       <p:sp>
         <p:nvSpPr>
-          <p:cNvPr id="19" name="Rectangle 18"/>
+          <p:cNvPr id="18" name="Rectangle 17"/>
           <p:cNvSpPr/>
           <p:nvPr/>
         </p:nvSpPr>
@@ -6413,27 +5809,13 @@
             <a:avLst/>
           </a:prstGeom>
           <a:solidFill>
-            <a:srgbClr val="F2F2F2"/>
+            <a:srgbClr val="FFFFFF"/>
           </a:solidFill>
           <a:ln>
             <a:noFill/>
           </a:ln>
           <a:effectLst/>
         </p:spPr>
-        <p:style>
-          <a:lnRef idx="1">
-            <a:schemeClr val="accent1"/>
-          </a:lnRef>
-          <a:fillRef idx="3">
-            <a:schemeClr val="accent1"/>
-          </a:fillRef>
-          <a:effectRef idx="2">
-            <a:schemeClr val="accent1"/>
-          </a:effectRef>
-          <a:fontRef idx="minor">
-            <a:schemeClr val="lt1"/>
-          </a:fontRef>
-        </p:style>
         <p:txBody>
           <a:bodyPr rtlCol="0" anchor="ctr"/>
           <a:lstStyle/>
@@ -6444,7 +5826,7 @@
       </p:sp>
       <p:sp>
         <p:nvSpPr>
-          <p:cNvPr id="20" name="Rectangle 19"/>
+          <p:cNvPr id="19" name="Rectangle 18"/>
           <p:cNvSpPr/>
           <p:nvPr/>
         </p:nvSpPr>
@@ -6457,27 +5839,13 @@
             <a:avLst/>
           </a:prstGeom>
           <a:solidFill>
-            <a:srgbClr val="5B8C5A"/>
+            <a:srgbClr val="988E86"/>
           </a:solidFill>
           <a:ln>
             <a:noFill/>
           </a:ln>
           <a:effectLst/>
         </p:spPr>
-        <p:style>
-          <a:lnRef idx="1">
-            <a:schemeClr val="accent1"/>
-          </a:lnRef>
-          <a:fillRef idx="3">
-            <a:schemeClr val="accent1"/>
-          </a:fillRef>
-          <a:effectRef idx="2">
-            <a:schemeClr val="accent1"/>
-          </a:effectRef>
-          <a:fontRef idx="minor">
-            <a:schemeClr val="lt1"/>
-          </a:fontRef>
-        </p:style>
         <p:txBody>
           <a:bodyPr rtlCol="0" anchor="ctr" wrap="square" lIns="73152" rIns="73152"/>
           <a:lstStyle/>
@@ -6497,7 +5865,7 @@
       </p:sp>
       <p:sp>
         <p:nvSpPr>
-          <p:cNvPr id="21" name="TextBox 20"/>
+          <p:cNvPr id="20" name="TextBox 19"/>
           <p:cNvSpPr txBox="1"/>
           <p:nvPr/>
         </p:nvSpPr>
@@ -6521,7 +5889,7 @@
             <a:r>
               <a:rPr sz="1200" b="1">
                 <a:solidFill>
-                  <a:srgbClr val="5B8C5A"/>
+                  <a:srgbClr val="988E86"/>
                 </a:solidFill>
                 <a:latin typeface="Yu Gothic"/>
               </a:rPr>
@@ -6532,7 +5900,7 @@
       </p:sp>
       <p:sp>
         <p:nvSpPr>
-          <p:cNvPr id="22" name="TextBox 21"/>
+          <p:cNvPr id="21" name="TextBox 20"/>
           <p:cNvSpPr txBox="1"/>
           <p:nvPr/>
         </p:nvSpPr>
@@ -6556,7 +5924,7 @@
             <a:r>
               <a:rPr sz="1600" b="1">
                 <a:solidFill>
-                  <a:srgbClr val="262626"/>
+                  <a:srgbClr val="3A2A24"/>
                 </a:solidFill>
                 <a:latin typeface="Yu Gothic"/>
               </a:rPr>
@@ -6567,7 +5935,7 @@
       </p:sp>
       <p:sp>
         <p:nvSpPr>
-          <p:cNvPr id="23" name="TextBox 22"/>
+          <p:cNvPr id="22" name="TextBox 21"/>
           <p:cNvSpPr txBox="1"/>
           <p:nvPr/>
         </p:nvSpPr>
@@ -6591,7 +5959,7 @@
             <a:r>
               <a:rPr sz="1100" b="0">
                 <a:solidFill>
-                  <a:srgbClr val="595959"/>
+                  <a:srgbClr val="7A6E66"/>
                 </a:solidFill>
                 <a:latin typeface="Yu Gothic"/>
               </a:rPr>
@@ -6602,7 +5970,7 @@
       </p:sp>
       <p:sp>
         <p:nvSpPr>
-          <p:cNvPr id="24" name="TextBox 23"/>
+          <p:cNvPr id="23" name="TextBox 22"/>
           <p:cNvSpPr txBox="1"/>
           <p:nvPr/>
         </p:nvSpPr>
@@ -6630,7 +5998,7 @@
             <a:r>
               <a:rPr sz="1600" b="0">
                 <a:solidFill>
-                  <a:srgbClr val="262626"/>
+                  <a:srgbClr val="3A2A24"/>
                 </a:solidFill>
                 <a:latin typeface="Yu Gothic"/>
               </a:rPr>
@@ -6646,7 +6014,7 @@
             <a:r>
               <a:rPr sz="1600" b="0">
                 <a:solidFill>
-                  <a:srgbClr val="262626"/>
+                  <a:srgbClr val="3A2A24"/>
                 </a:solidFill>
                 <a:latin typeface="Yu Gothic"/>
               </a:rPr>
@@ -6662,7 +6030,7 @@
             <a:r>
               <a:rPr sz="1600" b="0">
                 <a:solidFill>
-                  <a:srgbClr val="262626"/>
+                  <a:srgbClr val="3A2A24"/>
                 </a:solidFill>
                 <a:latin typeface="Yu Gothic"/>
               </a:rPr>
@@ -6673,7 +6041,7 @@
       </p:sp>
       <p:sp>
         <p:nvSpPr>
-          <p:cNvPr id="25" name="Rectangle 24"/>
+          <p:cNvPr id="24" name="Rectangle 23"/>
           <p:cNvSpPr/>
           <p:nvPr/>
         </p:nvSpPr>
@@ -6686,27 +6054,13 @@
             <a:avLst/>
           </a:prstGeom>
           <a:solidFill>
-            <a:srgbClr val="FBE3CB"/>
+            <a:srgbClr val="FFE0D0"/>
           </a:solidFill>
           <a:ln>
             <a:noFill/>
           </a:ln>
           <a:effectLst/>
         </p:spPr>
-        <p:style>
-          <a:lnRef idx="1">
-            <a:schemeClr val="accent1"/>
-          </a:lnRef>
-          <a:fillRef idx="3">
-            <a:schemeClr val="accent1"/>
-          </a:fillRef>
-          <a:effectRef idx="2">
-            <a:schemeClr val="accent1"/>
-          </a:effectRef>
-          <a:fontRef idx="minor">
-            <a:schemeClr val="lt1"/>
-          </a:fontRef>
-        </p:style>
         <p:txBody>
           <a:bodyPr rtlCol="0" anchor="t" wrap="square" lIns="182880" rIns="182880"/>
           <a:lstStyle/>
@@ -6715,7 +6069,7 @@
             <a:r>
               <a:rPr sz="1400" b="1">
                 <a:solidFill>
-                  <a:srgbClr val="1F497D"/>
+                  <a:srgbClr val="F06142"/>
                 </a:solidFill>
                 <a:latin typeface="Yu Gothic"/>
               </a:rPr>
@@ -6731,7 +6085,7 @@
             <a:r>
               <a:rPr sz="1500" b="0">
                 <a:solidFill>
-                  <a:srgbClr val="262626"/>
+                  <a:srgbClr val="3A2A24"/>
                 </a:solidFill>
                 <a:latin typeface="Yu Gothic"/>
               </a:rPr>
@@ -6751,6 +6105,14 @@
 <file path=ppt/slides/slide4.xml><?xml version="1.0" encoding="utf-8"?>
 <p:sld xmlns:a="http://schemas.openxmlformats.org/drawingml/2006/main" xmlns:p="http://schemas.openxmlformats.org/presentationml/2006/main" xmlns:r="http://schemas.openxmlformats.org/officeDocument/2006/relationships">
   <p:cSld>
+    <p:bg>
+      <p:bgPr>
+        <a:solidFill>
+          <a:srgbClr val="FFEEE4"/>
+        </a:solidFill>
+        <a:effectLst/>
+      </p:bgPr>
+    </p:bg>
     <p:spTree>
       <p:nvGrpSpPr>
         <p:cNvPr id="1" name=""/>
@@ -6766,42 +6128,20 @@
         </p:nvSpPr>
         <p:spPr>
           <a:xfrm>
-            <a:off x="54864" y="64008"/>
-            <a:ext cx="12079224" cy="521207"/>
-          </a:xfrm>
-          <a:prstGeom prst="rect">
-            <a:avLst/>
-          </a:prstGeom>
-          <a:gradFill rotWithShape="1">
-            <a:gsLst>
-              <a:gs pos="0">
-                <a:srgbClr val="F28C38"/>
-              </a:gs>
-              <a:gs pos="100000">
-                <a:srgbClr val="FBE3CB"/>
-              </a:gs>
-            </a:gsLst>
-            <a:lin scaled="0" ang="0"/>
-          </a:gradFill>
+            <a:off x="0" y="6675120"/>
+            <a:ext cx="12191695" cy="182880"/>
+          </a:xfrm>
+          <a:prstGeom prst="rect">
+            <a:avLst/>
+          </a:prstGeom>
+          <a:solidFill>
+            <a:srgbClr val="FF5D3B"/>
+          </a:solidFill>
           <a:ln>
             <a:noFill/>
           </a:ln>
           <a:effectLst/>
         </p:spPr>
-        <p:style>
-          <a:lnRef idx="1">
-            <a:schemeClr val="accent1"/>
-          </a:lnRef>
-          <a:fillRef idx="3">
-            <a:schemeClr val="accent1"/>
-          </a:fillRef>
-          <a:effectRef idx="2">
-            <a:schemeClr val="accent1"/>
-          </a:effectRef>
-          <a:fontRef idx="minor">
-            <a:schemeClr val="lt1"/>
-          </a:fontRef>
-        </p:style>
         <p:txBody>
           <a:bodyPr rtlCol="0" anchor="ctr"/>
           <a:lstStyle/>
@@ -6818,170 +6158,134 @@
         </p:nvSpPr>
         <p:spPr>
           <a:xfrm>
-            <a:off x="54864" y="6629400"/>
-            <a:ext cx="12079224" cy="182880"/>
-          </a:xfrm>
-          <a:prstGeom prst="rect">
-            <a:avLst/>
-          </a:prstGeom>
-          <a:gradFill rotWithShape="1">
-            <a:gsLst>
-              <a:gs pos="0">
-                <a:srgbClr val="F28C38"/>
-              </a:gs>
-              <a:gs pos="100000">
-                <a:srgbClr val="FBE3CB"/>
-              </a:gs>
-            </a:gsLst>
-            <a:lin scaled="0" ang="0"/>
-          </a:gradFill>
+            <a:off x="356616" y="137160"/>
+            <a:ext cx="2103120" cy="365760"/>
+          </a:xfrm>
+          <a:prstGeom prst="rect">
+            <a:avLst/>
+          </a:prstGeom>
+          <a:solidFill>
+            <a:srgbClr val="FF5D3B"/>
+          </a:solidFill>
           <a:ln>
             <a:noFill/>
           </a:ln>
           <a:effectLst/>
         </p:spPr>
-        <p:style>
-          <a:lnRef idx="1">
-            <a:schemeClr val="accent1"/>
-          </a:lnRef>
-          <a:fillRef idx="3">
-            <a:schemeClr val="accent1"/>
-          </a:fillRef>
-          <a:effectRef idx="2">
-            <a:schemeClr val="accent1"/>
-          </a:effectRef>
-          <a:fontRef idx="minor">
-            <a:schemeClr val="lt1"/>
-          </a:fontRef>
-        </p:style>
-        <p:txBody>
-          <a:bodyPr rtlCol="0" anchor="ctr"/>
+        <p:txBody>
+          <a:bodyPr rtlCol="0" anchor="ctr" wrap="square" lIns="73152" rIns="73152"/>
           <a:lstStyle/>
           <a:p>
             <a:pPr algn="ctr"/>
-          </a:p>
-        </p:txBody>
-      </p:sp>
-      <p:sp>
-        <p:nvSpPr>
-          <p:cNvPr id="4" name="Rectangle 3"/>
+            <a:r>
+              <a:rPr sz="1300" b="1">
+                <a:solidFill>
+                  <a:srgbClr val="FFFFFF"/>
+                </a:solidFill>
+                <a:latin typeface="Yu Gothic"/>
+              </a:rPr>
+              <a:t>学校群</a:t>
+            </a:r>
+          </a:p>
+        </p:txBody>
+      </p:sp>
+      <p:sp>
+        <p:nvSpPr>
+          <p:cNvPr id="4" name="TextBox 3"/>
+          <p:cNvSpPr txBox="1"/>
+          <p:nvPr/>
+        </p:nvSpPr>
+        <p:spPr>
+          <a:xfrm>
+            <a:off x="2606040" y="109728"/>
+            <a:ext cx="9144000" cy="420624"/>
+          </a:xfrm>
+          <a:prstGeom prst="rect">
+            <a:avLst/>
+          </a:prstGeom>
+          <a:noFill/>
+        </p:spPr>
+        <p:txBody>
+          <a:bodyPr wrap="square" anchor="ctr" lIns="73152" rIns="73152">
+            <a:spAutoFit/>
+          </a:bodyPr>
+          <a:lstStyle/>
+          <a:p>
+            <a:pPr algn="l"/>
+            <a:r>
+              <a:rPr sz="2000" b="1">
+                <a:solidFill>
+                  <a:srgbClr val="F06142"/>
+                </a:solidFill>
+                <a:latin typeface="Yu Gothic"/>
+              </a:rPr>
+              <a:t>ぐるぐる学校群と、日程の配慮</a:t>
+            </a:r>
+          </a:p>
+        </p:txBody>
+      </p:sp>
+      <p:sp>
+        <p:nvSpPr>
+          <p:cNvPr id="5" name="TextBox 4"/>
+          <p:cNvSpPr txBox="1"/>
+          <p:nvPr/>
+        </p:nvSpPr>
+        <p:spPr>
+          <a:xfrm>
+            <a:off x="274320" y="6291072"/>
+            <a:ext cx="11612880" cy="310896"/>
+          </a:xfrm>
+          <a:prstGeom prst="rect">
+            <a:avLst/>
+          </a:prstGeom>
+          <a:noFill/>
+        </p:spPr>
+        <p:txBody>
+          <a:bodyPr wrap="square" anchor="t" lIns="73152" rIns="73152">
+            <a:spAutoFit/>
+          </a:bodyPr>
+          <a:lstStyle/>
+          <a:p>
+            <a:pPr algn="l"/>
+            <a:r>
+              <a:rPr sz="900" b="0">
+                <a:solidFill>
+                  <a:srgbClr val="7A6E66"/>
+                </a:solidFill>
+                <a:latin typeface="Yu Gothic"/>
+              </a:rPr>
+              <a:t>出典：既存ペルソナ④学校群 / visions具体的なペルソナ像 / 年間目標・実数（各大学の年間スケジュール）。優先度は当方の提案</a:t>
+            </a:r>
+          </a:p>
+        </p:txBody>
+      </p:sp>
+      <p:sp>
+        <p:nvSpPr>
+          <p:cNvPr id="6" name="Rectangle 5"/>
           <p:cNvSpPr/>
           <p:nvPr/>
         </p:nvSpPr>
         <p:spPr>
           <a:xfrm>
-            <a:off x="356616" y="155448"/>
-            <a:ext cx="2103120" cy="329184"/>
-          </a:xfrm>
-          <a:prstGeom prst="rect">
-            <a:avLst/>
-          </a:prstGeom>
-          <a:solidFill>
-            <a:srgbClr val="1F497D"/>
+            <a:off x="365760" y="822960"/>
+            <a:ext cx="7498079" cy="1691640"/>
+          </a:xfrm>
+          <a:prstGeom prst="rect">
+            <a:avLst/>
+          </a:prstGeom>
+          <a:solidFill>
+            <a:srgbClr val="FFFFFF"/>
           </a:solidFill>
           <a:ln>
             <a:noFill/>
           </a:ln>
           <a:effectLst/>
         </p:spPr>
-        <p:style>
-          <a:lnRef idx="1">
-            <a:schemeClr val="accent1"/>
-          </a:lnRef>
-          <a:fillRef idx="3">
-            <a:schemeClr val="accent1"/>
-          </a:fillRef>
-          <a:effectRef idx="2">
-            <a:schemeClr val="accent1"/>
-          </a:effectRef>
-          <a:fontRef idx="minor">
-            <a:schemeClr val="lt1"/>
-          </a:fontRef>
-        </p:style>
-        <p:txBody>
-          <a:bodyPr rtlCol="0" anchor="ctr" wrap="square" lIns="73152" rIns="73152"/>
+        <p:txBody>
+          <a:bodyPr rtlCol="0" anchor="ctr"/>
           <a:lstStyle/>
           <a:p>
             <a:pPr algn="ctr"/>
-            <a:r>
-              <a:rPr sz="1300" b="1">
-                <a:solidFill>
-                  <a:srgbClr val="FFFFFF"/>
-                </a:solidFill>
-                <a:latin typeface="Yu Gothic"/>
-              </a:rPr>
-              <a:t>学校群</a:t>
-            </a:r>
-          </a:p>
-        </p:txBody>
-      </p:sp>
-      <p:sp>
-        <p:nvSpPr>
-          <p:cNvPr id="5" name="TextBox 4"/>
-          <p:cNvSpPr txBox="1"/>
-          <p:nvPr/>
-        </p:nvSpPr>
-        <p:spPr>
-          <a:xfrm>
-            <a:off x="2606040" y="128016"/>
-            <a:ext cx="9144000" cy="365760"/>
-          </a:xfrm>
-          <a:prstGeom prst="rect">
-            <a:avLst/>
-          </a:prstGeom>
-          <a:noFill/>
-        </p:spPr>
-        <p:txBody>
-          <a:bodyPr wrap="square" anchor="ctr" lIns="73152" rIns="73152">
-            <a:spAutoFit/>
-          </a:bodyPr>
-          <a:lstStyle/>
-          <a:p>
-            <a:pPr algn="l"/>
-            <a:r>
-              <a:rPr sz="1700" b="1">
-                <a:solidFill>
-                  <a:srgbClr val="262626"/>
-                </a:solidFill>
-                <a:latin typeface="Yu Gothic"/>
-              </a:rPr>
-              <a:t>ぐるぐる学校群と、日程の配慮</a:t>
-            </a:r>
-          </a:p>
-        </p:txBody>
-      </p:sp>
-      <p:sp>
-        <p:nvSpPr>
-          <p:cNvPr id="6" name="TextBox 5"/>
-          <p:cNvSpPr txBox="1"/>
-          <p:nvPr/>
-        </p:nvSpPr>
-        <p:spPr>
-          <a:xfrm>
-            <a:off x="274320" y="6291072"/>
-            <a:ext cx="11612880" cy="310896"/>
-          </a:xfrm>
-          <a:prstGeom prst="rect">
-            <a:avLst/>
-          </a:prstGeom>
-          <a:noFill/>
-        </p:spPr>
-        <p:txBody>
-          <a:bodyPr wrap="square" anchor="t" lIns="73152" rIns="73152">
-            <a:spAutoFit/>
-          </a:bodyPr>
-          <a:lstStyle/>
-          <a:p>
-            <a:pPr algn="l"/>
-            <a:r>
-              <a:rPr sz="900" b="0">
-                <a:solidFill>
-                  <a:srgbClr val="595959"/>
-                </a:solidFill>
-                <a:latin typeface="Yu Gothic"/>
-              </a:rPr>
-              <a:t>出典：既存ペルソナ④学校群 / visions具体的なペルソナ像 / 年間目標・実数（各大学の年間スケジュール）。優先度は当方の提案</a:t>
-            </a:r>
           </a:p>
         </p:txBody>
       </p:sp>
@@ -6994,82 +6298,24 @@
         <p:spPr>
           <a:xfrm>
             <a:off x="365760" y="822960"/>
-            <a:ext cx="7498079" cy="1691640"/>
-          </a:xfrm>
-          <a:prstGeom prst="rect">
-            <a:avLst/>
-          </a:prstGeom>
-          <a:solidFill>
-            <a:srgbClr val="F2F2F2"/>
+            <a:ext cx="1005840" cy="1691640"/>
+          </a:xfrm>
+          <a:prstGeom prst="rect">
+            <a:avLst/>
+          </a:prstGeom>
+          <a:solidFill>
+            <a:srgbClr val="F06142"/>
           </a:solidFill>
           <a:ln>
             <a:noFill/>
           </a:ln>
           <a:effectLst/>
         </p:spPr>
-        <p:style>
-          <a:lnRef idx="1">
-            <a:schemeClr val="accent1"/>
-          </a:lnRef>
-          <a:fillRef idx="3">
-            <a:schemeClr val="accent1"/>
-          </a:fillRef>
-          <a:effectRef idx="2">
-            <a:schemeClr val="accent1"/>
-          </a:effectRef>
-          <a:fontRef idx="minor">
-            <a:schemeClr val="lt1"/>
-          </a:fontRef>
-        </p:style>
-        <p:txBody>
-          <a:bodyPr rtlCol="0" anchor="ctr"/>
+        <p:txBody>
+          <a:bodyPr rtlCol="0" anchor="ctr" wrap="square" lIns="73152" rIns="73152"/>
           <a:lstStyle/>
           <a:p>
             <a:pPr algn="ctr"/>
-          </a:p>
-        </p:txBody>
-      </p:sp>
-      <p:sp>
-        <p:nvSpPr>
-          <p:cNvPr id="8" name="Rectangle 7"/>
-          <p:cNvSpPr/>
-          <p:nvPr/>
-        </p:nvSpPr>
-        <p:spPr>
-          <a:xfrm>
-            <a:off x="365760" y="822960"/>
-            <a:ext cx="1005840" cy="1691640"/>
-          </a:xfrm>
-          <a:prstGeom prst="rect">
-            <a:avLst/>
-          </a:prstGeom>
-          <a:solidFill>
-            <a:srgbClr val="1F497D"/>
-          </a:solidFill>
-          <a:ln>
-            <a:noFill/>
-          </a:ln>
-          <a:effectLst/>
-        </p:spPr>
-        <p:style>
-          <a:lnRef idx="1">
-            <a:schemeClr val="accent1"/>
-          </a:lnRef>
-          <a:fillRef idx="3">
-            <a:schemeClr val="accent1"/>
-          </a:fillRef>
-          <a:effectRef idx="2">
-            <a:schemeClr val="accent1"/>
-          </a:effectRef>
-          <a:fontRef idx="minor">
-            <a:schemeClr val="lt1"/>
-          </a:fontRef>
-        </p:style>
-        <p:txBody>
-          <a:bodyPr rtlCol="0" anchor="ctr" wrap="square" lIns="73152" rIns="73152"/>
-          <a:lstStyle/>
-          <a:p>
-            <a:pPr algn="ctr"/>
             <a:r>
               <a:rPr sz="2800" b="1">
                 <a:solidFill>
@@ -7084,7 +6330,7 @@
       </p:sp>
       <p:sp>
         <p:nvSpPr>
-          <p:cNvPr id="9" name="TextBox 8"/>
+          <p:cNvPr id="8" name="TextBox 7"/>
           <p:cNvSpPr txBox="1"/>
           <p:nvPr/>
         </p:nvSpPr>
@@ -7108,7 +6354,7 @@
             <a:r>
               <a:rPr sz="1500" b="1">
                 <a:solidFill>
-                  <a:srgbClr val="1F497D"/>
+                  <a:srgbClr val="F06142"/>
                 </a:solidFill>
                 <a:latin typeface="Yu Gothic"/>
               </a:rPr>
@@ -7119,7 +6365,7 @@
       </p:sp>
       <p:sp>
         <p:nvSpPr>
-          <p:cNvPr id="10" name="TextBox 9"/>
+          <p:cNvPr id="9" name="TextBox 8"/>
           <p:cNvSpPr txBox="1"/>
           <p:nvPr/>
         </p:nvSpPr>
@@ -7147,7 +6393,7 @@
             <a:r>
               <a:rPr sz="1500" b="0">
                 <a:solidFill>
-                  <a:srgbClr val="262626"/>
+                  <a:srgbClr val="3A2A24"/>
                 </a:solidFill>
                 <a:latin typeface="Yu Gothic"/>
               </a:rPr>
@@ -7163,7 +6409,7 @@
             <a:r>
               <a:rPr sz="1500" b="0">
                 <a:solidFill>
-                  <a:srgbClr val="262626"/>
+                  <a:srgbClr val="3A2A24"/>
                 </a:solidFill>
                 <a:latin typeface="Yu Gothic"/>
               </a:rPr>
@@ -7174,7 +6420,7 @@
       </p:sp>
       <p:sp>
         <p:nvSpPr>
-          <p:cNvPr id="11" name="TextBox 10"/>
+          <p:cNvPr id="10" name="TextBox 9"/>
           <p:cNvSpPr txBox="1"/>
           <p:nvPr/>
         </p:nvSpPr>
@@ -7202,7 +6448,7 @@
             <a:r>
               <a:rPr sz="1500" b="0">
                 <a:solidFill>
-                  <a:srgbClr val="262626"/>
+                  <a:srgbClr val="3A2A24"/>
                 </a:solidFill>
                 <a:latin typeface="Yu Gothic"/>
               </a:rPr>
@@ -7218,7 +6464,7 @@
             <a:r>
               <a:rPr sz="1500" b="0">
                 <a:solidFill>
-                  <a:srgbClr val="262626"/>
+                  <a:srgbClr val="3A2A24"/>
                 </a:solidFill>
                 <a:latin typeface="Yu Gothic"/>
               </a:rPr>
@@ -7229,7 +6475,7 @@
       </p:sp>
       <p:sp>
         <p:nvSpPr>
-          <p:cNvPr id="12" name="Rectangle 11"/>
+          <p:cNvPr id="11" name="Rectangle 10"/>
           <p:cNvSpPr/>
           <p:nvPr/>
         </p:nvSpPr>
@@ -7242,27 +6488,13 @@
             <a:avLst/>
           </a:prstGeom>
           <a:solidFill>
-            <a:srgbClr val="F2F2F2"/>
+            <a:srgbClr val="FFFFFF"/>
           </a:solidFill>
           <a:ln>
             <a:noFill/>
           </a:ln>
           <a:effectLst/>
         </p:spPr>
-        <p:style>
-          <a:lnRef idx="1">
-            <a:schemeClr val="accent1"/>
-          </a:lnRef>
-          <a:fillRef idx="3">
-            <a:schemeClr val="accent1"/>
-          </a:fillRef>
-          <a:effectRef idx="2">
-            <a:schemeClr val="accent1"/>
-          </a:effectRef>
-          <a:fontRef idx="minor">
-            <a:schemeClr val="lt1"/>
-          </a:fontRef>
-        </p:style>
         <p:txBody>
           <a:bodyPr rtlCol="0" anchor="ctr"/>
           <a:lstStyle/>
@@ -7273,7 +6505,7 @@
       </p:sp>
       <p:sp>
         <p:nvSpPr>
-          <p:cNvPr id="13" name="Rectangle 12"/>
+          <p:cNvPr id="12" name="Rectangle 11"/>
           <p:cNvSpPr/>
           <p:nvPr/>
         </p:nvSpPr>
@@ -7286,27 +6518,13 @@
             <a:avLst/>
           </a:prstGeom>
           <a:solidFill>
-            <a:srgbClr val="F28C38"/>
+            <a:srgbClr val="8C4A36"/>
           </a:solidFill>
           <a:ln>
             <a:noFill/>
           </a:ln>
           <a:effectLst/>
         </p:spPr>
-        <p:style>
-          <a:lnRef idx="1">
-            <a:schemeClr val="accent1"/>
-          </a:lnRef>
-          <a:fillRef idx="3">
-            <a:schemeClr val="accent1"/>
-          </a:fillRef>
-          <a:effectRef idx="2">
-            <a:schemeClr val="accent1"/>
-          </a:effectRef>
-          <a:fontRef idx="minor">
-            <a:schemeClr val="lt1"/>
-          </a:fontRef>
-        </p:style>
         <p:txBody>
           <a:bodyPr rtlCol="0" anchor="ctr" wrap="square" lIns="73152" rIns="73152"/>
           <a:lstStyle/>
@@ -7326,7 +6544,7 @@
       </p:sp>
       <p:sp>
         <p:nvSpPr>
-          <p:cNvPr id="14" name="TextBox 13"/>
+          <p:cNvPr id="13" name="TextBox 12"/>
           <p:cNvSpPr txBox="1"/>
           <p:nvPr/>
         </p:nvSpPr>
@@ -7350,7 +6568,7 @@
             <a:r>
               <a:rPr sz="1500" b="1">
                 <a:solidFill>
-                  <a:srgbClr val="1F497D"/>
+                  <a:srgbClr val="F06142"/>
                 </a:solidFill>
                 <a:latin typeface="Yu Gothic"/>
               </a:rPr>
@@ -7361,7 +6579,7 @@
       </p:sp>
       <p:sp>
         <p:nvSpPr>
-          <p:cNvPr id="15" name="TextBox 14"/>
+          <p:cNvPr id="14" name="TextBox 13"/>
           <p:cNvSpPr txBox="1"/>
           <p:nvPr/>
         </p:nvSpPr>
@@ -7389,7 +6607,7 @@
             <a:r>
               <a:rPr sz="1500" b="0">
                 <a:solidFill>
-                  <a:srgbClr val="262626"/>
+                  <a:srgbClr val="3A2A24"/>
                 </a:solidFill>
                 <a:latin typeface="Yu Gothic"/>
               </a:rPr>
@@ -7405,7 +6623,7 @@
             <a:r>
               <a:rPr sz="1500" b="0">
                 <a:solidFill>
-                  <a:srgbClr val="262626"/>
+                  <a:srgbClr val="3A2A24"/>
                 </a:solidFill>
                 <a:latin typeface="Yu Gothic"/>
               </a:rPr>
@@ -7416,7 +6634,7 @@
       </p:sp>
       <p:sp>
         <p:nvSpPr>
-          <p:cNvPr id="16" name="TextBox 15"/>
+          <p:cNvPr id="15" name="TextBox 14"/>
           <p:cNvSpPr txBox="1"/>
           <p:nvPr/>
         </p:nvSpPr>
@@ -7444,7 +6662,7 @@
             <a:r>
               <a:rPr sz="1500" b="0">
                 <a:solidFill>
-                  <a:srgbClr val="262626"/>
+                  <a:srgbClr val="3A2A24"/>
                 </a:solidFill>
                 <a:latin typeface="Yu Gothic"/>
               </a:rPr>
@@ -7460,7 +6678,7 @@
             <a:r>
               <a:rPr sz="1500" b="0">
                 <a:solidFill>
-                  <a:srgbClr val="262626"/>
+                  <a:srgbClr val="3A2A24"/>
                 </a:solidFill>
                 <a:latin typeface="Yu Gothic"/>
               </a:rPr>
@@ -7471,7 +6689,7 @@
       </p:sp>
       <p:sp>
         <p:nvSpPr>
-          <p:cNvPr id="17" name="Rectangle 16"/>
+          <p:cNvPr id="16" name="Rectangle 15"/>
           <p:cNvSpPr/>
           <p:nvPr/>
         </p:nvSpPr>
@@ -7484,27 +6702,13 @@
             <a:avLst/>
           </a:prstGeom>
           <a:solidFill>
-            <a:srgbClr val="F2F2F2"/>
+            <a:srgbClr val="FFFFFF"/>
           </a:solidFill>
           <a:ln>
             <a:noFill/>
           </a:ln>
           <a:effectLst/>
         </p:spPr>
-        <p:style>
-          <a:lnRef idx="1">
-            <a:schemeClr val="accent1"/>
-          </a:lnRef>
-          <a:fillRef idx="3">
-            <a:schemeClr val="accent1"/>
-          </a:fillRef>
-          <a:effectRef idx="2">
-            <a:schemeClr val="accent1"/>
-          </a:effectRef>
-          <a:fontRef idx="minor">
-            <a:schemeClr val="lt1"/>
-          </a:fontRef>
-        </p:style>
         <p:txBody>
           <a:bodyPr rtlCol="0" anchor="ctr"/>
           <a:lstStyle/>
@@ -7515,7 +6719,7 @@
       </p:sp>
       <p:sp>
         <p:nvSpPr>
-          <p:cNvPr id="18" name="Rectangle 17"/>
+          <p:cNvPr id="17" name="Rectangle 16"/>
           <p:cNvSpPr/>
           <p:nvPr/>
         </p:nvSpPr>
@@ -7528,27 +6732,13 @@
             <a:avLst/>
           </a:prstGeom>
           <a:solidFill>
-            <a:srgbClr val="595959"/>
+            <a:srgbClr val="7A6E66"/>
           </a:solidFill>
           <a:ln>
             <a:noFill/>
           </a:ln>
           <a:effectLst/>
         </p:spPr>
-        <p:style>
-          <a:lnRef idx="1">
-            <a:schemeClr val="accent1"/>
-          </a:lnRef>
-          <a:fillRef idx="3">
-            <a:schemeClr val="accent1"/>
-          </a:fillRef>
-          <a:effectRef idx="2">
-            <a:schemeClr val="accent1"/>
-          </a:effectRef>
-          <a:fontRef idx="minor">
-            <a:schemeClr val="lt1"/>
-          </a:fontRef>
-        </p:style>
         <p:txBody>
           <a:bodyPr rtlCol="0" anchor="ctr" wrap="square" lIns="73152" rIns="73152"/>
           <a:lstStyle/>
@@ -7568,7 +6758,7 @@
       </p:sp>
       <p:sp>
         <p:nvSpPr>
-          <p:cNvPr id="19" name="TextBox 18"/>
+          <p:cNvPr id="18" name="TextBox 17"/>
           <p:cNvSpPr txBox="1"/>
           <p:nvPr/>
         </p:nvSpPr>
@@ -7592,7 +6782,7 @@
             <a:r>
               <a:rPr sz="1500" b="1">
                 <a:solidFill>
-                  <a:srgbClr val="1F497D"/>
+                  <a:srgbClr val="F06142"/>
                 </a:solidFill>
                 <a:latin typeface="Yu Gothic"/>
               </a:rPr>
@@ -7603,7 +6793,7 @@
       </p:sp>
       <p:sp>
         <p:nvSpPr>
-          <p:cNvPr id="20" name="TextBox 19"/>
+          <p:cNvPr id="19" name="TextBox 18"/>
           <p:cNvSpPr txBox="1"/>
           <p:nvPr/>
         </p:nvSpPr>
@@ -7631,7 +6821,7 @@
             <a:r>
               <a:rPr sz="1500" b="0">
                 <a:solidFill>
-                  <a:srgbClr val="262626"/>
+                  <a:srgbClr val="3A2A24"/>
                 </a:solidFill>
                 <a:latin typeface="Yu Gothic"/>
               </a:rPr>
@@ -7647,7 +6837,7 @@
             <a:r>
               <a:rPr sz="1500" b="0">
                 <a:solidFill>
-                  <a:srgbClr val="262626"/>
+                  <a:srgbClr val="3A2A24"/>
                 </a:solidFill>
                 <a:latin typeface="Yu Gothic"/>
               </a:rPr>
@@ -7658,7 +6848,7 @@
       </p:sp>
       <p:sp>
         <p:nvSpPr>
-          <p:cNvPr id="21" name="TextBox 20"/>
+          <p:cNvPr id="20" name="TextBox 19"/>
           <p:cNvSpPr txBox="1"/>
           <p:nvPr/>
         </p:nvSpPr>
@@ -7686,7 +6876,7 @@
             <a:r>
               <a:rPr sz="1500" b="0">
                 <a:solidFill>
-                  <a:srgbClr val="262626"/>
+                  <a:srgbClr val="3A2A24"/>
                 </a:solidFill>
                 <a:latin typeface="Yu Gothic"/>
               </a:rPr>
@@ -7702,7 +6892,7 @@
             <a:r>
               <a:rPr sz="1500" b="0">
                 <a:solidFill>
-                  <a:srgbClr val="262626"/>
+                  <a:srgbClr val="3A2A24"/>
                 </a:solidFill>
                 <a:latin typeface="Yu Gothic"/>
               </a:rPr>
@@ -7713,7 +6903,7 @@
       </p:sp>
       <p:sp>
         <p:nvSpPr>
-          <p:cNvPr id="22" name="Rectangle 21"/>
+          <p:cNvPr id="21" name="Rectangle 20"/>
           <p:cNvSpPr/>
           <p:nvPr/>
         </p:nvSpPr>
@@ -7726,27 +6916,13 @@
             <a:avLst/>
           </a:prstGeom>
           <a:solidFill>
-            <a:srgbClr val="F2F2F2"/>
+            <a:srgbClr val="FFFFFF"/>
           </a:solidFill>
           <a:ln>
             <a:noFill/>
           </a:ln>
           <a:effectLst/>
         </p:spPr>
-        <p:style>
-          <a:lnRef idx="1">
-            <a:schemeClr val="accent1"/>
-          </a:lnRef>
-          <a:fillRef idx="3">
-            <a:schemeClr val="accent1"/>
-          </a:fillRef>
-          <a:effectRef idx="2">
-            <a:schemeClr val="accent1"/>
-          </a:effectRef>
-          <a:fontRef idx="minor">
-            <a:schemeClr val="lt1"/>
-          </a:fontRef>
-        </p:style>
         <p:txBody>
           <a:bodyPr rtlCol="0" anchor="ctr"/>
           <a:lstStyle/>
@@ -7757,7 +6933,7 @@
       </p:sp>
       <p:sp>
         <p:nvSpPr>
-          <p:cNvPr id="23" name="TextBox 22"/>
+          <p:cNvPr id="22" name="TextBox 21"/>
           <p:cNvSpPr txBox="1"/>
           <p:nvPr/>
         </p:nvSpPr>
@@ -7781,7 +6957,7 @@
             <a:r>
               <a:rPr sz="1500" b="1">
                 <a:solidFill>
-                  <a:srgbClr val="1F497D"/>
+                  <a:srgbClr val="F06142"/>
                 </a:solidFill>
                 <a:latin typeface="Yu Gothic"/>
               </a:rPr>
@@ -7792,7 +6968,7 @@
       </p:sp>
       <p:sp>
         <p:nvSpPr>
-          <p:cNvPr id="24" name="TextBox 23"/>
+          <p:cNvPr id="23" name="TextBox 22"/>
           <p:cNvSpPr txBox="1"/>
           <p:nvPr/>
         </p:nvSpPr>
@@ -7820,7 +6996,7 @@
             <a:r>
               <a:rPr sz="1400" b="0">
                 <a:solidFill>
-                  <a:srgbClr val="262626"/>
+                  <a:srgbClr val="3A2A24"/>
                 </a:solidFill>
                 <a:latin typeface="Yu Gothic"/>
               </a:rPr>
@@ -7836,7 +7012,7 @@
             <a:r>
               <a:rPr sz="1400" b="0">
                 <a:solidFill>
-                  <a:srgbClr val="262626"/>
+                  <a:srgbClr val="3A2A24"/>
                 </a:solidFill>
                 <a:latin typeface="Yu Gothic"/>
               </a:rPr>
@@ -7852,7 +7028,7 @@
             <a:r>
               <a:rPr sz="1200" b="0">
                 <a:solidFill>
-                  <a:srgbClr val="595959"/>
+                  <a:srgbClr val="7A6E66"/>
                 </a:solidFill>
                 <a:latin typeface="Yu Gothic"/>
               </a:rPr>
@@ -7863,7 +7039,7 @@
       </p:sp>
       <p:sp>
         <p:nvSpPr>
-          <p:cNvPr id="25" name="Rectangle 24"/>
+          <p:cNvPr id="24" name="Rectangle 23"/>
           <p:cNvSpPr/>
           <p:nvPr/>
         </p:nvSpPr>
@@ -7876,27 +7052,13 @@
             <a:avLst/>
           </a:prstGeom>
           <a:solidFill>
-            <a:srgbClr val="F2F2F2"/>
+            <a:srgbClr val="FFFFFF"/>
           </a:solidFill>
           <a:ln>
             <a:noFill/>
           </a:ln>
           <a:effectLst/>
         </p:spPr>
-        <p:style>
-          <a:lnRef idx="1">
-            <a:schemeClr val="accent1"/>
-          </a:lnRef>
-          <a:fillRef idx="3">
-            <a:schemeClr val="accent1"/>
-          </a:fillRef>
-          <a:effectRef idx="2">
-            <a:schemeClr val="accent1"/>
-          </a:effectRef>
-          <a:fontRef idx="minor">
-            <a:schemeClr val="lt1"/>
-          </a:fontRef>
-        </p:style>
         <p:txBody>
           <a:bodyPr rtlCol="0" anchor="ctr"/>
           <a:lstStyle/>
@@ -7907,7 +7069,7 @@
       </p:sp>
       <p:sp>
         <p:nvSpPr>
-          <p:cNvPr id="26" name="TextBox 25"/>
+          <p:cNvPr id="25" name="TextBox 24"/>
           <p:cNvSpPr txBox="1"/>
           <p:nvPr/>
         </p:nvSpPr>
@@ -7931,7 +7093,7 @@
             <a:r>
               <a:rPr sz="1500" b="1">
                 <a:solidFill>
-                  <a:srgbClr val="1F497D"/>
+                  <a:srgbClr val="F06142"/>
                 </a:solidFill>
                 <a:latin typeface="Yu Gothic"/>
               </a:rPr>
@@ -7942,7 +7104,7 @@
       </p:sp>
       <p:sp>
         <p:nvSpPr>
-          <p:cNvPr id="27" name="TextBox 26"/>
+          <p:cNvPr id="26" name="TextBox 25"/>
           <p:cNvSpPr txBox="1"/>
           <p:nvPr/>
         </p:nvSpPr>
@@ -7970,7 +7132,7 @@
             <a:r>
               <a:rPr sz="1400" b="0">
                 <a:solidFill>
-                  <a:srgbClr val="262626"/>
+                  <a:srgbClr val="3A2A24"/>
                 </a:solidFill>
                 <a:latin typeface="Yu Gothic"/>
               </a:rPr>
@@ -7986,7 +7148,7 @@
             <a:r>
               <a:rPr sz="1400" b="0">
                 <a:solidFill>
-                  <a:srgbClr val="262626"/>
+                  <a:srgbClr val="3A2A24"/>
                 </a:solidFill>
                 <a:latin typeface="Yu Gothic"/>
               </a:rPr>
@@ -8002,7 +7164,7 @@
             <a:r>
               <a:rPr sz="1400" b="0">
                 <a:solidFill>
-                  <a:srgbClr val="262626"/>
+                  <a:srgbClr val="3A2A24"/>
                 </a:solidFill>
                 <a:latin typeface="Yu Gothic"/>
               </a:rPr>
@@ -8018,7 +7180,7 @@
             <a:r>
               <a:rPr sz="1400" b="0">
                 <a:solidFill>
-                  <a:srgbClr val="262626"/>
+                  <a:srgbClr val="3A2A24"/>
                 </a:solidFill>
                 <a:latin typeface="Yu Gothic"/>
               </a:rPr>
@@ -8038,6 +7200,14 @@
 <file path=ppt/slides/slide5.xml><?xml version="1.0" encoding="utf-8"?>
 <p:sld xmlns:a="http://schemas.openxmlformats.org/drawingml/2006/main" xmlns:p="http://schemas.openxmlformats.org/presentationml/2006/main" xmlns:r="http://schemas.openxmlformats.org/officeDocument/2006/relationships">
   <p:cSld>
+    <p:bg>
+      <p:bgPr>
+        <a:solidFill>
+          <a:srgbClr val="FFEEE4"/>
+        </a:solidFill>
+        <a:effectLst/>
+      </p:bgPr>
+    </p:bg>
     <p:spTree>
       <p:nvGrpSpPr>
         <p:cNvPr id="1" name=""/>
@@ -8053,42 +7223,20 @@
         </p:nvSpPr>
         <p:spPr>
           <a:xfrm>
-            <a:off x="54864" y="64008"/>
-            <a:ext cx="12079224" cy="521207"/>
-          </a:xfrm>
-          <a:prstGeom prst="rect">
-            <a:avLst/>
-          </a:prstGeom>
-          <a:gradFill rotWithShape="1">
-            <a:gsLst>
-              <a:gs pos="0">
-                <a:srgbClr val="F28C38"/>
-              </a:gs>
-              <a:gs pos="100000">
-                <a:srgbClr val="FBE3CB"/>
-              </a:gs>
-            </a:gsLst>
-            <a:lin scaled="0" ang="0"/>
-          </a:gradFill>
+            <a:off x="0" y="6675120"/>
+            <a:ext cx="12191695" cy="182880"/>
+          </a:xfrm>
+          <a:prstGeom prst="rect">
+            <a:avLst/>
+          </a:prstGeom>
+          <a:solidFill>
+            <a:srgbClr val="FF5D3B"/>
+          </a:solidFill>
           <a:ln>
             <a:noFill/>
           </a:ln>
           <a:effectLst/>
         </p:spPr>
-        <p:style>
-          <a:lnRef idx="1">
-            <a:schemeClr val="accent1"/>
-          </a:lnRef>
-          <a:fillRef idx="3">
-            <a:schemeClr val="accent1"/>
-          </a:fillRef>
-          <a:effectRef idx="2">
-            <a:schemeClr val="accent1"/>
-          </a:effectRef>
-          <a:fontRef idx="minor">
-            <a:schemeClr val="lt1"/>
-          </a:fontRef>
-        </p:style>
         <p:txBody>
           <a:bodyPr rtlCol="0" anchor="ctr"/>
           <a:lstStyle/>
@@ -8105,86 +7253,129 @@
         </p:nvSpPr>
         <p:spPr>
           <a:xfrm>
-            <a:off x="54864" y="6629400"/>
-            <a:ext cx="12079224" cy="182880"/>
-          </a:xfrm>
-          <a:prstGeom prst="rect">
-            <a:avLst/>
-          </a:prstGeom>
-          <a:gradFill rotWithShape="1">
-            <a:gsLst>
-              <a:gs pos="0">
-                <a:srgbClr val="F28C38"/>
-              </a:gs>
-              <a:gs pos="100000">
-                <a:srgbClr val="FBE3CB"/>
-              </a:gs>
-            </a:gsLst>
-            <a:lin scaled="0" ang="0"/>
-          </a:gradFill>
+            <a:off x="356616" y="137160"/>
+            <a:ext cx="2103120" cy="365760"/>
+          </a:xfrm>
+          <a:prstGeom prst="rect">
+            <a:avLst/>
+          </a:prstGeom>
+          <a:solidFill>
+            <a:srgbClr val="FF5D3B"/>
+          </a:solidFill>
           <a:ln>
             <a:noFill/>
           </a:ln>
           <a:effectLst/>
         </p:spPr>
-        <p:style>
-          <a:lnRef idx="1">
-            <a:schemeClr val="accent1"/>
-          </a:lnRef>
-          <a:fillRef idx="3">
-            <a:schemeClr val="accent1"/>
-          </a:fillRef>
-          <a:effectRef idx="2">
-            <a:schemeClr val="accent1"/>
-          </a:effectRef>
-          <a:fontRef idx="minor">
-            <a:schemeClr val="lt1"/>
-          </a:fontRef>
-        </p:style>
-        <p:txBody>
-          <a:bodyPr rtlCol="0" anchor="ctr"/>
+        <p:txBody>
+          <a:bodyPr rtlCol="0" anchor="ctr" wrap="square" lIns="73152" rIns="73152"/>
           <a:lstStyle/>
           <a:p>
             <a:pPr algn="ctr"/>
-          </a:p>
-        </p:txBody>
-      </p:sp>
-      <p:sp>
-        <p:nvSpPr>
-          <p:cNvPr id="4" name="Rectangle 3"/>
+            <a:r>
+              <a:rPr sz="1300" b="1">
+                <a:solidFill>
+                  <a:srgbClr val="FFFFFF"/>
+                </a:solidFill>
+                <a:latin typeface="Yu Gothic"/>
+              </a:rPr>
+              <a:t>ツアー接点</a:t>
+            </a:r>
+          </a:p>
+        </p:txBody>
+      </p:sp>
+      <p:sp>
+        <p:nvSpPr>
+          <p:cNvPr id="4" name="TextBox 3"/>
+          <p:cNvSpPr txBox="1"/>
+          <p:nvPr/>
+        </p:nvSpPr>
+        <p:spPr>
+          <a:xfrm>
+            <a:off x="2606040" y="109728"/>
+            <a:ext cx="9144000" cy="420624"/>
+          </a:xfrm>
+          <a:prstGeom prst="rect">
+            <a:avLst/>
+          </a:prstGeom>
+          <a:noFill/>
+        </p:spPr>
+        <p:txBody>
+          <a:bodyPr wrap="square" anchor="ctr" lIns="73152" rIns="73152">
+            <a:spAutoFit/>
+          </a:bodyPr>
+          <a:lstStyle/>
+          <a:p>
+            <a:pPr algn="l"/>
+            <a:r>
+              <a:rPr sz="2000" b="1">
+                <a:solidFill>
+                  <a:srgbClr val="F06142"/>
+                </a:solidFill>
+                <a:latin typeface="Yu Gothic"/>
+              </a:rPr>
+              <a:t>ツアーでの、ぐるぐるの動きと見極め</a:t>
+            </a:r>
+          </a:p>
+        </p:txBody>
+      </p:sp>
+      <p:sp>
+        <p:nvSpPr>
+          <p:cNvPr id="5" name="TextBox 4"/>
+          <p:cNvSpPr txBox="1"/>
+          <p:nvPr/>
+        </p:nvSpPr>
+        <p:spPr>
+          <a:xfrm>
+            <a:off x="274320" y="6291072"/>
+            <a:ext cx="11612880" cy="310896"/>
+          </a:xfrm>
+          <a:prstGeom prst="rect">
+            <a:avLst/>
+          </a:prstGeom>
+          <a:noFill/>
+        </p:spPr>
+        <p:txBody>
+          <a:bodyPr wrap="square" anchor="t" lIns="73152" rIns="73152">
+            <a:spAutoFit/>
+          </a:bodyPr>
+          <a:lstStyle/>
+          <a:p>
+            <a:pPr algn="l"/>
+            <a:r>
+              <a:rPr sz="900" b="0">
+                <a:solidFill>
+                  <a:srgbClr val="7A6E66"/>
+                </a:solidFill>
+                <a:latin typeface="Yu Gothic"/>
+              </a:rPr>
+              <a:t>出典：地球資源を輝かせていくIS / 銅巡りインターン議事録・企画スライド。見極めポイントは当方の提案（案）</a:t>
+            </a:r>
+          </a:p>
+        </p:txBody>
+      </p:sp>
+      <p:sp>
+        <p:nvSpPr>
+          <p:cNvPr id="6" name="Rectangle 5"/>
           <p:cNvSpPr/>
           <p:nvPr/>
         </p:nvSpPr>
         <p:spPr>
           <a:xfrm>
-            <a:off x="356616" y="155448"/>
-            <a:ext cx="2103120" cy="329184"/>
-          </a:xfrm>
-          <a:prstGeom prst="rect">
-            <a:avLst/>
-          </a:prstGeom>
-          <a:solidFill>
-            <a:srgbClr val="1F497D"/>
+            <a:off x="365760" y="777240"/>
+            <a:ext cx="2423160" cy="384048"/>
+          </a:xfrm>
+          <a:prstGeom prst="rect">
+            <a:avLst/>
+          </a:prstGeom>
+          <a:solidFill>
+            <a:srgbClr val="F06142"/>
           </a:solidFill>
           <a:ln>
             <a:noFill/>
           </a:ln>
           <a:effectLst/>
         </p:spPr>
-        <p:style>
-          <a:lnRef idx="1">
-            <a:schemeClr val="accent1"/>
-          </a:lnRef>
-          <a:fillRef idx="3">
-            <a:schemeClr val="accent1"/>
-          </a:fillRef>
-          <a:effectRef idx="2">
-            <a:schemeClr val="accent1"/>
-          </a:effectRef>
-          <a:fontRef idx="minor">
-            <a:schemeClr val="lt1"/>
-          </a:fontRef>
-        </p:style>
         <p:txBody>
           <a:bodyPr rtlCol="0" anchor="ctr" wrap="square" lIns="73152" rIns="73152"/>
           <a:lstStyle/>
@@ -8197,77 +7388,7 @@
                 </a:solidFill>
                 <a:latin typeface="Yu Gothic"/>
               </a:rPr>
-              <a:t>ツアー接点</a:t>
-            </a:r>
-          </a:p>
-        </p:txBody>
-      </p:sp>
-      <p:sp>
-        <p:nvSpPr>
-          <p:cNvPr id="5" name="TextBox 4"/>
-          <p:cNvSpPr txBox="1"/>
-          <p:nvPr/>
-        </p:nvSpPr>
-        <p:spPr>
-          <a:xfrm>
-            <a:off x="2606040" y="128016"/>
-            <a:ext cx="9144000" cy="365760"/>
-          </a:xfrm>
-          <a:prstGeom prst="rect">
-            <a:avLst/>
-          </a:prstGeom>
-          <a:noFill/>
-        </p:spPr>
-        <p:txBody>
-          <a:bodyPr wrap="square" anchor="ctr" lIns="73152" rIns="73152">
-            <a:spAutoFit/>
-          </a:bodyPr>
-          <a:lstStyle/>
-          <a:p>
-            <a:pPr algn="l"/>
-            <a:r>
-              <a:rPr sz="1700" b="1">
-                <a:solidFill>
-                  <a:srgbClr val="262626"/>
-                </a:solidFill>
-                <a:latin typeface="Yu Gothic"/>
-              </a:rPr>
-              <a:t>ツアーでの、ぐるぐるの動きと見極め</a:t>
-            </a:r>
-          </a:p>
-        </p:txBody>
-      </p:sp>
-      <p:sp>
-        <p:nvSpPr>
-          <p:cNvPr id="6" name="TextBox 5"/>
-          <p:cNvSpPr txBox="1"/>
-          <p:nvPr/>
-        </p:nvSpPr>
-        <p:spPr>
-          <a:xfrm>
-            <a:off x="274320" y="6291072"/>
-            <a:ext cx="11612880" cy="310896"/>
-          </a:xfrm>
-          <a:prstGeom prst="rect">
-            <a:avLst/>
-          </a:prstGeom>
-          <a:noFill/>
-        </p:spPr>
-        <p:txBody>
-          <a:bodyPr wrap="square" anchor="t" lIns="73152" rIns="73152">
-            <a:spAutoFit/>
-          </a:bodyPr>
-          <a:lstStyle/>
-          <a:p>
-            <a:pPr algn="l"/>
-            <a:r>
-              <a:rPr sz="900" b="0">
-                <a:solidFill>
-                  <a:srgbClr val="595959"/>
-                </a:solidFill>
-                <a:latin typeface="Yu Gothic"/>
-              </a:rPr>
-              <a:t>出典：地球資源を輝かせていくIS / 銅巡りインターン議事録・企画スライド。見極めポイントは当方の提案（案）</a:t>
+              <a:t>フェーズ</a:t>
             </a:r>
           </a:p>
         </p:txBody>
@@ -8280,34 +7401,20 @@
         </p:nvSpPr>
         <p:spPr>
           <a:xfrm>
-            <a:off x="365760" y="777240"/>
-            <a:ext cx="2423160" cy="384048"/>
-          </a:xfrm>
-          <a:prstGeom prst="rect">
-            <a:avLst/>
-          </a:prstGeom>
-          <a:solidFill>
-            <a:srgbClr val="1F497D"/>
+            <a:off x="2834640" y="777240"/>
+            <a:ext cx="3337560" cy="384048"/>
+          </a:xfrm>
+          <a:prstGeom prst="rect">
+            <a:avLst/>
+          </a:prstGeom>
+          <a:solidFill>
+            <a:srgbClr val="F06142"/>
           </a:solidFill>
           <a:ln>
             <a:noFill/>
           </a:ln>
           <a:effectLst/>
         </p:spPr>
-        <p:style>
-          <a:lnRef idx="1">
-            <a:schemeClr val="accent1"/>
-          </a:lnRef>
-          <a:fillRef idx="3">
-            <a:schemeClr val="accent1"/>
-          </a:fillRef>
-          <a:effectRef idx="2">
-            <a:schemeClr val="accent1"/>
-          </a:effectRef>
-          <a:fontRef idx="minor">
-            <a:schemeClr val="lt1"/>
-          </a:fontRef>
-        </p:style>
         <p:txBody>
           <a:bodyPr rtlCol="0" anchor="ctr" wrap="square" lIns="73152" rIns="73152"/>
           <a:lstStyle/>
@@ -8320,7 +7427,7 @@
                 </a:solidFill>
                 <a:latin typeface="Yu Gothic"/>
               </a:rPr>
-              <a:t>フェーズ</a:t>
+              <a:t>内容</a:t>
             </a:r>
           </a:p>
         </p:txBody>
@@ -8333,34 +7440,20 @@
         </p:nvSpPr>
         <p:spPr>
           <a:xfrm>
-            <a:off x="2834640" y="777240"/>
-            <a:ext cx="3337560" cy="384048"/>
-          </a:xfrm>
-          <a:prstGeom prst="rect">
-            <a:avLst/>
-          </a:prstGeom>
-          <a:solidFill>
-            <a:srgbClr val="1F497D"/>
+            <a:off x="6217920" y="777240"/>
+            <a:ext cx="2971800" cy="384048"/>
+          </a:xfrm>
+          <a:prstGeom prst="rect">
+            <a:avLst/>
+          </a:prstGeom>
+          <a:solidFill>
+            <a:srgbClr val="F06142"/>
           </a:solidFill>
           <a:ln>
             <a:noFill/>
           </a:ln>
           <a:effectLst/>
         </p:spPr>
-        <p:style>
-          <a:lnRef idx="1">
-            <a:schemeClr val="accent1"/>
-          </a:lnRef>
-          <a:fillRef idx="3">
-            <a:schemeClr val="accent1"/>
-          </a:fillRef>
-          <a:effectRef idx="2">
-            <a:schemeClr val="accent1"/>
-          </a:effectRef>
-          <a:fontRef idx="minor">
-            <a:schemeClr val="lt1"/>
-          </a:fontRef>
-        </p:style>
         <p:txBody>
           <a:bodyPr rtlCol="0" anchor="ctr" wrap="square" lIns="73152" rIns="73152"/>
           <a:lstStyle/>
@@ -8373,7 +7466,7 @@
                 </a:solidFill>
                 <a:latin typeface="Yu Gothic"/>
               </a:rPr>
-              <a:t>内容</a:t>
+              <a:t>こころの動き</a:t>
             </a:r>
           </a:p>
         </p:txBody>
@@ -8386,34 +7479,20 @@
         </p:nvSpPr>
         <p:spPr>
           <a:xfrm>
-            <a:off x="6217920" y="777240"/>
-            <a:ext cx="2971800" cy="384048"/>
-          </a:xfrm>
-          <a:prstGeom prst="rect">
-            <a:avLst/>
-          </a:prstGeom>
-          <a:solidFill>
-            <a:srgbClr val="1F497D"/>
+            <a:off x="9235440" y="777240"/>
+            <a:ext cx="2514600" cy="384048"/>
+          </a:xfrm>
+          <a:prstGeom prst="rect">
+            <a:avLst/>
+          </a:prstGeom>
+          <a:solidFill>
+            <a:srgbClr val="F06142"/>
           </a:solidFill>
           <a:ln>
             <a:noFill/>
           </a:ln>
           <a:effectLst/>
         </p:spPr>
-        <p:style>
-          <a:lnRef idx="1">
-            <a:schemeClr val="accent1"/>
-          </a:lnRef>
-          <a:fillRef idx="3">
-            <a:schemeClr val="accent1"/>
-          </a:fillRef>
-          <a:effectRef idx="2">
-            <a:schemeClr val="accent1"/>
-          </a:effectRef>
-          <a:fontRef idx="minor">
-            <a:schemeClr val="lt1"/>
-          </a:fontRef>
-        </p:style>
         <p:txBody>
           <a:bodyPr rtlCol="0" anchor="ctr" wrap="square" lIns="73152" rIns="73152"/>
           <a:lstStyle/>
@@ -8426,7 +7505,7 @@
                 </a:solidFill>
                 <a:latin typeface="Yu Gothic"/>
               </a:rPr>
-              <a:t>こころの動き</a:t>
+              <a:t>見たい行動</a:t>
             </a:r>
           </a:p>
         </p:txBody>
@@ -8439,47 +7518,45 @@
         </p:nvSpPr>
         <p:spPr>
           <a:xfrm>
-            <a:off x="9235440" y="777240"/>
-            <a:ext cx="2514600" cy="384048"/>
-          </a:xfrm>
-          <a:prstGeom prst="rect">
-            <a:avLst/>
-          </a:prstGeom>
-          <a:solidFill>
-            <a:srgbClr val="1F497D"/>
+            <a:off x="365760" y="1216152"/>
+            <a:ext cx="2423160" cy="914400"/>
+          </a:xfrm>
+          <a:prstGeom prst="rect">
+            <a:avLst/>
+          </a:prstGeom>
+          <a:solidFill>
+            <a:srgbClr val="FFE0D0"/>
           </a:solidFill>
           <a:ln>
             <a:noFill/>
           </a:ln>
           <a:effectLst/>
         </p:spPr>
-        <p:style>
-          <a:lnRef idx="1">
-            <a:schemeClr val="accent1"/>
-          </a:lnRef>
-          <a:fillRef idx="3">
-            <a:schemeClr val="accent1"/>
-          </a:fillRef>
-          <a:effectRef idx="2">
-            <a:schemeClr val="accent1"/>
-          </a:effectRef>
-          <a:fontRef idx="minor">
-            <a:schemeClr val="lt1"/>
-          </a:fontRef>
-        </p:style>
         <p:txBody>
           <a:bodyPr rtlCol="0" anchor="ctr" wrap="square" lIns="73152" rIns="73152"/>
           <a:lstStyle/>
           <a:p>
-            <a:pPr algn="ctr"/>
-            <a:r>
-              <a:rPr sz="1300" b="1">
-                <a:solidFill>
-                  <a:srgbClr val="FFFFFF"/>
-                </a:solidFill>
-                <a:latin typeface="Yu Gothic"/>
-              </a:rPr>
-              <a:t>見たい行動</a:t>
+            <a:pPr algn="l"/>
+            <a:r>
+              <a:rPr sz="1400" b="1">
+                <a:solidFill>
+                  <a:srgbClr val="F06142"/>
+                </a:solidFill>
+                <a:latin typeface="Yu Gothic"/>
+              </a:rPr>
+              <a:t>Part0　12月</a:t>
+            </a:r>
+          </a:p>
+          <a:p>
+            <a:pPr algn="l"/>
+            <a:r>
+              <a:rPr sz="1400" b="1">
+                <a:solidFill>
+                  <a:srgbClr val="F06142"/>
+                </a:solidFill>
+                <a:latin typeface="Yu Gothic"/>
+              </a:rPr>
+              <a:t>オンライン</a:t>
             </a:r>
           </a:p>
         </p:txBody>
@@ -8492,59 +7569,45 @@
         </p:nvSpPr>
         <p:spPr>
           <a:xfrm>
-            <a:off x="365760" y="1216152"/>
-            <a:ext cx="2423160" cy="914400"/>
-          </a:xfrm>
-          <a:prstGeom prst="rect">
-            <a:avLst/>
-          </a:prstGeom>
-          <a:solidFill>
-            <a:srgbClr val="FBE3CB"/>
+            <a:off x="2834640" y="1216152"/>
+            <a:ext cx="3337560" cy="914400"/>
+          </a:xfrm>
+          <a:prstGeom prst="rect">
+            <a:avLst/>
+          </a:prstGeom>
+          <a:solidFill>
+            <a:srgbClr val="FFFFFF"/>
           </a:solidFill>
           <a:ln>
             <a:noFill/>
           </a:ln>
           <a:effectLst/>
         </p:spPr>
-        <p:style>
-          <a:lnRef idx="1">
-            <a:schemeClr val="accent1"/>
-          </a:lnRef>
-          <a:fillRef idx="3">
-            <a:schemeClr val="accent1"/>
-          </a:fillRef>
-          <a:effectRef idx="2">
-            <a:schemeClr val="accent1"/>
-          </a:effectRef>
-          <a:fontRef idx="minor">
-            <a:schemeClr val="lt1"/>
-          </a:fontRef>
-        </p:style>
         <p:txBody>
           <a:bodyPr rtlCol="0" anchor="ctr" wrap="square" lIns="73152" rIns="73152"/>
           <a:lstStyle/>
           <a:p>
             <a:pPr algn="l"/>
             <a:r>
-              <a:rPr sz="1400" b="1">
-                <a:solidFill>
-                  <a:srgbClr val="1F497D"/>
-                </a:solidFill>
-                <a:latin typeface="Yu Gothic"/>
-              </a:rPr>
-              <a:t>Part0　12月</a:t>
+              <a:rPr sz="1400" b="0">
+                <a:solidFill>
+                  <a:srgbClr val="3A2A24"/>
+                </a:solidFill>
+                <a:latin typeface="Yu Gothic"/>
+              </a:rPr>
+              <a:t>銅業界の課題</a:t>
             </a:r>
           </a:p>
           <a:p>
             <a:pPr algn="l"/>
             <a:r>
-              <a:rPr sz="1400" b="1">
-                <a:solidFill>
-                  <a:srgbClr val="1F497D"/>
-                </a:solidFill>
-                <a:latin typeface="Yu Gothic"/>
-              </a:rPr>
-              <a:t>オンライン</a:t>
+              <a:rPr sz="1400" b="0">
+                <a:solidFill>
+                  <a:srgbClr val="3A2A24"/>
+                </a:solidFill>
+                <a:latin typeface="Yu Gothic"/>
+              </a:rPr>
+              <a:t>価値循環モデル</a:t>
             </a:r>
           </a:p>
         </p:txBody>
@@ -8557,34 +7620,20 @@
         </p:nvSpPr>
         <p:spPr>
           <a:xfrm>
-            <a:off x="2834640" y="1216152"/>
-            <a:ext cx="3337560" cy="914400"/>
-          </a:xfrm>
-          <a:prstGeom prst="rect">
-            <a:avLst/>
-          </a:prstGeom>
-          <a:solidFill>
-            <a:srgbClr val="F2F2F2"/>
+            <a:off x="6217920" y="1216152"/>
+            <a:ext cx="2971800" cy="914400"/>
+          </a:xfrm>
+          <a:prstGeom prst="rect">
+            <a:avLst/>
+          </a:prstGeom>
+          <a:solidFill>
+            <a:srgbClr val="FFFFFF"/>
           </a:solidFill>
           <a:ln>
             <a:noFill/>
           </a:ln>
           <a:effectLst/>
         </p:spPr>
-        <p:style>
-          <a:lnRef idx="1">
-            <a:schemeClr val="accent1"/>
-          </a:lnRef>
-          <a:fillRef idx="3">
-            <a:schemeClr val="accent1"/>
-          </a:fillRef>
-          <a:effectRef idx="2">
-            <a:schemeClr val="accent1"/>
-          </a:effectRef>
-          <a:fontRef idx="minor">
-            <a:schemeClr val="lt1"/>
-          </a:fontRef>
-        </p:style>
         <p:txBody>
           <a:bodyPr rtlCol="0" anchor="ctr" wrap="square" lIns="73152" rIns="73152"/>
           <a:lstStyle/>
@@ -8593,23 +7642,11 @@
             <a:r>
               <a:rPr sz="1400" b="0">
                 <a:solidFill>
-                  <a:srgbClr val="262626"/>
-                </a:solidFill>
-                <a:latin typeface="Yu Gothic"/>
-              </a:rPr>
-              <a:t>銅業界の課題</a:t>
-            </a:r>
-          </a:p>
-          <a:p>
-            <a:pPr algn="l"/>
-            <a:r>
-              <a:rPr sz="1400" b="0">
-                <a:solidFill>
-                  <a:srgbClr val="262626"/>
-                </a:solidFill>
-                <a:latin typeface="Yu Gothic"/>
-              </a:rPr>
-              <a:t>価値循環モデル</a:t>
+                  <a:srgbClr val="3A2A24"/>
+                </a:solidFill>
+                <a:latin typeface="Yu Gothic"/>
+              </a:rPr>
+              <a:t>「銅は有限なんだ…！」</a:t>
             </a:r>
           </a:p>
         </p:txBody>
@@ -8622,34 +7659,20 @@
         </p:nvSpPr>
         <p:spPr>
           <a:xfrm>
-            <a:off x="6217920" y="1216152"/>
-            <a:ext cx="2971800" cy="914400"/>
-          </a:xfrm>
-          <a:prstGeom prst="rect">
-            <a:avLst/>
-          </a:prstGeom>
-          <a:solidFill>
-            <a:srgbClr val="F2F2F2"/>
+            <a:off x="9235440" y="1216152"/>
+            <a:ext cx="2514600" cy="914400"/>
+          </a:xfrm>
+          <a:prstGeom prst="rect">
+            <a:avLst/>
+          </a:prstGeom>
+          <a:solidFill>
+            <a:srgbClr val="FFFFFF"/>
           </a:solidFill>
           <a:ln>
             <a:noFill/>
           </a:ln>
           <a:effectLst/>
         </p:spPr>
-        <p:style>
-          <a:lnRef idx="1">
-            <a:schemeClr val="accent1"/>
-          </a:lnRef>
-          <a:fillRef idx="3">
-            <a:schemeClr val="accent1"/>
-          </a:fillRef>
-          <a:effectRef idx="2">
-            <a:schemeClr val="accent1"/>
-          </a:effectRef>
-          <a:fontRef idx="minor">
-            <a:schemeClr val="lt1"/>
-          </a:fontRef>
-        </p:style>
         <p:txBody>
           <a:bodyPr rtlCol="0" anchor="ctr" wrap="square" lIns="73152" rIns="73152"/>
           <a:lstStyle/>
@@ -8658,11 +7681,11 @@
             <a:r>
               <a:rPr sz="1400" b="0">
                 <a:solidFill>
-                  <a:srgbClr val="262626"/>
-                </a:solidFill>
-                <a:latin typeface="Yu Gothic"/>
-              </a:rPr>
-              <a:t>「銅は有限なんだ…！」</a:t>
+                  <a:srgbClr val="3A2A24"/>
+                </a:solidFill>
+                <a:latin typeface="Yu Gothic"/>
+              </a:rPr>
+              <a:t>事前課題・質問</a:t>
             </a:r>
           </a:p>
         </p:txBody>
@@ -8675,47 +7698,45 @@
         </p:nvSpPr>
         <p:spPr>
           <a:xfrm>
-            <a:off x="9235440" y="1216152"/>
-            <a:ext cx="2514600" cy="914400"/>
-          </a:xfrm>
-          <a:prstGeom prst="rect">
-            <a:avLst/>
-          </a:prstGeom>
-          <a:solidFill>
-            <a:srgbClr val="F2F2F2"/>
+            <a:off x="365760" y="2194560"/>
+            <a:ext cx="2423160" cy="914400"/>
+          </a:xfrm>
+          <a:prstGeom prst="rect">
+            <a:avLst/>
+          </a:prstGeom>
+          <a:solidFill>
+            <a:srgbClr val="FFE0D0"/>
           </a:solidFill>
           <a:ln>
             <a:noFill/>
           </a:ln>
           <a:effectLst/>
         </p:spPr>
-        <p:style>
-          <a:lnRef idx="1">
-            <a:schemeClr val="accent1"/>
-          </a:lnRef>
-          <a:fillRef idx="3">
-            <a:schemeClr val="accent1"/>
-          </a:fillRef>
-          <a:effectRef idx="2">
-            <a:schemeClr val="accent1"/>
-          </a:effectRef>
-          <a:fontRef idx="minor">
-            <a:schemeClr val="lt1"/>
-          </a:fontRef>
-        </p:style>
         <p:txBody>
           <a:bodyPr rtlCol="0" anchor="ctr" wrap="square" lIns="73152" rIns="73152"/>
           <a:lstStyle/>
           <a:p>
             <a:pPr algn="l"/>
             <a:r>
-              <a:rPr sz="1400" b="0">
-                <a:solidFill>
-                  <a:srgbClr val="262626"/>
-                </a:solidFill>
-                <a:latin typeface="Yu Gothic"/>
-              </a:rPr>
-              <a:t>事前課題・質問</a:t>
+              <a:rPr sz="1400" b="1">
+                <a:solidFill>
+                  <a:srgbClr val="F06142"/>
+                </a:solidFill>
+                <a:latin typeface="Yu Gothic"/>
+              </a:rPr>
+              <a:t>Part1　12月中旬</a:t>
+            </a:r>
+          </a:p>
+          <a:p>
+            <a:pPr algn="l"/>
+            <a:r>
+              <a:rPr sz="1400" b="1">
+                <a:solidFill>
+                  <a:srgbClr val="F06142"/>
+                </a:solidFill>
+                <a:latin typeface="Yu Gothic"/>
+              </a:rPr>
+              <a:t>関係者トーク</a:t>
             </a:r>
           </a:p>
         </p:txBody>
@@ -8728,59 +7749,45 @@
         </p:nvSpPr>
         <p:spPr>
           <a:xfrm>
-            <a:off x="365760" y="2194560"/>
-            <a:ext cx="2423160" cy="914400"/>
-          </a:xfrm>
-          <a:prstGeom prst="rect">
-            <a:avLst/>
-          </a:prstGeom>
-          <a:solidFill>
-            <a:srgbClr val="FBE3CB"/>
+            <a:off x="2834640" y="2194560"/>
+            <a:ext cx="3337560" cy="914400"/>
+          </a:xfrm>
+          <a:prstGeom prst="rect">
+            <a:avLst/>
+          </a:prstGeom>
+          <a:solidFill>
+            <a:srgbClr val="FFFFFF"/>
           </a:solidFill>
           <a:ln>
             <a:noFill/>
           </a:ln>
           <a:effectLst/>
         </p:spPr>
-        <p:style>
-          <a:lnRef idx="1">
-            <a:schemeClr val="accent1"/>
-          </a:lnRef>
-          <a:fillRef idx="3">
-            <a:schemeClr val="accent1"/>
-          </a:fillRef>
-          <a:effectRef idx="2">
-            <a:schemeClr val="accent1"/>
-          </a:effectRef>
-          <a:fontRef idx="minor">
-            <a:schemeClr val="lt1"/>
-          </a:fontRef>
-        </p:style>
         <p:txBody>
           <a:bodyPr rtlCol="0" anchor="ctr" wrap="square" lIns="73152" rIns="73152"/>
           <a:lstStyle/>
           <a:p>
             <a:pPr algn="l"/>
             <a:r>
-              <a:rPr sz="1400" b="1">
-                <a:solidFill>
-                  <a:srgbClr val="1F497D"/>
-                </a:solidFill>
-                <a:latin typeface="Yu Gothic"/>
-              </a:rPr>
-              <a:t>Part1　12月中旬</a:t>
+              <a:rPr sz="1400" b="0">
+                <a:solidFill>
+                  <a:srgbClr val="3A2A24"/>
+                </a:solidFill>
+                <a:latin typeface="Yu Gothic"/>
+              </a:rPr>
+              <a:t>産廃・加工・精錬所の</a:t>
             </a:r>
           </a:p>
           <a:p>
             <a:pPr algn="l"/>
             <a:r>
-              <a:rPr sz="1400" b="1">
-                <a:solidFill>
-                  <a:srgbClr val="1F497D"/>
-                </a:solidFill>
-                <a:latin typeface="Yu Gothic"/>
-              </a:rPr>
-              <a:t>関係者トーク</a:t>
+              <a:rPr sz="1400" b="0">
+                <a:solidFill>
+                  <a:srgbClr val="3A2A24"/>
+                </a:solidFill>
+                <a:latin typeface="Yu Gothic"/>
+              </a:rPr>
+              <a:t>方に話を聞く</a:t>
             </a:r>
           </a:p>
         </p:txBody>
@@ -8793,34 +7800,20 @@
         </p:nvSpPr>
         <p:spPr>
           <a:xfrm>
-            <a:off x="2834640" y="2194560"/>
-            <a:ext cx="3337560" cy="914400"/>
-          </a:xfrm>
-          <a:prstGeom prst="rect">
-            <a:avLst/>
-          </a:prstGeom>
-          <a:solidFill>
-            <a:srgbClr val="F2F2F2"/>
+            <a:off x="6217920" y="2194560"/>
+            <a:ext cx="2971800" cy="914400"/>
+          </a:xfrm>
+          <a:prstGeom prst="rect">
+            <a:avLst/>
+          </a:prstGeom>
+          <a:solidFill>
+            <a:srgbClr val="FFFFFF"/>
           </a:solidFill>
           <a:ln>
             <a:noFill/>
           </a:ln>
           <a:effectLst/>
         </p:spPr>
-        <p:style>
-          <a:lnRef idx="1">
-            <a:schemeClr val="accent1"/>
-          </a:lnRef>
-          <a:fillRef idx="3">
-            <a:schemeClr val="accent1"/>
-          </a:fillRef>
-          <a:effectRef idx="2">
-            <a:schemeClr val="accent1"/>
-          </a:effectRef>
-          <a:fontRef idx="minor">
-            <a:schemeClr val="lt1"/>
-          </a:fontRef>
-        </p:style>
         <p:txBody>
           <a:bodyPr rtlCol="0" anchor="ctr" wrap="square" lIns="73152" rIns="73152"/>
           <a:lstStyle/>
@@ -8829,23 +7822,11 @@
             <a:r>
               <a:rPr sz="1400" b="0">
                 <a:solidFill>
-                  <a:srgbClr val="262626"/>
-                </a:solidFill>
-                <a:latin typeface="Yu Gothic"/>
-              </a:rPr>
-              <a:t>産廃・加工・精錬所の</a:t>
-            </a:r>
-          </a:p>
-          <a:p>
-            <a:pPr algn="l"/>
-            <a:r>
-              <a:rPr sz="1400" b="0">
-                <a:solidFill>
-                  <a:srgbClr val="262626"/>
-                </a:solidFill>
-                <a:latin typeface="Yu Gothic"/>
-              </a:rPr>
-              <a:t>方に話を聞く</a:t>
+                  <a:srgbClr val="3A2A24"/>
+                </a:solidFill>
+                <a:latin typeface="Yu Gothic"/>
+              </a:rPr>
+              <a:t>「立場で景色が違う」</a:t>
             </a:r>
           </a:p>
         </p:txBody>
@@ -8858,34 +7839,20 @@
         </p:nvSpPr>
         <p:spPr>
           <a:xfrm>
-            <a:off x="6217920" y="2194560"/>
-            <a:ext cx="2971800" cy="914400"/>
-          </a:xfrm>
-          <a:prstGeom prst="rect">
-            <a:avLst/>
-          </a:prstGeom>
-          <a:solidFill>
-            <a:srgbClr val="F2F2F2"/>
+            <a:off x="9235440" y="2194560"/>
+            <a:ext cx="2514600" cy="914400"/>
+          </a:xfrm>
+          <a:prstGeom prst="rect">
+            <a:avLst/>
+          </a:prstGeom>
+          <a:solidFill>
+            <a:srgbClr val="FFFFFF"/>
           </a:solidFill>
           <a:ln>
             <a:noFill/>
           </a:ln>
           <a:effectLst/>
         </p:spPr>
-        <p:style>
-          <a:lnRef idx="1">
-            <a:schemeClr val="accent1"/>
-          </a:lnRef>
-          <a:fillRef idx="3">
-            <a:schemeClr val="accent1"/>
-          </a:fillRef>
-          <a:effectRef idx="2">
-            <a:schemeClr val="accent1"/>
-          </a:effectRef>
-          <a:fontRef idx="minor">
-            <a:schemeClr val="lt1"/>
-          </a:fontRef>
-        </p:style>
         <p:txBody>
           <a:bodyPr rtlCol="0" anchor="ctr" wrap="square" lIns="73152" rIns="73152"/>
           <a:lstStyle/>
@@ -8894,11 +7861,11 @@
             <a:r>
               <a:rPr sz="1400" b="0">
                 <a:solidFill>
-                  <a:srgbClr val="262626"/>
-                </a:solidFill>
-                <a:latin typeface="Yu Gothic"/>
-              </a:rPr>
-              <a:t>「立場で景色が違う」</a:t>
+                  <a:srgbClr val="3A2A24"/>
+                </a:solidFill>
+                <a:latin typeface="Yu Gothic"/>
+              </a:rPr>
+              <a:t>聞く力</a:t>
             </a:r>
           </a:p>
         </p:txBody>
@@ -8911,47 +7878,45 @@
         </p:nvSpPr>
         <p:spPr>
           <a:xfrm>
-            <a:off x="9235440" y="2194560"/>
-            <a:ext cx="2514600" cy="914400"/>
-          </a:xfrm>
-          <a:prstGeom prst="rect">
-            <a:avLst/>
-          </a:prstGeom>
-          <a:solidFill>
-            <a:srgbClr val="F2F2F2"/>
+            <a:off x="365760" y="3172968"/>
+            <a:ext cx="2423160" cy="914400"/>
+          </a:xfrm>
+          <a:prstGeom prst="rect">
+            <a:avLst/>
+          </a:prstGeom>
+          <a:solidFill>
+            <a:srgbClr val="FFE0D0"/>
           </a:solidFill>
           <a:ln>
             <a:noFill/>
           </a:ln>
           <a:effectLst/>
         </p:spPr>
-        <p:style>
-          <a:lnRef idx="1">
-            <a:schemeClr val="accent1"/>
-          </a:lnRef>
-          <a:fillRef idx="3">
-            <a:schemeClr val="accent1"/>
-          </a:fillRef>
-          <a:effectRef idx="2">
-            <a:schemeClr val="accent1"/>
-          </a:effectRef>
-          <a:fontRef idx="minor">
-            <a:schemeClr val="lt1"/>
-          </a:fontRef>
-        </p:style>
         <p:txBody>
           <a:bodyPr rtlCol="0" anchor="ctr" wrap="square" lIns="73152" rIns="73152"/>
           <a:lstStyle/>
           <a:p>
             <a:pPr algn="l"/>
             <a:r>
-              <a:rPr sz="1400" b="0">
-                <a:solidFill>
-                  <a:srgbClr val="262626"/>
-                </a:solidFill>
-                <a:latin typeface="Yu Gothic"/>
-              </a:rPr>
-              <a:t>聞く力</a:t>
+              <a:rPr sz="1400" b="1">
+                <a:solidFill>
+                  <a:srgbClr val="F06142"/>
+                </a:solidFill>
+                <a:latin typeface="Yu Gothic"/>
+              </a:rPr>
+              <a:t>Part2　1月</a:t>
+            </a:r>
+          </a:p>
+          <a:p>
+            <a:pPr algn="l"/>
+            <a:r>
+              <a:rPr sz="1400" b="1">
+                <a:solidFill>
+                  <a:srgbClr val="F06142"/>
+                </a:solidFill>
+                <a:latin typeface="Yu Gothic"/>
+              </a:rPr>
+              <a:t>工場見学</a:t>
             </a:r>
           </a:p>
         </p:txBody>
@@ -8964,59 +7929,45 @@
         </p:nvSpPr>
         <p:spPr>
           <a:xfrm>
-            <a:off x="365760" y="3172968"/>
-            <a:ext cx="2423160" cy="914400"/>
-          </a:xfrm>
-          <a:prstGeom prst="rect">
-            <a:avLst/>
-          </a:prstGeom>
-          <a:solidFill>
-            <a:srgbClr val="FBE3CB"/>
+            <a:off x="2834640" y="3172968"/>
+            <a:ext cx="3337560" cy="914400"/>
+          </a:xfrm>
+          <a:prstGeom prst="rect">
+            <a:avLst/>
+          </a:prstGeom>
+          <a:solidFill>
+            <a:srgbClr val="FFFFFF"/>
           </a:solidFill>
           <a:ln>
             <a:noFill/>
           </a:ln>
           <a:effectLst/>
         </p:spPr>
-        <p:style>
-          <a:lnRef idx="1">
-            <a:schemeClr val="accent1"/>
-          </a:lnRef>
-          <a:fillRef idx="3">
-            <a:schemeClr val="accent1"/>
-          </a:fillRef>
-          <a:effectRef idx="2">
-            <a:schemeClr val="accent1"/>
-          </a:effectRef>
-          <a:fontRef idx="minor">
-            <a:schemeClr val="lt1"/>
-          </a:fontRef>
-        </p:style>
         <p:txBody>
           <a:bodyPr rtlCol="0" anchor="ctr" wrap="square" lIns="73152" rIns="73152"/>
           <a:lstStyle/>
           <a:p>
             <a:pPr algn="l"/>
             <a:r>
-              <a:rPr sz="1400" b="1">
-                <a:solidFill>
-                  <a:srgbClr val="1F497D"/>
-                </a:solidFill>
-                <a:latin typeface="Yu Gothic"/>
-              </a:rPr>
-              <a:t>Part2　1月</a:t>
+              <a:rPr sz="1400" b="0">
+                <a:solidFill>
+                  <a:srgbClr val="3A2A24"/>
+                </a:solidFill>
+                <a:latin typeface="Yu Gothic"/>
+              </a:rPr>
+              <a:t>もったいない</a:t>
             </a:r>
           </a:p>
           <a:p>
             <a:pPr algn="l"/>
             <a:r>
-              <a:rPr sz="1400" b="1">
-                <a:solidFill>
-                  <a:srgbClr val="1F497D"/>
-                </a:solidFill>
-                <a:latin typeface="Yu Gothic"/>
-              </a:rPr>
-              <a:t>工場見学</a:t>
+              <a:rPr sz="1400" b="0">
+                <a:solidFill>
+                  <a:srgbClr val="3A2A24"/>
+                </a:solidFill>
+                <a:latin typeface="Yu Gothic"/>
+              </a:rPr>
+              <a:t>ポイントを探す</a:t>
             </a:r>
           </a:p>
         </p:txBody>
@@ -9029,34 +7980,20 @@
         </p:nvSpPr>
         <p:spPr>
           <a:xfrm>
-            <a:off x="2834640" y="3172968"/>
-            <a:ext cx="3337560" cy="914400"/>
-          </a:xfrm>
-          <a:prstGeom prst="rect">
-            <a:avLst/>
-          </a:prstGeom>
-          <a:solidFill>
-            <a:srgbClr val="F2F2F2"/>
+            <a:off x="6217920" y="3172968"/>
+            <a:ext cx="2971800" cy="914400"/>
+          </a:xfrm>
+          <a:prstGeom prst="rect">
+            <a:avLst/>
+          </a:prstGeom>
+          <a:solidFill>
+            <a:srgbClr val="FFFFFF"/>
           </a:solidFill>
           <a:ln>
             <a:noFill/>
           </a:ln>
           <a:effectLst/>
         </p:spPr>
-        <p:style>
-          <a:lnRef idx="1">
-            <a:schemeClr val="accent1"/>
-          </a:lnRef>
-          <a:fillRef idx="3">
-            <a:schemeClr val="accent1"/>
-          </a:fillRef>
-          <a:effectRef idx="2">
-            <a:schemeClr val="accent1"/>
-          </a:effectRef>
-          <a:fontRef idx="minor">
-            <a:schemeClr val="lt1"/>
-          </a:fontRef>
-        </p:style>
         <p:txBody>
           <a:bodyPr rtlCol="0" anchor="ctr" wrap="square" lIns="73152" rIns="73152"/>
           <a:lstStyle/>
@@ -9065,23 +8002,11 @@
             <a:r>
               <a:rPr sz="1400" b="0">
                 <a:solidFill>
-                  <a:srgbClr val="262626"/>
-                </a:solidFill>
-                <a:latin typeface="Yu Gothic"/>
-              </a:rPr>
-              <a:t>もったいない</a:t>
-            </a:r>
-          </a:p>
-          <a:p>
-            <a:pPr algn="l"/>
-            <a:r>
-              <a:rPr sz="1400" b="0">
-                <a:solidFill>
-                  <a:srgbClr val="262626"/>
-                </a:solidFill>
-                <a:latin typeface="Yu Gothic"/>
-              </a:rPr>
-              <a:t>ポイントを探す</a:t>
+                  <a:srgbClr val="3A2A24"/>
+                </a:solidFill>
+                <a:latin typeface="Yu Gothic"/>
+              </a:rPr>
+              <a:t>「どこで回せる？」</a:t>
             </a:r>
           </a:p>
         </p:txBody>
@@ -9094,34 +8019,20 @@
         </p:nvSpPr>
         <p:spPr>
           <a:xfrm>
-            <a:off x="6217920" y="3172968"/>
-            <a:ext cx="2971800" cy="914400"/>
-          </a:xfrm>
-          <a:prstGeom prst="rect">
-            <a:avLst/>
-          </a:prstGeom>
-          <a:solidFill>
-            <a:srgbClr val="F2F2F2"/>
+            <a:off x="9235440" y="3172968"/>
+            <a:ext cx="2514600" cy="914400"/>
+          </a:xfrm>
+          <a:prstGeom prst="rect">
+            <a:avLst/>
+          </a:prstGeom>
+          <a:solidFill>
+            <a:srgbClr val="FFFFFF"/>
           </a:solidFill>
           <a:ln>
             <a:noFill/>
           </a:ln>
           <a:effectLst/>
         </p:spPr>
-        <p:style>
-          <a:lnRef idx="1">
-            <a:schemeClr val="accent1"/>
-          </a:lnRef>
-          <a:fillRef idx="3">
-            <a:schemeClr val="accent1"/>
-          </a:fillRef>
-          <a:effectRef idx="2">
-            <a:schemeClr val="accent1"/>
-          </a:effectRef>
-          <a:fontRef idx="minor">
-            <a:schemeClr val="lt1"/>
-          </a:fontRef>
-        </p:style>
         <p:txBody>
           <a:bodyPr rtlCol="0" anchor="ctr" wrap="square" lIns="73152" rIns="73152"/>
           <a:lstStyle/>
@@ -9130,11 +8041,11 @@
             <a:r>
               <a:rPr sz="1400" b="0">
                 <a:solidFill>
-                  <a:srgbClr val="262626"/>
-                </a:solidFill>
-                <a:latin typeface="Yu Gothic"/>
-              </a:rPr>
-              <a:t>「どこで回せる？」</a:t>
+                  <a:srgbClr val="3A2A24"/>
+                </a:solidFill>
+                <a:latin typeface="Yu Gothic"/>
+              </a:rPr>
+              <a:t>観察の細かさ</a:t>
             </a:r>
           </a:p>
         </p:txBody>
@@ -9147,47 +8058,33 @@
         </p:nvSpPr>
         <p:spPr>
           <a:xfrm>
-            <a:off x="9235440" y="3172968"/>
-            <a:ext cx="2514600" cy="914400"/>
-          </a:xfrm>
-          <a:prstGeom prst="rect">
-            <a:avLst/>
-          </a:prstGeom>
-          <a:solidFill>
-            <a:srgbClr val="F2F2F2"/>
+            <a:off x="365760" y="4151376"/>
+            <a:ext cx="2423160" cy="914400"/>
+          </a:xfrm>
+          <a:prstGeom prst="rect">
+            <a:avLst/>
+          </a:prstGeom>
+          <a:solidFill>
+            <a:srgbClr val="FFE0D0"/>
           </a:solidFill>
           <a:ln>
             <a:noFill/>
           </a:ln>
           <a:effectLst/>
         </p:spPr>
-        <p:style>
-          <a:lnRef idx="1">
-            <a:schemeClr val="accent1"/>
-          </a:lnRef>
-          <a:fillRef idx="3">
-            <a:schemeClr val="accent1"/>
-          </a:fillRef>
-          <a:effectRef idx="2">
-            <a:schemeClr val="accent1"/>
-          </a:effectRef>
-          <a:fontRef idx="minor">
-            <a:schemeClr val="lt1"/>
-          </a:fontRef>
-        </p:style>
         <p:txBody>
           <a:bodyPr rtlCol="0" anchor="ctr" wrap="square" lIns="73152" rIns="73152"/>
           <a:lstStyle/>
           <a:p>
             <a:pPr algn="l"/>
             <a:r>
-              <a:rPr sz="1400" b="0">
-                <a:solidFill>
-                  <a:srgbClr val="262626"/>
-                </a:solidFill>
-                <a:latin typeface="Yu Gothic"/>
-              </a:rPr>
-              <a:t>観察の細かさ</a:t>
+              <a:rPr sz="1400" b="1">
+                <a:solidFill>
+                  <a:srgbClr val="F06142"/>
+                </a:solidFill>
+                <a:latin typeface="Yu Gothic"/>
+              </a:rPr>
+              <a:t>ディスカッション</a:t>
             </a:r>
           </a:p>
         </p:txBody>
@@ -9200,47 +8097,33 @@
         </p:nvSpPr>
         <p:spPr>
           <a:xfrm>
-            <a:off x="365760" y="4151376"/>
-            <a:ext cx="2423160" cy="914400"/>
-          </a:xfrm>
-          <a:prstGeom prst="rect">
-            <a:avLst/>
-          </a:prstGeom>
-          <a:solidFill>
-            <a:srgbClr val="FBE3CB"/>
+            <a:off x="2834640" y="4151376"/>
+            <a:ext cx="3337560" cy="914400"/>
+          </a:xfrm>
+          <a:prstGeom prst="rect">
+            <a:avLst/>
+          </a:prstGeom>
+          <a:solidFill>
+            <a:srgbClr val="FFFFFF"/>
           </a:solidFill>
           <a:ln>
             <a:noFill/>
           </a:ln>
           <a:effectLst/>
         </p:spPr>
-        <p:style>
-          <a:lnRef idx="1">
-            <a:schemeClr val="accent1"/>
-          </a:lnRef>
-          <a:fillRef idx="3">
-            <a:schemeClr val="accent1"/>
-          </a:fillRef>
-          <a:effectRef idx="2">
-            <a:schemeClr val="accent1"/>
-          </a:effectRef>
-          <a:fontRef idx="minor">
-            <a:schemeClr val="lt1"/>
-          </a:fontRef>
-        </p:style>
         <p:txBody>
           <a:bodyPr rtlCol="0" anchor="ctr" wrap="square" lIns="73152" rIns="73152"/>
           <a:lstStyle/>
           <a:p>
             <a:pPr algn="l"/>
             <a:r>
-              <a:rPr sz="1400" b="1">
-                <a:solidFill>
-                  <a:srgbClr val="1F497D"/>
-                </a:solidFill>
-                <a:latin typeface="Yu Gothic"/>
-              </a:rPr>
-              <a:t>ディスカッション</a:t>
+              <a:rPr sz="1400" b="0">
+                <a:solidFill>
+                  <a:srgbClr val="3A2A24"/>
+                </a:solidFill>
+                <a:latin typeface="Yu Gothic"/>
+              </a:rPr>
+              <a:t>改善案を発表</a:t>
             </a:r>
           </a:p>
         </p:txBody>
@@ -9253,34 +8136,20 @@
         </p:nvSpPr>
         <p:spPr>
           <a:xfrm>
-            <a:off x="2834640" y="4151376"/>
-            <a:ext cx="3337560" cy="914400"/>
-          </a:xfrm>
-          <a:prstGeom prst="rect">
-            <a:avLst/>
-          </a:prstGeom>
-          <a:solidFill>
-            <a:srgbClr val="F2F2F2"/>
+            <a:off x="6217920" y="4151376"/>
+            <a:ext cx="2971800" cy="914400"/>
+          </a:xfrm>
+          <a:prstGeom prst="rect">
+            <a:avLst/>
+          </a:prstGeom>
+          <a:solidFill>
+            <a:srgbClr val="FFFFFF"/>
           </a:solidFill>
           <a:ln>
             <a:noFill/>
           </a:ln>
           <a:effectLst/>
         </p:spPr>
-        <p:style>
-          <a:lnRef idx="1">
-            <a:schemeClr val="accent1"/>
-          </a:lnRef>
-          <a:fillRef idx="3">
-            <a:schemeClr val="accent1"/>
-          </a:fillRef>
-          <a:effectRef idx="2">
-            <a:schemeClr val="accent1"/>
-          </a:effectRef>
-          <a:fontRef idx="minor">
-            <a:schemeClr val="lt1"/>
-          </a:fontRef>
-        </p:style>
         <p:txBody>
           <a:bodyPr rtlCol="0" anchor="ctr" wrap="square" lIns="73152" rIns="73152"/>
           <a:lstStyle/>
@@ -9289,11 +8158,11 @@
             <a:r>
               <a:rPr sz="1400" b="0">
                 <a:solidFill>
-                  <a:srgbClr val="262626"/>
-                </a:solidFill>
-                <a:latin typeface="Yu Gothic"/>
-              </a:rPr>
-              <a:t>改善案を発表</a:t>
+                  <a:srgbClr val="3A2A24"/>
+                </a:solidFill>
+                <a:latin typeface="Yu Gothic"/>
+              </a:rPr>
+              <a:t>「回し方を提案したい」</a:t>
             </a:r>
           </a:p>
         </p:txBody>
@@ -9306,34 +8175,20 @@
         </p:nvSpPr>
         <p:spPr>
           <a:xfrm>
-            <a:off x="6217920" y="4151376"/>
-            <a:ext cx="2971800" cy="914400"/>
-          </a:xfrm>
-          <a:prstGeom prst="rect">
-            <a:avLst/>
-          </a:prstGeom>
-          <a:solidFill>
-            <a:srgbClr val="F2F2F2"/>
+            <a:off x="9235440" y="4151376"/>
+            <a:ext cx="2514600" cy="914400"/>
+          </a:xfrm>
+          <a:prstGeom prst="rect">
+            <a:avLst/>
+          </a:prstGeom>
+          <a:solidFill>
+            <a:srgbClr val="FFFFFF"/>
           </a:solidFill>
           <a:ln>
             <a:noFill/>
           </a:ln>
           <a:effectLst/>
         </p:spPr>
-        <p:style>
-          <a:lnRef idx="1">
-            <a:schemeClr val="accent1"/>
-          </a:lnRef>
-          <a:fillRef idx="3">
-            <a:schemeClr val="accent1"/>
-          </a:fillRef>
-          <a:effectRef idx="2">
-            <a:schemeClr val="accent1"/>
-          </a:effectRef>
-          <a:fontRef idx="minor">
-            <a:schemeClr val="lt1"/>
-          </a:fontRef>
-        </p:style>
         <p:txBody>
           <a:bodyPr rtlCol="0" anchor="ctr" wrap="square" lIns="73152" rIns="73152"/>
           <a:lstStyle/>
@@ -9342,11 +8197,11 @@
             <a:r>
               <a:rPr sz="1400" b="0">
                 <a:solidFill>
-                  <a:srgbClr val="262626"/>
-                </a:solidFill>
-                <a:latin typeface="Yu Gothic"/>
-              </a:rPr>
-              <a:t>「回し方を提案したい」</a:t>
+                  <a:srgbClr val="3A2A24"/>
+                </a:solidFill>
+                <a:latin typeface="Yu Gothic"/>
+              </a:rPr>
+              <a:t>仮説と巻き込み</a:t>
             </a:r>
           </a:p>
         </p:txBody>
@@ -9359,47 +8214,33 @@
         </p:nvSpPr>
         <p:spPr>
           <a:xfrm>
-            <a:off x="9235440" y="4151376"/>
-            <a:ext cx="2514600" cy="914400"/>
-          </a:xfrm>
-          <a:prstGeom prst="rect">
-            <a:avLst/>
-          </a:prstGeom>
-          <a:solidFill>
-            <a:srgbClr val="F2F2F2"/>
+            <a:off x="365760" y="5129784"/>
+            <a:ext cx="2423160" cy="914400"/>
+          </a:xfrm>
+          <a:prstGeom prst="rect">
+            <a:avLst/>
+          </a:prstGeom>
+          <a:solidFill>
+            <a:srgbClr val="FFE0D0"/>
           </a:solidFill>
           <a:ln>
             <a:noFill/>
           </a:ln>
           <a:effectLst/>
         </p:spPr>
-        <p:style>
-          <a:lnRef idx="1">
-            <a:schemeClr val="accent1"/>
-          </a:lnRef>
-          <a:fillRef idx="3">
-            <a:schemeClr val="accent1"/>
-          </a:fillRef>
-          <a:effectRef idx="2">
-            <a:schemeClr val="accent1"/>
-          </a:effectRef>
-          <a:fontRef idx="minor">
-            <a:schemeClr val="lt1"/>
-          </a:fontRef>
-        </p:style>
         <p:txBody>
           <a:bodyPr rtlCol="0" anchor="ctr" wrap="square" lIns="73152" rIns="73152"/>
           <a:lstStyle/>
           <a:p>
             <a:pPr algn="l"/>
             <a:r>
-              <a:rPr sz="1400" b="0">
-                <a:solidFill>
-                  <a:srgbClr val="262626"/>
-                </a:solidFill>
-                <a:latin typeface="Yu Gothic"/>
-              </a:rPr>
-              <a:t>仮説と巻き込み</a:t>
+              <a:rPr sz="1400" b="1">
+                <a:solidFill>
+                  <a:srgbClr val="F06142"/>
+                </a:solidFill>
+                <a:latin typeface="Yu Gothic"/>
+              </a:rPr>
+              <a:t>社長・社内懇親会</a:t>
             </a:r>
           </a:p>
         </p:txBody>
@@ -9412,47 +8253,33 @@
         </p:nvSpPr>
         <p:spPr>
           <a:xfrm>
-            <a:off x="365760" y="5129784"/>
-            <a:ext cx="2423160" cy="914400"/>
-          </a:xfrm>
-          <a:prstGeom prst="rect">
-            <a:avLst/>
-          </a:prstGeom>
-          <a:solidFill>
-            <a:srgbClr val="FBE3CB"/>
+            <a:off x="2834640" y="5129784"/>
+            <a:ext cx="3337560" cy="914400"/>
+          </a:xfrm>
+          <a:prstGeom prst="rect">
+            <a:avLst/>
+          </a:prstGeom>
+          <a:solidFill>
+            <a:srgbClr val="FFFFFF"/>
           </a:solidFill>
           <a:ln>
             <a:noFill/>
           </a:ln>
           <a:effectLst/>
         </p:spPr>
-        <p:style>
-          <a:lnRef idx="1">
-            <a:schemeClr val="accent1"/>
-          </a:lnRef>
-          <a:fillRef idx="3">
-            <a:schemeClr val="accent1"/>
-          </a:fillRef>
-          <a:effectRef idx="2">
-            <a:schemeClr val="accent1"/>
-          </a:effectRef>
-          <a:fontRef idx="minor">
-            <a:schemeClr val="lt1"/>
-          </a:fontRef>
-        </p:style>
         <p:txBody>
           <a:bodyPr rtlCol="0" anchor="ctr" wrap="square" lIns="73152" rIns="73152"/>
           <a:lstStyle/>
           <a:p>
             <a:pPr algn="l"/>
             <a:r>
-              <a:rPr sz="1400" b="1">
-                <a:solidFill>
-                  <a:srgbClr val="1F497D"/>
-                </a:solidFill>
-                <a:latin typeface="Yu Gothic"/>
-              </a:rPr>
-              <a:t>社長・社内懇親会</a:t>
+              <a:rPr sz="1400" b="0">
+                <a:solidFill>
+                  <a:srgbClr val="3A2A24"/>
+                </a:solidFill>
+                <a:latin typeface="Yu Gothic"/>
+              </a:rPr>
+              <a:t>社長と問いを深める</a:t>
             </a:r>
           </a:p>
         </p:txBody>
@@ -9465,34 +8292,20 @@
         </p:nvSpPr>
         <p:spPr>
           <a:xfrm>
-            <a:off x="2834640" y="5129784"/>
-            <a:ext cx="3337560" cy="914400"/>
-          </a:xfrm>
-          <a:prstGeom prst="rect">
-            <a:avLst/>
-          </a:prstGeom>
-          <a:solidFill>
-            <a:srgbClr val="F2F2F2"/>
+            <a:off x="6217920" y="5129784"/>
+            <a:ext cx="2971800" cy="914400"/>
+          </a:xfrm>
+          <a:prstGeom prst="rect">
+            <a:avLst/>
+          </a:prstGeom>
+          <a:solidFill>
+            <a:srgbClr val="FFFFFF"/>
           </a:solidFill>
           <a:ln>
             <a:noFill/>
           </a:ln>
           <a:effectLst/>
         </p:spPr>
-        <p:style>
-          <a:lnRef idx="1">
-            <a:schemeClr val="accent1"/>
-          </a:lnRef>
-          <a:fillRef idx="3">
-            <a:schemeClr val="accent1"/>
-          </a:fillRef>
-          <a:effectRef idx="2">
-            <a:schemeClr val="accent1"/>
-          </a:effectRef>
-          <a:fontRef idx="minor">
-            <a:schemeClr val="lt1"/>
-          </a:fontRef>
-        </p:style>
         <p:txBody>
           <a:bodyPr rtlCol="0" anchor="ctr" wrap="square" lIns="73152" rIns="73152"/>
           <a:lstStyle/>
@@ -9501,11 +8314,11 @@
             <a:r>
               <a:rPr sz="1400" b="0">
                 <a:solidFill>
-                  <a:srgbClr val="262626"/>
-                </a:solidFill>
-                <a:latin typeface="Yu Gothic"/>
-              </a:rPr>
-              <a:t>社長と問いを深める</a:t>
+                  <a:srgbClr val="3A2A24"/>
+                </a:solidFill>
+                <a:latin typeface="Yu Gothic"/>
+              </a:rPr>
+              <a:t>「問い続けたい」</a:t>
             </a:r>
           </a:p>
         </p:txBody>
@@ -9518,34 +8331,20 @@
         </p:nvSpPr>
         <p:spPr>
           <a:xfrm>
-            <a:off x="6217920" y="5129784"/>
-            <a:ext cx="2971800" cy="914400"/>
-          </a:xfrm>
-          <a:prstGeom prst="rect">
-            <a:avLst/>
-          </a:prstGeom>
-          <a:solidFill>
-            <a:srgbClr val="F2F2F2"/>
+            <a:off x="9235440" y="5129784"/>
+            <a:ext cx="2514600" cy="914400"/>
+          </a:xfrm>
+          <a:prstGeom prst="rect">
+            <a:avLst/>
+          </a:prstGeom>
+          <a:solidFill>
+            <a:srgbClr val="FFFFFF"/>
           </a:solidFill>
           <a:ln>
             <a:noFill/>
           </a:ln>
           <a:effectLst/>
         </p:spPr>
-        <p:style>
-          <a:lnRef idx="1">
-            <a:schemeClr val="accent1"/>
-          </a:lnRef>
-          <a:fillRef idx="3">
-            <a:schemeClr val="accent1"/>
-          </a:fillRef>
-          <a:effectRef idx="2">
-            <a:schemeClr val="accent1"/>
-          </a:effectRef>
-          <a:fontRef idx="minor">
-            <a:schemeClr val="lt1"/>
-          </a:fontRef>
-        </p:style>
         <p:txBody>
           <a:bodyPr rtlCol="0" anchor="ctr" wrap="square" lIns="73152" rIns="73152"/>
           <a:lstStyle/>
@@ -9554,60 +8353,7 @@
             <a:r>
               <a:rPr sz="1400" b="0">
                 <a:solidFill>
-                  <a:srgbClr val="262626"/>
-                </a:solidFill>
-                <a:latin typeface="Yu Gothic"/>
-              </a:rPr>
-              <a:t>「問い続けたい」</a:t>
-            </a:r>
-          </a:p>
-        </p:txBody>
-      </p:sp>
-      <p:sp>
-        <p:nvSpPr>
-          <p:cNvPr id="30" name="Rectangle 29"/>
-          <p:cNvSpPr/>
-          <p:nvPr/>
-        </p:nvSpPr>
-        <p:spPr>
-          <a:xfrm>
-            <a:off x="9235440" y="5129784"/>
-            <a:ext cx="2514600" cy="914400"/>
-          </a:xfrm>
-          <a:prstGeom prst="rect">
-            <a:avLst/>
-          </a:prstGeom>
-          <a:solidFill>
-            <a:srgbClr val="F2F2F2"/>
-          </a:solidFill>
-          <a:ln>
-            <a:noFill/>
-          </a:ln>
-          <a:effectLst/>
-        </p:spPr>
-        <p:style>
-          <a:lnRef idx="1">
-            <a:schemeClr val="accent1"/>
-          </a:lnRef>
-          <a:fillRef idx="3">
-            <a:schemeClr val="accent1"/>
-          </a:fillRef>
-          <a:effectRef idx="2">
-            <a:schemeClr val="accent1"/>
-          </a:effectRef>
-          <a:fontRef idx="minor">
-            <a:schemeClr val="lt1"/>
-          </a:fontRef>
-        </p:style>
-        <p:txBody>
-          <a:bodyPr rtlCol="0" anchor="ctr" wrap="square" lIns="73152" rIns="73152"/>
-          <a:lstStyle/>
-          <a:p>
-            <a:pPr algn="l"/>
-            <a:r>
-              <a:rPr sz="1400" b="0">
-                <a:solidFill>
-                  <a:srgbClr val="262626"/>
+                  <a:srgbClr val="3A2A24"/>
                 </a:solidFill>
                 <a:latin typeface="Yu Gothic"/>
               </a:rPr>
@@ -9627,6 +8373,14 @@
 <file path=ppt/slides/slide6.xml><?xml version="1.0" encoding="utf-8"?>
 <p:sld xmlns:a="http://schemas.openxmlformats.org/drawingml/2006/main" xmlns:p="http://schemas.openxmlformats.org/presentationml/2006/main" xmlns:r="http://schemas.openxmlformats.org/officeDocument/2006/relationships">
   <p:cSld>
+    <p:bg>
+      <p:bgPr>
+        <a:solidFill>
+          <a:srgbClr val="FFEEE4"/>
+        </a:solidFill>
+        <a:effectLst/>
+      </p:bgPr>
+    </p:bg>
     <p:spTree>
       <p:nvGrpSpPr>
         <p:cNvPr id="1" name=""/>
@@ -9642,42 +8396,20 @@
         </p:nvSpPr>
         <p:spPr>
           <a:xfrm>
-            <a:off x="54864" y="64008"/>
-            <a:ext cx="12079224" cy="521207"/>
-          </a:xfrm>
-          <a:prstGeom prst="rect">
-            <a:avLst/>
-          </a:prstGeom>
-          <a:gradFill rotWithShape="1">
-            <a:gsLst>
-              <a:gs pos="0">
-                <a:srgbClr val="F28C38"/>
-              </a:gs>
-              <a:gs pos="100000">
-                <a:srgbClr val="FBE3CB"/>
-              </a:gs>
-            </a:gsLst>
-            <a:lin scaled="0" ang="0"/>
-          </a:gradFill>
+            <a:off x="0" y="6675120"/>
+            <a:ext cx="12191695" cy="182880"/>
+          </a:xfrm>
+          <a:prstGeom prst="rect">
+            <a:avLst/>
+          </a:prstGeom>
+          <a:solidFill>
+            <a:srgbClr val="FF5D3B"/>
+          </a:solidFill>
           <a:ln>
             <a:noFill/>
           </a:ln>
           <a:effectLst/>
         </p:spPr>
-        <p:style>
-          <a:lnRef idx="1">
-            <a:schemeClr val="accent1"/>
-          </a:lnRef>
-          <a:fillRef idx="3">
-            <a:schemeClr val="accent1"/>
-          </a:fillRef>
-          <a:effectRef idx="2">
-            <a:schemeClr val="accent1"/>
-          </a:effectRef>
-          <a:fontRef idx="minor">
-            <a:schemeClr val="lt1"/>
-          </a:fontRef>
-        </p:style>
         <p:txBody>
           <a:bodyPr rtlCol="0" anchor="ctr"/>
           <a:lstStyle/>
@@ -9694,148 +8426,147 @@
         </p:nvSpPr>
         <p:spPr>
           <a:xfrm>
-            <a:off x="54864" y="6629400"/>
-            <a:ext cx="12079224" cy="182880"/>
-          </a:xfrm>
-          <a:prstGeom prst="rect">
-            <a:avLst/>
-          </a:prstGeom>
-          <a:gradFill rotWithShape="1">
-            <a:gsLst>
-              <a:gs pos="0">
-                <a:srgbClr val="F28C38"/>
-              </a:gs>
-              <a:gs pos="100000">
-                <a:srgbClr val="FBE3CB"/>
-              </a:gs>
-            </a:gsLst>
-            <a:lin scaled="0" ang="0"/>
-          </a:gradFill>
+            <a:off x="356616" y="137160"/>
+            <a:ext cx="2103120" cy="365760"/>
+          </a:xfrm>
+          <a:prstGeom prst="rect">
+            <a:avLst/>
+          </a:prstGeom>
+          <a:solidFill>
+            <a:srgbClr val="FF5D3B"/>
+          </a:solidFill>
           <a:ln>
             <a:noFill/>
           </a:ln>
           <a:effectLst/>
         </p:spPr>
-        <p:style>
-          <a:lnRef idx="1">
-            <a:schemeClr val="accent1"/>
-          </a:lnRef>
-          <a:fillRef idx="3">
-            <a:schemeClr val="accent1"/>
-          </a:fillRef>
-          <a:effectRef idx="2">
-            <a:schemeClr val="accent1"/>
-          </a:effectRef>
-          <a:fontRef idx="minor">
-            <a:schemeClr val="lt1"/>
-          </a:fontRef>
-        </p:style>
-        <p:txBody>
-          <a:bodyPr rtlCol="0" anchor="ctr"/>
+        <p:txBody>
+          <a:bodyPr rtlCol="0" anchor="ctr" wrap="square" lIns="73152" rIns="73152"/>
           <a:lstStyle/>
           <a:p>
             <a:pPr algn="ctr"/>
-          </a:p>
-        </p:txBody>
-      </p:sp>
-      <p:sp>
-        <p:nvSpPr>
-          <p:cNvPr id="4" name="Rectangle 3"/>
+            <a:r>
+              <a:rPr sz="1300" b="1">
+                <a:solidFill>
+                  <a:srgbClr val="FFFFFF"/>
+                </a:solidFill>
+                <a:latin typeface="Yu Gothic"/>
+              </a:rPr>
+              <a:t>導線・Next</a:t>
+            </a:r>
+          </a:p>
+        </p:txBody>
+      </p:sp>
+      <p:sp>
+        <p:nvSpPr>
+          <p:cNvPr id="4" name="TextBox 3"/>
+          <p:cNvSpPr txBox="1"/>
+          <p:nvPr/>
+        </p:nvSpPr>
+        <p:spPr>
+          <a:xfrm>
+            <a:off x="2606040" y="109728"/>
+            <a:ext cx="9144000" cy="420624"/>
+          </a:xfrm>
+          <a:prstGeom prst="rect">
+            <a:avLst/>
+          </a:prstGeom>
+          <a:noFill/>
+        </p:spPr>
+        <p:txBody>
+          <a:bodyPr wrap="square" anchor="ctr" lIns="73152" rIns="73152">
+            <a:spAutoFit/>
+          </a:bodyPr>
+          <a:lstStyle/>
+          <a:p>
+            <a:pPr algn="l"/>
+            <a:r>
+              <a:rPr sz="2000" b="1">
+                <a:solidFill>
+                  <a:srgbClr val="F06142"/>
+                </a:solidFill>
+                <a:latin typeface="Yu Gothic"/>
+              </a:rPr>
+              <a:t>集客導線と、次のアクション</a:t>
+            </a:r>
+          </a:p>
+        </p:txBody>
+      </p:sp>
+      <p:sp>
+        <p:nvSpPr>
+          <p:cNvPr id="5" name="TextBox 4"/>
+          <p:cNvSpPr txBox="1"/>
+          <p:nvPr/>
+        </p:nvSpPr>
+        <p:spPr>
+          <a:xfrm>
+            <a:off x="274320" y="6291072"/>
+            <a:ext cx="11612880" cy="310896"/>
+          </a:xfrm>
+          <a:prstGeom prst="rect">
+            <a:avLst/>
+          </a:prstGeom>
+          <a:noFill/>
+        </p:spPr>
+        <p:txBody>
+          <a:bodyPr wrap="square" anchor="t" lIns="73152" rIns="73152">
+            <a:spAutoFit/>
+          </a:bodyPr>
+          <a:lstStyle/>
+          <a:p>
+            <a:pPr algn="l"/>
+            <a:r>
+              <a:rPr sz="900" b="0">
+                <a:solidFill>
+                  <a:srgbClr val="7A6E66"/>
+                </a:solidFill>
+                <a:latin typeface="Yu Gothic"/>
+              </a:rPr>
+              <a:t>出典：年間目標・実数 / 銅巡りインターン議事録 / visions collegeのご相談</a:t>
+            </a:r>
+          </a:p>
+        </p:txBody>
+      </p:sp>
+      <p:sp>
+        <p:nvSpPr>
+          <p:cNvPr id="6" name="Rectangle 5"/>
           <p:cNvSpPr/>
           <p:nvPr/>
         </p:nvSpPr>
         <p:spPr>
           <a:xfrm>
-            <a:off x="356616" y="155448"/>
-            <a:ext cx="2103120" cy="329184"/>
-          </a:xfrm>
-          <a:prstGeom prst="rect">
-            <a:avLst/>
-          </a:prstGeom>
-          <a:solidFill>
-            <a:srgbClr val="1F497D"/>
+            <a:off x="365760" y="822960"/>
+            <a:ext cx="5577840" cy="2651760"/>
+          </a:xfrm>
+          <a:prstGeom prst="rect">
+            <a:avLst/>
+          </a:prstGeom>
+          <a:solidFill>
+            <a:srgbClr val="FFFFFF"/>
           </a:solidFill>
           <a:ln>
             <a:noFill/>
           </a:ln>
           <a:effectLst/>
         </p:spPr>
-        <p:style>
-          <a:lnRef idx="1">
-            <a:schemeClr val="accent1"/>
-          </a:lnRef>
-          <a:fillRef idx="3">
-            <a:schemeClr val="accent1"/>
-          </a:fillRef>
-          <a:effectRef idx="2">
-            <a:schemeClr val="accent1"/>
-          </a:effectRef>
-          <a:fontRef idx="minor">
-            <a:schemeClr val="lt1"/>
-          </a:fontRef>
-        </p:style>
-        <p:txBody>
-          <a:bodyPr rtlCol="0" anchor="ctr" wrap="square" lIns="73152" rIns="73152"/>
+        <p:txBody>
+          <a:bodyPr rtlCol="0" anchor="ctr"/>
           <a:lstStyle/>
           <a:p>
             <a:pPr algn="ctr"/>
-            <a:r>
-              <a:rPr sz="1300" b="1">
-                <a:solidFill>
-                  <a:srgbClr val="FFFFFF"/>
-                </a:solidFill>
-                <a:latin typeface="Yu Gothic"/>
-              </a:rPr>
-              <a:t>導線・Next</a:t>
-            </a:r>
-          </a:p>
-        </p:txBody>
-      </p:sp>
-      <p:sp>
-        <p:nvSpPr>
-          <p:cNvPr id="5" name="TextBox 4"/>
+          </a:p>
+        </p:txBody>
+      </p:sp>
+      <p:sp>
+        <p:nvSpPr>
+          <p:cNvPr id="7" name="TextBox 6"/>
           <p:cNvSpPr txBox="1"/>
           <p:nvPr/>
         </p:nvSpPr>
         <p:spPr>
           <a:xfrm>
-            <a:off x="2606040" y="128016"/>
-            <a:ext cx="9144000" cy="365760"/>
-          </a:xfrm>
-          <a:prstGeom prst="rect">
-            <a:avLst/>
-          </a:prstGeom>
-          <a:noFill/>
-        </p:spPr>
-        <p:txBody>
-          <a:bodyPr wrap="square" anchor="ctr" lIns="73152" rIns="73152">
-            <a:spAutoFit/>
-          </a:bodyPr>
-          <a:lstStyle/>
-          <a:p>
-            <a:pPr algn="l"/>
-            <a:r>
-              <a:rPr sz="1700" b="1">
-                <a:solidFill>
-                  <a:srgbClr val="262626"/>
-                </a:solidFill>
-                <a:latin typeface="Yu Gothic"/>
-              </a:rPr>
-              <a:t>集客導線と、次のアクション</a:t>
-            </a:r>
-          </a:p>
-        </p:txBody>
-      </p:sp>
-      <p:sp>
-        <p:nvSpPr>
-          <p:cNvPr id="6" name="TextBox 5"/>
-          <p:cNvSpPr txBox="1"/>
-          <p:nvPr/>
-        </p:nvSpPr>
-        <p:spPr>
-          <a:xfrm>
-            <a:off x="274320" y="6291072"/>
-            <a:ext cx="11612880" cy="310896"/>
+            <a:off x="365760" y="868680"/>
+            <a:ext cx="5577840" cy="411480"/>
           </a:xfrm>
           <a:prstGeom prst="rect">
             <a:avLst/>
@@ -9850,99 +8581,20 @@
           <a:p>
             <a:pPr algn="l"/>
             <a:r>
-              <a:rPr sz="900" b="0">
-                <a:solidFill>
-                  <a:srgbClr val="595959"/>
-                </a:solidFill>
-                <a:latin typeface="Yu Gothic"/>
-              </a:rPr>
-              <a:t>出典：年間目標・実数 / 銅巡りインターン議事録 / visions collegeのご相談</a:t>
-            </a:r>
-          </a:p>
-        </p:txBody>
-      </p:sp>
-      <p:sp>
-        <p:nvSpPr>
-          <p:cNvPr id="7" name="Rectangle 6"/>
-          <p:cNvSpPr/>
-          <p:nvPr/>
-        </p:nvSpPr>
-        <p:spPr>
-          <a:xfrm>
-            <a:off x="365760" y="822960"/>
-            <a:ext cx="5577840" cy="2651760"/>
-          </a:xfrm>
-          <a:prstGeom prst="rect">
-            <a:avLst/>
-          </a:prstGeom>
-          <a:solidFill>
-            <a:srgbClr val="F2F2F2"/>
-          </a:solidFill>
-          <a:ln>
-            <a:noFill/>
-          </a:ln>
-          <a:effectLst/>
-        </p:spPr>
-        <p:style>
-          <a:lnRef idx="1">
-            <a:schemeClr val="accent1"/>
-          </a:lnRef>
-          <a:fillRef idx="3">
-            <a:schemeClr val="accent1"/>
-          </a:fillRef>
-          <a:effectRef idx="2">
-            <a:schemeClr val="accent1"/>
-          </a:effectRef>
-          <a:fontRef idx="minor">
-            <a:schemeClr val="lt1"/>
-          </a:fontRef>
-        </p:style>
-        <p:txBody>
-          <a:bodyPr rtlCol="0" anchor="ctr"/>
-          <a:lstStyle/>
-          <a:p>
-            <a:pPr algn="ctr"/>
+              <a:rPr sz="1700" b="1">
+                <a:solidFill>
+                  <a:srgbClr val="F06142"/>
+                </a:solidFill>
+                <a:latin typeface="Yu Gothic"/>
+              </a:rPr>
+              <a:t>集客の導線（案）</a:t>
+            </a:r>
           </a:p>
         </p:txBody>
       </p:sp>
       <p:sp>
         <p:nvSpPr>
           <p:cNvPr id="8" name="TextBox 7"/>
-          <p:cNvSpPr txBox="1"/>
-          <p:nvPr/>
-        </p:nvSpPr>
-        <p:spPr>
-          <a:xfrm>
-            <a:off x="365760" y="868680"/>
-            <a:ext cx="5577840" cy="411480"/>
-          </a:xfrm>
-          <a:prstGeom prst="rect">
-            <a:avLst/>
-          </a:prstGeom>
-          <a:noFill/>
-        </p:spPr>
-        <p:txBody>
-          <a:bodyPr wrap="square" anchor="t" lIns="73152" rIns="73152">
-            <a:spAutoFit/>
-          </a:bodyPr>
-          <a:lstStyle/>
-          <a:p>
-            <a:pPr algn="l"/>
-            <a:r>
-              <a:rPr sz="1700" b="1">
-                <a:solidFill>
-                  <a:srgbClr val="1F497D"/>
-                </a:solidFill>
-                <a:latin typeface="Yu Gothic"/>
-              </a:rPr>
-              <a:t>集客の導線（案）</a:t>
-            </a:r>
-          </a:p>
-        </p:txBody>
-      </p:sp>
-      <p:sp>
-        <p:nvSpPr>
-          <p:cNvPr id="9" name="TextBox 8"/>
           <p:cNvSpPr txBox="1"/>
           <p:nvPr/>
         </p:nvSpPr>
@@ -9970,7 +8622,7 @@
             <a:r>
               <a:rPr sz="1700" b="0">
                 <a:solidFill>
-                  <a:srgbClr val="262626"/>
+                  <a:srgbClr val="3A2A24"/>
                 </a:solidFill>
                 <a:latin typeface="Yu Gothic"/>
               </a:rPr>
@@ -9986,7 +8638,7 @@
             <a:r>
               <a:rPr sz="1700" b="0">
                 <a:solidFill>
-                  <a:srgbClr val="262626"/>
+                  <a:srgbClr val="3A2A24"/>
                 </a:solidFill>
                 <a:latin typeface="Yu Gothic"/>
               </a:rPr>
@@ -10002,7 +8654,7 @@
             <a:r>
               <a:rPr sz="1700" b="0">
                 <a:solidFill>
-                  <a:srgbClr val="262626"/>
+                  <a:srgbClr val="3A2A24"/>
                 </a:solidFill>
                 <a:latin typeface="Yu Gothic"/>
               </a:rPr>
@@ -10018,7 +8670,7 @@
             <a:r>
               <a:rPr sz="1700" b="0">
                 <a:solidFill>
-                  <a:srgbClr val="262626"/>
+                  <a:srgbClr val="3A2A24"/>
                 </a:solidFill>
                 <a:latin typeface="Yu Gothic"/>
               </a:rPr>
@@ -10034,7 +8686,7 @@
             <a:r>
               <a:rPr sz="1700" b="0">
                 <a:solidFill>
-                  <a:srgbClr val="262626"/>
+                  <a:srgbClr val="3A2A24"/>
                 </a:solidFill>
                 <a:latin typeface="Yu Gothic"/>
               </a:rPr>
@@ -10045,7 +8697,7 @@
       </p:sp>
       <p:sp>
         <p:nvSpPr>
-          <p:cNvPr id="10" name="Rectangle 9"/>
+          <p:cNvPr id="9" name="Rectangle 8"/>
           <p:cNvSpPr/>
           <p:nvPr/>
         </p:nvSpPr>
@@ -10058,27 +8710,13 @@
             <a:avLst/>
           </a:prstGeom>
           <a:solidFill>
-            <a:srgbClr val="F2F2F2"/>
+            <a:srgbClr val="FFFFFF"/>
           </a:solidFill>
           <a:ln>
             <a:noFill/>
           </a:ln>
           <a:effectLst/>
         </p:spPr>
-        <p:style>
-          <a:lnRef idx="1">
-            <a:schemeClr val="accent1"/>
-          </a:lnRef>
-          <a:fillRef idx="3">
-            <a:schemeClr val="accent1"/>
-          </a:fillRef>
-          <a:effectRef idx="2">
-            <a:schemeClr val="accent1"/>
-          </a:effectRef>
-          <a:fontRef idx="minor">
-            <a:schemeClr val="lt1"/>
-          </a:fontRef>
-        </p:style>
         <p:txBody>
           <a:bodyPr rtlCol="0" anchor="ctr"/>
           <a:lstStyle/>
@@ -10089,7 +8727,7 @@
       </p:sp>
       <p:sp>
         <p:nvSpPr>
-          <p:cNvPr id="11" name="TextBox 10"/>
+          <p:cNvPr id="10" name="TextBox 9"/>
           <p:cNvSpPr txBox="1"/>
           <p:nvPr/>
         </p:nvSpPr>
@@ -10113,7 +8751,7 @@
             <a:r>
               <a:rPr sz="1700" b="1">
                 <a:solidFill>
-                  <a:srgbClr val="1F497D"/>
+                  <a:srgbClr val="F06142"/>
                 </a:solidFill>
                 <a:latin typeface="Yu Gothic"/>
               </a:rPr>
@@ -10124,7 +8762,7 @@
       </p:sp>
       <p:sp>
         <p:nvSpPr>
-          <p:cNvPr id="12" name="TextBox 11"/>
+          <p:cNvPr id="11" name="TextBox 10"/>
           <p:cNvSpPr txBox="1"/>
           <p:nvPr/>
         </p:nvSpPr>
@@ -10152,7 +8790,7 @@
             <a:r>
               <a:rPr sz="1700" b="0">
                 <a:solidFill>
-                  <a:srgbClr val="262626"/>
+                  <a:srgbClr val="3A2A24"/>
                 </a:solidFill>
                 <a:latin typeface="Yu Gothic"/>
               </a:rPr>
@@ -10168,7 +8806,7 @@
             <a:r>
               <a:rPr sz="1700" b="0">
                 <a:solidFill>
-                  <a:srgbClr val="262626"/>
+                  <a:srgbClr val="3A2A24"/>
                 </a:solidFill>
                 <a:latin typeface="Yu Gothic"/>
               </a:rPr>
@@ -10184,7 +8822,7 @@
             <a:r>
               <a:rPr sz="1700" b="0">
                 <a:solidFill>
-                  <a:srgbClr val="262626"/>
+                  <a:srgbClr val="3A2A24"/>
                 </a:solidFill>
                 <a:latin typeface="Yu Gothic"/>
               </a:rPr>
@@ -10200,7 +8838,7 @@
             <a:r>
               <a:rPr sz="1700" b="0">
                 <a:solidFill>
-                  <a:srgbClr val="262626"/>
+                  <a:srgbClr val="3A2A24"/>
                 </a:solidFill>
                 <a:latin typeface="Yu Gothic"/>
               </a:rPr>
@@ -10211,7 +8849,7 @@
       </p:sp>
       <p:sp>
         <p:nvSpPr>
-          <p:cNvPr id="13" name="Rectangle 12"/>
+          <p:cNvPr id="12" name="Rectangle 11"/>
           <p:cNvSpPr/>
           <p:nvPr/>
         </p:nvSpPr>
@@ -10224,27 +8862,13 @@
             <a:avLst/>
           </a:prstGeom>
           <a:solidFill>
-            <a:srgbClr val="F2F2F2"/>
+            <a:srgbClr val="FFFFFF"/>
           </a:solidFill>
           <a:ln>
             <a:noFill/>
           </a:ln>
           <a:effectLst/>
         </p:spPr>
-        <p:style>
-          <a:lnRef idx="1">
-            <a:schemeClr val="accent1"/>
-          </a:lnRef>
-          <a:fillRef idx="3">
-            <a:schemeClr val="accent1"/>
-          </a:fillRef>
-          <a:effectRef idx="2">
-            <a:schemeClr val="accent1"/>
-          </a:effectRef>
-          <a:fontRef idx="minor">
-            <a:schemeClr val="lt1"/>
-          </a:fontRef>
-        </p:style>
         <p:txBody>
           <a:bodyPr rtlCol="0" anchor="ctr"/>
           <a:lstStyle/>
@@ -10255,7 +8879,7 @@
       </p:sp>
       <p:sp>
         <p:nvSpPr>
-          <p:cNvPr id="14" name="TextBox 13"/>
+          <p:cNvPr id="13" name="TextBox 12"/>
           <p:cNvSpPr txBox="1"/>
           <p:nvPr/>
         </p:nvSpPr>
@@ -10279,7 +8903,7 @@
             <a:r>
               <a:rPr sz="1700" b="1">
                 <a:solidFill>
-                  <a:srgbClr val="1F497D"/>
+                  <a:srgbClr val="F06142"/>
                 </a:solidFill>
                 <a:latin typeface="Yu Gothic"/>
               </a:rPr>
@@ -10290,7 +8914,7 @@
       </p:sp>
       <p:sp>
         <p:nvSpPr>
-          <p:cNvPr id="15" name="TextBox 14"/>
+          <p:cNvPr id="14" name="TextBox 13"/>
           <p:cNvSpPr txBox="1"/>
           <p:nvPr/>
         </p:nvSpPr>
@@ -10318,7 +8942,7 @@
             <a:r>
               <a:rPr sz="1700" b="0">
                 <a:solidFill>
-                  <a:srgbClr val="262626"/>
+                  <a:srgbClr val="3A2A24"/>
                 </a:solidFill>
                 <a:latin typeface="Yu Gothic"/>
               </a:rPr>
@@ -10334,7 +8958,7 @@
             <a:r>
               <a:rPr sz="1700" b="0">
                 <a:solidFill>
-                  <a:srgbClr val="262626"/>
+                  <a:srgbClr val="3A2A24"/>
                 </a:solidFill>
                 <a:latin typeface="Yu Gothic"/>
               </a:rPr>
@@ -10350,7 +8974,7 @@
             <a:r>
               <a:rPr sz="1700" b="0">
                 <a:solidFill>
-                  <a:srgbClr val="262626"/>
+                  <a:srgbClr val="3A2A24"/>
                 </a:solidFill>
                 <a:latin typeface="Yu Gothic"/>
               </a:rPr>
@@ -10366,7 +8990,7 @@
             <a:r>
               <a:rPr sz="1700" b="0">
                 <a:solidFill>
-                  <a:srgbClr val="262626"/>
+                  <a:srgbClr val="3A2A24"/>
                 </a:solidFill>
                 <a:latin typeface="Yu Gothic"/>
               </a:rPr>
@@ -10377,7 +9001,7 @@
       </p:sp>
       <p:sp>
         <p:nvSpPr>
-          <p:cNvPr id="16" name="Rectangle 15"/>
+          <p:cNvPr id="15" name="Rectangle 14"/>
           <p:cNvSpPr/>
           <p:nvPr/>
         </p:nvSpPr>
@@ -10390,27 +9014,13 @@
             <a:avLst/>
           </a:prstGeom>
           <a:solidFill>
-            <a:srgbClr val="F2F2F2"/>
+            <a:srgbClr val="FFFFFF"/>
           </a:solidFill>
           <a:ln>
             <a:noFill/>
           </a:ln>
           <a:effectLst/>
         </p:spPr>
-        <p:style>
-          <a:lnRef idx="1">
-            <a:schemeClr val="accent1"/>
-          </a:lnRef>
-          <a:fillRef idx="3">
-            <a:schemeClr val="accent1"/>
-          </a:fillRef>
-          <a:effectRef idx="2">
-            <a:schemeClr val="accent1"/>
-          </a:effectRef>
-          <a:fontRef idx="minor">
-            <a:schemeClr val="lt1"/>
-          </a:fontRef>
-        </p:style>
         <p:txBody>
           <a:bodyPr rtlCol="0" anchor="ctr"/>
           <a:lstStyle/>
@@ -10421,7 +9031,7 @@
       </p:sp>
       <p:sp>
         <p:nvSpPr>
-          <p:cNvPr id="17" name="TextBox 16"/>
+          <p:cNvPr id="16" name="TextBox 15"/>
           <p:cNvSpPr txBox="1"/>
           <p:nvPr/>
         </p:nvSpPr>
@@ -10445,7 +9055,7 @@
             <a:r>
               <a:rPr sz="1700" b="1">
                 <a:solidFill>
-                  <a:srgbClr val="1F497D"/>
+                  <a:srgbClr val="F06142"/>
                 </a:solidFill>
                 <a:latin typeface="Yu Gothic"/>
               </a:rPr>
@@ -10456,7 +9066,7 @@
       </p:sp>
       <p:sp>
         <p:nvSpPr>
-          <p:cNvPr id="18" name="TextBox 17"/>
+          <p:cNvPr id="17" name="TextBox 16"/>
           <p:cNvSpPr txBox="1"/>
           <p:nvPr/>
         </p:nvSpPr>
@@ -10484,7 +9094,7 @@
             <a:r>
               <a:rPr sz="1700" b="0">
                 <a:solidFill>
-                  <a:srgbClr val="262626"/>
+                  <a:srgbClr val="3A2A24"/>
                 </a:solidFill>
                 <a:latin typeface="Yu Gothic"/>
               </a:rPr>
@@ -10500,7 +9110,7 @@
             <a:r>
               <a:rPr sz="1700" b="0">
                 <a:solidFill>
-                  <a:srgbClr val="262626"/>
+                  <a:srgbClr val="3A2A24"/>
                 </a:solidFill>
                 <a:latin typeface="Yu Gothic"/>
               </a:rPr>
@@ -10516,7 +9126,7 @@
             <a:r>
               <a:rPr sz="1700" b="0">
                 <a:solidFill>
-                  <a:srgbClr val="262626"/>
+                  <a:srgbClr val="3A2A24"/>
                 </a:solidFill>
                 <a:latin typeface="Yu Gothic"/>
               </a:rPr>
@@ -10532,7 +9142,7 @@
             <a:r>
               <a:rPr sz="1700" b="0">
                 <a:solidFill>
-                  <a:srgbClr val="262626"/>
+                  <a:srgbClr val="3A2A24"/>
                 </a:solidFill>
                 <a:latin typeface="Yu Gothic"/>
               </a:rPr>

--- a/guruguru/guruguru_target_tour.pptx
+++ b/guruguru/guruguru_target_tour.pptx
@@ -11,6 +11,7 @@
     <p:sldId id="259" r:id="rId10"/>
     <p:sldId id="260" r:id="rId11"/>
     <p:sldId id="261" r:id="rId12"/>
+    <p:sldId id="262" r:id="rId13"/>
   </p:sldIdLst>
   <p:sldSz cx="12191695" cy="6858000" type="screen4x3"/>
   <p:notesSz cx="6858000" cy="9144000"/>
@@ -3165,7 +3166,7 @@
                 </a:solidFill>
                 <a:latin typeface="Yu Gothic"/>
               </a:rPr>
-              <a:t>ぐるぐる人材</a:t>
+              <a:t>コンセプト</a:t>
             </a:r>
           </a:p>
         </p:txBody>
@@ -3200,7 +3201,7 @@
                 </a:solidFill>
                 <a:latin typeface="Yu Gothic"/>
               </a:rPr>
-              <a:t>ぐるぐる人材とは？</a:t>
+              <a:t>コンセプト：銅めぐりツアー（仮）</a:t>
             </a:r>
           </a:p>
         </p:txBody>
@@ -3235,7 +3236,7 @@
                 </a:solidFill>
                 <a:latin typeface="Yu Gothic"/>
               </a:rPr>
-              <a:t>出典：visions具体的なペルソナ像 / ジャーニー（専卒以上）/ SEEDS選定シート</a:t>
+              <a:t>出典：visions collegeのご相談 / 銅巡りインターン議事録 / 地球資源を輝かせていくIS / 採用ピッチ資料_構成</a:t>
             </a:r>
           </a:p>
         </p:txBody>
@@ -3248,8 +3249,8 @@
         </p:nvSpPr>
         <p:spPr>
           <a:xfrm>
-            <a:off x="365760" y="777240"/>
-            <a:ext cx="11430000" cy="548640"/>
+            <a:off x="365760" y="731520"/>
+            <a:ext cx="11430000" cy="457200"/>
           </a:xfrm>
           <a:prstGeom prst="rect">
             <a:avLst/>
@@ -3264,27 +3265,462 @@
           <a:p>
             <a:pPr algn="l"/>
             <a:r>
-              <a:rPr sz="2200" b="1">
+              <a:rPr sz="2800" b="1">
                 <a:solidFill>
                   <a:srgbClr val="F06142"/>
                 </a:solidFill>
                 <a:latin typeface="Yu Gothic"/>
               </a:rPr>
-              <a:t>仮説を回し、人をつなぎ、“めぐり”をつくる人</a:t>
-            </a:r>
-          </a:p>
-        </p:txBody>
-      </p:sp>
-      <p:sp>
-        <p:nvSpPr>
-          <p:cNvPr id="7" name="Rectangle 6"/>
+              <a:t>越境の力で、分断された銅の循環をつなごう。</a:t>
+            </a:r>
+          </a:p>
+        </p:txBody>
+      </p:sp>
+      <p:sp>
+        <p:nvSpPr>
+          <p:cNvPr id="7" name="TextBox 6"/>
+          <p:cNvSpPr txBox="1"/>
+          <p:nvPr/>
+        </p:nvSpPr>
+        <p:spPr>
+          <a:xfrm>
+            <a:off x="365760" y="1280160"/>
+            <a:ext cx="11430000" cy="365760"/>
+          </a:xfrm>
+          <a:prstGeom prst="rect">
+            <a:avLst/>
+          </a:prstGeom>
+          <a:noFill/>
+        </p:spPr>
+        <p:txBody>
+          <a:bodyPr wrap="square" anchor="t" lIns="73152" rIns="73152">
+            <a:spAutoFit/>
+          </a:bodyPr>
+          <a:lstStyle/>
+          <a:p>
+            <a:pPr algn="l"/>
+            <a:r>
+              <a:rPr sz="1400" b="0">
+                <a:solidFill>
+                  <a:srgbClr val="7A6E66"/>
+                </a:solidFill>
+                <a:latin typeface="Yu Gothic"/>
+              </a:rPr>
+              <a:t>合言葉：100年後のために働く　／　テーマ：自然との共生を目指してはたらく</a:t>
+            </a:r>
+          </a:p>
+        </p:txBody>
+      </p:sp>
+      <p:sp>
+        <p:nvSpPr>
+          <p:cNvPr id="8" name="Pentagon 7"/>
           <p:cNvSpPr/>
           <p:nvPr/>
         </p:nvSpPr>
         <p:spPr>
           <a:xfrm>
-            <a:off x="365760" y="1463040"/>
-            <a:ext cx="3703320" cy="2011680"/>
+            <a:off x="365760" y="1828800"/>
+            <a:ext cx="2377440" cy="731520"/>
+          </a:xfrm>
+          <a:prstGeom prst="homePlate">
+            <a:avLst/>
+          </a:prstGeom>
+          <a:solidFill>
+            <a:srgbClr val="FFE0D0"/>
+          </a:solidFill>
+          <a:ln>
+            <a:noFill/>
+          </a:ln>
+        </p:spPr>
+        <p:txBody>
+          <a:bodyPr rtlCol="0" anchor="ctr"/>
+          <a:lstStyle/>
+          <a:p>
+            <a:pPr algn="ctr"/>
+            <a:r>
+              <a:rPr sz="1500" b="1">
+                <a:solidFill>
+                  <a:srgbClr val="3A2A24"/>
+                </a:solidFill>
+                <a:latin typeface="Yu Gothic"/>
+              </a:rPr>
+              <a:t>銅鉱石</a:t>
+            </a:r>
+          </a:p>
+        </p:txBody>
+      </p:sp>
+      <p:sp>
+        <p:nvSpPr>
+          <p:cNvPr id="9" name="TextBox 8"/>
+          <p:cNvSpPr txBox="1"/>
+          <p:nvPr/>
+        </p:nvSpPr>
+        <p:spPr>
+          <a:xfrm>
+            <a:off x="548640" y="2606040"/>
+            <a:ext cx="2103120" cy="320040"/>
+          </a:xfrm>
+          <a:prstGeom prst="rect">
+            <a:avLst/>
+          </a:prstGeom>
+          <a:noFill/>
+        </p:spPr>
+        <p:txBody>
+          <a:bodyPr wrap="square" anchor="t" lIns="73152" rIns="73152">
+            <a:spAutoFit/>
+          </a:bodyPr>
+          <a:lstStyle/>
+          <a:p>
+            <a:pPr algn="ctr"/>
+            <a:r>
+              <a:rPr sz="1200" b="0">
+                <a:solidFill>
+                  <a:srgbClr val="7A6E66"/>
+                </a:solidFill>
+                <a:latin typeface="Yu Gothic"/>
+              </a:rPr>
+              <a:t>採掘</a:t>
+            </a:r>
+          </a:p>
+        </p:txBody>
+      </p:sp>
+      <p:sp>
+        <p:nvSpPr>
+          <p:cNvPr id="10" name="Chevron 9"/>
+          <p:cNvSpPr/>
+          <p:nvPr/>
+        </p:nvSpPr>
+        <p:spPr>
+          <a:xfrm>
+            <a:off x="2651760" y="1828800"/>
+            <a:ext cx="2377440" cy="731520"/>
+          </a:xfrm>
+          <a:prstGeom prst="chevron">
+            <a:avLst/>
+          </a:prstGeom>
+          <a:solidFill>
+            <a:srgbClr val="FFE0D0"/>
+          </a:solidFill>
+          <a:ln>
+            <a:noFill/>
+          </a:ln>
+        </p:spPr>
+        <p:txBody>
+          <a:bodyPr rtlCol="0" anchor="ctr"/>
+          <a:lstStyle/>
+          <a:p>
+            <a:pPr algn="ctr"/>
+            <a:r>
+              <a:rPr sz="1500" b="1">
+                <a:solidFill>
+                  <a:srgbClr val="3A2A24"/>
+                </a:solidFill>
+                <a:latin typeface="Yu Gothic"/>
+              </a:rPr>
+              <a:t>電気銅</a:t>
+            </a:r>
+          </a:p>
+        </p:txBody>
+      </p:sp>
+      <p:sp>
+        <p:nvSpPr>
+          <p:cNvPr id="11" name="TextBox 10"/>
+          <p:cNvSpPr txBox="1"/>
+          <p:nvPr/>
+        </p:nvSpPr>
+        <p:spPr>
+          <a:xfrm>
+            <a:off x="2834640" y="2606040"/>
+            <a:ext cx="2103120" cy="320040"/>
+          </a:xfrm>
+          <a:prstGeom prst="rect">
+            <a:avLst/>
+          </a:prstGeom>
+          <a:noFill/>
+        </p:spPr>
+        <p:txBody>
+          <a:bodyPr wrap="square" anchor="t" lIns="73152" rIns="73152">
+            <a:spAutoFit/>
+          </a:bodyPr>
+          <a:lstStyle/>
+          <a:p>
+            <a:pPr algn="ctr"/>
+            <a:r>
+              <a:rPr sz="1200" b="0">
+                <a:solidFill>
+                  <a:srgbClr val="7A6E66"/>
+                </a:solidFill>
+                <a:latin typeface="Yu Gothic"/>
+              </a:rPr>
+              <a:t>精錬所</a:t>
+            </a:r>
+          </a:p>
+        </p:txBody>
+      </p:sp>
+      <p:sp>
+        <p:nvSpPr>
+          <p:cNvPr id="12" name="Chevron 11"/>
+          <p:cNvSpPr/>
+          <p:nvPr/>
+        </p:nvSpPr>
+        <p:spPr>
+          <a:xfrm>
+            <a:off x="4937760" y="1828800"/>
+            <a:ext cx="2377440" cy="731520"/>
+          </a:xfrm>
+          <a:prstGeom prst="chevron">
+            <a:avLst/>
+          </a:prstGeom>
+          <a:solidFill>
+            <a:srgbClr val="FF5D3B"/>
+          </a:solidFill>
+          <a:ln>
+            <a:noFill/>
+          </a:ln>
+        </p:spPr>
+        <p:txBody>
+          <a:bodyPr rtlCol="0" anchor="ctr"/>
+          <a:lstStyle/>
+          <a:p>
+            <a:pPr algn="ctr"/>
+            <a:r>
+              <a:rPr sz="1500" b="1">
+                <a:solidFill>
+                  <a:srgbClr val="FFFFFF"/>
+                </a:solidFill>
+                <a:latin typeface="Yu Gothic"/>
+              </a:rPr>
+              <a:t>インゴット</a:t>
+            </a:r>
+          </a:p>
+        </p:txBody>
+      </p:sp>
+      <p:sp>
+        <p:nvSpPr>
+          <p:cNvPr id="13" name="TextBox 12"/>
+          <p:cNvSpPr txBox="1"/>
+          <p:nvPr/>
+        </p:nvSpPr>
+        <p:spPr>
+          <a:xfrm>
+            <a:off x="5120640" y="2606040"/>
+            <a:ext cx="2103120" cy="320040"/>
+          </a:xfrm>
+          <a:prstGeom prst="rect">
+            <a:avLst/>
+          </a:prstGeom>
+          <a:noFill/>
+        </p:spPr>
+        <p:txBody>
+          <a:bodyPr wrap="square" anchor="t" lIns="73152" rIns="73152">
+            <a:spAutoFit/>
+          </a:bodyPr>
+          <a:lstStyle/>
+          <a:p>
+            <a:pPr algn="ctr"/>
+            <a:r>
+              <a:rPr sz="1200" b="0">
+                <a:solidFill>
+                  <a:srgbClr val="7A6E66"/>
+                </a:solidFill>
+                <a:latin typeface="Yu Gothic"/>
+              </a:rPr>
+              <a:t>清峰</a:t>
+            </a:r>
+          </a:p>
+        </p:txBody>
+      </p:sp>
+      <p:sp>
+        <p:nvSpPr>
+          <p:cNvPr id="14" name="Chevron 13"/>
+          <p:cNvSpPr/>
+          <p:nvPr/>
+        </p:nvSpPr>
+        <p:spPr>
+          <a:xfrm>
+            <a:off x="7223760" y="1828800"/>
+            <a:ext cx="2377440" cy="731520"/>
+          </a:xfrm>
+          <a:prstGeom prst="chevron">
+            <a:avLst/>
+          </a:prstGeom>
+          <a:solidFill>
+            <a:srgbClr val="FFE0D0"/>
+          </a:solidFill>
+          <a:ln>
+            <a:noFill/>
+          </a:ln>
+        </p:spPr>
+        <p:txBody>
+          <a:bodyPr rtlCol="0" anchor="ctr"/>
+          <a:lstStyle/>
+          <a:p>
+            <a:pPr algn="ctr"/>
+            <a:r>
+              <a:rPr sz="1500" b="1">
+                <a:solidFill>
+                  <a:srgbClr val="3A2A24"/>
+                </a:solidFill>
+                <a:latin typeface="Yu Gothic"/>
+              </a:rPr>
+              <a:t>銅製品</a:t>
+            </a:r>
+          </a:p>
+        </p:txBody>
+      </p:sp>
+      <p:sp>
+        <p:nvSpPr>
+          <p:cNvPr id="15" name="TextBox 14"/>
+          <p:cNvSpPr txBox="1"/>
+          <p:nvPr/>
+        </p:nvSpPr>
+        <p:spPr>
+          <a:xfrm>
+            <a:off x="7406640" y="2606040"/>
+            <a:ext cx="2103120" cy="320040"/>
+          </a:xfrm>
+          <a:prstGeom prst="rect">
+            <a:avLst/>
+          </a:prstGeom>
+          <a:noFill/>
+        </p:spPr>
+        <p:txBody>
+          <a:bodyPr wrap="square" anchor="t" lIns="73152" rIns="73152">
+            <a:spAutoFit/>
+          </a:bodyPr>
+          <a:lstStyle/>
+          <a:p>
+            <a:pPr algn="ctr"/>
+            <a:r>
+              <a:rPr sz="1200" b="0">
+                <a:solidFill>
+                  <a:srgbClr val="7A6E66"/>
+                </a:solidFill>
+                <a:latin typeface="Yu Gothic"/>
+              </a:rPr>
+              <a:t>ユーザー</a:t>
+            </a:r>
+          </a:p>
+        </p:txBody>
+      </p:sp>
+      <p:sp>
+        <p:nvSpPr>
+          <p:cNvPr id="16" name="Chevron 15"/>
+          <p:cNvSpPr/>
+          <p:nvPr/>
+        </p:nvSpPr>
+        <p:spPr>
+          <a:xfrm>
+            <a:off x="9509760" y="1828800"/>
+            <a:ext cx="2377440" cy="731520"/>
+          </a:xfrm>
+          <a:prstGeom prst="chevron">
+            <a:avLst/>
+          </a:prstGeom>
+          <a:solidFill>
+            <a:srgbClr val="FFE0D0"/>
+          </a:solidFill>
+          <a:ln>
+            <a:noFill/>
+          </a:ln>
+        </p:spPr>
+        <p:txBody>
+          <a:bodyPr rtlCol="0" anchor="ctr"/>
+          <a:lstStyle/>
+          <a:p>
+            <a:pPr algn="ctr"/>
+            <a:r>
+              <a:rPr sz="1500" b="1">
+                <a:solidFill>
+                  <a:srgbClr val="3A2A24"/>
+                </a:solidFill>
+                <a:latin typeface="Yu Gothic"/>
+              </a:rPr>
+              <a:t>銅産廃</a:t>
+            </a:r>
+          </a:p>
+        </p:txBody>
+      </p:sp>
+      <p:sp>
+        <p:nvSpPr>
+          <p:cNvPr id="17" name="TextBox 16"/>
+          <p:cNvSpPr txBox="1"/>
+          <p:nvPr/>
+        </p:nvSpPr>
+        <p:spPr>
+          <a:xfrm>
+            <a:off x="9692640" y="2606040"/>
+            <a:ext cx="2103120" cy="320040"/>
+          </a:xfrm>
+          <a:prstGeom prst="rect">
+            <a:avLst/>
+          </a:prstGeom>
+          <a:noFill/>
+        </p:spPr>
+        <p:txBody>
+          <a:bodyPr wrap="square" anchor="t" lIns="73152" rIns="73152">
+            <a:spAutoFit/>
+          </a:bodyPr>
+          <a:lstStyle/>
+          <a:p>
+            <a:pPr algn="ctr"/>
+            <a:r>
+              <a:rPr sz="1200" b="0">
+                <a:solidFill>
+                  <a:srgbClr val="7A6E66"/>
+                </a:solidFill>
+                <a:latin typeface="Yu Gothic"/>
+              </a:rPr>
+              <a:t>産廃・回収</a:t>
+            </a:r>
+          </a:p>
+        </p:txBody>
+      </p:sp>
+      <p:sp>
+        <p:nvSpPr>
+          <p:cNvPr id="18" name="TextBox 17"/>
+          <p:cNvSpPr txBox="1"/>
+          <p:nvPr/>
+        </p:nvSpPr>
+        <p:spPr>
+          <a:xfrm>
+            <a:off x="365760" y="2971800"/>
+            <a:ext cx="11430000" cy="365760"/>
+          </a:xfrm>
+          <a:prstGeom prst="rect">
+            <a:avLst/>
+          </a:prstGeom>
+          <a:noFill/>
+        </p:spPr>
+        <p:txBody>
+          <a:bodyPr wrap="square" anchor="t" lIns="73152" rIns="73152">
+            <a:spAutoFit/>
+          </a:bodyPr>
+          <a:lstStyle/>
+          <a:p>
+            <a:pPr algn="ctr"/>
+            <a:r>
+              <a:rPr sz="1500" b="1">
+                <a:solidFill>
+                  <a:srgbClr val="F06142"/>
+                </a:solidFill>
+                <a:latin typeface="Yu Gothic"/>
+              </a:rPr>
+              <a:t>この流れが、会社ごとに分断されている</a:t>
+            </a:r>
+          </a:p>
+        </p:txBody>
+      </p:sp>
+      <p:sp>
+        <p:nvSpPr>
+          <p:cNvPr id="19" name="Rectangle 18"/>
+          <p:cNvSpPr/>
+          <p:nvPr/>
+        </p:nvSpPr>
+        <p:spPr>
+          <a:xfrm>
+            <a:off x="365760" y="3474720"/>
+            <a:ext cx="3703320" cy="2697480"/>
           </a:xfrm>
           <a:prstGeom prst="rect">
             <a:avLst/>
@@ -3307,13 +3743,13 @@
       </p:sp>
       <p:sp>
         <p:nvSpPr>
-          <p:cNvPr id="8" name="TextBox 7"/>
+          <p:cNvPr id="20" name="TextBox 19"/>
           <p:cNvSpPr txBox="1"/>
           <p:nvPr/>
         </p:nvSpPr>
         <p:spPr>
           <a:xfrm>
-            <a:off x="365760" y="1508760"/>
+            <a:off x="365760" y="3520440"/>
             <a:ext cx="3703320" cy="411480"/>
           </a:xfrm>
           <a:prstGeom prst="rect">
@@ -3329,27 +3765,27 @@
           <a:p>
             <a:pPr algn="l"/>
             <a:r>
-              <a:rPr sz="1500" b="1">
+              <a:rPr sz="1600" b="1">
                 <a:solidFill>
                   <a:srgbClr val="F06142"/>
                 </a:solidFill>
                 <a:latin typeface="Yu Gothic"/>
               </a:rPr>
-              <a:t>① visionsの定義</a:t>
-            </a:r>
-          </a:p>
-        </p:txBody>
-      </p:sp>
-      <p:sp>
-        <p:nvSpPr>
-          <p:cNvPr id="9" name="TextBox 8"/>
+              <a:t>なぜ（課題）</a:t>
+            </a:r>
+          </a:p>
+        </p:txBody>
+      </p:sp>
+      <p:sp>
+        <p:nvSpPr>
+          <p:cNvPr id="21" name="TextBox 20"/>
           <p:cNvSpPr txBox="1"/>
           <p:nvPr/>
         </p:nvSpPr>
         <p:spPr>
           <a:xfrm>
-            <a:off x="365760" y="1965960"/>
-            <a:ext cx="3703320" cy="1463040"/>
+            <a:off x="365760" y="3977639"/>
+            <a:ext cx="3703320" cy="2103120"/>
           </a:xfrm>
           <a:prstGeom prst="rect">
             <a:avLst/>
@@ -3364,7 +3800,7 @@
           <a:p>
             <a:pPr algn="l">
               <a:spcBef>
-                <a:spcPts val="400"/>
+                <a:spcPts val="600"/>
               </a:spcBef>
             </a:pPr>
             <a:r>
@@ -3374,13 +3810,13 @@
                 </a:solidFill>
                 <a:latin typeface="Yu Gothic"/>
               </a:rPr>
-              <a:t>PDCAを回すのが得意</a:t>
+              <a:t>銅の可採年数は約40年</a:t>
             </a:r>
           </a:p>
           <a:p>
             <a:pPr algn="l">
               <a:spcBef>
-                <a:spcPts val="400"/>
+                <a:spcPts val="600"/>
               </a:spcBef>
             </a:pPr>
             <a:r>
@@ -3390,37 +3826,37 @@
                 </a:solidFill>
                 <a:latin typeface="Yu Gothic"/>
               </a:rPr>
-              <a:t>循環（関係作り）ができる</a:t>
+              <a:t>回収・リサイクルは不透明</a:t>
             </a:r>
           </a:p>
           <a:p>
             <a:pPr algn="l">
               <a:spcBef>
-                <a:spcPts val="400"/>
+                <a:spcPts val="600"/>
               </a:spcBef>
             </a:pPr>
             <a:r>
               <a:rPr sz="1500" b="0">
                 <a:solidFill>
-                  <a:srgbClr val="7A6E66"/>
-                </a:solidFill>
-                <a:latin typeface="Yu Gothic"/>
-              </a:rPr>
-              <a:t>↔ コツコツ＝深く積む</a:t>
-            </a:r>
-          </a:p>
-        </p:txBody>
-      </p:sp>
-      <p:sp>
-        <p:nvSpPr>
-          <p:cNvPr id="10" name="Rectangle 9"/>
+                  <a:srgbClr val="3A2A24"/>
+                </a:solidFill>
+                <a:latin typeface="Yu Gothic"/>
+              </a:rPr>
+              <a:t>工場内で戻すのが最も早く安い</a:t>
+            </a:r>
+          </a:p>
+        </p:txBody>
+      </p:sp>
+      <p:sp>
+        <p:nvSpPr>
+          <p:cNvPr id="22" name="Rectangle 21"/>
           <p:cNvSpPr/>
           <p:nvPr/>
         </p:nvSpPr>
         <p:spPr>
           <a:xfrm>
-            <a:off x="4251960" y="1463040"/>
-            <a:ext cx="3703320" cy="2011680"/>
+            <a:off x="4251960" y="3474720"/>
+            <a:ext cx="3703320" cy="2697480"/>
           </a:xfrm>
           <a:prstGeom prst="rect">
             <a:avLst/>
@@ -3443,13 +3879,13 @@
       </p:sp>
       <p:sp>
         <p:nvSpPr>
-          <p:cNvPr id="11" name="TextBox 10"/>
+          <p:cNvPr id="23" name="TextBox 22"/>
           <p:cNvSpPr txBox="1"/>
           <p:nvPr/>
         </p:nvSpPr>
         <p:spPr>
           <a:xfrm>
-            <a:off x="4251960" y="1508760"/>
+            <a:off x="4251960" y="3520440"/>
             <a:ext cx="3703320" cy="411480"/>
           </a:xfrm>
           <a:prstGeom prst="rect">
@@ -3465,27 +3901,27 @@
           <a:p>
             <a:pPr algn="l"/>
             <a:r>
-              <a:rPr sz="1500" b="1">
+              <a:rPr sz="1600" b="1">
                 <a:solidFill>
                   <a:srgbClr val="F06142"/>
                 </a:solidFill>
                 <a:latin typeface="Yu Gothic"/>
               </a:rPr>
-              <a:t>② 清峰SEEDSの⭐</a:t>
-            </a:r>
-          </a:p>
-        </p:txBody>
-      </p:sp>
-      <p:sp>
-        <p:nvSpPr>
-          <p:cNvPr id="12" name="TextBox 11"/>
+              <a:t>なにをする</a:t>
+            </a:r>
+          </a:p>
+        </p:txBody>
+      </p:sp>
+      <p:sp>
+        <p:nvSpPr>
+          <p:cNvPr id="24" name="TextBox 23"/>
           <p:cNvSpPr txBox="1"/>
           <p:nvPr/>
         </p:nvSpPr>
         <p:spPr>
           <a:xfrm>
-            <a:off x="4251960" y="1965960"/>
-            <a:ext cx="3703320" cy="1463040"/>
+            <a:off x="4251960" y="3977639"/>
+            <a:ext cx="3703320" cy="2103120"/>
           </a:xfrm>
           <a:prstGeom prst="rect">
             <a:avLst/>
@@ -3500,7 +3936,7 @@
           <a:p>
             <a:pPr algn="l">
               <a:spcBef>
-                <a:spcPts val="400"/>
+                <a:spcPts val="600"/>
               </a:spcBef>
             </a:pPr>
             <a:r>
@@ -3510,13 +3946,13 @@
                 </a:solidFill>
                 <a:latin typeface="Yu Gothic"/>
               </a:rPr>
-              <a:t>地域・社会への貢献</a:t>
+              <a:t>関係者に会う</a:t>
             </a:r>
           </a:p>
           <a:p>
             <a:pPr algn="l">
               <a:spcBef>
-                <a:spcPts val="400"/>
+                <a:spcPts val="600"/>
               </a:spcBef>
             </a:pPr>
             <a:r>
@@ -3526,13 +3962,13 @@
                 </a:solidFill>
                 <a:latin typeface="Yu Gothic"/>
               </a:rPr>
-              <a:t>明確な理念</a:t>
+              <a:t>工場を歩き、もったいないを探す</a:t>
             </a:r>
           </a:p>
           <a:p>
             <a:pPr algn="l">
               <a:spcBef>
-                <a:spcPts val="400"/>
+                <a:spcPts val="600"/>
               </a:spcBef>
             </a:pPr>
             <a:r>
@@ -3542,37 +3978,21 @@
                 </a:solidFill>
                 <a:latin typeface="Yu Gothic"/>
               </a:rPr>
-              <a:t>実は身近、支えるロマン</a:t>
-            </a:r>
-          </a:p>
-          <a:p>
-            <a:pPr algn="l">
-              <a:spcBef>
-                <a:spcPts val="400"/>
-              </a:spcBef>
-            </a:pPr>
-            <a:r>
-              <a:rPr sz="1500" b="0">
-                <a:solidFill>
-                  <a:srgbClr val="3A2A24"/>
-                </a:solidFill>
-                <a:latin typeface="Yu Gothic"/>
-              </a:rPr>
-              <a:t>どう作られるかの物語</a:t>
-            </a:r>
-          </a:p>
-        </p:txBody>
-      </p:sp>
-      <p:sp>
-        <p:nvSpPr>
-          <p:cNvPr id="13" name="Rectangle 12"/>
+              <a:t>社長と問いを深める</a:t>
+            </a:r>
+          </a:p>
+        </p:txBody>
+      </p:sp>
+      <p:sp>
+        <p:nvSpPr>
+          <p:cNvPr id="25" name="Rectangle 24"/>
           <p:cNvSpPr/>
           <p:nvPr/>
         </p:nvSpPr>
         <p:spPr>
           <a:xfrm>
-            <a:off x="8138160" y="1463040"/>
-            <a:ext cx="3657600" cy="2011680"/>
+            <a:off x="8138160" y="3474720"/>
+            <a:ext cx="3657600" cy="2697480"/>
           </a:xfrm>
           <a:prstGeom prst="rect">
             <a:avLst/>
@@ -3595,13 +4015,13 @@
       </p:sp>
       <p:sp>
         <p:nvSpPr>
-          <p:cNvPr id="14" name="TextBox 13"/>
+          <p:cNvPr id="26" name="TextBox 25"/>
           <p:cNvSpPr txBox="1"/>
           <p:nvPr/>
         </p:nvSpPr>
         <p:spPr>
           <a:xfrm>
-            <a:off x="8138160" y="1508760"/>
+            <a:off x="8138160" y="3520440"/>
             <a:ext cx="3657600" cy="411480"/>
           </a:xfrm>
           <a:prstGeom prst="rect">
@@ -3617,27 +4037,27 @@
           <a:p>
             <a:pPr algn="l"/>
             <a:r>
-              <a:rPr sz="1500" b="1">
+              <a:rPr sz="1600" b="1">
                 <a:solidFill>
                   <a:srgbClr val="F06142"/>
                 </a:solidFill>
                 <a:latin typeface="Yu Gothic"/>
               </a:rPr>
-              <a:t>③ ツアーでの見立て（案）</a:t>
-            </a:r>
-          </a:p>
-        </p:txBody>
-      </p:sp>
-      <p:sp>
-        <p:nvSpPr>
-          <p:cNvPr id="15" name="TextBox 14"/>
+              <a:t>誰と・持ち帰るもの</a:t>
+            </a:r>
+          </a:p>
+        </p:txBody>
+      </p:sp>
+      <p:sp>
+        <p:nvSpPr>
+          <p:cNvPr id="27" name="TextBox 26"/>
           <p:cNvSpPr txBox="1"/>
           <p:nvPr/>
         </p:nvSpPr>
         <p:spPr>
           <a:xfrm>
-            <a:off x="8138160" y="1965960"/>
-            <a:ext cx="3657600" cy="1463040"/>
+            <a:off x="8138160" y="3977639"/>
+            <a:ext cx="3657600" cy="2103120"/>
           </a:xfrm>
           <a:prstGeom prst="rect">
             <a:avLst/>
@@ -3652,7 +4072,7 @@
           <a:p>
             <a:pPr algn="l">
               <a:spcBef>
-                <a:spcPts val="400"/>
+                <a:spcPts val="600"/>
               </a:spcBef>
             </a:pPr>
             <a:r>
@@ -3662,13 +4082,13 @@
                 </a:solidFill>
                 <a:latin typeface="Yu Gothic"/>
               </a:rPr>
-              <a:t>銅の流れを構造で捉える</a:t>
+              <a:t>ぐるぐる人材（28卒）</a:t>
             </a:r>
           </a:p>
           <a:p>
             <a:pPr algn="l">
               <a:spcBef>
-                <a:spcPts val="400"/>
+                <a:spcPts val="600"/>
               </a:spcBef>
             </a:pPr>
             <a:r>
@@ -3678,13 +4098,13 @@
                 </a:solidFill>
                 <a:latin typeface="Yu Gothic"/>
               </a:rPr>
-              <a:t>分断をつなぐことに燃える</a:t>
+              <a:t>答えより、深まった問い</a:t>
             </a:r>
           </a:p>
           <a:p>
             <a:pPr algn="l">
               <a:spcBef>
-                <a:spcPts val="400"/>
+                <a:spcPts val="600"/>
               </a:spcBef>
             </a:pPr>
             <a:r>
@@ -3694,623 +4114,7 @@
                 </a:solidFill>
                 <a:latin typeface="Yu Gothic"/>
               </a:rPr>
-              <a:t>答えより問いを深める</a:t>
-            </a:r>
-          </a:p>
-        </p:txBody>
-      </p:sp>
-      <p:sp>
-        <p:nvSpPr>
-          <p:cNvPr id="16" name="TextBox 15"/>
-          <p:cNvSpPr txBox="1"/>
-          <p:nvPr/>
-        </p:nvSpPr>
-        <p:spPr>
-          <a:xfrm>
-            <a:off x="365760" y="3611880"/>
-            <a:ext cx="11430000" cy="365760"/>
-          </a:xfrm>
-          <a:prstGeom prst="rect">
-            <a:avLst/>
-          </a:prstGeom>
-          <a:noFill/>
-        </p:spPr>
-        <p:txBody>
-          <a:bodyPr wrap="square" anchor="t" lIns="73152" rIns="73152">
-            <a:spAutoFit/>
-          </a:bodyPr>
-          <a:lstStyle/>
-          <a:p>
-            <a:pPr algn="l"/>
-            <a:r>
-              <a:rPr sz="1500" b="1">
-                <a:solidFill>
-                  <a:srgbClr val="F06142"/>
-                </a:solidFill>
-                <a:latin typeface="Yu Gothic"/>
-              </a:rPr>
-              <a:t>コツコツとの違い</a:t>
-            </a:r>
-          </a:p>
-        </p:txBody>
-      </p:sp>
-      <p:sp>
-        <p:nvSpPr>
-          <p:cNvPr id="17" name="TextBox 16"/>
-          <p:cNvSpPr txBox="1"/>
-          <p:nvPr/>
-        </p:nvSpPr>
-        <p:spPr>
-          <a:xfrm>
-            <a:off x="365760" y="4023360"/>
-            <a:ext cx="2148840" cy="384048"/>
-          </a:xfrm>
-          <a:prstGeom prst="rect">
-            <a:avLst/>
-          </a:prstGeom>
-          <a:noFill/>
-        </p:spPr>
-        <p:txBody>
-          <a:bodyPr wrap="square" anchor="ctr" lIns="73152" rIns="73152">
-            <a:spAutoFit/>
-          </a:bodyPr>
-          <a:lstStyle/>
-          <a:p>
-            <a:pPr algn="l"/>
-            <a:r>
-              <a:rPr sz="1400" b="1">
-                <a:solidFill>
-                  <a:srgbClr val="3A2A24"/>
-                </a:solidFill>
-                <a:latin typeface="Yu Gothic"/>
-              </a:rPr>
-              <a:t/>
-            </a:r>
-          </a:p>
-        </p:txBody>
-      </p:sp>
-      <p:sp>
-        <p:nvSpPr>
-          <p:cNvPr id="18" name="Rectangle 17"/>
-          <p:cNvSpPr/>
-          <p:nvPr/>
-        </p:nvSpPr>
-        <p:spPr>
-          <a:xfrm>
-            <a:off x="2560320" y="4023360"/>
-            <a:ext cx="4526280" cy="384048"/>
-          </a:xfrm>
-          <a:prstGeom prst="rect">
-            <a:avLst/>
-          </a:prstGeom>
-          <a:solidFill>
-            <a:srgbClr val="F06142"/>
-          </a:solidFill>
-          <a:ln>
-            <a:noFill/>
-          </a:ln>
-          <a:effectLst/>
-        </p:spPr>
-        <p:txBody>
-          <a:bodyPr rtlCol="0" anchor="ctr" wrap="square" lIns="73152" rIns="73152"/>
-          <a:lstStyle/>
-          <a:p>
-            <a:pPr algn="l"/>
-            <a:r>
-              <a:rPr sz="1400" b="1">
-                <a:solidFill>
-                  <a:srgbClr val="FFFFFF"/>
-                </a:solidFill>
-                <a:latin typeface="Yu Gothic"/>
-              </a:rPr>
-              <a:t>コツコツ</a:t>
-            </a:r>
-          </a:p>
-        </p:txBody>
-      </p:sp>
-      <p:sp>
-        <p:nvSpPr>
-          <p:cNvPr id="19" name="Rectangle 18"/>
-          <p:cNvSpPr/>
-          <p:nvPr/>
-        </p:nvSpPr>
-        <p:spPr>
-          <a:xfrm>
-            <a:off x="7132320" y="4023360"/>
-            <a:ext cx="4617720" cy="384048"/>
-          </a:xfrm>
-          <a:prstGeom prst="rect">
-            <a:avLst/>
-          </a:prstGeom>
-          <a:solidFill>
-            <a:srgbClr val="F06142"/>
-          </a:solidFill>
-          <a:ln>
-            <a:noFill/>
-          </a:ln>
-          <a:effectLst/>
-        </p:spPr>
-        <p:txBody>
-          <a:bodyPr rtlCol="0" anchor="ctr" wrap="square" lIns="73152" rIns="73152"/>
-          <a:lstStyle/>
-          <a:p>
-            <a:pPr algn="l"/>
-            <a:r>
-              <a:rPr sz="1400" b="1">
-                <a:solidFill>
-                  <a:srgbClr val="FFFFFF"/>
-                </a:solidFill>
-                <a:latin typeface="Yu Gothic"/>
-              </a:rPr>
-              <a:t>ぐるぐる</a:t>
-            </a:r>
-          </a:p>
-        </p:txBody>
-      </p:sp>
-      <p:sp>
-        <p:nvSpPr>
-          <p:cNvPr id="20" name="Rectangle 19"/>
-          <p:cNvSpPr/>
-          <p:nvPr/>
-        </p:nvSpPr>
-        <p:spPr>
-          <a:xfrm>
-            <a:off x="365760" y="4443984"/>
-            <a:ext cx="2148840" cy="384048"/>
-          </a:xfrm>
-          <a:prstGeom prst="rect">
-            <a:avLst/>
-          </a:prstGeom>
-          <a:solidFill>
-            <a:srgbClr val="FFE0D0"/>
-          </a:solidFill>
-          <a:ln>
-            <a:noFill/>
-          </a:ln>
-          <a:effectLst/>
-        </p:spPr>
-        <p:txBody>
-          <a:bodyPr rtlCol="0" anchor="ctr" wrap="square" lIns="73152" rIns="73152"/>
-          <a:lstStyle/>
-          <a:p>
-            <a:pPr algn="l"/>
-            <a:r>
-              <a:rPr sz="1400" b="1">
-                <a:solidFill>
-                  <a:srgbClr val="3A2A24"/>
-                </a:solidFill>
-                <a:latin typeface="Yu Gothic"/>
-              </a:rPr>
-              <a:t>関心</a:t>
-            </a:r>
-          </a:p>
-        </p:txBody>
-      </p:sp>
-      <p:sp>
-        <p:nvSpPr>
-          <p:cNvPr id="21" name="Rectangle 20"/>
-          <p:cNvSpPr/>
-          <p:nvPr/>
-        </p:nvSpPr>
-        <p:spPr>
-          <a:xfrm>
-            <a:off x="2560320" y="4443984"/>
-            <a:ext cx="4526280" cy="384048"/>
-          </a:xfrm>
-          <a:prstGeom prst="rect">
-            <a:avLst/>
-          </a:prstGeom>
-          <a:solidFill>
-            <a:srgbClr val="FFFFFF"/>
-          </a:solidFill>
-          <a:ln>
-            <a:noFill/>
-          </a:ln>
-          <a:effectLst/>
-        </p:spPr>
-        <p:txBody>
-          <a:bodyPr rtlCol="0" anchor="ctr" wrap="square" lIns="73152" rIns="73152"/>
-          <a:lstStyle/>
-          <a:p>
-            <a:pPr algn="l"/>
-            <a:r>
-              <a:rPr sz="1400" b="0">
-                <a:solidFill>
-                  <a:srgbClr val="3A2A24"/>
-                </a:solidFill>
-                <a:latin typeface="Yu Gothic"/>
-              </a:rPr>
-              <a:t>工程を極める</a:t>
-            </a:r>
-          </a:p>
-        </p:txBody>
-      </p:sp>
-      <p:sp>
-        <p:nvSpPr>
-          <p:cNvPr id="22" name="Rectangle 21"/>
-          <p:cNvSpPr/>
-          <p:nvPr/>
-        </p:nvSpPr>
-        <p:spPr>
-          <a:xfrm>
-            <a:off x="7132320" y="4443984"/>
-            <a:ext cx="4617720" cy="384048"/>
-          </a:xfrm>
-          <a:prstGeom prst="rect">
-            <a:avLst/>
-          </a:prstGeom>
-          <a:solidFill>
-            <a:srgbClr val="FFFFFF"/>
-          </a:solidFill>
-          <a:ln>
-            <a:noFill/>
-          </a:ln>
-          <a:effectLst/>
-        </p:spPr>
-        <p:txBody>
-          <a:bodyPr rtlCol="0" anchor="ctr" wrap="square" lIns="73152" rIns="73152"/>
-          <a:lstStyle/>
-          <a:p>
-            <a:pPr algn="l"/>
-            <a:r>
-              <a:rPr sz="1400" b="0">
-                <a:solidFill>
-                  <a:srgbClr val="3A2A24"/>
-                </a:solidFill>
-                <a:latin typeface="Yu Gothic"/>
-              </a:rPr>
-              <a:t>工程と会社のあいだ</a:t>
-            </a:r>
-          </a:p>
-        </p:txBody>
-      </p:sp>
-      <p:sp>
-        <p:nvSpPr>
-          <p:cNvPr id="23" name="Rectangle 22"/>
-          <p:cNvSpPr/>
-          <p:nvPr/>
-        </p:nvSpPr>
-        <p:spPr>
-          <a:xfrm>
-            <a:off x="365760" y="4864608"/>
-            <a:ext cx="2148840" cy="384048"/>
-          </a:xfrm>
-          <a:prstGeom prst="rect">
-            <a:avLst/>
-          </a:prstGeom>
-          <a:solidFill>
-            <a:srgbClr val="FFE0D0"/>
-          </a:solidFill>
-          <a:ln>
-            <a:noFill/>
-          </a:ln>
-          <a:effectLst/>
-        </p:spPr>
-        <p:txBody>
-          <a:bodyPr rtlCol="0" anchor="ctr" wrap="square" lIns="73152" rIns="73152"/>
-          <a:lstStyle/>
-          <a:p>
-            <a:pPr algn="l"/>
-            <a:r>
-              <a:rPr sz="1400" b="1">
-                <a:solidFill>
-                  <a:srgbClr val="3A2A24"/>
-                </a:solidFill>
-                <a:latin typeface="Yu Gothic"/>
-              </a:rPr>
-              <a:t>やりがい</a:t>
-            </a:r>
-          </a:p>
-        </p:txBody>
-      </p:sp>
-      <p:sp>
-        <p:nvSpPr>
-          <p:cNvPr id="24" name="Rectangle 23"/>
-          <p:cNvSpPr/>
-          <p:nvPr/>
-        </p:nvSpPr>
-        <p:spPr>
-          <a:xfrm>
-            <a:off x="2560320" y="4864608"/>
-            <a:ext cx="4526280" cy="384048"/>
-          </a:xfrm>
-          <a:prstGeom prst="rect">
-            <a:avLst/>
-          </a:prstGeom>
-          <a:solidFill>
-            <a:srgbClr val="FFFFFF"/>
-          </a:solidFill>
-          <a:ln>
-            <a:noFill/>
-          </a:ln>
-          <a:effectLst/>
-        </p:spPr>
-        <p:txBody>
-          <a:bodyPr rtlCol="0" anchor="ctr" wrap="square" lIns="73152" rIns="73152"/>
-          <a:lstStyle/>
-          <a:p>
-            <a:pPr algn="l"/>
-            <a:r>
-              <a:rPr sz="1400" b="0">
-                <a:solidFill>
-                  <a:srgbClr val="3A2A24"/>
-                </a:solidFill>
-                <a:latin typeface="Yu Gothic"/>
-              </a:rPr>
-              <a:t>綺麗に巻けた達成感</a:t>
-            </a:r>
-          </a:p>
-        </p:txBody>
-      </p:sp>
-      <p:sp>
-        <p:nvSpPr>
-          <p:cNvPr id="25" name="Rectangle 24"/>
-          <p:cNvSpPr/>
-          <p:nvPr/>
-        </p:nvSpPr>
-        <p:spPr>
-          <a:xfrm>
-            <a:off x="7132320" y="4864608"/>
-            <a:ext cx="4617720" cy="384048"/>
-          </a:xfrm>
-          <a:prstGeom prst="rect">
-            <a:avLst/>
-          </a:prstGeom>
-          <a:solidFill>
-            <a:srgbClr val="FFFFFF"/>
-          </a:solidFill>
-          <a:ln>
-            <a:noFill/>
-          </a:ln>
-          <a:effectLst/>
-        </p:spPr>
-        <p:txBody>
-          <a:bodyPr rtlCol="0" anchor="ctr" wrap="square" lIns="73152" rIns="73152"/>
-          <a:lstStyle/>
-          <a:p>
-            <a:pPr algn="l"/>
-            <a:r>
-              <a:rPr sz="1400" b="0">
-                <a:solidFill>
-                  <a:srgbClr val="3A2A24"/>
-                </a:solidFill>
-                <a:latin typeface="Yu Gothic"/>
-              </a:rPr>
-              <a:t>仮説検証・伝わる喜び</a:t>
-            </a:r>
-          </a:p>
-        </p:txBody>
-      </p:sp>
-      <p:sp>
-        <p:nvSpPr>
-          <p:cNvPr id="26" name="Rectangle 25"/>
-          <p:cNvSpPr/>
-          <p:nvPr/>
-        </p:nvSpPr>
-        <p:spPr>
-          <a:xfrm>
-            <a:off x="365760" y="5285232"/>
-            <a:ext cx="2148840" cy="384048"/>
-          </a:xfrm>
-          <a:prstGeom prst="rect">
-            <a:avLst/>
-          </a:prstGeom>
-          <a:solidFill>
-            <a:srgbClr val="FFE0D0"/>
-          </a:solidFill>
-          <a:ln>
-            <a:noFill/>
-          </a:ln>
-          <a:effectLst/>
-        </p:spPr>
-        <p:txBody>
-          <a:bodyPr rtlCol="0" anchor="ctr" wrap="square" lIns="73152" rIns="73152"/>
-          <a:lstStyle/>
-          <a:p>
-            <a:pPr algn="l"/>
-            <a:r>
-              <a:rPr sz="1400" b="1">
-                <a:solidFill>
-                  <a:srgbClr val="3A2A24"/>
-                </a:solidFill>
-                <a:latin typeface="Yu Gothic"/>
-              </a:rPr>
-              <a:t>響く場面</a:t>
-            </a:r>
-          </a:p>
-        </p:txBody>
-      </p:sp>
-      <p:sp>
-        <p:nvSpPr>
-          <p:cNvPr id="27" name="Rectangle 26"/>
-          <p:cNvSpPr/>
-          <p:nvPr/>
-        </p:nvSpPr>
-        <p:spPr>
-          <a:xfrm>
-            <a:off x="2560320" y="5285232"/>
-            <a:ext cx="4526280" cy="384048"/>
-          </a:xfrm>
-          <a:prstGeom prst="rect">
-            <a:avLst/>
-          </a:prstGeom>
-          <a:solidFill>
-            <a:srgbClr val="FFFFFF"/>
-          </a:solidFill>
-          <a:ln>
-            <a:noFill/>
-          </a:ln>
-          <a:effectLst/>
-        </p:spPr>
-        <p:txBody>
-          <a:bodyPr rtlCol="0" anchor="ctr" wrap="square" lIns="73152" rIns="73152"/>
-          <a:lstStyle/>
-          <a:p>
-            <a:pPr algn="l"/>
-            <a:r>
-              <a:rPr sz="1400" b="0">
-                <a:solidFill>
-                  <a:srgbClr val="3A2A24"/>
-                </a:solidFill>
-                <a:latin typeface="Yu Gothic"/>
-              </a:rPr>
-              <a:t>工場見学</a:t>
-            </a:r>
-          </a:p>
-        </p:txBody>
-      </p:sp>
-      <p:sp>
-        <p:nvSpPr>
-          <p:cNvPr id="28" name="Rectangle 27"/>
-          <p:cNvSpPr/>
-          <p:nvPr/>
-        </p:nvSpPr>
-        <p:spPr>
-          <a:xfrm>
-            <a:off x="7132320" y="5285232"/>
-            <a:ext cx="4617720" cy="384048"/>
-          </a:xfrm>
-          <a:prstGeom prst="rect">
-            <a:avLst/>
-          </a:prstGeom>
-          <a:solidFill>
-            <a:srgbClr val="FFFFFF"/>
-          </a:solidFill>
-          <a:ln>
-            <a:noFill/>
-          </a:ln>
-          <a:effectLst/>
-        </p:spPr>
-        <p:txBody>
-          <a:bodyPr rtlCol="0" anchor="ctr" wrap="square" lIns="73152" rIns="73152"/>
-          <a:lstStyle/>
-          <a:p>
-            <a:pPr algn="l"/>
-            <a:r>
-              <a:rPr sz="1400" b="0">
-                <a:solidFill>
-                  <a:srgbClr val="3A2A24"/>
-                </a:solidFill>
-                <a:latin typeface="Yu Gothic"/>
-              </a:rPr>
-              <a:t>循環ワーク・対話</a:t>
-            </a:r>
-          </a:p>
-        </p:txBody>
-      </p:sp>
-      <p:sp>
-        <p:nvSpPr>
-          <p:cNvPr id="29" name="Rectangle 28"/>
-          <p:cNvSpPr/>
-          <p:nvPr/>
-        </p:nvSpPr>
-        <p:spPr>
-          <a:xfrm>
-            <a:off x="365760" y="5705856"/>
-            <a:ext cx="2148840" cy="384048"/>
-          </a:xfrm>
-          <a:prstGeom prst="rect">
-            <a:avLst/>
-          </a:prstGeom>
-          <a:solidFill>
-            <a:srgbClr val="FFE0D0"/>
-          </a:solidFill>
-          <a:ln>
-            <a:noFill/>
-          </a:ln>
-          <a:effectLst/>
-        </p:spPr>
-        <p:txBody>
-          <a:bodyPr rtlCol="0" anchor="ctr" wrap="square" lIns="73152" rIns="73152"/>
-          <a:lstStyle/>
-          <a:p>
-            <a:pPr algn="l"/>
-            <a:r>
-              <a:rPr sz="1400" b="1">
-                <a:solidFill>
-                  <a:srgbClr val="3A2A24"/>
-                </a:solidFill>
-                <a:latin typeface="Yu Gothic"/>
-              </a:rPr>
-              <a:t>キャリア観</a:t>
-            </a:r>
-          </a:p>
-        </p:txBody>
-      </p:sp>
-      <p:sp>
-        <p:nvSpPr>
-          <p:cNvPr id="30" name="Rectangle 29"/>
-          <p:cNvSpPr/>
-          <p:nvPr/>
-        </p:nvSpPr>
-        <p:spPr>
-          <a:xfrm>
-            <a:off x="2560320" y="5705856"/>
-            <a:ext cx="4526280" cy="384048"/>
-          </a:xfrm>
-          <a:prstGeom prst="rect">
-            <a:avLst/>
-          </a:prstGeom>
-          <a:solidFill>
-            <a:srgbClr val="FFFFFF"/>
-          </a:solidFill>
-          <a:ln>
-            <a:noFill/>
-          </a:ln>
-          <a:effectLst/>
-        </p:spPr>
-        <p:txBody>
-          <a:bodyPr rtlCol="0" anchor="ctr" wrap="square" lIns="73152" rIns="73152"/>
-          <a:lstStyle/>
-          <a:p>
-            <a:pPr algn="l"/>
-            <a:r>
-              <a:rPr sz="1400" b="0">
-                <a:solidFill>
-                  <a:srgbClr val="3A2A24"/>
-                </a:solidFill>
-                <a:latin typeface="Yu Gothic"/>
-              </a:rPr>
-              <a:t>一つを積み重ねる</a:t>
-            </a:r>
-          </a:p>
-        </p:txBody>
-      </p:sp>
-      <p:sp>
-        <p:nvSpPr>
-          <p:cNvPr id="31" name="Rectangle 30"/>
-          <p:cNvSpPr/>
-          <p:nvPr/>
-        </p:nvSpPr>
-        <p:spPr>
-          <a:xfrm>
-            <a:off x="7132320" y="5705856"/>
-            <a:ext cx="4617720" cy="384048"/>
-          </a:xfrm>
-          <a:prstGeom prst="rect">
-            <a:avLst/>
-          </a:prstGeom>
-          <a:solidFill>
-            <a:srgbClr val="FFFFFF"/>
-          </a:solidFill>
-          <a:ln>
-            <a:noFill/>
-          </a:ln>
-          <a:effectLst/>
-        </p:spPr>
-        <p:txBody>
-          <a:bodyPr rtlCol="0" anchor="ctr" wrap="square" lIns="73152" rIns="73152"/>
-          <a:lstStyle/>
-          <a:p>
-            <a:pPr algn="l"/>
-            <a:r>
-              <a:rPr sz="1400" b="0">
-                <a:solidFill>
-                  <a:srgbClr val="3A2A24"/>
-                </a:solidFill>
-                <a:latin typeface="Yu Gothic"/>
-              </a:rPr>
-              <a:t>役に立つ／人と繋がる</a:t>
+              <a:t>成果は記事化して発信</a:t>
             </a:r>
           </a:p>
         </p:txBody>
@@ -4405,7 +4209,7 @@
                 </a:solidFill>
                 <a:latin typeface="Yu Gothic"/>
               </a:rPr>
-              <a:t>現状データ</a:t>
+              <a:t>ぐるぐる人材</a:t>
             </a:r>
           </a:p>
         </p:txBody>
@@ -4440,7 +4244,7 @@
                 </a:solidFill>
                 <a:latin typeface="Yu Gothic"/>
               </a:rPr>
-              <a:t>清峰データで見えた、ぐるぐるの現在地</a:t>
+              <a:t>ぐるぐる人材とは？</a:t>
             </a:r>
           </a:p>
         </p:txBody>
@@ -4475,21 +4279,56 @@
                 </a:solidFill>
                 <a:latin typeface="Yu Gothic"/>
               </a:rPr>
-              <a:t>出典：sch_0202 / 学生管理シート（27）/ 年間目標・実数 / visions学生リストアップ / 具体的なペルソナ像</a:t>
-            </a:r>
-          </a:p>
-        </p:txBody>
-      </p:sp>
-      <p:sp>
-        <p:nvSpPr>
-          <p:cNvPr id="6" name="Rectangle 5"/>
+              <a:t>出典：visions具体的なペルソナ像 / ジャーニー（専卒以上）/ SEEDS選定シート</a:t>
+            </a:r>
+          </a:p>
+        </p:txBody>
+      </p:sp>
+      <p:sp>
+        <p:nvSpPr>
+          <p:cNvPr id="6" name="TextBox 5"/>
+          <p:cNvSpPr txBox="1"/>
+          <p:nvPr/>
+        </p:nvSpPr>
+        <p:spPr>
+          <a:xfrm>
+            <a:off x="365760" y="777240"/>
+            <a:ext cx="11430000" cy="548640"/>
+          </a:xfrm>
+          <a:prstGeom prst="rect">
+            <a:avLst/>
+          </a:prstGeom>
+          <a:noFill/>
+        </p:spPr>
+        <p:txBody>
+          <a:bodyPr wrap="square" anchor="t" lIns="73152" rIns="73152">
+            <a:spAutoFit/>
+          </a:bodyPr>
+          <a:lstStyle/>
+          <a:p>
+            <a:pPr algn="l"/>
+            <a:r>
+              <a:rPr sz="2200" b="1">
+                <a:solidFill>
+                  <a:srgbClr val="F06142"/>
+                </a:solidFill>
+                <a:latin typeface="Yu Gothic"/>
+              </a:rPr>
+              <a:t>仮説を回し、人をつなぎ、“めぐり”をつくる人</a:t>
+            </a:r>
+          </a:p>
+        </p:txBody>
+      </p:sp>
+      <p:sp>
+        <p:nvSpPr>
+          <p:cNvPr id="7" name="Rectangle 6"/>
           <p:cNvSpPr/>
           <p:nvPr/>
         </p:nvSpPr>
         <p:spPr>
           <a:xfrm>
-            <a:off x="365760" y="822960"/>
-            <a:ext cx="11430000" cy="914400"/>
+            <a:off x="365760" y="1463040"/>
+            <a:ext cx="3703320" cy="2011680"/>
           </a:xfrm>
           <a:prstGeom prst="rect">
             <a:avLst/>
@@ -4512,49 +4351,14 @@
       </p:sp>
       <p:sp>
         <p:nvSpPr>
-          <p:cNvPr id="7" name="TextBox 6"/>
-          <p:cNvSpPr txBox="1"/>
-          <p:nvPr/>
-        </p:nvSpPr>
-        <p:spPr>
-          <a:xfrm>
-            <a:off x="411480" y="841248"/>
-            <a:ext cx="3017520" cy="530352"/>
-          </a:xfrm>
-          <a:prstGeom prst="rect">
-            <a:avLst/>
-          </a:prstGeom>
-          <a:noFill/>
-        </p:spPr>
-        <p:txBody>
-          <a:bodyPr wrap="square" anchor="ctr" lIns="73152" rIns="73152">
-            <a:spAutoFit/>
-          </a:bodyPr>
-          <a:lstStyle/>
-          <a:p>
-            <a:pPr algn="ctr"/>
-            <a:r>
-              <a:rPr sz="2600" b="1">
-                <a:solidFill>
-                  <a:srgbClr val="8C4A36"/>
-                </a:solidFill>
-                <a:latin typeface="Yu Gothic"/>
-              </a:rPr>
-              <a:t>0名</a:t>
-            </a:r>
-          </a:p>
-        </p:txBody>
-      </p:sp>
-      <p:sp>
-        <p:nvSpPr>
           <p:cNvPr id="8" name="TextBox 7"/>
           <p:cNvSpPr txBox="1"/>
           <p:nvPr/>
         </p:nvSpPr>
         <p:spPr>
           <a:xfrm>
-            <a:off x="411480" y="1371600"/>
-            <a:ext cx="3017520" cy="320040"/>
+            <a:off x="365760" y="1508760"/>
+            <a:ext cx="3703320" cy="411480"/>
           </a:xfrm>
           <a:prstGeom prst="rect">
             <a:avLst/>
@@ -4567,15 +4371,15 @@
           </a:bodyPr>
           <a:lstStyle/>
           <a:p>
-            <a:pPr algn="ctr"/>
-            <a:r>
-              <a:rPr sz="1100" b="0">
-                <a:solidFill>
-                  <a:srgbClr val="7A6E66"/>
-                </a:solidFill>
-                <a:latin typeface="Yu Gothic"/>
-              </a:rPr>
-              <a:t>28卒のぐるぐる接点</a:t>
+            <a:pPr algn="l"/>
+            <a:r>
+              <a:rPr sz="1500" b="1">
+                <a:solidFill>
+                  <a:srgbClr val="F06142"/>
+                </a:solidFill>
+                <a:latin typeface="Yu Gothic"/>
+              </a:rPr>
+              <a:t>① visionsの定義</a:t>
             </a:r>
           </a:p>
         </p:txBody>
@@ -4588,120 +4392,8 @@
         </p:nvSpPr>
         <p:spPr>
           <a:xfrm>
-            <a:off x="3657600" y="841248"/>
-            <a:ext cx="8046720" cy="877824"/>
-          </a:xfrm>
-          <a:prstGeom prst="rect">
-            <a:avLst/>
-          </a:prstGeom>
-          <a:noFill/>
-        </p:spPr>
-        <p:txBody>
-          <a:bodyPr wrap="square" anchor="ctr" lIns="73152" rIns="73152">
-            <a:spAutoFit/>
-          </a:bodyPr>
-          <a:lstStyle/>
-          <a:p>
-            <a:pPr algn="l"/>
-            <a:r>
-              <a:rPr sz="1600" b="0">
-                <a:solidFill>
-                  <a:srgbClr val="3A2A24"/>
-                </a:solidFill>
-                <a:latin typeface="Yu Gothic"/>
-              </a:rPr>
-              <a:t>リストアップ表は空欄</a:t>
-            </a:r>
-          </a:p>
-          <a:p>
-            <a:pPr algn="l"/>
-            <a:r>
-              <a:rPr sz="1600" b="0">
-                <a:solidFill>
-                  <a:srgbClr val="3A2A24"/>
-                </a:solidFill>
-                <a:latin typeface="Yu Gothic"/>
-              </a:rPr>
-              <a:t>目標：10月30名 → 12月50名</a:t>
-            </a:r>
-          </a:p>
-        </p:txBody>
-      </p:sp>
-      <p:sp>
-        <p:nvSpPr>
-          <p:cNvPr id="10" name="Rectangle 9"/>
-          <p:cNvSpPr/>
-          <p:nvPr/>
-        </p:nvSpPr>
-        <p:spPr>
-          <a:xfrm>
-            <a:off x="365760" y="1828800"/>
-            <a:ext cx="11430000" cy="914400"/>
-          </a:xfrm>
-          <a:prstGeom prst="rect">
-            <a:avLst/>
-          </a:prstGeom>
-          <a:solidFill>
-            <a:srgbClr val="FFFFFF"/>
-          </a:solidFill>
-          <a:ln>
-            <a:noFill/>
-          </a:ln>
-          <a:effectLst/>
-        </p:spPr>
-        <p:txBody>
-          <a:bodyPr rtlCol="0" anchor="ctr"/>
-          <a:lstStyle/>
-          <a:p>
-            <a:pPr algn="ctr"/>
-          </a:p>
-        </p:txBody>
-      </p:sp>
-      <p:sp>
-        <p:nvSpPr>
-          <p:cNvPr id="11" name="TextBox 10"/>
-          <p:cNvSpPr txBox="1"/>
-          <p:nvPr/>
-        </p:nvSpPr>
-        <p:spPr>
-          <a:xfrm>
-            <a:off x="411480" y="1847088"/>
-            <a:ext cx="3017520" cy="530352"/>
-          </a:xfrm>
-          <a:prstGeom prst="rect">
-            <a:avLst/>
-          </a:prstGeom>
-          <a:noFill/>
-        </p:spPr>
-        <p:txBody>
-          <a:bodyPr wrap="square" anchor="ctr" lIns="73152" rIns="73152">
-            <a:spAutoFit/>
-          </a:bodyPr>
-          <a:lstStyle/>
-          <a:p>
-            <a:pPr algn="ctr"/>
-            <a:r>
-              <a:rPr sz="2600" b="1">
-                <a:solidFill>
-                  <a:srgbClr val="8C4A36"/>
-                </a:solidFill>
-                <a:latin typeface="Yu Gothic"/>
-              </a:rPr>
-              <a:t>1 / 5名</a:t>
-            </a:r>
-          </a:p>
-        </p:txBody>
-      </p:sp>
-      <p:sp>
-        <p:nvSpPr>
-          <p:cNvPr id="12" name="TextBox 11"/>
-          <p:cNvSpPr txBox="1"/>
-          <p:nvPr/>
-        </p:nvSpPr>
-        <p:spPr>
-          <a:xfrm>
-            <a:off x="411480" y="2377440"/>
-            <a:ext cx="3017520" cy="320040"/>
+            <a:off x="365760" y="1965960"/>
+            <a:ext cx="3703320" cy="1463040"/>
           </a:xfrm>
           <a:prstGeom prst="rect">
             <a:avLst/>
@@ -4713,414 +4405,6 @@
             <a:spAutoFit/>
           </a:bodyPr>
           <a:lstStyle/>
-          <a:p>
-            <a:pPr algn="ctr"/>
-            <a:r>
-              <a:rPr sz="1100" b="0">
-                <a:solidFill>
-                  <a:srgbClr val="7A6E66"/>
-                </a:solidFill>
-                <a:latin typeface="Yu Gothic"/>
-              </a:rPr>
-              <a:t>27卒の理系で説明会へ進んだ人</a:t>
-            </a:r>
-          </a:p>
-        </p:txBody>
-      </p:sp>
-      <p:sp>
-        <p:nvSpPr>
-          <p:cNvPr id="13" name="TextBox 12"/>
-          <p:cNvSpPr txBox="1"/>
-          <p:nvPr/>
-        </p:nvSpPr>
-        <p:spPr>
-          <a:xfrm>
-            <a:off x="3657600" y="1847088"/>
-            <a:ext cx="8046720" cy="877824"/>
-          </a:xfrm>
-          <a:prstGeom prst="rect">
-            <a:avLst/>
-          </a:prstGeom>
-          <a:noFill/>
-        </p:spPr>
-        <p:txBody>
-          <a:bodyPr wrap="square" anchor="ctr" lIns="73152" rIns="73152">
-            <a:spAutoFit/>
-          </a:bodyPr>
-          <a:lstStyle/>
-          <a:p>
-            <a:pPr algn="l"/>
-            <a:r>
-              <a:rPr sz="1600" b="0">
-                <a:solidFill>
-                  <a:srgbClr val="3A2A24"/>
-                </a:solidFill>
-                <a:latin typeface="Yu Gothic"/>
-              </a:rPr>
-              <a:t>筑波大 地球学類のみ</a:t>
-            </a:r>
-          </a:p>
-          <a:p>
-            <a:pPr algn="l"/>
-            <a:r>
-              <a:rPr sz="1600" b="0">
-                <a:solidFill>
-                  <a:srgbClr val="3A2A24"/>
-                </a:solidFill>
-                <a:latin typeface="Yu Gothic"/>
-              </a:rPr>
-              <a:t>（のち内定承諾）</a:t>
-            </a:r>
-          </a:p>
-        </p:txBody>
-      </p:sp>
-      <p:sp>
-        <p:nvSpPr>
-          <p:cNvPr id="14" name="Rectangle 13"/>
-          <p:cNvSpPr/>
-          <p:nvPr/>
-        </p:nvSpPr>
-        <p:spPr>
-          <a:xfrm>
-            <a:off x="365760" y="2834640"/>
-            <a:ext cx="11430000" cy="914400"/>
-          </a:xfrm>
-          <a:prstGeom prst="rect">
-            <a:avLst/>
-          </a:prstGeom>
-          <a:solidFill>
-            <a:srgbClr val="FFFFFF"/>
-          </a:solidFill>
-          <a:ln>
-            <a:noFill/>
-          </a:ln>
-          <a:effectLst/>
-        </p:spPr>
-        <p:txBody>
-          <a:bodyPr rtlCol="0" anchor="ctr"/>
-          <a:lstStyle/>
-          <a:p>
-            <a:pPr algn="ctr"/>
-          </a:p>
-        </p:txBody>
-      </p:sp>
-      <p:sp>
-        <p:nvSpPr>
-          <p:cNvPr id="15" name="TextBox 14"/>
-          <p:cNvSpPr txBox="1"/>
-          <p:nvPr/>
-        </p:nvSpPr>
-        <p:spPr>
-          <a:xfrm>
-            <a:off x="411480" y="2852928"/>
-            <a:ext cx="3017520" cy="530352"/>
-          </a:xfrm>
-          <a:prstGeom prst="rect">
-            <a:avLst/>
-          </a:prstGeom>
-          <a:noFill/>
-        </p:spPr>
-        <p:txBody>
-          <a:bodyPr wrap="square" anchor="ctr" lIns="73152" rIns="73152">
-            <a:spAutoFit/>
-          </a:bodyPr>
-          <a:lstStyle/>
-          <a:p>
-            <a:pPr algn="ctr"/>
-            <a:r>
-              <a:rPr sz="2600" b="1">
-                <a:solidFill>
-                  <a:srgbClr val="8C4A36"/>
-                </a:solidFill>
-                <a:latin typeface="Yu Gothic"/>
-              </a:rPr>
-              <a:t>理念で承諾</a:t>
-            </a:r>
-          </a:p>
-        </p:txBody>
-      </p:sp>
-      <p:sp>
-        <p:nvSpPr>
-          <p:cNvPr id="16" name="TextBox 15"/>
-          <p:cNvSpPr txBox="1"/>
-          <p:nvPr/>
-        </p:nvSpPr>
-        <p:spPr>
-          <a:xfrm>
-            <a:off x="411480" y="3383280"/>
-            <a:ext cx="3017520" cy="320040"/>
-          </a:xfrm>
-          <a:prstGeom prst="rect">
-            <a:avLst/>
-          </a:prstGeom>
-          <a:noFill/>
-        </p:spPr>
-        <p:txBody>
-          <a:bodyPr wrap="square" anchor="t" lIns="73152" rIns="73152">
-            <a:spAutoFit/>
-          </a:bodyPr>
-          <a:lstStyle/>
-          <a:p>
-            <a:pPr algn="ctr"/>
-            <a:r>
-              <a:rPr sz="1100" b="0">
-                <a:solidFill>
-                  <a:srgbClr val="7A6E66"/>
-                </a:solidFill>
-                <a:latin typeface="Yu Gothic"/>
-              </a:rPr>
-              <a:t>成功事例</a:t>
-            </a:r>
-          </a:p>
-        </p:txBody>
-      </p:sp>
-      <p:sp>
-        <p:nvSpPr>
-          <p:cNvPr id="17" name="TextBox 16"/>
-          <p:cNvSpPr txBox="1"/>
-          <p:nvPr/>
-        </p:nvSpPr>
-        <p:spPr>
-          <a:xfrm>
-            <a:off x="3657600" y="2852928"/>
-            <a:ext cx="8046720" cy="877824"/>
-          </a:xfrm>
-          <a:prstGeom prst="rect">
-            <a:avLst/>
-          </a:prstGeom>
-          <a:noFill/>
-        </p:spPr>
-        <p:txBody>
-          <a:bodyPr wrap="square" anchor="ctr" lIns="73152" rIns="73152">
-            <a:spAutoFit/>
-          </a:bodyPr>
-          <a:lstStyle/>
-          <a:p>
-            <a:pPr algn="l"/>
-            <a:r>
-              <a:rPr sz="1600" b="0">
-                <a:solidFill>
-                  <a:srgbClr val="3A2A24"/>
-                </a:solidFill>
-                <a:latin typeface="Yu Gothic"/>
-              </a:rPr>
-              <a:t>「地球資源を輝かせていく」に共感</a:t>
-            </a:r>
-          </a:p>
-          <a:p>
-            <a:pPr algn="l"/>
-            <a:r>
-              <a:rPr sz="1600" b="0">
-                <a:solidFill>
-                  <a:srgbClr val="3A2A24"/>
-                </a:solidFill>
-                <a:latin typeface="Yu Gothic"/>
-              </a:rPr>
-              <a:t>ISに参加して承諾</a:t>
-            </a:r>
-          </a:p>
-        </p:txBody>
-      </p:sp>
-      <p:sp>
-        <p:nvSpPr>
-          <p:cNvPr id="18" name="Rectangle 17"/>
-          <p:cNvSpPr/>
-          <p:nvPr/>
-        </p:nvSpPr>
-        <p:spPr>
-          <a:xfrm>
-            <a:off x="365760" y="3840480"/>
-            <a:ext cx="11430000" cy="914400"/>
-          </a:xfrm>
-          <a:prstGeom prst="rect">
-            <a:avLst/>
-          </a:prstGeom>
-          <a:solidFill>
-            <a:srgbClr val="FFFFFF"/>
-          </a:solidFill>
-          <a:ln>
-            <a:noFill/>
-          </a:ln>
-          <a:effectLst/>
-        </p:spPr>
-        <p:txBody>
-          <a:bodyPr rtlCol="0" anchor="ctr"/>
-          <a:lstStyle/>
-          <a:p>
-            <a:pPr algn="ctr"/>
-          </a:p>
-        </p:txBody>
-      </p:sp>
-      <p:sp>
-        <p:nvSpPr>
-          <p:cNvPr id="19" name="TextBox 18"/>
-          <p:cNvSpPr txBox="1"/>
-          <p:nvPr/>
-        </p:nvSpPr>
-        <p:spPr>
-          <a:xfrm>
-            <a:off x="411480" y="3858768"/>
-            <a:ext cx="3017520" cy="530352"/>
-          </a:xfrm>
-          <a:prstGeom prst="rect">
-            <a:avLst/>
-          </a:prstGeom>
-          <a:noFill/>
-        </p:spPr>
-        <p:txBody>
-          <a:bodyPr wrap="square" anchor="ctr" lIns="73152" rIns="73152">
-            <a:spAutoFit/>
-          </a:bodyPr>
-          <a:lstStyle/>
-          <a:p>
-            <a:pPr algn="ctr"/>
-            <a:r>
-              <a:rPr sz="2600" b="1">
-                <a:solidFill>
-                  <a:srgbClr val="8C4A36"/>
-                </a:solidFill>
-                <a:latin typeface="Yu Gothic"/>
-              </a:rPr>
-              <a:t>8 / 9名</a:t>
-            </a:r>
-          </a:p>
-        </p:txBody>
-      </p:sp>
-      <p:sp>
-        <p:nvSpPr>
-          <p:cNvPr id="20" name="TextBox 19"/>
-          <p:cNvSpPr txBox="1"/>
-          <p:nvPr/>
-        </p:nvSpPr>
-        <p:spPr>
-          <a:xfrm>
-            <a:off x="411480" y="4389120"/>
-            <a:ext cx="3017520" cy="320040"/>
-          </a:xfrm>
-          <a:prstGeom prst="rect">
-            <a:avLst/>
-          </a:prstGeom>
-          <a:noFill/>
-        </p:spPr>
-        <p:txBody>
-          <a:bodyPr wrap="square" anchor="t" lIns="73152" rIns="73152">
-            <a:spAutoFit/>
-          </a:bodyPr>
-          <a:lstStyle/>
-          <a:p>
-            <a:pPr algn="ctr"/>
-            <a:r>
-              <a:rPr sz="1100" b="0">
-                <a:solidFill>
-                  <a:srgbClr val="7A6E66"/>
-                </a:solidFill>
-                <a:latin typeface="Yu Gothic"/>
-              </a:rPr>
-              <a:t>リスト学生の関心テーマ</a:t>
-            </a:r>
-          </a:p>
-        </p:txBody>
-      </p:sp>
-      <p:sp>
-        <p:nvSpPr>
-          <p:cNvPr id="21" name="TextBox 20"/>
-          <p:cNvSpPr txBox="1"/>
-          <p:nvPr/>
-        </p:nvSpPr>
-        <p:spPr>
-          <a:xfrm>
-            <a:off x="3657600" y="3858768"/>
-            <a:ext cx="8046720" cy="877824"/>
-          </a:xfrm>
-          <a:prstGeom prst="rect">
-            <a:avLst/>
-          </a:prstGeom>
-          <a:noFill/>
-        </p:spPr>
-        <p:txBody>
-          <a:bodyPr wrap="square" anchor="ctr" lIns="73152" rIns="73152">
-            <a:spAutoFit/>
-          </a:bodyPr>
-          <a:lstStyle/>
-          <a:p>
-            <a:pPr algn="l"/>
-            <a:r>
-              <a:rPr sz="1600" b="0">
-                <a:solidFill>
-                  <a:srgbClr val="3A2A24"/>
-                </a:solidFill>
-                <a:latin typeface="Yu Gothic"/>
-              </a:rPr>
-              <a:t>自然と共生・循環型社会</a:t>
-            </a:r>
-          </a:p>
-          <a:p>
-            <a:pPr algn="l"/>
-            <a:r>
-              <a:rPr sz="1600" b="0">
-                <a:solidFill>
-                  <a:srgbClr val="3A2A24"/>
-                </a:solidFill>
-                <a:latin typeface="Yu Gothic"/>
-              </a:rPr>
-              <a:t>清峰の最重要テーマと一致</a:t>
-            </a:r>
-          </a:p>
-        </p:txBody>
-      </p:sp>
-      <p:sp>
-        <p:nvSpPr>
-          <p:cNvPr id="22" name="Rectangle 21"/>
-          <p:cNvSpPr/>
-          <p:nvPr/>
-        </p:nvSpPr>
-        <p:spPr>
-          <a:xfrm>
-            <a:off x="365760" y="4937760"/>
-            <a:ext cx="11430000" cy="1234440"/>
-          </a:xfrm>
-          <a:prstGeom prst="rect">
-            <a:avLst/>
-          </a:prstGeom>
-          <a:solidFill>
-            <a:srgbClr val="FFE0D0"/>
-          </a:solidFill>
-          <a:ln>
-            <a:noFill/>
-          </a:ln>
-          <a:effectLst/>
-        </p:spPr>
-        <p:txBody>
-          <a:bodyPr rtlCol="0" anchor="t" wrap="square" lIns="182880" rIns="182880"/>
-          <a:lstStyle/>
-          <a:p>
-            <a:pPr algn="l"/>
-            <a:r>
-              <a:rPr sz="1600" b="1">
-                <a:solidFill>
-                  <a:srgbClr val="F06142"/>
-                </a:solidFill>
-                <a:latin typeface="Yu Gothic"/>
-              </a:rPr>
-              <a:t>示唆</a:t>
-            </a:r>
-          </a:p>
-          <a:p>
-            <a:pPr algn="l">
-              <a:spcBef>
-                <a:spcPts val="600"/>
-              </a:spcBef>
-            </a:pPr>
-            <a:r>
-              <a:rPr sz="1600" b="0">
-                <a:solidFill>
-                  <a:srgbClr val="3A2A24"/>
-                </a:solidFill>
-                <a:latin typeface="Yu Gothic"/>
-              </a:rPr>
-              <a:t>既存チャネルでは、ぐるぐる層に届いていない</a:t>
-            </a:r>
-          </a:p>
           <a:p>
             <a:pPr algn="l">
               <a:spcBef>
@@ -5128,13 +4412,949 @@
               </a:spcBef>
             </a:pPr>
             <a:r>
-              <a:rPr sz="1600" b="0">
-                <a:solidFill>
-                  <a:srgbClr val="3A2A24"/>
-                </a:solidFill>
-                <a:latin typeface="Yu Gothic"/>
-              </a:rPr>
-              <a:t>理念への共感が、最強の入口になる</a:t>
+              <a:rPr sz="1500" b="0">
+                <a:solidFill>
+                  <a:srgbClr val="3A2A24"/>
+                </a:solidFill>
+                <a:latin typeface="Yu Gothic"/>
+              </a:rPr>
+              <a:t>PDCAを回すのが得意</a:t>
+            </a:r>
+          </a:p>
+          <a:p>
+            <a:pPr algn="l">
+              <a:spcBef>
+                <a:spcPts val="400"/>
+              </a:spcBef>
+            </a:pPr>
+            <a:r>
+              <a:rPr sz="1500" b="0">
+                <a:solidFill>
+                  <a:srgbClr val="3A2A24"/>
+                </a:solidFill>
+                <a:latin typeface="Yu Gothic"/>
+              </a:rPr>
+              <a:t>循環（関係作り）ができる</a:t>
+            </a:r>
+          </a:p>
+          <a:p>
+            <a:pPr algn="l">
+              <a:spcBef>
+                <a:spcPts val="400"/>
+              </a:spcBef>
+            </a:pPr>
+            <a:r>
+              <a:rPr sz="1500" b="0">
+                <a:solidFill>
+                  <a:srgbClr val="7A6E66"/>
+                </a:solidFill>
+                <a:latin typeface="Yu Gothic"/>
+              </a:rPr>
+              <a:t>↔ コツコツ＝深く積む</a:t>
+            </a:r>
+          </a:p>
+        </p:txBody>
+      </p:sp>
+      <p:sp>
+        <p:nvSpPr>
+          <p:cNvPr id="10" name="Rectangle 9"/>
+          <p:cNvSpPr/>
+          <p:nvPr/>
+        </p:nvSpPr>
+        <p:spPr>
+          <a:xfrm>
+            <a:off x="4251960" y="1463040"/>
+            <a:ext cx="3703320" cy="2011680"/>
+          </a:xfrm>
+          <a:prstGeom prst="rect">
+            <a:avLst/>
+          </a:prstGeom>
+          <a:solidFill>
+            <a:srgbClr val="FFFFFF"/>
+          </a:solidFill>
+          <a:ln>
+            <a:noFill/>
+          </a:ln>
+          <a:effectLst/>
+        </p:spPr>
+        <p:txBody>
+          <a:bodyPr rtlCol="0" anchor="ctr"/>
+          <a:lstStyle/>
+          <a:p>
+            <a:pPr algn="ctr"/>
+          </a:p>
+        </p:txBody>
+      </p:sp>
+      <p:sp>
+        <p:nvSpPr>
+          <p:cNvPr id="11" name="TextBox 10"/>
+          <p:cNvSpPr txBox="1"/>
+          <p:nvPr/>
+        </p:nvSpPr>
+        <p:spPr>
+          <a:xfrm>
+            <a:off x="4251960" y="1508760"/>
+            <a:ext cx="3703320" cy="411480"/>
+          </a:xfrm>
+          <a:prstGeom prst="rect">
+            <a:avLst/>
+          </a:prstGeom>
+          <a:noFill/>
+        </p:spPr>
+        <p:txBody>
+          <a:bodyPr wrap="square" anchor="t" lIns="73152" rIns="73152">
+            <a:spAutoFit/>
+          </a:bodyPr>
+          <a:lstStyle/>
+          <a:p>
+            <a:pPr algn="l"/>
+            <a:r>
+              <a:rPr sz="1500" b="1">
+                <a:solidFill>
+                  <a:srgbClr val="F06142"/>
+                </a:solidFill>
+                <a:latin typeface="Yu Gothic"/>
+              </a:rPr>
+              <a:t>② 清峰SEEDSの⭐</a:t>
+            </a:r>
+          </a:p>
+        </p:txBody>
+      </p:sp>
+      <p:sp>
+        <p:nvSpPr>
+          <p:cNvPr id="12" name="TextBox 11"/>
+          <p:cNvSpPr txBox="1"/>
+          <p:nvPr/>
+        </p:nvSpPr>
+        <p:spPr>
+          <a:xfrm>
+            <a:off x="4251960" y="1965960"/>
+            <a:ext cx="3703320" cy="1463040"/>
+          </a:xfrm>
+          <a:prstGeom prst="rect">
+            <a:avLst/>
+          </a:prstGeom>
+          <a:noFill/>
+        </p:spPr>
+        <p:txBody>
+          <a:bodyPr wrap="square" anchor="t" lIns="73152" rIns="73152">
+            <a:spAutoFit/>
+          </a:bodyPr>
+          <a:lstStyle/>
+          <a:p>
+            <a:pPr algn="l">
+              <a:spcBef>
+                <a:spcPts val="400"/>
+              </a:spcBef>
+            </a:pPr>
+            <a:r>
+              <a:rPr sz="1500" b="0">
+                <a:solidFill>
+                  <a:srgbClr val="3A2A24"/>
+                </a:solidFill>
+                <a:latin typeface="Yu Gothic"/>
+              </a:rPr>
+              <a:t>地域・社会への貢献</a:t>
+            </a:r>
+          </a:p>
+          <a:p>
+            <a:pPr algn="l">
+              <a:spcBef>
+                <a:spcPts val="400"/>
+              </a:spcBef>
+            </a:pPr>
+            <a:r>
+              <a:rPr sz="1500" b="0">
+                <a:solidFill>
+                  <a:srgbClr val="3A2A24"/>
+                </a:solidFill>
+                <a:latin typeface="Yu Gothic"/>
+              </a:rPr>
+              <a:t>明確な理念</a:t>
+            </a:r>
+          </a:p>
+          <a:p>
+            <a:pPr algn="l">
+              <a:spcBef>
+                <a:spcPts val="400"/>
+              </a:spcBef>
+            </a:pPr>
+            <a:r>
+              <a:rPr sz="1500" b="0">
+                <a:solidFill>
+                  <a:srgbClr val="3A2A24"/>
+                </a:solidFill>
+                <a:latin typeface="Yu Gothic"/>
+              </a:rPr>
+              <a:t>実は身近、支えるロマン</a:t>
+            </a:r>
+          </a:p>
+          <a:p>
+            <a:pPr algn="l">
+              <a:spcBef>
+                <a:spcPts val="400"/>
+              </a:spcBef>
+            </a:pPr>
+            <a:r>
+              <a:rPr sz="1500" b="0">
+                <a:solidFill>
+                  <a:srgbClr val="3A2A24"/>
+                </a:solidFill>
+                <a:latin typeface="Yu Gothic"/>
+              </a:rPr>
+              <a:t>どう作られるかの物語</a:t>
+            </a:r>
+          </a:p>
+        </p:txBody>
+      </p:sp>
+      <p:sp>
+        <p:nvSpPr>
+          <p:cNvPr id="13" name="Rectangle 12"/>
+          <p:cNvSpPr/>
+          <p:nvPr/>
+        </p:nvSpPr>
+        <p:spPr>
+          <a:xfrm>
+            <a:off x="8138160" y="1463040"/>
+            <a:ext cx="3657600" cy="2011680"/>
+          </a:xfrm>
+          <a:prstGeom prst="rect">
+            <a:avLst/>
+          </a:prstGeom>
+          <a:solidFill>
+            <a:srgbClr val="FFFFFF"/>
+          </a:solidFill>
+          <a:ln>
+            <a:noFill/>
+          </a:ln>
+          <a:effectLst/>
+        </p:spPr>
+        <p:txBody>
+          <a:bodyPr rtlCol="0" anchor="ctr"/>
+          <a:lstStyle/>
+          <a:p>
+            <a:pPr algn="ctr"/>
+          </a:p>
+        </p:txBody>
+      </p:sp>
+      <p:sp>
+        <p:nvSpPr>
+          <p:cNvPr id="14" name="TextBox 13"/>
+          <p:cNvSpPr txBox="1"/>
+          <p:nvPr/>
+        </p:nvSpPr>
+        <p:spPr>
+          <a:xfrm>
+            <a:off x="8138160" y="1508760"/>
+            <a:ext cx="3657600" cy="411480"/>
+          </a:xfrm>
+          <a:prstGeom prst="rect">
+            <a:avLst/>
+          </a:prstGeom>
+          <a:noFill/>
+        </p:spPr>
+        <p:txBody>
+          <a:bodyPr wrap="square" anchor="t" lIns="73152" rIns="73152">
+            <a:spAutoFit/>
+          </a:bodyPr>
+          <a:lstStyle/>
+          <a:p>
+            <a:pPr algn="l"/>
+            <a:r>
+              <a:rPr sz="1500" b="1">
+                <a:solidFill>
+                  <a:srgbClr val="F06142"/>
+                </a:solidFill>
+                <a:latin typeface="Yu Gothic"/>
+              </a:rPr>
+              <a:t>③ ツアーでの見立て（案）</a:t>
+            </a:r>
+          </a:p>
+        </p:txBody>
+      </p:sp>
+      <p:sp>
+        <p:nvSpPr>
+          <p:cNvPr id="15" name="TextBox 14"/>
+          <p:cNvSpPr txBox="1"/>
+          <p:nvPr/>
+        </p:nvSpPr>
+        <p:spPr>
+          <a:xfrm>
+            <a:off x="8138160" y="1965960"/>
+            <a:ext cx="3657600" cy="1463040"/>
+          </a:xfrm>
+          <a:prstGeom prst="rect">
+            <a:avLst/>
+          </a:prstGeom>
+          <a:noFill/>
+        </p:spPr>
+        <p:txBody>
+          <a:bodyPr wrap="square" anchor="t" lIns="73152" rIns="73152">
+            <a:spAutoFit/>
+          </a:bodyPr>
+          <a:lstStyle/>
+          <a:p>
+            <a:pPr algn="l">
+              <a:spcBef>
+                <a:spcPts val="400"/>
+              </a:spcBef>
+            </a:pPr>
+            <a:r>
+              <a:rPr sz="1500" b="0">
+                <a:solidFill>
+                  <a:srgbClr val="3A2A24"/>
+                </a:solidFill>
+                <a:latin typeface="Yu Gothic"/>
+              </a:rPr>
+              <a:t>銅の流れを構造で捉える</a:t>
+            </a:r>
+          </a:p>
+          <a:p>
+            <a:pPr algn="l">
+              <a:spcBef>
+                <a:spcPts val="400"/>
+              </a:spcBef>
+            </a:pPr>
+            <a:r>
+              <a:rPr sz="1500" b="0">
+                <a:solidFill>
+                  <a:srgbClr val="3A2A24"/>
+                </a:solidFill>
+                <a:latin typeface="Yu Gothic"/>
+              </a:rPr>
+              <a:t>分断をつなぐことに燃える</a:t>
+            </a:r>
+          </a:p>
+          <a:p>
+            <a:pPr algn="l">
+              <a:spcBef>
+                <a:spcPts val="400"/>
+              </a:spcBef>
+            </a:pPr>
+            <a:r>
+              <a:rPr sz="1500" b="0">
+                <a:solidFill>
+                  <a:srgbClr val="3A2A24"/>
+                </a:solidFill>
+                <a:latin typeface="Yu Gothic"/>
+              </a:rPr>
+              <a:t>答えより問いを深める</a:t>
+            </a:r>
+          </a:p>
+        </p:txBody>
+      </p:sp>
+      <p:sp>
+        <p:nvSpPr>
+          <p:cNvPr id="16" name="TextBox 15"/>
+          <p:cNvSpPr txBox="1"/>
+          <p:nvPr/>
+        </p:nvSpPr>
+        <p:spPr>
+          <a:xfrm>
+            <a:off x="365760" y="3611880"/>
+            <a:ext cx="11430000" cy="365760"/>
+          </a:xfrm>
+          <a:prstGeom prst="rect">
+            <a:avLst/>
+          </a:prstGeom>
+          <a:noFill/>
+        </p:spPr>
+        <p:txBody>
+          <a:bodyPr wrap="square" anchor="t" lIns="73152" rIns="73152">
+            <a:spAutoFit/>
+          </a:bodyPr>
+          <a:lstStyle/>
+          <a:p>
+            <a:pPr algn="l"/>
+            <a:r>
+              <a:rPr sz="1500" b="1">
+                <a:solidFill>
+                  <a:srgbClr val="F06142"/>
+                </a:solidFill>
+                <a:latin typeface="Yu Gothic"/>
+              </a:rPr>
+              <a:t>コツコツとの違い</a:t>
+            </a:r>
+          </a:p>
+        </p:txBody>
+      </p:sp>
+      <p:sp>
+        <p:nvSpPr>
+          <p:cNvPr id="17" name="TextBox 16"/>
+          <p:cNvSpPr txBox="1"/>
+          <p:nvPr/>
+        </p:nvSpPr>
+        <p:spPr>
+          <a:xfrm>
+            <a:off x="365760" y="4023360"/>
+            <a:ext cx="2148840" cy="384048"/>
+          </a:xfrm>
+          <a:prstGeom prst="rect">
+            <a:avLst/>
+          </a:prstGeom>
+          <a:noFill/>
+        </p:spPr>
+        <p:txBody>
+          <a:bodyPr wrap="square" anchor="ctr" lIns="73152" rIns="73152">
+            <a:spAutoFit/>
+          </a:bodyPr>
+          <a:lstStyle/>
+          <a:p>
+            <a:pPr algn="l"/>
+            <a:r>
+              <a:rPr sz="1400" b="1">
+                <a:solidFill>
+                  <a:srgbClr val="3A2A24"/>
+                </a:solidFill>
+                <a:latin typeface="Yu Gothic"/>
+              </a:rPr>
+              <a:t/>
+            </a:r>
+          </a:p>
+        </p:txBody>
+      </p:sp>
+      <p:sp>
+        <p:nvSpPr>
+          <p:cNvPr id="18" name="Rectangle 17"/>
+          <p:cNvSpPr/>
+          <p:nvPr/>
+        </p:nvSpPr>
+        <p:spPr>
+          <a:xfrm>
+            <a:off x="2560320" y="4023360"/>
+            <a:ext cx="4526280" cy="384048"/>
+          </a:xfrm>
+          <a:prstGeom prst="rect">
+            <a:avLst/>
+          </a:prstGeom>
+          <a:solidFill>
+            <a:srgbClr val="F06142"/>
+          </a:solidFill>
+          <a:ln>
+            <a:noFill/>
+          </a:ln>
+          <a:effectLst/>
+        </p:spPr>
+        <p:txBody>
+          <a:bodyPr rtlCol="0" anchor="ctr" wrap="square" lIns="73152" rIns="73152"/>
+          <a:lstStyle/>
+          <a:p>
+            <a:pPr algn="l"/>
+            <a:r>
+              <a:rPr sz="1400" b="1">
+                <a:solidFill>
+                  <a:srgbClr val="FFFFFF"/>
+                </a:solidFill>
+                <a:latin typeface="Yu Gothic"/>
+              </a:rPr>
+              <a:t>コツコツ</a:t>
+            </a:r>
+          </a:p>
+        </p:txBody>
+      </p:sp>
+      <p:sp>
+        <p:nvSpPr>
+          <p:cNvPr id="19" name="Rectangle 18"/>
+          <p:cNvSpPr/>
+          <p:nvPr/>
+        </p:nvSpPr>
+        <p:spPr>
+          <a:xfrm>
+            <a:off x="7132320" y="4023360"/>
+            <a:ext cx="4617720" cy="384048"/>
+          </a:xfrm>
+          <a:prstGeom prst="rect">
+            <a:avLst/>
+          </a:prstGeom>
+          <a:solidFill>
+            <a:srgbClr val="F06142"/>
+          </a:solidFill>
+          <a:ln>
+            <a:noFill/>
+          </a:ln>
+          <a:effectLst/>
+        </p:spPr>
+        <p:txBody>
+          <a:bodyPr rtlCol="0" anchor="ctr" wrap="square" lIns="73152" rIns="73152"/>
+          <a:lstStyle/>
+          <a:p>
+            <a:pPr algn="l"/>
+            <a:r>
+              <a:rPr sz="1400" b="1">
+                <a:solidFill>
+                  <a:srgbClr val="FFFFFF"/>
+                </a:solidFill>
+                <a:latin typeface="Yu Gothic"/>
+              </a:rPr>
+              <a:t>ぐるぐる</a:t>
+            </a:r>
+          </a:p>
+        </p:txBody>
+      </p:sp>
+      <p:sp>
+        <p:nvSpPr>
+          <p:cNvPr id="20" name="Rectangle 19"/>
+          <p:cNvSpPr/>
+          <p:nvPr/>
+        </p:nvSpPr>
+        <p:spPr>
+          <a:xfrm>
+            <a:off x="365760" y="4443984"/>
+            <a:ext cx="2148840" cy="384048"/>
+          </a:xfrm>
+          <a:prstGeom prst="rect">
+            <a:avLst/>
+          </a:prstGeom>
+          <a:solidFill>
+            <a:srgbClr val="FFE0D0"/>
+          </a:solidFill>
+          <a:ln>
+            <a:noFill/>
+          </a:ln>
+          <a:effectLst/>
+        </p:spPr>
+        <p:txBody>
+          <a:bodyPr rtlCol="0" anchor="ctr" wrap="square" lIns="73152" rIns="73152"/>
+          <a:lstStyle/>
+          <a:p>
+            <a:pPr algn="l"/>
+            <a:r>
+              <a:rPr sz="1400" b="1">
+                <a:solidFill>
+                  <a:srgbClr val="3A2A24"/>
+                </a:solidFill>
+                <a:latin typeface="Yu Gothic"/>
+              </a:rPr>
+              <a:t>関心</a:t>
+            </a:r>
+          </a:p>
+        </p:txBody>
+      </p:sp>
+      <p:sp>
+        <p:nvSpPr>
+          <p:cNvPr id="21" name="Rectangle 20"/>
+          <p:cNvSpPr/>
+          <p:nvPr/>
+        </p:nvSpPr>
+        <p:spPr>
+          <a:xfrm>
+            <a:off x="2560320" y="4443984"/>
+            <a:ext cx="4526280" cy="384048"/>
+          </a:xfrm>
+          <a:prstGeom prst="rect">
+            <a:avLst/>
+          </a:prstGeom>
+          <a:solidFill>
+            <a:srgbClr val="FFFFFF"/>
+          </a:solidFill>
+          <a:ln>
+            <a:noFill/>
+          </a:ln>
+          <a:effectLst/>
+        </p:spPr>
+        <p:txBody>
+          <a:bodyPr rtlCol="0" anchor="ctr" wrap="square" lIns="73152" rIns="73152"/>
+          <a:lstStyle/>
+          <a:p>
+            <a:pPr algn="l"/>
+            <a:r>
+              <a:rPr sz="1400" b="0">
+                <a:solidFill>
+                  <a:srgbClr val="3A2A24"/>
+                </a:solidFill>
+                <a:latin typeface="Yu Gothic"/>
+              </a:rPr>
+              <a:t>工程を極める</a:t>
+            </a:r>
+          </a:p>
+        </p:txBody>
+      </p:sp>
+      <p:sp>
+        <p:nvSpPr>
+          <p:cNvPr id="22" name="Rectangle 21"/>
+          <p:cNvSpPr/>
+          <p:nvPr/>
+        </p:nvSpPr>
+        <p:spPr>
+          <a:xfrm>
+            <a:off x="7132320" y="4443984"/>
+            <a:ext cx="4617720" cy="384048"/>
+          </a:xfrm>
+          <a:prstGeom prst="rect">
+            <a:avLst/>
+          </a:prstGeom>
+          <a:solidFill>
+            <a:srgbClr val="FFFFFF"/>
+          </a:solidFill>
+          <a:ln>
+            <a:noFill/>
+          </a:ln>
+          <a:effectLst/>
+        </p:spPr>
+        <p:txBody>
+          <a:bodyPr rtlCol="0" anchor="ctr" wrap="square" lIns="73152" rIns="73152"/>
+          <a:lstStyle/>
+          <a:p>
+            <a:pPr algn="l"/>
+            <a:r>
+              <a:rPr sz="1400" b="0">
+                <a:solidFill>
+                  <a:srgbClr val="3A2A24"/>
+                </a:solidFill>
+                <a:latin typeface="Yu Gothic"/>
+              </a:rPr>
+              <a:t>工程と会社のあいだ</a:t>
+            </a:r>
+          </a:p>
+        </p:txBody>
+      </p:sp>
+      <p:sp>
+        <p:nvSpPr>
+          <p:cNvPr id="23" name="Rectangle 22"/>
+          <p:cNvSpPr/>
+          <p:nvPr/>
+        </p:nvSpPr>
+        <p:spPr>
+          <a:xfrm>
+            <a:off x="365760" y="4864608"/>
+            <a:ext cx="2148840" cy="384048"/>
+          </a:xfrm>
+          <a:prstGeom prst="rect">
+            <a:avLst/>
+          </a:prstGeom>
+          <a:solidFill>
+            <a:srgbClr val="FFE0D0"/>
+          </a:solidFill>
+          <a:ln>
+            <a:noFill/>
+          </a:ln>
+          <a:effectLst/>
+        </p:spPr>
+        <p:txBody>
+          <a:bodyPr rtlCol="0" anchor="ctr" wrap="square" lIns="73152" rIns="73152"/>
+          <a:lstStyle/>
+          <a:p>
+            <a:pPr algn="l"/>
+            <a:r>
+              <a:rPr sz="1400" b="1">
+                <a:solidFill>
+                  <a:srgbClr val="3A2A24"/>
+                </a:solidFill>
+                <a:latin typeface="Yu Gothic"/>
+              </a:rPr>
+              <a:t>やりがい</a:t>
+            </a:r>
+          </a:p>
+        </p:txBody>
+      </p:sp>
+      <p:sp>
+        <p:nvSpPr>
+          <p:cNvPr id="24" name="Rectangle 23"/>
+          <p:cNvSpPr/>
+          <p:nvPr/>
+        </p:nvSpPr>
+        <p:spPr>
+          <a:xfrm>
+            <a:off x="2560320" y="4864608"/>
+            <a:ext cx="4526280" cy="384048"/>
+          </a:xfrm>
+          <a:prstGeom prst="rect">
+            <a:avLst/>
+          </a:prstGeom>
+          <a:solidFill>
+            <a:srgbClr val="FFFFFF"/>
+          </a:solidFill>
+          <a:ln>
+            <a:noFill/>
+          </a:ln>
+          <a:effectLst/>
+        </p:spPr>
+        <p:txBody>
+          <a:bodyPr rtlCol="0" anchor="ctr" wrap="square" lIns="73152" rIns="73152"/>
+          <a:lstStyle/>
+          <a:p>
+            <a:pPr algn="l"/>
+            <a:r>
+              <a:rPr sz="1400" b="0">
+                <a:solidFill>
+                  <a:srgbClr val="3A2A24"/>
+                </a:solidFill>
+                <a:latin typeface="Yu Gothic"/>
+              </a:rPr>
+              <a:t>綺麗に巻けた達成感</a:t>
+            </a:r>
+          </a:p>
+        </p:txBody>
+      </p:sp>
+      <p:sp>
+        <p:nvSpPr>
+          <p:cNvPr id="25" name="Rectangle 24"/>
+          <p:cNvSpPr/>
+          <p:nvPr/>
+        </p:nvSpPr>
+        <p:spPr>
+          <a:xfrm>
+            <a:off x="7132320" y="4864608"/>
+            <a:ext cx="4617720" cy="384048"/>
+          </a:xfrm>
+          <a:prstGeom prst="rect">
+            <a:avLst/>
+          </a:prstGeom>
+          <a:solidFill>
+            <a:srgbClr val="FFFFFF"/>
+          </a:solidFill>
+          <a:ln>
+            <a:noFill/>
+          </a:ln>
+          <a:effectLst/>
+        </p:spPr>
+        <p:txBody>
+          <a:bodyPr rtlCol="0" anchor="ctr" wrap="square" lIns="73152" rIns="73152"/>
+          <a:lstStyle/>
+          <a:p>
+            <a:pPr algn="l"/>
+            <a:r>
+              <a:rPr sz="1400" b="0">
+                <a:solidFill>
+                  <a:srgbClr val="3A2A24"/>
+                </a:solidFill>
+                <a:latin typeface="Yu Gothic"/>
+              </a:rPr>
+              <a:t>仮説検証・伝わる喜び</a:t>
+            </a:r>
+          </a:p>
+        </p:txBody>
+      </p:sp>
+      <p:sp>
+        <p:nvSpPr>
+          <p:cNvPr id="26" name="Rectangle 25"/>
+          <p:cNvSpPr/>
+          <p:nvPr/>
+        </p:nvSpPr>
+        <p:spPr>
+          <a:xfrm>
+            <a:off x="365760" y="5285232"/>
+            <a:ext cx="2148840" cy="384048"/>
+          </a:xfrm>
+          <a:prstGeom prst="rect">
+            <a:avLst/>
+          </a:prstGeom>
+          <a:solidFill>
+            <a:srgbClr val="FFE0D0"/>
+          </a:solidFill>
+          <a:ln>
+            <a:noFill/>
+          </a:ln>
+          <a:effectLst/>
+        </p:spPr>
+        <p:txBody>
+          <a:bodyPr rtlCol="0" anchor="ctr" wrap="square" lIns="73152" rIns="73152"/>
+          <a:lstStyle/>
+          <a:p>
+            <a:pPr algn="l"/>
+            <a:r>
+              <a:rPr sz="1400" b="1">
+                <a:solidFill>
+                  <a:srgbClr val="3A2A24"/>
+                </a:solidFill>
+                <a:latin typeface="Yu Gothic"/>
+              </a:rPr>
+              <a:t>響く場面</a:t>
+            </a:r>
+          </a:p>
+        </p:txBody>
+      </p:sp>
+      <p:sp>
+        <p:nvSpPr>
+          <p:cNvPr id="27" name="Rectangle 26"/>
+          <p:cNvSpPr/>
+          <p:nvPr/>
+        </p:nvSpPr>
+        <p:spPr>
+          <a:xfrm>
+            <a:off x="2560320" y="5285232"/>
+            <a:ext cx="4526280" cy="384048"/>
+          </a:xfrm>
+          <a:prstGeom prst="rect">
+            <a:avLst/>
+          </a:prstGeom>
+          <a:solidFill>
+            <a:srgbClr val="FFFFFF"/>
+          </a:solidFill>
+          <a:ln>
+            <a:noFill/>
+          </a:ln>
+          <a:effectLst/>
+        </p:spPr>
+        <p:txBody>
+          <a:bodyPr rtlCol="0" anchor="ctr" wrap="square" lIns="73152" rIns="73152"/>
+          <a:lstStyle/>
+          <a:p>
+            <a:pPr algn="l"/>
+            <a:r>
+              <a:rPr sz="1400" b="0">
+                <a:solidFill>
+                  <a:srgbClr val="3A2A24"/>
+                </a:solidFill>
+                <a:latin typeface="Yu Gothic"/>
+              </a:rPr>
+              <a:t>工場見学</a:t>
+            </a:r>
+          </a:p>
+        </p:txBody>
+      </p:sp>
+      <p:sp>
+        <p:nvSpPr>
+          <p:cNvPr id="28" name="Rectangle 27"/>
+          <p:cNvSpPr/>
+          <p:nvPr/>
+        </p:nvSpPr>
+        <p:spPr>
+          <a:xfrm>
+            <a:off x="7132320" y="5285232"/>
+            <a:ext cx="4617720" cy="384048"/>
+          </a:xfrm>
+          <a:prstGeom prst="rect">
+            <a:avLst/>
+          </a:prstGeom>
+          <a:solidFill>
+            <a:srgbClr val="FFFFFF"/>
+          </a:solidFill>
+          <a:ln>
+            <a:noFill/>
+          </a:ln>
+          <a:effectLst/>
+        </p:spPr>
+        <p:txBody>
+          <a:bodyPr rtlCol="0" anchor="ctr" wrap="square" lIns="73152" rIns="73152"/>
+          <a:lstStyle/>
+          <a:p>
+            <a:pPr algn="l"/>
+            <a:r>
+              <a:rPr sz="1400" b="0">
+                <a:solidFill>
+                  <a:srgbClr val="3A2A24"/>
+                </a:solidFill>
+                <a:latin typeface="Yu Gothic"/>
+              </a:rPr>
+              <a:t>循環ワーク・対話</a:t>
+            </a:r>
+          </a:p>
+        </p:txBody>
+      </p:sp>
+      <p:sp>
+        <p:nvSpPr>
+          <p:cNvPr id="29" name="Rectangle 28"/>
+          <p:cNvSpPr/>
+          <p:nvPr/>
+        </p:nvSpPr>
+        <p:spPr>
+          <a:xfrm>
+            <a:off x="365760" y="5705856"/>
+            <a:ext cx="2148840" cy="384048"/>
+          </a:xfrm>
+          <a:prstGeom prst="rect">
+            <a:avLst/>
+          </a:prstGeom>
+          <a:solidFill>
+            <a:srgbClr val="FFE0D0"/>
+          </a:solidFill>
+          <a:ln>
+            <a:noFill/>
+          </a:ln>
+          <a:effectLst/>
+        </p:spPr>
+        <p:txBody>
+          <a:bodyPr rtlCol="0" anchor="ctr" wrap="square" lIns="73152" rIns="73152"/>
+          <a:lstStyle/>
+          <a:p>
+            <a:pPr algn="l"/>
+            <a:r>
+              <a:rPr sz="1400" b="1">
+                <a:solidFill>
+                  <a:srgbClr val="3A2A24"/>
+                </a:solidFill>
+                <a:latin typeface="Yu Gothic"/>
+              </a:rPr>
+              <a:t>キャリア観</a:t>
+            </a:r>
+          </a:p>
+        </p:txBody>
+      </p:sp>
+      <p:sp>
+        <p:nvSpPr>
+          <p:cNvPr id="30" name="Rectangle 29"/>
+          <p:cNvSpPr/>
+          <p:nvPr/>
+        </p:nvSpPr>
+        <p:spPr>
+          <a:xfrm>
+            <a:off x="2560320" y="5705856"/>
+            <a:ext cx="4526280" cy="384048"/>
+          </a:xfrm>
+          <a:prstGeom prst="rect">
+            <a:avLst/>
+          </a:prstGeom>
+          <a:solidFill>
+            <a:srgbClr val="FFFFFF"/>
+          </a:solidFill>
+          <a:ln>
+            <a:noFill/>
+          </a:ln>
+          <a:effectLst/>
+        </p:spPr>
+        <p:txBody>
+          <a:bodyPr rtlCol="0" anchor="ctr" wrap="square" lIns="73152" rIns="73152"/>
+          <a:lstStyle/>
+          <a:p>
+            <a:pPr algn="l"/>
+            <a:r>
+              <a:rPr sz="1400" b="0">
+                <a:solidFill>
+                  <a:srgbClr val="3A2A24"/>
+                </a:solidFill>
+                <a:latin typeface="Yu Gothic"/>
+              </a:rPr>
+              <a:t>一つを積み重ねる</a:t>
+            </a:r>
+          </a:p>
+        </p:txBody>
+      </p:sp>
+      <p:sp>
+        <p:nvSpPr>
+          <p:cNvPr id="31" name="Rectangle 30"/>
+          <p:cNvSpPr/>
+          <p:nvPr/>
+        </p:nvSpPr>
+        <p:spPr>
+          <a:xfrm>
+            <a:off x="7132320" y="5705856"/>
+            <a:ext cx="4617720" cy="384048"/>
+          </a:xfrm>
+          <a:prstGeom prst="rect">
+            <a:avLst/>
+          </a:prstGeom>
+          <a:solidFill>
+            <a:srgbClr val="FFFFFF"/>
+          </a:solidFill>
+          <a:ln>
+            <a:noFill/>
+          </a:ln>
+          <a:effectLst/>
+        </p:spPr>
+        <p:txBody>
+          <a:bodyPr rtlCol="0" anchor="ctr" wrap="square" lIns="73152" rIns="73152"/>
+          <a:lstStyle/>
+          <a:p>
+            <a:pPr algn="l"/>
+            <a:r>
+              <a:rPr sz="1400" b="0">
+                <a:solidFill>
+                  <a:srgbClr val="3A2A24"/>
+                </a:solidFill>
+                <a:latin typeface="Yu Gothic"/>
+              </a:rPr>
+              <a:t>役に立つ／人と繋がる</a:t>
             </a:r>
           </a:p>
         </p:txBody>
@@ -5229,7 +5449,7 @@
                 </a:solidFill>
                 <a:latin typeface="Yu Gothic"/>
               </a:rPr>
-              <a:t>ターゲット像</a:t>
+              <a:t>現状データ</a:t>
             </a:r>
           </a:p>
         </p:txBody>
@@ -5264,7 +5484,7 @@
                 </a:solidFill>
                 <a:latin typeface="Yu Gothic"/>
               </a:rPr>
-              <a:t>ぐるぐるターゲット像：3タイプ</a:t>
+              <a:t>清峰データで見えた、ぐるぐるの現在地</a:t>
             </a:r>
           </a:p>
         </p:txBody>
@@ -5299,7 +5519,7 @@
                 </a:solidFill>
                 <a:latin typeface="Yu Gothic"/>
               </a:rPr>
-              <a:t>出典：具体的なペルソナ像（visionsユーザー）/ 既存ペルソナ①〜③。タイプ分けは当方の整理（案）</a:t>
+              <a:t>出典：sch_0202 / 学生管理シート（27）/ 年間目標・実数 / visions学生リストアップ / 具体的なペルソナ像</a:t>
             </a:r>
           </a:p>
         </p:txBody>
@@ -5312,8 +5532,8 @@
         </p:nvSpPr>
         <p:spPr>
           <a:xfrm>
-            <a:off x="365760" y="777240"/>
-            <a:ext cx="3749039" cy="4343400"/>
+            <a:off x="365760" y="822960"/>
+            <a:ext cx="11430000" cy="914400"/>
           </a:xfrm>
           <a:prstGeom prst="rect">
             <a:avLst/>
@@ -5336,20 +5556,137 @@
       </p:sp>
       <p:sp>
         <p:nvSpPr>
-          <p:cNvPr id="7" name="Rectangle 6"/>
+          <p:cNvPr id="7" name="TextBox 6"/>
+          <p:cNvSpPr txBox="1"/>
+          <p:nvPr/>
+        </p:nvSpPr>
+        <p:spPr>
+          <a:xfrm>
+            <a:off x="411480" y="841248"/>
+            <a:ext cx="3017520" cy="530352"/>
+          </a:xfrm>
+          <a:prstGeom prst="rect">
+            <a:avLst/>
+          </a:prstGeom>
+          <a:noFill/>
+        </p:spPr>
+        <p:txBody>
+          <a:bodyPr wrap="square" anchor="ctr" lIns="73152" rIns="73152">
+            <a:spAutoFit/>
+          </a:bodyPr>
+          <a:lstStyle/>
+          <a:p>
+            <a:pPr algn="ctr"/>
+            <a:r>
+              <a:rPr sz="2600" b="1">
+                <a:solidFill>
+                  <a:srgbClr val="8C4A36"/>
+                </a:solidFill>
+                <a:latin typeface="Yu Gothic"/>
+              </a:rPr>
+              <a:t>0名</a:t>
+            </a:r>
+          </a:p>
+        </p:txBody>
+      </p:sp>
+      <p:sp>
+        <p:nvSpPr>
+          <p:cNvPr id="8" name="TextBox 7"/>
+          <p:cNvSpPr txBox="1"/>
+          <p:nvPr/>
+        </p:nvSpPr>
+        <p:spPr>
+          <a:xfrm>
+            <a:off x="411480" y="1371600"/>
+            <a:ext cx="3017520" cy="320040"/>
+          </a:xfrm>
+          <a:prstGeom prst="rect">
+            <a:avLst/>
+          </a:prstGeom>
+          <a:noFill/>
+        </p:spPr>
+        <p:txBody>
+          <a:bodyPr wrap="square" anchor="t" lIns="73152" rIns="73152">
+            <a:spAutoFit/>
+          </a:bodyPr>
+          <a:lstStyle/>
+          <a:p>
+            <a:pPr algn="ctr"/>
+            <a:r>
+              <a:rPr sz="1100" b="0">
+                <a:solidFill>
+                  <a:srgbClr val="7A6E66"/>
+                </a:solidFill>
+                <a:latin typeface="Yu Gothic"/>
+              </a:rPr>
+              <a:t>28卒のぐるぐる接点</a:t>
+            </a:r>
+          </a:p>
+        </p:txBody>
+      </p:sp>
+      <p:sp>
+        <p:nvSpPr>
+          <p:cNvPr id="9" name="TextBox 8"/>
+          <p:cNvSpPr txBox="1"/>
+          <p:nvPr/>
+        </p:nvSpPr>
+        <p:spPr>
+          <a:xfrm>
+            <a:off x="3657600" y="841248"/>
+            <a:ext cx="8046720" cy="877824"/>
+          </a:xfrm>
+          <a:prstGeom prst="rect">
+            <a:avLst/>
+          </a:prstGeom>
+          <a:noFill/>
+        </p:spPr>
+        <p:txBody>
+          <a:bodyPr wrap="square" anchor="ctr" lIns="73152" rIns="73152">
+            <a:spAutoFit/>
+          </a:bodyPr>
+          <a:lstStyle/>
+          <a:p>
+            <a:pPr algn="l"/>
+            <a:r>
+              <a:rPr sz="1600" b="0">
+                <a:solidFill>
+                  <a:srgbClr val="3A2A24"/>
+                </a:solidFill>
+                <a:latin typeface="Yu Gothic"/>
+              </a:rPr>
+              <a:t>リストアップ表は空欄</a:t>
+            </a:r>
+          </a:p>
+          <a:p>
+            <a:pPr algn="l"/>
+            <a:r>
+              <a:rPr sz="1600" b="0">
+                <a:solidFill>
+                  <a:srgbClr val="3A2A24"/>
+                </a:solidFill>
+                <a:latin typeface="Yu Gothic"/>
+              </a:rPr>
+              <a:t>目標：10月30名 → 12月50名</a:t>
+            </a:r>
+          </a:p>
+        </p:txBody>
+      </p:sp>
+      <p:sp>
+        <p:nvSpPr>
+          <p:cNvPr id="10" name="Rectangle 9"/>
           <p:cNvSpPr/>
           <p:nvPr/>
         </p:nvSpPr>
         <p:spPr>
           <a:xfrm>
-            <a:off x="365760" y="777240"/>
-            <a:ext cx="3749039" cy="548640"/>
-          </a:xfrm>
-          <a:prstGeom prst="rect">
-            <a:avLst/>
-          </a:prstGeom>
-          <a:solidFill>
-            <a:srgbClr val="F06142"/>
+            <a:off x="365760" y="1828800"/>
+            <a:ext cx="11430000" cy="914400"/>
+          </a:xfrm>
+          <a:prstGeom prst="rect">
+            <a:avLst/>
+          </a:prstGeom>
+          <a:solidFill>
+            <a:srgbClr val="FFFFFF"/>
           </a:solidFill>
           <a:ln>
             <a:noFill/>
@@ -5357,32 +5694,58 @@
           <a:effectLst/>
         </p:spPr>
         <p:txBody>
-          <a:bodyPr rtlCol="0" anchor="ctr" wrap="square" lIns="73152" rIns="73152"/>
-          <a:lstStyle/>
-          <a:p>
-            <a:pPr algn="l"/>
-            <a:r>
-              <a:rPr sz="1600" b="1">
-                <a:solidFill>
-                  <a:srgbClr val="FFFFFF"/>
-                </a:solidFill>
-                <a:latin typeface="Yu Gothic"/>
-              </a:rPr>
-              <a:t>A　資源めぐり探究型</a:t>
-            </a:r>
-          </a:p>
-        </p:txBody>
-      </p:sp>
-      <p:sp>
-        <p:nvSpPr>
-          <p:cNvPr id="8" name="TextBox 7"/>
+          <a:bodyPr rtlCol="0" anchor="ctr"/>
+          <a:lstStyle/>
+          <a:p>
+            <a:pPr algn="ctr"/>
+          </a:p>
+        </p:txBody>
+      </p:sp>
+      <p:sp>
+        <p:nvSpPr>
+          <p:cNvPr id="11" name="TextBox 10"/>
           <p:cNvSpPr txBox="1"/>
           <p:nvPr/>
         </p:nvSpPr>
         <p:spPr>
           <a:xfrm>
-            <a:off x="365760" y="1417320"/>
-            <a:ext cx="3749039" cy="365760"/>
+            <a:off x="411480" y="1847088"/>
+            <a:ext cx="3017520" cy="530352"/>
+          </a:xfrm>
+          <a:prstGeom prst="rect">
+            <a:avLst/>
+          </a:prstGeom>
+          <a:noFill/>
+        </p:spPr>
+        <p:txBody>
+          <a:bodyPr wrap="square" anchor="ctr" lIns="73152" rIns="73152">
+            <a:spAutoFit/>
+          </a:bodyPr>
+          <a:lstStyle/>
+          <a:p>
+            <a:pPr algn="ctr"/>
+            <a:r>
+              <a:rPr sz="2600" b="1">
+                <a:solidFill>
+                  <a:srgbClr val="8C4A36"/>
+                </a:solidFill>
+                <a:latin typeface="Yu Gothic"/>
+              </a:rPr>
+              <a:t>1 / 5名</a:t>
+            </a:r>
+          </a:p>
+        </p:txBody>
+      </p:sp>
+      <p:sp>
+        <p:nvSpPr>
+          <p:cNvPr id="12" name="TextBox 11"/>
+          <p:cNvSpPr txBox="1"/>
+          <p:nvPr/>
+        </p:nvSpPr>
+        <p:spPr>
+          <a:xfrm>
+            <a:off x="411480" y="2377440"/>
+            <a:ext cx="3017520" cy="320040"/>
           </a:xfrm>
           <a:prstGeom prst="rect">
             <a:avLst/>
@@ -5395,29 +5758,29 @@
           </a:bodyPr>
           <a:lstStyle/>
           <a:p>
-            <a:pPr algn="l"/>
-            <a:r>
-              <a:rPr sz="1200" b="1">
-                <a:solidFill>
-                  <a:srgbClr val="F06142"/>
-                </a:solidFill>
-                <a:latin typeface="Yu Gothic"/>
-              </a:rPr>
-              <a:t>主ターゲット</a:t>
-            </a:r>
-          </a:p>
-        </p:txBody>
-      </p:sp>
-      <p:sp>
-        <p:nvSpPr>
-          <p:cNvPr id="9" name="TextBox 8"/>
+            <a:pPr algn="ctr"/>
+            <a:r>
+              <a:rPr sz="1100" b="0">
+                <a:solidFill>
+                  <a:srgbClr val="7A6E66"/>
+                </a:solidFill>
+                <a:latin typeface="Yu Gothic"/>
+              </a:rPr>
+              <a:t>27卒の理系で説明会へ進んだ人</a:t>
+            </a:r>
+          </a:p>
+        </p:txBody>
+      </p:sp>
+      <p:sp>
+        <p:nvSpPr>
+          <p:cNvPr id="13" name="TextBox 12"/>
           <p:cNvSpPr txBox="1"/>
           <p:nvPr/>
         </p:nvSpPr>
         <p:spPr>
           <a:xfrm>
-            <a:off x="365760" y="1783080"/>
-            <a:ext cx="3749039" cy="457200"/>
+            <a:off x="3657600" y="1847088"/>
+            <a:ext cx="8046720" cy="877824"/>
           </a:xfrm>
           <a:prstGeom prst="rect">
             <a:avLst/>
@@ -5425,140 +5788,46 @@
           <a:noFill/>
         </p:spPr>
         <p:txBody>
-          <a:bodyPr wrap="square" anchor="t" lIns="73152" rIns="73152">
+          <a:bodyPr wrap="square" anchor="ctr" lIns="73152" rIns="73152">
             <a:spAutoFit/>
           </a:bodyPr>
           <a:lstStyle/>
           <a:p>
             <a:pPr algn="l"/>
             <a:r>
-              <a:rPr sz="1600" b="1">
-                <a:solidFill>
-                  <a:srgbClr val="3A2A24"/>
-                </a:solidFill>
-                <a:latin typeface="Yu Gothic"/>
-              </a:rPr>
-              <a:t>環境資源・物質循環・地球科学</a:t>
-            </a:r>
-          </a:p>
-        </p:txBody>
-      </p:sp>
-      <p:sp>
-        <p:nvSpPr>
-          <p:cNvPr id="10" name="TextBox 9"/>
-          <p:cNvSpPr txBox="1"/>
-          <p:nvPr/>
-        </p:nvSpPr>
-        <p:spPr>
-          <a:xfrm>
-            <a:off x="365760" y="2286000"/>
-            <a:ext cx="3749039" cy="365760"/>
-          </a:xfrm>
-          <a:prstGeom prst="rect">
-            <a:avLst/>
-          </a:prstGeom>
-          <a:noFill/>
-        </p:spPr>
-        <p:txBody>
-          <a:bodyPr wrap="square" anchor="t" lIns="73152" rIns="73152">
-            <a:spAutoFit/>
-          </a:bodyPr>
-          <a:lstStyle/>
+              <a:rPr sz="1600" b="0">
+                <a:solidFill>
+                  <a:srgbClr val="3A2A24"/>
+                </a:solidFill>
+                <a:latin typeface="Yu Gothic"/>
+              </a:rPr>
+              <a:t>筑波大 地球学類のみ</a:t>
+            </a:r>
+          </a:p>
           <a:p>
             <a:pPr algn="l"/>
             <a:r>
-              <a:rPr sz="1100" b="0">
-                <a:solidFill>
-                  <a:srgbClr val="7A6E66"/>
-                </a:solidFill>
-                <a:latin typeface="Yu Gothic"/>
-              </a:rPr>
-              <a:t>根拠：visions同志2名・筑波の承諾実績</a:t>
-            </a:r>
-          </a:p>
-        </p:txBody>
-      </p:sp>
-      <p:sp>
-        <p:nvSpPr>
-          <p:cNvPr id="11" name="TextBox 10"/>
-          <p:cNvSpPr txBox="1"/>
+              <a:rPr sz="1600" b="0">
+                <a:solidFill>
+                  <a:srgbClr val="3A2A24"/>
+                </a:solidFill>
+                <a:latin typeface="Yu Gothic"/>
+              </a:rPr>
+              <a:t>（のち内定承諾）</a:t>
+            </a:r>
+          </a:p>
+        </p:txBody>
+      </p:sp>
+      <p:sp>
+        <p:nvSpPr>
+          <p:cNvPr id="14" name="Rectangle 13"/>
+          <p:cNvSpPr/>
           <p:nvPr/>
         </p:nvSpPr>
         <p:spPr>
           <a:xfrm>
             <a:off x="365760" y="2834640"/>
-            <a:ext cx="3749039" cy="2194560"/>
-          </a:xfrm>
-          <a:prstGeom prst="rect">
-            <a:avLst/>
-          </a:prstGeom>
-          <a:noFill/>
-        </p:spPr>
-        <p:txBody>
-          <a:bodyPr wrap="square" anchor="t" lIns="73152" rIns="73152">
-            <a:spAutoFit/>
-          </a:bodyPr>
-          <a:lstStyle/>
-          <a:p>
-            <a:pPr algn="l">
-              <a:spcBef>
-                <a:spcPts val="1000"/>
-              </a:spcBef>
-            </a:pPr>
-            <a:r>
-              <a:rPr sz="1600" b="0">
-                <a:solidFill>
-                  <a:srgbClr val="3A2A24"/>
-                </a:solidFill>
-                <a:latin typeface="Yu Gothic"/>
-              </a:rPr>
-              <a:t>・循環・ライフサイクルに関心</a:t>
-            </a:r>
-          </a:p>
-          <a:p>
-            <a:pPr algn="l">
-              <a:spcBef>
-                <a:spcPts val="1000"/>
-              </a:spcBef>
-            </a:pPr>
-            <a:r>
-              <a:rPr sz="1600" b="0">
-                <a:solidFill>
-                  <a:srgbClr val="3A2A24"/>
-                </a:solidFill>
-                <a:latin typeface="Yu Gothic"/>
-              </a:rPr>
-              <a:t>・銅の有限性を自分ごとに</a:t>
-            </a:r>
-          </a:p>
-          <a:p>
-            <a:pPr algn="l">
-              <a:spcBef>
-                <a:spcPts val="1000"/>
-              </a:spcBef>
-            </a:pPr>
-            <a:r>
-              <a:rPr sz="1600" b="0">
-                <a:solidFill>
-                  <a:srgbClr val="3A2A24"/>
-                </a:solidFill>
-                <a:latin typeface="Yu Gothic"/>
-              </a:rPr>
-              <a:t>・価値循環ワークで動く</a:t>
-            </a:r>
-          </a:p>
-        </p:txBody>
-      </p:sp>
-      <p:sp>
-        <p:nvSpPr>
-          <p:cNvPr id="12" name="Rectangle 11"/>
-          <p:cNvSpPr/>
-          <p:nvPr/>
-        </p:nvSpPr>
-        <p:spPr>
-          <a:xfrm>
-            <a:off x="4206240" y="777240"/>
-            <a:ext cx="3749039" cy="4343400"/>
+            <a:ext cx="11430000" cy="914400"/>
           </a:xfrm>
           <a:prstGeom prst="rect">
             <a:avLst/>
@@ -5581,20 +5850,137 @@
       </p:sp>
       <p:sp>
         <p:nvSpPr>
-          <p:cNvPr id="13" name="Rectangle 12"/>
+          <p:cNvPr id="15" name="TextBox 14"/>
+          <p:cNvSpPr txBox="1"/>
+          <p:nvPr/>
+        </p:nvSpPr>
+        <p:spPr>
+          <a:xfrm>
+            <a:off x="411480" y="2852928"/>
+            <a:ext cx="3017520" cy="530352"/>
+          </a:xfrm>
+          <a:prstGeom prst="rect">
+            <a:avLst/>
+          </a:prstGeom>
+          <a:noFill/>
+        </p:spPr>
+        <p:txBody>
+          <a:bodyPr wrap="square" anchor="ctr" lIns="73152" rIns="73152">
+            <a:spAutoFit/>
+          </a:bodyPr>
+          <a:lstStyle/>
+          <a:p>
+            <a:pPr algn="ctr"/>
+            <a:r>
+              <a:rPr sz="2600" b="1">
+                <a:solidFill>
+                  <a:srgbClr val="8C4A36"/>
+                </a:solidFill>
+                <a:latin typeface="Yu Gothic"/>
+              </a:rPr>
+              <a:t>理念で承諾</a:t>
+            </a:r>
+          </a:p>
+        </p:txBody>
+      </p:sp>
+      <p:sp>
+        <p:nvSpPr>
+          <p:cNvPr id="16" name="TextBox 15"/>
+          <p:cNvSpPr txBox="1"/>
+          <p:nvPr/>
+        </p:nvSpPr>
+        <p:spPr>
+          <a:xfrm>
+            <a:off x="411480" y="3383280"/>
+            <a:ext cx="3017520" cy="320040"/>
+          </a:xfrm>
+          <a:prstGeom prst="rect">
+            <a:avLst/>
+          </a:prstGeom>
+          <a:noFill/>
+        </p:spPr>
+        <p:txBody>
+          <a:bodyPr wrap="square" anchor="t" lIns="73152" rIns="73152">
+            <a:spAutoFit/>
+          </a:bodyPr>
+          <a:lstStyle/>
+          <a:p>
+            <a:pPr algn="ctr"/>
+            <a:r>
+              <a:rPr sz="1100" b="0">
+                <a:solidFill>
+                  <a:srgbClr val="7A6E66"/>
+                </a:solidFill>
+                <a:latin typeface="Yu Gothic"/>
+              </a:rPr>
+              <a:t>成功事例</a:t>
+            </a:r>
+          </a:p>
+        </p:txBody>
+      </p:sp>
+      <p:sp>
+        <p:nvSpPr>
+          <p:cNvPr id="17" name="TextBox 16"/>
+          <p:cNvSpPr txBox="1"/>
+          <p:nvPr/>
+        </p:nvSpPr>
+        <p:spPr>
+          <a:xfrm>
+            <a:off x="3657600" y="2852928"/>
+            <a:ext cx="8046720" cy="877824"/>
+          </a:xfrm>
+          <a:prstGeom prst="rect">
+            <a:avLst/>
+          </a:prstGeom>
+          <a:noFill/>
+        </p:spPr>
+        <p:txBody>
+          <a:bodyPr wrap="square" anchor="ctr" lIns="73152" rIns="73152">
+            <a:spAutoFit/>
+          </a:bodyPr>
+          <a:lstStyle/>
+          <a:p>
+            <a:pPr algn="l"/>
+            <a:r>
+              <a:rPr sz="1600" b="0">
+                <a:solidFill>
+                  <a:srgbClr val="3A2A24"/>
+                </a:solidFill>
+                <a:latin typeface="Yu Gothic"/>
+              </a:rPr>
+              <a:t>「地球資源を輝かせていく」に共感</a:t>
+            </a:r>
+          </a:p>
+          <a:p>
+            <a:pPr algn="l"/>
+            <a:r>
+              <a:rPr sz="1600" b="0">
+                <a:solidFill>
+                  <a:srgbClr val="3A2A24"/>
+                </a:solidFill>
+                <a:latin typeface="Yu Gothic"/>
+              </a:rPr>
+              <a:t>ISに参加して承諾</a:t>
+            </a:r>
+          </a:p>
+        </p:txBody>
+      </p:sp>
+      <p:sp>
+        <p:nvSpPr>
+          <p:cNvPr id="18" name="Rectangle 17"/>
           <p:cNvSpPr/>
           <p:nvPr/>
         </p:nvSpPr>
         <p:spPr>
           <a:xfrm>
-            <a:off x="4206240" y="777240"/>
-            <a:ext cx="3749039" cy="548640"/>
-          </a:xfrm>
-          <a:prstGeom prst="rect">
-            <a:avLst/>
-          </a:prstGeom>
-          <a:solidFill>
-            <a:srgbClr val="8C4A36"/>
+            <a:off x="365760" y="3840480"/>
+            <a:ext cx="11430000" cy="914400"/>
+          </a:xfrm>
+          <a:prstGeom prst="rect">
+            <a:avLst/>
+          </a:prstGeom>
+          <a:solidFill>
+            <a:srgbClr val="FFFFFF"/>
           </a:solidFill>
           <a:ln>
             <a:noFill/>
@@ -5602,32 +5988,58 @@
           <a:effectLst/>
         </p:spPr>
         <p:txBody>
-          <a:bodyPr rtlCol="0" anchor="ctr" wrap="square" lIns="73152" rIns="73152"/>
-          <a:lstStyle/>
-          <a:p>
-            <a:pPr algn="l"/>
-            <a:r>
-              <a:rPr sz="1600" b="1">
-                <a:solidFill>
-                  <a:srgbClr val="FFFFFF"/>
-                </a:solidFill>
-                <a:latin typeface="Yu Gothic"/>
-              </a:rPr>
-              <a:t>B　問い続ける・発信型</a:t>
-            </a:r>
-          </a:p>
-        </p:txBody>
-      </p:sp>
-      <p:sp>
-        <p:nvSpPr>
-          <p:cNvPr id="14" name="TextBox 13"/>
+          <a:bodyPr rtlCol="0" anchor="ctr"/>
+          <a:lstStyle/>
+          <a:p>
+            <a:pPr algn="ctr"/>
+          </a:p>
+        </p:txBody>
+      </p:sp>
+      <p:sp>
+        <p:nvSpPr>
+          <p:cNvPr id="19" name="TextBox 18"/>
           <p:cNvSpPr txBox="1"/>
           <p:nvPr/>
         </p:nvSpPr>
         <p:spPr>
           <a:xfrm>
-            <a:off x="4206240" y="1417320"/>
-            <a:ext cx="3749039" cy="365760"/>
+            <a:off x="411480" y="3858768"/>
+            <a:ext cx="3017520" cy="530352"/>
+          </a:xfrm>
+          <a:prstGeom prst="rect">
+            <a:avLst/>
+          </a:prstGeom>
+          <a:noFill/>
+        </p:spPr>
+        <p:txBody>
+          <a:bodyPr wrap="square" anchor="ctr" lIns="73152" rIns="73152">
+            <a:spAutoFit/>
+          </a:bodyPr>
+          <a:lstStyle/>
+          <a:p>
+            <a:pPr algn="ctr"/>
+            <a:r>
+              <a:rPr sz="2600" b="1">
+                <a:solidFill>
+                  <a:srgbClr val="8C4A36"/>
+                </a:solidFill>
+                <a:latin typeface="Yu Gothic"/>
+              </a:rPr>
+              <a:t>8 / 9名</a:t>
+            </a:r>
+          </a:p>
+        </p:txBody>
+      </p:sp>
+      <p:sp>
+        <p:nvSpPr>
+          <p:cNvPr id="20" name="TextBox 19"/>
+          <p:cNvSpPr txBox="1"/>
+          <p:nvPr/>
+        </p:nvSpPr>
+        <p:spPr>
+          <a:xfrm>
+            <a:off x="411480" y="4389120"/>
+            <a:ext cx="3017520" cy="320040"/>
           </a:xfrm>
           <a:prstGeom prst="rect">
             <a:avLst/>
@@ -5640,29 +6052,29 @@
           </a:bodyPr>
           <a:lstStyle/>
           <a:p>
-            <a:pPr algn="l"/>
-            <a:r>
-              <a:rPr sz="1200" b="1">
-                <a:solidFill>
-                  <a:srgbClr val="8C4A36"/>
-                </a:solidFill>
-                <a:latin typeface="Yu Gothic"/>
-              </a:rPr>
-              <a:t>既存ペルソナ②</a:t>
-            </a:r>
-          </a:p>
-        </p:txBody>
-      </p:sp>
-      <p:sp>
-        <p:nvSpPr>
-          <p:cNvPr id="15" name="TextBox 14"/>
+            <a:pPr algn="ctr"/>
+            <a:r>
+              <a:rPr sz="1100" b="0">
+                <a:solidFill>
+                  <a:srgbClr val="7A6E66"/>
+                </a:solidFill>
+                <a:latin typeface="Yu Gothic"/>
+              </a:rPr>
+              <a:t>リスト学生の関心テーマ</a:t>
+            </a:r>
+          </a:p>
+        </p:txBody>
+      </p:sp>
+      <p:sp>
+        <p:nvSpPr>
+          <p:cNvPr id="21" name="TextBox 20"/>
           <p:cNvSpPr txBox="1"/>
           <p:nvPr/>
         </p:nvSpPr>
         <p:spPr>
           <a:xfrm>
-            <a:off x="4206240" y="1783080"/>
-            <a:ext cx="3749039" cy="457200"/>
+            <a:off x="3657600" y="3858768"/>
+            <a:ext cx="8046720" cy="877824"/>
           </a:xfrm>
           <a:prstGeom prst="rect">
             <a:avLst/>
@@ -5670,146 +6082,52 @@
           <a:noFill/>
         </p:spPr>
         <p:txBody>
-          <a:bodyPr wrap="square" anchor="t" lIns="73152" rIns="73152">
+          <a:bodyPr wrap="square" anchor="ctr" lIns="73152" rIns="73152">
             <a:spAutoFit/>
           </a:bodyPr>
           <a:lstStyle/>
           <a:p>
             <a:pPr algn="l"/>
             <a:r>
-              <a:rPr sz="1600" b="1">
-                <a:solidFill>
-                  <a:srgbClr val="3A2A24"/>
-                </a:solidFill>
-                <a:latin typeface="Yu Gothic"/>
-              </a:rPr>
-              <a:t>環境学・総合科学・農学</a:t>
-            </a:r>
-          </a:p>
-        </p:txBody>
-      </p:sp>
-      <p:sp>
-        <p:nvSpPr>
-          <p:cNvPr id="16" name="TextBox 15"/>
-          <p:cNvSpPr txBox="1"/>
-          <p:nvPr/>
-        </p:nvSpPr>
-        <p:spPr>
-          <a:xfrm>
-            <a:off x="4206240" y="2286000"/>
-            <a:ext cx="3749039" cy="365760"/>
-          </a:xfrm>
-          <a:prstGeom prst="rect">
-            <a:avLst/>
-          </a:prstGeom>
-          <a:noFill/>
-        </p:spPr>
-        <p:txBody>
-          <a:bodyPr wrap="square" anchor="t" lIns="73152" rIns="73152">
-            <a:spAutoFit/>
-          </a:bodyPr>
-          <a:lstStyle/>
+              <a:rPr sz="1600" b="0">
+                <a:solidFill>
+                  <a:srgbClr val="3A2A24"/>
+                </a:solidFill>
+                <a:latin typeface="Yu Gothic"/>
+              </a:rPr>
+              <a:t>自然と共生・循環型社会</a:t>
+            </a:r>
+          </a:p>
           <a:p>
             <a:pPr algn="l"/>
             <a:r>
-              <a:rPr sz="1100" b="0">
-                <a:solidFill>
-                  <a:srgbClr val="7A6E66"/>
-                </a:solidFill>
-                <a:latin typeface="Yu Gothic"/>
-              </a:rPr>
-              <a:t>根拠：公立鳥取環境大ペルソナ</a:t>
-            </a:r>
-          </a:p>
-        </p:txBody>
-      </p:sp>
-      <p:sp>
-        <p:nvSpPr>
-          <p:cNvPr id="17" name="TextBox 16"/>
-          <p:cNvSpPr txBox="1"/>
-          <p:nvPr/>
-        </p:nvSpPr>
-        <p:spPr>
-          <a:xfrm>
-            <a:off x="4206240" y="2834640"/>
-            <a:ext cx="3749039" cy="2194560"/>
-          </a:xfrm>
-          <a:prstGeom prst="rect">
-            <a:avLst/>
-          </a:prstGeom>
-          <a:noFill/>
-        </p:spPr>
-        <p:txBody>
-          <a:bodyPr wrap="square" anchor="t" lIns="73152" rIns="73152">
-            <a:spAutoFit/>
-          </a:bodyPr>
-          <a:lstStyle/>
-          <a:p>
-            <a:pPr algn="l">
-              <a:spcBef>
-                <a:spcPts val="1000"/>
-              </a:spcBef>
-            </a:pPr>
-            <a:r>
               <a:rPr sz="1600" b="0">
                 <a:solidFill>
                   <a:srgbClr val="3A2A24"/>
                 </a:solidFill>
                 <a:latin typeface="Yu Gothic"/>
               </a:rPr>
-              <a:t>・自然に向き合い問い続ける</a:t>
-            </a:r>
-          </a:p>
-          <a:p>
-            <a:pPr algn="l">
-              <a:spcBef>
-                <a:spcPts val="1000"/>
-              </a:spcBef>
-            </a:pPr>
-            <a:r>
-              <a:rPr sz="1600" b="0">
-                <a:solidFill>
-                  <a:srgbClr val="3A2A24"/>
-                </a:solidFill>
-                <a:latin typeface="Yu Gothic"/>
-              </a:rPr>
-              <a:t>・仮説検証・説明が好き</a:t>
-            </a:r>
-          </a:p>
-          <a:p>
-            <a:pPr algn="l">
-              <a:spcBef>
-                <a:spcPts val="1000"/>
-              </a:spcBef>
-            </a:pPr>
-            <a:r>
-              <a:rPr sz="1600" b="0">
-                <a:solidFill>
-                  <a:srgbClr val="3A2A24"/>
-                </a:solidFill>
-                <a:latin typeface="Yu Gothic"/>
-              </a:rPr>
-              <a:t>・議論と記事化で光る</a:t>
-            </a:r>
-          </a:p>
-        </p:txBody>
-      </p:sp>
-      <p:sp>
-        <p:nvSpPr>
-          <p:cNvPr id="18" name="Rectangle 17"/>
+              <a:t>清峰の最重要テーマと一致</a:t>
+            </a:r>
+          </a:p>
+        </p:txBody>
+      </p:sp>
+      <p:sp>
+        <p:nvSpPr>
+          <p:cNvPr id="22" name="Rectangle 21"/>
           <p:cNvSpPr/>
           <p:nvPr/>
         </p:nvSpPr>
         <p:spPr>
           <a:xfrm>
-            <a:off x="8046720" y="777240"/>
-            <a:ext cx="3749039" cy="4343400"/>
-          </a:xfrm>
-          <a:prstGeom prst="rect">
-            <a:avLst/>
-          </a:prstGeom>
-          <a:solidFill>
-            <a:srgbClr val="FFFFFF"/>
+            <a:off x="365760" y="4937760"/>
+            <a:ext cx="11430000" cy="1234440"/>
+          </a:xfrm>
+          <a:prstGeom prst="rect">
+            <a:avLst/>
+          </a:prstGeom>
+          <a:solidFill>
+            <a:srgbClr val="FFE0D0"/>
           </a:solidFill>
           <a:ln>
             <a:noFill/>
@@ -5817,182 +6135,24 @@
           <a:effectLst/>
         </p:spPr>
         <p:txBody>
-          <a:bodyPr rtlCol="0" anchor="ctr"/>
-          <a:lstStyle/>
-          <a:p>
-            <a:pPr algn="ctr"/>
-          </a:p>
-        </p:txBody>
-      </p:sp>
-      <p:sp>
-        <p:nvSpPr>
-          <p:cNvPr id="19" name="Rectangle 18"/>
-          <p:cNvSpPr/>
-          <p:nvPr/>
-        </p:nvSpPr>
-        <p:spPr>
-          <a:xfrm>
-            <a:off x="8046720" y="777240"/>
-            <a:ext cx="3749039" cy="548640"/>
-          </a:xfrm>
-          <a:prstGeom prst="rect">
-            <a:avLst/>
-          </a:prstGeom>
-          <a:solidFill>
-            <a:srgbClr val="988E86"/>
-          </a:solidFill>
-          <a:ln>
-            <a:noFill/>
-          </a:ln>
-          <a:effectLst/>
-        </p:spPr>
-        <p:txBody>
-          <a:bodyPr rtlCol="0" anchor="ctr" wrap="square" lIns="73152" rIns="73152"/>
+          <a:bodyPr rtlCol="0" anchor="t" wrap="square" lIns="182880" rIns="182880"/>
           <a:lstStyle/>
           <a:p>
             <a:pPr algn="l"/>
             <a:r>
               <a:rPr sz="1600" b="1">
                 <a:solidFill>
-                  <a:srgbClr val="FFFFFF"/>
-                </a:solidFill>
-                <a:latin typeface="Yu Gothic"/>
-              </a:rPr>
-              <a:t>C　コツコツ×ぐるぐる</a:t>
-            </a:r>
-          </a:p>
-        </p:txBody>
-      </p:sp>
-      <p:sp>
-        <p:nvSpPr>
-          <p:cNvPr id="20" name="TextBox 19"/>
-          <p:cNvSpPr txBox="1"/>
-          <p:nvPr/>
-        </p:nvSpPr>
-        <p:spPr>
-          <a:xfrm>
-            <a:off x="8046720" y="1417320"/>
-            <a:ext cx="3749039" cy="365760"/>
-          </a:xfrm>
-          <a:prstGeom prst="rect">
-            <a:avLst/>
-          </a:prstGeom>
-          <a:noFill/>
-        </p:spPr>
-        <p:txBody>
-          <a:bodyPr wrap="square" anchor="t" lIns="73152" rIns="73152">
-            <a:spAutoFit/>
-          </a:bodyPr>
-          <a:lstStyle/>
-          <a:p>
-            <a:pPr algn="l"/>
-            <a:r>
-              <a:rPr sz="1200" b="1">
-                <a:solidFill>
-                  <a:srgbClr val="988E86"/>
-                </a:solidFill>
-                <a:latin typeface="Yu Gothic"/>
-              </a:rPr>
-              <a:t>既存ペルソナ③</a:t>
-            </a:r>
-          </a:p>
-        </p:txBody>
-      </p:sp>
-      <p:sp>
-        <p:nvSpPr>
-          <p:cNvPr id="21" name="TextBox 20"/>
-          <p:cNvSpPr txBox="1"/>
-          <p:nvPr/>
-        </p:nvSpPr>
-        <p:spPr>
-          <a:xfrm>
-            <a:off x="8046720" y="1783080"/>
-            <a:ext cx="3749039" cy="457200"/>
-          </a:xfrm>
-          <a:prstGeom prst="rect">
-            <a:avLst/>
-          </a:prstGeom>
-          <a:noFill/>
-        </p:spPr>
-        <p:txBody>
-          <a:bodyPr wrap="square" anchor="t" lIns="73152" rIns="73152">
-            <a:spAutoFit/>
-          </a:bodyPr>
-          <a:lstStyle/>
-          <a:p>
-            <a:pPr algn="l"/>
-            <a:r>
-              <a:rPr sz="1600" b="1">
-                <a:solidFill>
-                  <a:srgbClr val="3A2A24"/>
-                </a:solidFill>
-                <a:latin typeface="Yu Gothic"/>
-              </a:rPr>
-              <a:t>森林・農学・手仕事志向</a:t>
-            </a:r>
-          </a:p>
-        </p:txBody>
-      </p:sp>
-      <p:sp>
-        <p:nvSpPr>
-          <p:cNvPr id="22" name="TextBox 21"/>
-          <p:cNvSpPr txBox="1"/>
-          <p:nvPr/>
-        </p:nvSpPr>
-        <p:spPr>
-          <a:xfrm>
-            <a:off x="8046720" y="2286000"/>
-            <a:ext cx="3749039" cy="365760"/>
-          </a:xfrm>
-          <a:prstGeom prst="rect">
-            <a:avLst/>
-          </a:prstGeom>
-          <a:noFill/>
-        </p:spPr>
-        <p:txBody>
-          <a:bodyPr wrap="square" anchor="t" lIns="73152" rIns="73152">
-            <a:spAutoFit/>
-          </a:bodyPr>
-          <a:lstStyle/>
-          <a:p>
-            <a:pPr algn="l"/>
-            <a:r>
-              <a:rPr sz="1100" b="0">
-                <a:solidFill>
-                  <a:srgbClr val="7A6E66"/>
-                </a:solidFill>
-                <a:latin typeface="Yu Gothic"/>
-              </a:rPr>
-              <a:t>根拠：信州大 農学部・筑波</a:t>
-            </a:r>
-          </a:p>
-        </p:txBody>
-      </p:sp>
-      <p:sp>
-        <p:nvSpPr>
-          <p:cNvPr id="23" name="TextBox 22"/>
-          <p:cNvSpPr txBox="1"/>
-          <p:nvPr/>
-        </p:nvSpPr>
-        <p:spPr>
-          <a:xfrm>
-            <a:off x="8046720" y="2834640"/>
-            <a:ext cx="3749039" cy="2194560"/>
-          </a:xfrm>
-          <a:prstGeom prst="rect">
-            <a:avLst/>
-          </a:prstGeom>
-          <a:noFill/>
-        </p:spPr>
-        <p:txBody>
-          <a:bodyPr wrap="square" anchor="t" lIns="73152" rIns="73152">
-            <a:spAutoFit/>
-          </a:bodyPr>
-          <a:lstStyle/>
+                  <a:srgbClr val="F06142"/>
+                </a:solidFill>
+                <a:latin typeface="Yu Gothic"/>
+              </a:rPr>
+              <a:t>示唆</a:t>
+            </a:r>
+          </a:p>
           <a:p>
             <a:pPr algn="l">
               <a:spcBef>
-                <a:spcPts val="1000"/>
+                <a:spcPts val="600"/>
               </a:spcBef>
             </a:pPr>
             <a:r>
@@ -6002,78 +6162,7 @@
                 </a:solidFill>
                 <a:latin typeface="Yu Gothic"/>
               </a:rPr>
-              <a:t>・手仕事＋改善を回す</a:t>
-            </a:r>
-          </a:p>
-          <a:p>
-            <a:pPr algn="l">
-              <a:spcBef>
-                <a:spcPts val="1000"/>
-              </a:spcBef>
-            </a:pPr>
-            <a:r>
-              <a:rPr sz="1600" b="0">
-                <a:solidFill>
-                  <a:srgbClr val="3A2A24"/>
-                </a:solidFill>
-                <a:latin typeface="Yu Gothic"/>
-              </a:rPr>
-              <a:t>・自然の課題を発信したい</a:t>
-            </a:r>
-          </a:p>
-          <a:p>
-            <a:pPr algn="l">
-              <a:spcBef>
-                <a:spcPts val="1000"/>
-              </a:spcBef>
-            </a:pPr>
-            <a:r>
-              <a:rPr sz="1600" b="0">
-                <a:solidFill>
-                  <a:srgbClr val="3A2A24"/>
-                </a:solidFill>
-                <a:latin typeface="Yu Gothic"/>
-              </a:rPr>
-              <a:t>・工場見学ワークで両面が出る</a:t>
-            </a:r>
-          </a:p>
-        </p:txBody>
-      </p:sp>
-      <p:sp>
-        <p:nvSpPr>
-          <p:cNvPr id="24" name="Rectangle 23"/>
-          <p:cNvSpPr/>
-          <p:nvPr/>
-        </p:nvSpPr>
-        <p:spPr>
-          <a:xfrm>
-            <a:off x="365760" y="5257800"/>
-            <a:ext cx="11430000" cy="914400"/>
-          </a:xfrm>
-          <a:prstGeom prst="rect">
-            <a:avLst/>
-          </a:prstGeom>
-          <a:solidFill>
-            <a:srgbClr val="FFE0D0"/>
-          </a:solidFill>
-          <a:ln>
-            <a:noFill/>
-          </a:ln>
-          <a:effectLst/>
-        </p:spPr>
-        <p:txBody>
-          <a:bodyPr rtlCol="0" anchor="t" wrap="square" lIns="182880" rIns="182880"/>
-          <a:lstStyle/>
-          <a:p>
-            <a:pPr algn="l"/>
-            <a:r>
-              <a:rPr sz="1400" b="1">
-                <a:solidFill>
-                  <a:srgbClr val="F06142"/>
-                </a:solidFill>
-                <a:latin typeface="Yu Gothic"/>
-              </a:rPr>
-              <a:t>対象外（案）</a:t>
+              <a:t>既存チャネルでは、ぐるぐる層に届いていない</a:t>
             </a:r>
           </a:p>
           <a:p>
@@ -6083,13 +6172,13 @@
               </a:spcBef>
             </a:pPr>
             <a:r>
-              <a:rPr sz="1500" b="0">
-                <a:solidFill>
-                  <a:srgbClr val="3A2A24"/>
-                </a:solidFill>
-                <a:latin typeface="Yu Gothic"/>
-              </a:rPr>
-              <a:t>現場の人と関わる・手を動かす意志が見えない人</a:t>
+              <a:rPr sz="1600" b="0">
+                <a:solidFill>
+                  <a:srgbClr val="3A2A24"/>
+                </a:solidFill>
+                <a:latin typeface="Yu Gothic"/>
+              </a:rPr>
+              <a:t>理念への共感が、最強の入口になる</a:t>
             </a:r>
           </a:p>
         </p:txBody>
@@ -6184,7 +6273,7 @@
                 </a:solidFill>
                 <a:latin typeface="Yu Gothic"/>
               </a:rPr>
-              <a:t>学校群</a:t>
+              <a:t>ターゲット像</a:t>
             </a:r>
           </a:p>
         </p:txBody>
@@ -6219,7 +6308,7 @@
                 </a:solidFill>
                 <a:latin typeface="Yu Gothic"/>
               </a:rPr>
-              <a:t>ぐるぐる学校群と、日程の配慮</a:t>
+              <a:t>ぐるぐるターゲット像：3タイプ</a:t>
             </a:r>
           </a:p>
         </p:txBody>
@@ -6254,7 +6343,7 @@
                 </a:solidFill>
                 <a:latin typeface="Yu Gothic"/>
               </a:rPr>
-              <a:t>出典：既存ペルソナ④学校群 / visions具体的なペルソナ像 / 年間目標・実数（各大学の年間スケジュール）。優先度は当方の提案</a:t>
+              <a:t>出典：具体的なペルソナ像（visionsユーザー）/ 既存ペルソナ①〜③。タイプ分けは当方の整理（案）</a:t>
             </a:r>
           </a:p>
         </p:txBody>
@@ -6267,8 +6356,8 @@
         </p:nvSpPr>
         <p:spPr>
           <a:xfrm>
-            <a:off x="365760" y="822960"/>
-            <a:ext cx="7498079" cy="1691640"/>
+            <a:off x="365760" y="777240"/>
+            <a:ext cx="3749039" cy="4343400"/>
           </a:xfrm>
           <a:prstGeom prst="rect">
             <a:avLst/>
@@ -6297,8 +6386,8 @@
         </p:nvSpPr>
         <p:spPr>
           <a:xfrm>
-            <a:off x="365760" y="822960"/>
-            <a:ext cx="1005840" cy="1691640"/>
+            <a:off x="365760" y="777240"/>
+            <a:ext cx="3749039" cy="548640"/>
           </a:xfrm>
           <a:prstGeom prst="rect">
             <a:avLst/>
@@ -6315,15 +6404,15 @@
           <a:bodyPr rtlCol="0" anchor="ctr" wrap="square" lIns="73152" rIns="73152"/>
           <a:lstStyle/>
           <a:p>
-            <a:pPr algn="ctr"/>
-            <a:r>
-              <a:rPr sz="2800" b="1">
+            <a:pPr algn="l"/>
+            <a:r>
+              <a:rPr sz="1600" b="1">
                 <a:solidFill>
                   <a:srgbClr val="FFFFFF"/>
                 </a:solidFill>
                 <a:latin typeface="Yu Gothic"/>
               </a:rPr>
-              <a:t>S</a:t>
+              <a:t>A　資源めぐり探究型</a:t>
             </a:r>
           </a:p>
         </p:txBody>
@@ -6336,8 +6425,8 @@
         </p:nvSpPr>
         <p:spPr>
           <a:xfrm>
-            <a:off x="1508760" y="868680"/>
-            <a:ext cx="6217920" cy="365760"/>
+            <a:off x="365760" y="1417320"/>
+            <a:ext cx="3749039" cy="365760"/>
           </a:xfrm>
           <a:prstGeom prst="rect">
             <a:avLst/>
@@ -6352,13 +6441,13 @@
           <a:p>
             <a:pPr algn="l"/>
             <a:r>
-              <a:rPr sz="1500" b="1">
+              <a:rPr sz="1200" b="1">
                 <a:solidFill>
                   <a:srgbClr val="F06142"/>
                 </a:solidFill>
                 <a:latin typeface="Yu Gothic"/>
               </a:rPr>
-              <a:t>資源・循環系</a:t>
+              <a:t>主ターゲット</a:t>
             </a:r>
           </a:p>
         </p:txBody>
@@ -6371,8 +6460,8 @@
         </p:nvSpPr>
         <p:spPr>
           <a:xfrm>
-            <a:off x="1508760" y="1280160"/>
-            <a:ext cx="3108960" cy="1188720"/>
+            <a:off x="365760" y="1783080"/>
+            <a:ext cx="3749039" cy="457200"/>
           </a:xfrm>
           <a:prstGeom prst="rect">
             <a:avLst/>
@@ -6385,35 +6474,15 @@
           </a:bodyPr>
           <a:lstStyle/>
           <a:p>
-            <a:pPr algn="l">
-              <a:spcBef>
-                <a:spcPts val="600"/>
-              </a:spcBef>
-            </a:pPr>
-            <a:r>
-              <a:rPr sz="1500" b="0">
-                <a:solidFill>
-                  <a:srgbClr val="3A2A24"/>
-                </a:solidFill>
-                <a:latin typeface="Yu Gothic"/>
-              </a:rPr>
-              <a:t>早稲田大（環境資源工学）</a:t>
-            </a:r>
-          </a:p>
-          <a:p>
-            <a:pPr algn="l">
-              <a:spcBef>
-                <a:spcPts val="600"/>
-              </a:spcBef>
-            </a:pPr>
-            <a:r>
-              <a:rPr sz="1500" b="0">
-                <a:solidFill>
-                  <a:srgbClr val="3A2A24"/>
-                </a:solidFill>
-                <a:latin typeface="Yu Gothic"/>
-              </a:rPr>
-              <a:t>東京農工大院（物質循環）</a:t>
+            <a:pPr algn="l"/>
+            <a:r>
+              <a:rPr sz="1600" b="1">
+                <a:solidFill>
+                  <a:srgbClr val="3A2A24"/>
+                </a:solidFill>
+                <a:latin typeface="Yu Gothic"/>
+              </a:rPr>
+              <a:t>環境資源・物質循環・地球科学</a:t>
             </a:r>
           </a:p>
         </p:txBody>
@@ -6426,8 +6495,8 @@
         </p:nvSpPr>
         <p:spPr>
           <a:xfrm>
-            <a:off x="4663440" y="1280160"/>
-            <a:ext cx="3200400" cy="1188720"/>
+            <a:off x="365760" y="2286000"/>
+            <a:ext cx="3749039" cy="365760"/>
           </a:xfrm>
           <a:prstGeom prst="rect">
             <a:avLst/>
@@ -6440,49 +6509,100 @@
           </a:bodyPr>
           <a:lstStyle/>
           <a:p>
+            <a:pPr algn="l"/>
+            <a:r>
+              <a:rPr sz="1100" b="0">
+                <a:solidFill>
+                  <a:srgbClr val="7A6E66"/>
+                </a:solidFill>
+                <a:latin typeface="Yu Gothic"/>
+              </a:rPr>
+              <a:t>根拠：visions同志2名・筑波の承諾実績</a:t>
+            </a:r>
+          </a:p>
+        </p:txBody>
+      </p:sp>
+      <p:sp>
+        <p:nvSpPr>
+          <p:cNvPr id="11" name="TextBox 10"/>
+          <p:cNvSpPr txBox="1"/>
+          <p:nvPr/>
+        </p:nvSpPr>
+        <p:spPr>
+          <a:xfrm>
+            <a:off x="365760" y="2834640"/>
+            <a:ext cx="3749039" cy="2194560"/>
+          </a:xfrm>
+          <a:prstGeom prst="rect">
+            <a:avLst/>
+          </a:prstGeom>
+          <a:noFill/>
+        </p:spPr>
+        <p:txBody>
+          <a:bodyPr wrap="square" anchor="t" lIns="73152" rIns="73152">
+            <a:spAutoFit/>
+          </a:bodyPr>
+          <a:lstStyle/>
+          <a:p>
             <a:pPr algn="l">
               <a:spcBef>
-                <a:spcPts val="600"/>
+                <a:spcPts val="1000"/>
               </a:spcBef>
             </a:pPr>
             <a:r>
-              <a:rPr sz="1500" b="0">
-                <a:solidFill>
-                  <a:srgbClr val="3A2A24"/>
-                </a:solidFill>
-                <a:latin typeface="Yu Gothic"/>
-              </a:rPr>
-              <a:t>筑波大（地球学類）</a:t>
+              <a:rPr sz="1600" b="0">
+                <a:solidFill>
+                  <a:srgbClr val="3A2A24"/>
+                </a:solidFill>
+                <a:latin typeface="Yu Gothic"/>
+              </a:rPr>
+              <a:t>・循環・ライフサイクルに関心</a:t>
             </a:r>
           </a:p>
           <a:p>
             <a:pPr algn="l">
               <a:spcBef>
-                <a:spcPts val="600"/>
+                <a:spcPts val="1000"/>
               </a:spcBef>
             </a:pPr>
             <a:r>
-              <a:rPr sz="1500" b="0">
-                <a:solidFill>
-                  <a:srgbClr val="3A2A24"/>
-                </a:solidFill>
-                <a:latin typeface="Yu Gothic"/>
-              </a:rPr>
-              <a:t>秋田大・茨城大（理工）</a:t>
-            </a:r>
-          </a:p>
-        </p:txBody>
-      </p:sp>
-      <p:sp>
-        <p:nvSpPr>
-          <p:cNvPr id="11" name="Rectangle 10"/>
+              <a:rPr sz="1600" b="0">
+                <a:solidFill>
+                  <a:srgbClr val="3A2A24"/>
+                </a:solidFill>
+                <a:latin typeface="Yu Gothic"/>
+              </a:rPr>
+              <a:t>・銅の有限性を自分ごとに</a:t>
+            </a:r>
+          </a:p>
+          <a:p>
+            <a:pPr algn="l">
+              <a:spcBef>
+                <a:spcPts val="1000"/>
+              </a:spcBef>
+            </a:pPr>
+            <a:r>
+              <a:rPr sz="1600" b="0">
+                <a:solidFill>
+                  <a:srgbClr val="3A2A24"/>
+                </a:solidFill>
+                <a:latin typeface="Yu Gothic"/>
+              </a:rPr>
+              <a:t>・価値循環ワークで動く</a:t>
+            </a:r>
+          </a:p>
+        </p:txBody>
+      </p:sp>
+      <p:sp>
+        <p:nvSpPr>
+          <p:cNvPr id="12" name="Rectangle 11"/>
           <p:cNvSpPr/>
           <p:nvPr/>
         </p:nvSpPr>
         <p:spPr>
           <a:xfrm>
-            <a:off x="365760" y="2606040"/>
-            <a:ext cx="7498079" cy="1691640"/>
+            <a:off x="4206240" y="777240"/>
+            <a:ext cx="3749039" cy="4343400"/>
           </a:xfrm>
           <a:prstGeom prst="rect">
             <a:avLst/>
@@ -6505,14 +6625,14 @@
       </p:sp>
       <p:sp>
         <p:nvSpPr>
-          <p:cNvPr id="12" name="Rectangle 11"/>
+          <p:cNvPr id="13" name="Rectangle 12"/>
           <p:cNvSpPr/>
           <p:nvPr/>
         </p:nvSpPr>
         <p:spPr>
           <a:xfrm>
-            <a:off x="365760" y="2606040"/>
-            <a:ext cx="1005840" cy="1691640"/>
+            <a:off x="4206240" y="777240"/>
+            <a:ext cx="3749039" cy="548640"/>
           </a:xfrm>
           <a:prstGeom prst="rect">
             <a:avLst/>
@@ -6529,29 +6649,29 @@
           <a:bodyPr rtlCol="0" anchor="ctr" wrap="square" lIns="73152" rIns="73152"/>
           <a:lstStyle/>
           <a:p>
-            <a:pPr algn="ctr"/>
-            <a:r>
-              <a:rPr sz="2800" b="1">
+            <a:pPr algn="l"/>
+            <a:r>
+              <a:rPr sz="1600" b="1">
                 <a:solidFill>
                   <a:srgbClr val="FFFFFF"/>
                 </a:solidFill>
                 <a:latin typeface="Yu Gothic"/>
               </a:rPr>
-              <a:t>A</a:t>
-            </a:r>
-          </a:p>
-        </p:txBody>
-      </p:sp>
-      <p:sp>
-        <p:nvSpPr>
-          <p:cNvPr id="13" name="TextBox 12"/>
+              <a:t>B　問い続ける・発信型</a:t>
+            </a:r>
+          </a:p>
+        </p:txBody>
+      </p:sp>
+      <p:sp>
+        <p:nvSpPr>
+          <p:cNvPr id="14" name="TextBox 13"/>
           <p:cNvSpPr txBox="1"/>
           <p:nvPr/>
         </p:nvSpPr>
         <p:spPr>
           <a:xfrm>
-            <a:off x="1508760" y="2651760"/>
-            <a:ext cx="6217920" cy="365760"/>
+            <a:off x="4206240" y="1417320"/>
+            <a:ext cx="3749039" cy="365760"/>
           </a:xfrm>
           <a:prstGeom prst="rect">
             <a:avLst/>
@@ -6566,27 +6686,27 @@
           <a:p>
             <a:pPr algn="l"/>
             <a:r>
-              <a:rPr sz="1500" b="1">
-                <a:solidFill>
-                  <a:srgbClr val="F06142"/>
-                </a:solidFill>
-                <a:latin typeface="Yu Gothic"/>
-              </a:rPr>
-              <a:t>環境・農・森林系</a:t>
-            </a:r>
-          </a:p>
-        </p:txBody>
-      </p:sp>
-      <p:sp>
-        <p:nvSpPr>
-          <p:cNvPr id="14" name="TextBox 13"/>
+              <a:rPr sz="1200" b="1">
+                <a:solidFill>
+                  <a:srgbClr val="8C4A36"/>
+                </a:solidFill>
+                <a:latin typeface="Yu Gothic"/>
+              </a:rPr>
+              <a:t>既存ペルソナ②</a:t>
+            </a:r>
+          </a:p>
+        </p:txBody>
+      </p:sp>
+      <p:sp>
+        <p:nvSpPr>
+          <p:cNvPr id="15" name="TextBox 14"/>
           <p:cNvSpPr txBox="1"/>
           <p:nvPr/>
         </p:nvSpPr>
         <p:spPr>
           <a:xfrm>
-            <a:off x="1508760" y="3063240"/>
-            <a:ext cx="3108960" cy="1188720"/>
+            <a:off x="4206240" y="1783080"/>
+            <a:ext cx="3749039" cy="457200"/>
           </a:xfrm>
           <a:prstGeom prst="rect">
             <a:avLst/>
@@ -6599,49 +6719,29 @@
           </a:bodyPr>
           <a:lstStyle/>
           <a:p>
-            <a:pPr algn="l">
-              <a:spcBef>
-                <a:spcPts val="600"/>
-              </a:spcBef>
-            </a:pPr>
-            <a:r>
-              <a:rPr sz="1500" b="0">
-                <a:solidFill>
-                  <a:srgbClr val="3A2A24"/>
-                </a:solidFill>
-                <a:latin typeface="Yu Gothic"/>
-              </a:rPr>
-              <a:t>公立鳥取環境大</a:t>
-            </a:r>
-          </a:p>
-          <a:p>
-            <a:pPr algn="l">
-              <a:spcBef>
-                <a:spcPts val="600"/>
-              </a:spcBef>
-            </a:pPr>
-            <a:r>
-              <a:rPr sz="1500" b="0">
-                <a:solidFill>
-                  <a:srgbClr val="3A2A24"/>
-                </a:solidFill>
-                <a:latin typeface="Yu Gothic"/>
-              </a:rPr>
-              <a:t>信州大（農）</a:t>
-            </a:r>
-          </a:p>
-        </p:txBody>
-      </p:sp>
-      <p:sp>
-        <p:nvSpPr>
-          <p:cNvPr id="15" name="TextBox 14"/>
+            <a:pPr algn="l"/>
+            <a:r>
+              <a:rPr sz="1600" b="1">
+                <a:solidFill>
+                  <a:srgbClr val="3A2A24"/>
+                </a:solidFill>
+                <a:latin typeface="Yu Gothic"/>
+              </a:rPr>
+              <a:t>環境学・総合科学・農学</a:t>
+            </a:r>
+          </a:p>
+        </p:txBody>
+      </p:sp>
+      <p:sp>
+        <p:nvSpPr>
+          <p:cNvPr id="16" name="TextBox 15"/>
           <p:cNvSpPr txBox="1"/>
           <p:nvPr/>
         </p:nvSpPr>
         <p:spPr>
           <a:xfrm>
-            <a:off x="4663440" y="3063240"/>
-            <a:ext cx="3200400" cy="1188720"/>
+            <a:off x="4206240" y="2286000"/>
+            <a:ext cx="3749039" cy="365760"/>
           </a:xfrm>
           <a:prstGeom prst="rect">
             <a:avLst/>
@@ -6654,49 +6754,100 @@
           </a:bodyPr>
           <a:lstStyle/>
           <a:p>
+            <a:pPr algn="l"/>
+            <a:r>
+              <a:rPr sz="1100" b="0">
+                <a:solidFill>
+                  <a:srgbClr val="7A6E66"/>
+                </a:solidFill>
+                <a:latin typeface="Yu Gothic"/>
+              </a:rPr>
+              <a:t>根拠：公立鳥取環境大ペルソナ</a:t>
+            </a:r>
+          </a:p>
+        </p:txBody>
+      </p:sp>
+      <p:sp>
+        <p:nvSpPr>
+          <p:cNvPr id="17" name="TextBox 16"/>
+          <p:cNvSpPr txBox="1"/>
+          <p:nvPr/>
+        </p:nvSpPr>
+        <p:spPr>
+          <a:xfrm>
+            <a:off x="4206240" y="2834640"/>
+            <a:ext cx="3749039" cy="2194560"/>
+          </a:xfrm>
+          <a:prstGeom prst="rect">
+            <a:avLst/>
+          </a:prstGeom>
+          <a:noFill/>
+        </p:spPr>
+        <p:txBody>
+          <a:bodyPr wrap="square" anchor="t" lIns="73152" rIns="73152">
+            <a:spAutoFit/>
+          </a:bodyPr>
+          <a:lstStyle/>
+          <a:p>
             <a:pPr algn="l">
               <a:spcBef>
-                <a:spcPts val="600"/>
+                <a:spcPts val="1000"/>
               </a:spcBef>
             </a:pPr>
             <a:r>
-              <a:rPr sz="1500" b="0">
-                <a:solidFill>
-                  <a:srgbClr val="3A2A24"/>
-                </a:solidFill>
-                <a:latin typeface="Yu Gothic"/>
-              </a:rPr>
-              <a:t>東京農業大</a:t>
+              <a:rPr sz="1600" b="0">
+                <a:solidFill>
+                  <a:srgbClr val="3A2A24"/>
+                </a:solidFill>
+                <a:latin typeface="Yu Gothic"/>
+              </a:rPr>
+              <a:t>・自然に向き合い問い続ける</a:t>
             </a:r>
           </a:p>
           <a:p>
             <a:pPr algn="l">
               <a:spcBef>
-                <a:spcPts val="600"/>
+                <a:spcPts val="1000"/>
               </a:spcBef>
             </a:pPr>
             <a:r>
-              <a:rPr sz="1500" b="0">
-                <a:solidFill>
-                  <a:srgbClr val="3A2A24"/>
-                </a:solidFill>
-                <a:latin typeface="Yu Gothic"/>
-              </a:rPr>
-              <a:t>宇都宮・群馬・福島の農・理工</a:t>
-            </a:r>
-          </a:p>
-        </p:txBody>
-      </p:sp>
-      <p:sp>
-        <p:nvSpPr>
-          <p:cNvPr id="16" name="Rectangle 15"/>
+              <a:rPr sz="1600" b="0">
+                <a:solidFill>
+                  <a:srgbClr val="3A2A24"/>
+                </a:solidFill>
+                <a:latin typeface="Yu Gothic"/>
+              </a:rPr>
+              <a:t>・仮説検証・説明が好き</a:t>
+            </a:r>
+          </a:p>
+          <a:p>
+            <a:pPr algn="l">
+              <a:spcBef>
+                <a:spcPts val="1000"/>
+              </a:spcBef>
+            </a:pPr>
+            <a:r>
+              <a:rPr sz="1600" b="0">
+                <a:solidFill>
+                  <a:srgbClr val="3A2A24"/>
+                </a:solidFill>
+                <a:latin typeface="Yu Gothic"/>
+              </a:rPr>
+              <a:t>・議論と記事化で光る</a:t>
+            </a:r>
+          </a:p>
+        </p:txBody>
+      </p:sp>
+      <p:sp>
+        <p:nvSpPr>
+          <p:cNvPr id="18" name="Rectangle 17"/>
           <p:cNvSpPr/>
           <p:nvPr/>
         </p:nvSpPr>
         <p:spPr>
           <a:xfrm>
-            <a:off x="365760" y="4389120"/>
-            <a:ext cx="7498079" cy="1691640"/>
+            <a:off x="8046720" y="777240"/>
+            <a:ext cx="3749039" cy="4343400"/>
           </a:xfrm>
           <a:prstGeom prst="rect">
             <a:avLst/>
@@ -6719,20 +6870,20 @@
       </p:sp>
       <p:sp>
         <p:nvSpPr>
-          <p:cNvPr id="17" name="Rectangle 16"/>
+          <p:cNvPr id="19" name="Rectangle 18"/>
           <p:cNvSpPr/>
           <p:nvPr/>
         </p:nvSpPr>
         <p:spPr>
           <a:xfrm>
-            <a:off x="365760" y="4389120"/>
-            <a:ext cx="1005840" cy="1691640"/>
-          </a:xfrm>
-          <a:prstGeom prst="rect">
-            <a:avLst/>
-          </a:prstGeom>
-          <a:solidFill>
-            <a:srgbClr val="7A6E66"/>
+            <a:off x="8046720" y="777240"/>
+            <a:ext cx="3749039" cy="548640"/>
+          </a:xfrm>
+          <a:prstGeom prst="rect">
+            <a:avLst/>
+          </a:prstGeom>
+          <a:solidFill>
+            <a:srgbClr val="988E86"/>
           </a:solidFill>
           <a:ln>
             <a:noFill/>
@@ -6743,29 +6894,29 @@
           <a:bodyPr rtlCol="0" anchor="ctr" wrap="square" lIns="73152" rIns="73152"/>
           <a:lstStyle/>
           <a:p>
-            <a:pPr algn="ctr"/>
-            <a:r>
-              <a:rPr sz="2800" b="1">
+            <a:pPr algn="l"/>
+            <a:r>
+              <a:rPr sz="1600" b="1">
                 <a:solidFill>
                   <a:srgbClr val="FFFFFF"/>
                 </a:solidFill>
                 <a:latin typeface="Yu Gothic"/>
               </a:rPr>
-              <a:t>B</a:t>
-            </a:r>
-          </a:p>
-        </p:txBody>
-      </p:sp>
-      <p:sp>
-        <p:nvSpPr>
-          <p:cNvPr id="18" name="TextBox 17"/>
+              <a:t>C　コツコツ×ぐるぐる</a:t>
+            </a:r>
+          </a:p>
+        </p:txBody>
+      </p:sp>
+      <p:sp>
+        <p:nvSpPr>
+          <p:cNvPr id="20" name="TextBox 19"/>
           <p:cNvSpPr txBox="1"/>
           <p:nvPr/>
         </p:nvSpPr>
         <p:spPr>
           <a:xfrm>
-            <a:off x="1508760" y="4434840"/>
-            <a:ext cx="6217920" cy="365760"/>
+            <a:off x="8046720" y="1417320"/>
+            <a:ext cx="3749039" cy="365760"/>
           </a:xfrm>
           <a:prstGeom prst="rect">
             <a:avLst/>
@@ -6780,27 +6931,27 @@
           <a:p>
             <a:pPr algn="l"/>
             <a:r>
-              <a:rPr sz="1500" b="1">
-                <a:solidFill>
-                  <a:srgbClr val="F06142"/>
-                </a:solidFill>
-                <a:latin typeface="Yu Gothic"/>
-              </a:rPr>
-              <a:t>理系私立・公立</a:t>
-            </a:r>
-          </a:p>
-        </p:txBody>
-      </p:sp>
-      <p:sp>
-        <p:nvSpPr>
-          <p:cNvPr id="19" name="TextBox 18"/>
+              <a:rPr sz="1200" b="1">
+                <a:solidFill>
+                  <a:srgbClr val="988E86"/>
+                </a:solidFill>
+                <a:latin typeface="Yu Gothic"/>
+              </a:rPr>
+              <a:t>既存ペルソナ③</a:t>
+            </a:r>
+          </a:p>
+        </p:txBody>
+      </p:sp>
+      <p:sp>
+        <p:nvSpPr>
+          <p:cNvPr id="21" name="TextBox 20"/>
           <p:cNvSpPr txBox="1"/>
           <p:nvPr/>
         </p:nvSpPr>
         <p:spPr>
           <a:xfrm>
-            <a:off x="1508760" y="4846320"/>
-            <a:ext cx="3108960" cy="1188720"/>
+            <a:off x="8046720" y="1783080"/>
+            <a:ext cx="3749039" cy="457200"/>
           </a:xfrm>
           <a:prstGeom prst="rect">
             <a:avLst/>
@@ -6813,49 +6964,29 @@
           </a:bodyPr>
           <a:lstStyle/>
           <a:p>
-            <a:pPr algn="l">
-              <a:spcBef>
-                <a:spcPts val="600"/>
-              </a:spcBef>
-            </a:pPr>
-            <a:r>
-              <a:rPr sz="1500" b="0">
-                <a:solidFill>
-                  <a:srgbClr val="3A2A24"/>
-                </a:solidFill>
-                <a:latin typeface="Yu Gothic"/>
-              </a:rPr>
-              <a:t>都立大・横浜市大</a:t>
-            </a:r>
-          </a:p>
-          <a:p>
-            <a:pPr algn="l">
-              <a:spcBef>
-                <a:spcPts val="600"/>
-              </a:spcBef>
-            </a:pPr>
-            <a:r>
-              <a:rPr sz="1500" b="0">
-                <a:solidFill>
-                  <a:srgbClr val="3A2A24"/>
-                </a:solidFill>
-                <a:latin typeface="Yu Gothic"/>
-              </a:rPr>
-              <a:t>長野県立大・諏訪東京理科</a:t>
-            </a:r>
-          </a:p>
-        </p:txBody>
-      </p:sp>
-      <p:sp>
-        <p:nvSpPr>
-          <p:cNvPr id="20" name="TextBox 19"/>
+            <a:pPr algn="l"/>
+            <a:r>
+              <a:rPr sz="1600" b="1">
+                <a:solidFill>
+                  <a:srgbClr val="3A2A24"/>
+                </a:solidFill>
+                <a:latin typeface="Yu Gothic"/>
+              </a:rPr>
+              <a:t>森林・農学・手仕事志向</a:t>
+            </a:r>
+          </a:p>
+        </p:txBody>
+      </p:sp>
+      <p:sp>
+        <p:nvSpPr>
+          <p:cNvPr id="22" name="TextBox 21"/>
           <p:cNvSpPr txBox="1"/>
           <p:nvPr/>
         </p:nvSpPr>
         <p:spPr>
           <a:xfrm>
-            <a:off x="4663440" y="4846320"/>
-            <a:ext cx="3200400" cy="1188720"/>
+            <a:off x="8046720" y="2286000"/>
+            <a:ext cx="3749039" cy="365760"/>
           </a:xfrm>
           <a:prstGeom prst="rect">
             <a:avLst/>
@@ -6868,55 +6999,106 @@
           </a:bodyPr>
           <a:lstStyle/>
           <a:p>
+            <a:pPr algn="l"/>
+            <a:r>
+              <a:rPr sz="1100" b="0">
+                <a:solidFill>
+                  <a:srgbClr val="7A6E66"/>
+                </a:solidFill>
+                <a:latin typeface="Yu Gothic"/>
+              </a:rPr>
+              <a:t>根拠：信州大 農学部・筑波</a:t>
+            </a:r>
+          </a:p>
+        </p:txBody>
+      </p:sp>
+      <p:sp>
+        <p:nvSpPr>
+          <p:cNvPr id="23" name="TextBox 22"/>
+          <p:cNvSpPr txBox="1"/>
+          <p:nvPr/>
+        </p:nvSpPr>
+        <p:spPr>
+          <a:xfrm>
+            <a:off x="8046720" y="2834640"/>
+            <a:ext cx="3749039" cy="2194560"/>
+          </a:xfrm>
+          <a:prstGeom prst="rect">
+            <a:avLst/>
+          </a:prstGeom>
+          <a:noFill/>
+        </p:spPr>
+        <p:txBody>
+          <a:bodyPr wrap="square" anchor="t" lIns="73152" rIns="73152">
+            <a:spAutoFit/>
+          </a:bodyPr>
+          <a:lstStyle/>
+          <a:p>
             <a:pPr algn="l">
               <a:spcBef>
-                <a:spcPts val="600"/>
+                <a:spcPts val="1000"/>
               </a:spcBef>
             </a:pPr>
             <a:r>
-              <a:rPr sz="1500" b="0">
-                <a:solidFill>
-                  <a:srgbClr val="3A2A24"/>
-                </a:solidFill>
-                <a:latin typeface="Yu Gothic"/>
-              </a:rPr>
-              <a:t>明治・芝浦工・電機大</a:t>
+              <a:rPr sz="1600" b="0">
+                <a:solidFill>
+                  <a:srgbClr val="3A2A24"/>
+                </a:solidFill>
+                <a:latin typeface="Yu Gothic"/>
+              </a:rPr>
+              <a:t>・手仕事＋改善を回す</a:t>
             </a:r>
           </a:p>
           <a:p>
             <a:pPr algn="l">
               <a:spcBef>
-                <a:spcPts val="600"/>
+                <a:spcPts val="1000"/>
               </a:spcBef>
             </a:pPr>
             <a:r>
-              <a:rPr sz="1500" b="0">
-                <a:solidFill>
-                  <a:srgbClr val="3A2A24"/>
-                </a:solidFill>
-                <a:latin typeface="Yu Gothic"/>
-              </a:rPr>
-              <a:t>日大・法政・東洋</a:t>
-            </a:r>
-          </a:p>
-        </p:txBody>
-      </p:sp>
-      <p:sp>
-        <p:nvSpPr>
-          <p:cNvPr id="21" name="Rectangle 20"/>
+              <a:rPr sz="1600" b="0">
+                <a:solidFill>
+                  <a:srgbClr val="3A2A24"/>
+                </a:solidFill>
+                <a:latin typeface="Yu Gothic"/>
+              </a:rPr>
+              <a:t>・自然の課題を発信したい</a:t>
+            </a:r>
+          </a:p>
+          <a:p>
+            <a:pPr algn="l">
+              <a:spcBef>
+                <a:spcPts val="1000"/>
+              </a:spcBef>
+            </a:pPr>
+            <a:r>
+              <a:rPr sz="1600" b="0">
+                <a:solidFill>
+                  <a:srgbClr val="3A2A24"/>
+                </a:solidFill>
+                <a:latin typeface="Yu Gothic"/>
+              </a:rPr>
+              <a:t>・工場見学ワークで両面が出る</a:t>
+            </a:r>
+          </a:p>
+        </p:txBody>
+      </p:sp>
+      <p:sp>
+        <p:nvSpPr>
+          <p:cNvPr id="24" name="Rectangle 23"/>
           <p:cNvSpPr/>
           <p:nvPr/>
         </p:nvSpPr>
         <p:spPr>
           <a:xfrm>
-            <a:off x="8046720" y="822960"/>
-            <a:ext cx="3749039" cy="2377440"/>
-          </a:xfrm>
-          <a:prstGeom prst="rect">
-            <a:avLst/>
-          </a:prstGeom>
-          <a:solidFill>
-            <a:srgbClr val="FFFFFF"/>
+            <a:off x="365760" y="5257800"/>
+            <a:ext cx="11430000" cy="914400"/>
+          </a:xfrm>
+          <a:prstGeom prst="rect">
+            <a:avLst/>
+          </a:prstGeom>
+          <a:solidFill>
+            <a:srgbClr val="FFE0D0"/>
           </a:solidFill>
           <a:ln>
             <a:noFill/>
@@ -6924,69 +7106,20 @@
           <a:effectLst/>
         </p:spPr>
         <p:txBody>
-          <a:bodyPr rtlCol="0" anchor="ctr"/>
-          <a:lstStyle/>
-          <a:p>
-            <a:pPr algn="ctr"/>
-          </a:p>
-        </p:txBody>
-      </p:sp>
-      <p:sp>
-        <p:nvSpPr>
-          <p:cNvPr id="22" name="TextBox 21"/>
-          <p:cNvSpPr txBox="1"/>
-          <p:nvPr/>
-        </p:nvSpPr>
-        <p:spPr>
-          <a:xfrm>
-            <a:off x="8046720" y="868680"/>
-            <a:ext cx="3749039" cy="411480"/>
-          </a:xfrm>
-          <a:prstGeom prst="rect">
-            <a:avLst/>
-          </a:prstGeom>
-          <a:noFill/>
-        </p:spPr>
-        <p:txBody>
-          <a:bodyPr wrap="square" anchor="t" lIns="73152" rIns="73152">
-            <a:spAutoFit/>
-          </a:bodyPr>
+          <a:bodyPr rtlCol="0" anchor="t" wrap="square" lIns="182880" rIns="182880"/>
           <a:lstStyle/>
           <a:p>
             <a:pPr algn="l"/>
             <a:r>
-              <a:rPr sz="1500" b="1">
+              <a:rPr sz="1400" b="1">
                 <a:solidFill>
                   <a:srgbClr val="F06142"/>
                 </a:solidFill>
                 <a:latin typeface="Yu Gothic"/>
               </a:rPr>
-              <a:t>日程</a:t>
-            </a:r>
-          </a:p>
-        </p:txBody>
-      </p:sp>
-      <p:sp>
-        <p:nvSpPr>
-          <p:cNvPr id="23" name="TextBox 22"/>
-          <p:cNvSpPr txBox="1"/>
-          <p:nvPr/>
-        </p:nvSpPr>
-        <p:spPr>
-          <a:xfrm>
-            <a:off x="8046720" y="1325880"/>
-            <a:ext cx="3749039" cy="1828800"/>
-          </a:xfrm>
-          <a:prstGeom prst="rect">
-            <a:avLst/>
-          </a:prstGeom>
-          <a:noFill/>
-        </p:spPr>
-        <p:txBody>
-          <a:bodyPr wrap="square" anchor="t" lIns="73152" rIns="73152">
-            <a:spAutoFit/>
-          </a:bodyPr>
-          <a:lstStyle/>
+              <a:t>対象外（案）</a:t>
+            </a:r>
+          </a:p>
           <a:p>
             <a:pPr algn="l">
               <a:spcBef>
@@ -6994,197 +7127,13 @@
               </a:spcBef>
             </a:pPr>
             <a:r>
-              <a:rPr sz="1400" b="0">
-                <a:solidFill>
-                  <a:srgbClr val="3A2A24"/>
-                </a:solidFill>
-                <a:latin typeface="Yu Gothic"/>
-              </a:rPr>
-              <a:t>オンライン：12月中旬</a:t>
-            </a:r>
-          </a:p>
-          <a:p>
-            <a:pPr algn="l">
-              <a:spcBef>
-                <a:spcPts val="400"/>
-              </a:spcBef>
-            </a:pPr>
-            <a:r>
-              <a:rPr sz="1400" b="0">
-                <a:solidFill>
-                  <a:srgbClr val="3A2A24"/>
-                </a:solidFill>
-                <a:latin typeface="Yu Gothic"/>
-              </a:rPr>
-              <a:t>現場訪問：1月上旬〜中旬</a:t>
-            </a:r>
-          </a:p>
-          <a:p>
-            <a:pPr algn="l">
-              <a:spcBef>
-                <a:spcPts val="600"/>
-              </a:spcBef>
-            </a:pPr>
-            <a:r>
-              <a:rPr sz="1200" b="0">
-                <a:solidFill>
-                  <a:srgbClr val="7A6E66"/>
-                </a:solidFill>
-                <a:latin typeface="Yu Gothic"/>
-              </a:rPr>
-              <a:t>期末・冬季休業を避ける</a:t>
-            </a:r>
-          </a:p>
-        </p:txBody>
-      </p:sp>
-      <p:sp>
-        <p:nvSpPr>
-          <p:cNvPr id="24" name="Rectangle 23"/>
-          <p:cNvSpPr/>
-          <p:nvPr/>
-        </p:nvSpPr>
-        <p:spPr>
-          <a:xfrm>
-            <a:off x="8046720" y="3337560"/>
-            <a:ext cx="3749039" cy="2926080"/>
-          </a:xfrm>
-          <a:prstGeom prst="rect">
-            <a:avLst/>
-          </a:prstGeom>
-          <a:solidFill>
-            <a:srgbClr val="FFFFFF"/>
-          </a:solidFill>
-          <a:ln>
-            <a:noFill/>
-          </a:ln>
-          <a:effectLst/>
-        </p:spPr>
-        <p:txBody>
-          <a:bodyPr rtlCol="0" anchor="ctr"/>
-          <a:lstStyle/>
-          <a:p>
-            <a:pPr algn="ctr"/>
-          </a:p>
-        </p:txBody>
-      </p:sp>
-      <p:sp>
-        <p:nvSpPr>
-          <p:cNvPr id="25" name="TextBox 24"/>
-          <p:cNvSpPr txBox="1"/>
-          <p:nvPr/>
-        </p:nvSpPr>
-        <p:spPr>
-          <a:xfrm>
-            <a:off x="8046720" y="3383279"/>
-            <a:ext cx="3749039" cy="411480"/>
-          </a:xfrm>
-          <a:prstGeom prst="rect">
-            <a:avLst/>
-          </a:prstGeom>
-          <a:noFill/>
-        </p:spPr>
-        <p:txBody>
-          <a:bodyPr wrap="square" anchor="t" lIns="73152" rIns="73152">
-            <a:spAutoFit/>
-          </a:bodyPr>
-          <a:lstStyle/>
-          <a:p>
-            <a:pPr algn="l"/>
-            <a:r>
-              <a:rPr sz="1500" b="1">
-                <a:solidFill>
-                  <a:srgbClr val="F06142"/>
-                </a:solidFill>
-                <a:latin typeface="Yu Gothic"/>
-              </a:rPr>
-              <a:t>visions検索基準</a:t>
-            </a:r>
-          </a:p>
-        </p:txBody>
-      </p:sp>
-      <p:sp>
-        <p:nvSpPr>
-          <p:cNvPr id="26" name="TextBox 25"/>
-          <p:cNvSpPr txBox="1"/>
-          <p:nvPr/>
-        </p:nvSpPr>
-        <p:spPr>
-          <a:xfrm>
-            <a:off x="8046720" y="3840480"/>
-            <a:ext cx="3749039" cy="2377440"/>
-          </a:xfrm>
-          <a:prstGeom prst="rect">
-            <a:avLst/>
-          </a:prstGeom>
-          <a:noFill/>
-        </p:spPr>
-        <p:txBody>
-          <a:bodyPr wrap="square" anchor="t" lIns="73152" rIns="73152">
-            <a:spAutoFit/>
-          </a:bodyPr>
-          <a:lstStyle/>
-          <a:p>
-            <a:pPr algn="l">
-              <a:spcBef>
-                <a:spcPts val="400"/>
-              </a:spcBef>
-            </a:pPr>
-            <a:r>
-              <a:rPr sz="1400" b="0">
-                <a:solidFill>
-                  <a:srgbClr val="3A2A24"/>
-                </a:solidFill>
-                <a:latin typeface="Yu Gothic"/>
-              </a:rPr>
-              <a:t>自然と共生・循環型社会</a:t>
-            </a:r>
-          </a:p>
-          <a:p>
-            <a:pPr algn="l">
-              <a:spcBef>
-                <a:spcPts val="400"/>
-              </a:spcBef>
-            </a:pPr>
-            <a:r>
-              <a:rPr sz="1400" b="0">
-                <a:solidFill>
-                  <a:srgbClr val="3A2A24"/>
-                </a:solidFill>
-                <a:latin typeface="Yu Gothic"/>
-              </a:rPr>
-              <a:t>積み重ねる／人の役に立つ</a:t>
-            </a:r>
-          </a:p>
-          <a:p>
-            <a:pPr algn="l">
-              <a:spcBef>
-                <a:spcPts val="400"/>
-              </a:spcBef>
-            </a:pPr>
-            <a:r>
-              <a:rPr sz="1400" b="0">
-                <a:solidFill>
-                  <a:srgbClr val="3A2A24"/>
-                </a:solidFill>
-                <a:latin typeface="Yu Gothic"/>
-              </a:rPr>
-              <a:t>環境・資源・物質・農</a:t>
-            </a:r>
-          </a:p>
-          <a:p>
-            <a:pPr algn="l">
-              <a:spcBef>
-                <a:spcPts val="400"/>
-              </a:spcBef>
-            </a:pPr>
-            <a:r>
-              <a:rPr sz="1400" b="0">
-                <a:solidFill>
-                  <a:srgbClr val="3A2A24"/>
-                </a:solidFill>
-                <a:latin typeface="Yu Gothic"/>
-              </a:rPr>
-              <a:t>目標：30 → 40 → 50名</a:t>
+              <a:rPr sz="1500" b="0">
+                <a:solidFill>
+                  <a:srgbClr val="3A2A24"/>
+                </a:solidFill>
+                <a:latin typeface="Yu Gothic"/>
+              </a:rPr>
+              <a:t>現場の人と関わる・手を動かす意志が見えない人</a:t>
             </a:r>
           </a:p>
         </p:txBody>
@@ -7279,7 +7228,7 @@
                 </a:solidFill>
                 <a:latin typeface="Yu Gothic"/>
               </a:rPr>
-              <a:t>ツアー接点</a:t>
+              <a:t>学校群</a:t>
             </a:r>
           </a:p>
         </p:txBody>
@@ -7314,7 +7263,7 @@
                 </a:solidFill>
                 <a:latin typeface="Yu Gothic"/>
               </a:rPr>
-              <a:t>ツアーでの、ぐるぐるの動きと見極め</a:t>
+              <a:t>ぐるぐる学校群と、日程の配慮</a:t>
             </a:r>
           </a:p>
         </p:txBody>
@@ -7349,7 +7298,7 @@
                 </a:solidFill>
                 <a:latin typeface="Yu Gothic"/>
               </a:rPr>
-              <a:t>出典：地球資源を輝かせていくIS / 銅巡りインターン議事録・企画スライド。見極めポイントは当方の提案（案）</a:t>
+              <a:t>出典：既存ペルソナ④学校群 / visions具体的なペルソナ像 / 年間目標・実数（各大学の年間スケジュール）。優先度は当方の提案</a:t>
             </a:r>
           </a:p>
         </p:txBody>
@@ -7362,14 +7311,14 @@
         </p:nvSpPr>
         <p:spPr>
           <a:xfrm>
-            <a:off x="365760" y="777240"/>
-            <a:ext cx="2423160" cy="384048"/>
-          </a:xfrm>
-          <a:prstGeom prst="rect">
-            <a:avLst/>
-          </a:prstGeom>
-          <a:solidFill>
-            <a:srgbClr val="F06142"/>
+            <a:off x="365760" y="822960"/>
+            <a:ext cx="7498079" cy="1691640"/>
+          </a:xfrm>
+          <a:prstGeom prst="rect">
+            <a:avLst/>
+          </a:prstGeom>
+          <a:solidFill>
+            <a:srgbClr val="FFFFFF"/>
           </a:solidFill>
           <a:ln>
             <a:noFill/>
@@ -7377,19 +7326,10 @@
           <a:effectLst/>
         </p:spPr>
         <p:txBody>
-          <a:bodyPr rtlCol="0" anchor="ctr" wrap="square" lIns="73152" rIns="73152"/>
+          <a:bodyPr rtlCol="0" anchor="ctr"/>
           <a:lstStyle/>
           <a:p>
             <a:pPr algn="ctr"/>
-            <a:r>
-              <a:rPr sz="1300" b="1">
-                <a:solidFill>
-                  <a:srgbClr val="FFFFFF"/>
-                </a:solidFill>
-                <a:latin typeface="Yu Gothic"/>
-              </a:rPr>
-              <a:t>フェーズ</a:t>
-            </a:r>
           </a:p>
         </p:txBody>
       </p:sp>
@@ -7401,8 +7341,8 @@
         </p:nvSpPr>
         <p:spPr>
           <a:xfrm>
-            <a:off x="2834640" y="777240"/>
-            <a:ext cx="3337560" cy="384048"/>
+            <a:off x="365760" y="822960"/>
+            <a:ext cx="1005840" cy="1691640"/>
           </a:xfrm>
           <a:prstGeom prst="rect">
             <a:avLst/>
@@ -7421,33 +7361,178 @@
           <a:p>
             <a:pPr algn="ctr"/>
             <a:r>
-              <a:rPr sz="1300" b="1">
+              <a:rPr sz="2800" b="1">
                 <a:solidFill>
                   <a:srgbClr val="FFFFFF"/>
                 </a:solidFill>
                 <a:latin typeface="Yu Gothic"/>
               </a:rPr>
-              <a:t>内容</a:t>
-            </a:r>
-          </a:p>
-        </p:txBody>
-      </p:sp>
-      <p:sp>
-        <p:nvSpPr>
-          <p:cNvPr id="8" name="Rectangle 7"/>
+              <a:t>S</a:t>
+            </a:r>
+          </a:p>
+        </p:txBody>
+      </p:sp>
+      <p:sp>
+        <p:nvSpPr>
+          <p:cNvPr id="8" name="TextBox 7"/>
+          <p:cNvSpPr txBox="1"/>
+          <p:nvPr/>
+        </p:nvSpPr>
+        <p:spPr>
+          <a:xfrm>
+            <a:off x="1508760" y="868680"/>
+            <a:ext cx="6217920" cy="365760"/>
+          </a:xfrm>
+          <a:prstGeom prst="rect">
+            <a:avLst/>
+          </a:prstGeom>
+          <a:noFill/>
+        </p:spPr>
+        <p:txBody>
+          <a:bodyPr wrap="square" anchor="t" lIns="73152" rIns="73152">
+            <a:spAutoFit/>
+          </a:bodyPr>
+          <a:lstStyle/>
+          <a:p>
+            <a:pPr algn="l"/>
+            <a:r>
+              <a:rPr sz="1500" b="1">
+                <a:solidFill>
+                  <a:srgbClr val="F06142"/>
+                </a:solidFill>
+                <a:latin typeface="Yu Gothic"/>
+              </a:rPr>
+              <a:t>資源・循環系</a:t>
+            </a:r>
+          </a:p>
+        </p:txBody>
+      </p:sp>
+      <p:sp>
+        <p:nvSpPr>
+          <p:cNvPr id="9" name="TextBox 8"/>
+          <p:cNvSpPr txBox="1"/>
+          <p:nvPr/>
+        </p:nvSpPr>
+        <p:spPr>
+          <a:xfrm>
+            <a:off x="1508760" y="1280160"/>
+            <a:ext cx="3108960" cy="1188720"/>
+          </a:xfrm>
+          <a:prstGeom prst="rect">
+            <a:avLst/>
+          </a:prstGeom>
+          <a:noFill/>
+        </p:spPr>
+        <p:txBody>
+          <a:bodyPr wrap="square" anchor="t" lIns="73152" rIns="73152">
+            <a:spAutoFit/>
+          </a:bodyPr>
+          <a:lstStyle/>
+          <a:p>
+            <a:pPr algn="l">
+              <a:spcBef>
+                <a:spcPts val="600"/>
+              </a:spcBef>
+            </a:pPr>
+            <a:r>
+              <a:rPr sz="1500" b="0">
+                <a:solidFill>
+                  <a:srgbClr val="3A2A24"/>
+                </a:solidFill>
+                <a:latin typeface="Yu Gothic"/>
+              </a:rPr>
+              <a:t>早稲田大（環境資源工学）</a:t>
+            </a:r>
+          </a:p>
+          <a:p>
+            <a:pPr algn="l">
+              <a:spcBef>
+                <a:spcPts val="600"/>
+              </a:spcBef>
+            </a:pPr>
+            <a:r>
+              <a:rPr sz="1500" b="0">
+                <a:solidFill>
+                  <a:srgbClr val="3A2A24"/>
+                </a:solidFill>
+                <a:latin typeface="Yu Gothic"/>
+              </a:rPr>
+              <a:t>東京農工大院（物質循環）</a:t>
+            </a:r>
+          </a:p>
+        </p:txBody>
+      </p:sp>
+      <p:sp>
+        <p:nvSpPr>
+          <p:cNvPr id="10" name="TextBox 9"/>
+          <p:cNvSpPr txBox="1"/>
+          <p:nvPr/>
+        </p:nvSpPr>
+        <p:spPr>
+          <a:xfrm>
+            <a:off x="4663440" y="1280160"/>
+            <a:ext cx="3200400" cy="1188720"/>
+          </a:xfrm>
+          <a:prstGeom prst="rect">
+            <a:avLst/>
+          </a:prstGeom>
+          <a:noFill/>
+        </p:spPr>
+        <p:txBody>
+          <a:bodyPr wrap="square" anchor="t" lIns="73152" rIns="73152">
+            <a:spAutoFit/>
+          </a:bodyPr>
+          <a:lstStyle/>
+          <a:p>
+            <a:pPr algn="l">
+              <a:spcBef>
+                <a:spcPts val="600"/>
+              </a:spcBef>
+            </a:pPr>
+            <a:r>
+              <a:rPr sz="1500" b="0">
+                <a:solidFill>
+                  <a:srgbClr val="3A2A24"/>
+                </a:solidFill>
+                <a:latin typeface="Yu Gothic"/>
+              </a:rPr>
+              <a:t>筑波大（地球学類）</a:t>
+            </a:r>
+          </a:p>
+          <a:p>
+            <a:pPr algn="l">
+              <a:spcBef>
+                <a:spcPts val="600"/>
+              </a:spcBef>
+            </a:pPr>
+            <a:r>
+              <a:rPr sz="1500" b="0">
+                <a:solidFill>
+                  <a:srgbClr val="3A2A24"/>
+                </a:solidFill>
+                <a:latin typeface="Yu Gothic"/>
+              </a:rPr>
+              <a:t>秋田大・茨城大（理工）</a:t>
+            </a:r>
+          </a:p>
+        </p:txBody>
+      </p:sp>
+      <p:sp>
+        <p:nvSpPr>
+          <p:cNvPr id="11" name="Rectangle 10"/>
           <p:cNvSpPr/>
           <p:nvPr/>
         </p:nvSpPr>
         <p:spPr>
           <a:xfrm>
-            <a:off x="6217920" y="777240"/>
-            <a:ext cx="2971800" cy="384048"/>
-          </a:xfrm>
-          <a:prstGeom prst="rect">
-            <a:avLst/>
-          </a:prstGeom>
-          <a:solidFill>
-            <a:srgbClr val="F06142"/>
+            <a:off x="365760" y="2606040"/>
+            <a:ext cx="7498079" cy="1691640"/>
+          </a:xfrm>
+          <a:prstGeom prst="rect">
+            <a:avLst/>
+          </a:prstGeom>
+          <a:solidFill>
+            <a:srgbClr val="FFFFFF"/>
           </a:solidFill>
           <a:ln>
             <a:noFill/>
@@ -7455,38 +7540,29 @@
           <a:effectLst/>
         </p:spPr>
         <p:txBody>
-          <a:bodyPr rtlCol="0" anchor="ctr" wrap="square" lIns="73152" rIns="73152"/>
+          <a:bodyPr rtlCol="0" anchor="ctr"/>
           <a:lstStyle/>
           <a:p>
             <a:pPr algn="ctr"/>
-            <a:r>
-              <a:rPr sz="1300" b="1">
-                <a:solidFill>
-                  <a:srgbClr val="FFFFFF"/>
-                </a:solidFill>
-                <a:latin typeface="Yu Gothic"/>
-              </a:rPr>
-              <a:t>こころの動き</a:t>
-            </a:r>
-          </a:p>
-        </p:txBody>
-      </p:sp>
-      <p:sp>
-        <p:nvSpPr>
-          <p:cNvPr id="9" name="Rectangle 8"/>
+          </a:p>
+        </p:txBody>
+      </p:sp>
+      <p:sp>
+        <p:nvSpPr>
+          <p:cNvPr id="12" name="Rectangle 11"/>
           <p:cNvSpPr/>
           <p:nvPr/>
         </p:nvSpPr>
         <p:spPr>
           <a:xfrm>
-            <a:off x="9235440" y="777240"/>
-            <a:ext cx="2514600" cy="384048"/>
-          </a:xfrm>
-          <a:prstGeom prst="rect">
-            <a:avLst/>
-          </a:prstGeom>
-          <a:solidFill>
-            <a:srgbClr val="F06142"/>
+            <a:off x="365760" y="2606040"/>
+            <a:ext cx="1005840" cy="1691640"/>
+          </a:xfrm>
+          <a:prstGeom prst="rect">
+            <a:avLst/>
+          </a:prstGeom>
+          <a:solidFill>
+            <a:srgbClr val="8C4A36"/>
           </a:solidFill>
           <a:ln>
             <a:noFill/>
@@ -7499,33 +7575,178 @@
           <a:p>
             <a:pPr algn="ctr"/>
             <a:r>
-              <a:rPr sz="1300" b="1">
+              <a:rPr sz="2800" b="1">
                 <a:solidFill>
                   <a:srgbClr val="FFFFFF"/>
                 </a:solidFill>
                 <a:latin typeface="Yu Gothic"/>
               </a:rPr>
-              <a:t>見たい行動</a:t>
-            </a:r>
-          </a:p>
-        </p:txBody>
-      </p:sp>
-      <p:sp>
-        <p:nvSpPr>
-          <p:cNvPr id="10" name="Rectangle 9"/>
+              <a:t>A</a:t>
+            </a:r>
+          </a:p>
+        </p:txBody>
+      </p:sp>
+      <p:sp>
+        <p:nvSpPr>
+          <p:cNvPr id="13" name="TextBox 12"/>
+          <p:cNvSpPr txBox="1"/>
+          <p:nvPr/>
+        </p:nvSpPr>
+        <p:spPr>
+          <a:xfrm>
+            <a:off x="1508760" y="2651760"/>
+            <a:ext cx="6217920" cy="365760"/>
+          </a:xfrm>
+          <a:prstGeom prst="rect">
+            <a:avLst/>
+          </a:prstGeom>
+          <a:noFill/>
+        </p:spPr>
+        <p:txBody>
+          <a:bodyPr wrap="square" anchor="t" lIns="73152" rIns="73152">
+            <a:spAutoFit/>
+          </a:bodyPr>
+          <a:lstStyle/>
+          <a:p>
+            <a:pPr algn="l"/>
+            <a:r>
+              <a:rPr sz="1500" b="1">
+                <a:solidFill>
+                  <a:srgbClr val="F06142"/>
+                </a:solidFill>
+                <a:latin typeface="Yu Gothic"/>
+              </a:rPr>
+              <a:t>環境・農・森林系</a:t>
+            </a:r>
+          </a:p>
+        </p:txBody>
+      </p:sp>
+      <p:sp>
+        <p:nvSpPr>
+          <p:cNvPr id="14" name="TextBox 13"/>
+          <p:cNvSpPr txBox="1"/>
+          <p:nvPr/>
+        </p:nvSpPr>
+        <p:spPr>
+          <a:xfrm>
+            <a:off x="1508760" y="3063240"/>
+            <a:ext cx="3108960" cy="1188720"/>
+          </a:xfrm>
+          <a:prstGeom prst="rect">
+            <a:avLst/>
+          </a:prstGeom>
+          <a:noFill/>
+        </p:spPr>
+        <p:txBody>
+          <a:bodyPr wrap="square" anchor="t" lIns="73152" rIns="73152">
+            <a:spAutoFit/>
+          </a:bodyPr>
+          <a:lstStyle/>
+          <a:p>
+            <a:pPr algn="l">
+              <a:spcBef>
+                <a:spcPts val="600"/>
+              </a:spcBef>
+            </a:pPr>
+            <a:r>
+              <a:rPr sz="1500" b="0">
+                <a:solidFill>
+                  <a:srgbClr val="3A2A24"/>
+                </a:solidFill>
+                <a:latin typeface="Yu Gothic"/>
+              </a:rPr>
+              <a:t>公立鳥取環境大</a:t>
+            </a:r>
+          </a:p>
+          <a:p>
+            <a:pPr algn="l">
+              <a:spcBef>
+                <a:spcPts val="600"/>
+              </a:spcBef>
+            </a:pPr>
+            <a:r>
+              <a:rPr sz="1500" b="0">
+                <a:solidFill>
+                  <a:srgbClr val="3A2A24"/>
+                </a:solidFill>
+                <a:latin typeface="Yu Gothic"/>
+              </a:rPr>
+              <a:t>信州大（農）</a:t>
+            </a:r>
+          </a:p>
+        </p:txBody>
+      </p:sp>
+      <p:sp>
+        <p:nvSpPr>
+          <p:cNvPr id="15" name="TextBox 14"/>
+          <p:cNvSpPr txBox="1"/>
+          <p:nvPr/>
+        </p:nvSpPr>
+        <p:spPr>
+          <a:xfrm>
+            <a:off x="4663440" y="3063240"/>
+            <a:ext cx="3200400" cy="1188720"/>
+          </a:xfrm>
+          <a:prstGeom prst="rect">
+            <a:avLst/>
+          </a:prstGeom>
+          <a:noFill/>
+        </p:spPr>
+        <p:txBody>
+          <a:bodyPr wrap="square" anchor="t" lIns="73152" rIns="73152">
+            <a:spAutoFit/>
+          </a:bodyPr>
+          <a:lstStyle/>
+          <a:p>
+            <a:pPr algn="l">
+              <a:spcBef>
+                <a:spcPts val="600"/>
+              </a:spcBef>
+            </a:pPr>
+            <a:r>
+              <a:rPr sz="1500" b="0">
+                <a:solidFill>
+                  <a:srgbClr val="3A2A24"/>
+                </a:solidFill>
+                <a:latin typeface="Yu Gothic"/>
+              </a:rPr>
+              <a:t>東京農業大</a:t>
+            </a:r>
+          </a:p>
+          <a:p>
+            <a:pPr algn="l">
+              <a:spcBef>
+                <a:spcPts val="600"/>
+              </a:spcBef>
+            </a:pPr>
+            <a:r>
+              <a:rPr sz="1500" b="0">
+                <a:solidFill>
+                  <a:srgbClr val="3A2A24"/>
+                </a:solidFill>
+                <a:latin typeface="Yu Gothic"/>
+              </a:rPr>
+              <a:t>宇都宮・群馬・福島の農・理工</a:t>
+            </a:r>
+          </a:p>
+        </p:txBody>
+      </p:sp>
+      <p:sp>
+        <p:nvSpPr>
+          <p:cNvPr id="16" name="Rectangle 15"/>
           <p:cNvSpPr/>
           <p:nvPr/>
         </p:nvSpPr>
         <p:spPr>
           <a:xfrm>
-            <a:off x="365760" y="1216152"/>
-            <a:ext cx="2423160" cy="914400"/>
-          </a:xfrm>
-          <a:prstGeom prst="rect">
-            <a:avLst/>
-          </a:prstGeom>
-          <a:solidFill>
-            <a:srgbClr val="FFE0D0"/>
+            <a:off x="365760" y="4389120"/>
+            <a:ext cx="7498079" cy="1691640"/>
+          </a:xfrm>
+          <a:prstGeom prst="rect">
+            <a:avLst/>
+          </a:prstGeom>
+          <a:solidFill>
+            <a:srgbClr val="FFFFFF"/>
           </a:solidFill>
           <a:ln>
             <a:noFill/>
@@ -7533,50 +7754,29 @@
           <a:effectLst/>
         </p:spPr>
         <p:txBody>
-          <a:bodyPr rtlCol="0" anchor="ctr" wrap="square" lIns="73152" rIns="73152"/>
-          <a:lstStyle/>
-          <a:p>
-            <a:pPr algn="l"/>
-            <a:r>
-              <a:rPr sz="1400" b="1">
-                <a:solidFill>
-                  <a:srgbClr val="F06142"/>
-                </a:solidFill>
-                <a:latin typeface="Yu Gothic"/>
-              </a:rPr>
-              <a:t>Part0　12月</a:t>
-            </a:r>
-          </a:p>
-          <a:p>
-            <a:pPr algn="l"/>
-            <a:r>
-              <a:rPr sz="1400" b="1">
-                <a:solidFill>
-                  <a:srgbClr val="F06142"/>
-                </a:solidFill>
-                <a:latin typeface="Yu Gothic"/>
-              </a:rPr>
-              <a:t>オンライン</a:t>
-            </a:r>
-          </a:p>
-        </p:txBody>
-      </p:sp>
-      <p:sp>
-        <p:nvSpPr>
-          <p:cNvPr id="11" name="Rectangle 10"/>
+          <a:bodyPr rtlCol="0" anchor="ctr"/>
+          <a:lstStyle/>
+          <a:p>
+            <a:pPr algn="ctr"/>
+          </a:p>
+        </p:txBody>
+      </p:sp>
+      <p:sp>
+        <p:nvSpPr>
+          <p:cNvPr id="17" name="Rectangle 16"/>
           <p:cNvSpPr/>
           <p:nvPr/>
         </p:nvSpPr>
         <p:spPr>
           <a:xfrm>
-            <a:off x="2834640" y="1216152"/>
-            <a:ext cx="3337560" cy="914400"/>
-          </a:xfrm>
-          <a:prstGeom prst="rect">
-            <a:avLst/>
-          </a:prstGeom>
-          <a:solidFill>
-            <a:srgbClr val="FFFFFF"/>
+            <a:off x="365760" y="4389120"/>
+            <a:ext cx="1005840" cy="1691640"/>
+          </a:xfrm>
+          <a:prstGeom prst="rect">
+            <a:avLst/>
+          </a:prstGeom>
+          <a:solidFill>
+            <a:srgbClr val="7A6E66"/>
           </a:solidFill>
           <a:ln>
             <a:noFill/>
@@ -7587,41 +7787,174 @@
           <a:bodyPr rtlCol="0" anchor="ctr" wrap="square" lIns="73152" rIns="73152"/>
           <a:lstStyle/>
           <a:p>
+            <a:pPr algn="ctr"/>
+            <a:r>
+              <a:rPr sz="2800" b="1">
+                <a:solidFill>
+                  <a:srgbClr val="FFFFFF"/>
+                </a:solidFill>
+                <a:latin typeface="Yu Gothic"/>
+              </a:rPr>
+              <a:t>B</a:t>
+            </a:r>
+          </a:p>
+        </p:txBody>
+      </p:sp>
+      <p:sp>
+        <p:nvSpPr>
+          <p:cNvPr id="18" name="TextBox 17"/>
+          <p:cNvSpPr txBox="1"/>
+          <p:nvPr/>
+        </p:nvSpPr>
+        <p:spPr>
+          <a:xfrm>
+            <a:off x="1508760" y="4434840"/>
+            <a:ext cx="6217920" cy="365760"/>
+          </a:xfrm>
+          <a:prstGeom prst="rect">
+            <a:avLst/>
+          </a:prstGeom>
+          <a:noFill/>
+        </p:spPr>
+        <p:txBody>
+          <a:bodyPr wrap="square" anchor="t" lIns="73152" rIns="73152">
+            <a:spAutoFit/>
+          </a:bodyPr>
+          <a:lstStyle/>
+          <a:p>
             <a:pPr algn="l"/>
             <a:r>
-              <a:rPr sz="1400" b="0">
-                <a:solidFill>
-                  <a:srgbClr val="3A2A24"/>
-                </a:solidFill>
-                <a:latin typeface="Yu Gothic"/>
-              </a:rPr>
-              <a:t>銅業界の課題</a:t>
-            </a:r>
-          </a:p>
-          <a:p>
-            <a:pPr algn="l"/>
-            <a:r>
-              <a:rPr sz="1400" b="0">
-                <a:solidFill>
-                  <a:srgbClr val="3A2A24"/>
-                </a:solidFill>
-                <a:latin typeface="Yu Gothic"/>
-              </a:rPr>
-              <a:t>価値循環モデル</a:t>
-            </a:r>
-          </a:p>
-        </p:txBody>
-      </p:sp>
-      <p:sp>
-        <p:nvSpPr>
-          <p:cNvPr id="12" name="Rectangle 11"/>
+              <a:rPr sz="1500" b="1">
+                <a:solidFill>
+                  <a:srgbClr val="F06142"/>
+                </a:solidFill>
+                <a:latin typeface="Yu Gothic"/>
+              </a:rPr>
+              <a:t>理系私立・公立</a:t>
+            </a:r>
+          </a:p>
+        </p:txBody>
+      </p:sp>
+      <p:sp>
+        <p:nvSpPr>
+          <p:cNvPr id="19" name="TextBox 18"/>
+          <p:cNvSpPr txBox="1"/>
+          <p:nvPr/>
+        </p:nvSpPr>
+        <p:spPr>
+          <a:xfrm>
+            <a:off x="1508760" y="4846320"/>
+            <a:ext cx="3108960" cy="1188720"/>
+          </a:xfrm>
+          <a:prstGeom prst="rect">
+            <a:avLst/>
+          </a:prstGeom>
+          <a:noFill/>
+        </p:spPr>
+        <p:txBody>
+          <a:bodyPr wrap="square" anchor="t" lIns="73152" rIns="73152">
+            <a:spAutoFit/>
+          </a:bodyPr>
+          <a:lstStyle/>
+          <a:p>
+            <a:pPr algn="l">
+              <a:spcBef>
+                <a:spcPts val="600"/>
+              </a:spcBef>
+            </a:pPr>
+            <a:r>
+              <a:rPr sz="1500" b="0">
+                <a:solidFill>
+                  <a:srgbClr val="3A2A24"/>
+                </a:solidFill>
+                <a:latin typeface="Yu Gothic"/>
+              </a:rPr>
+              <a:t>都立大・横浜市大</a:t>
+            </a:r>
+          </a:p>
+          <a:p>
+            <a:pPr algn="l">
+              <a:spcBef>
+                <a:spcPts val="600"/>
+              </a:spcBef>
+            </a:pPr>
+            <a:r>
+              <a:rPr sz="1500" b="0">
+                <a:solidFill>
+                  <a:srgbClr val="3A2A24"/>
+                </a:solidFill>
+                <a:latin typeface="Yu Gothic"/>
+              </a:rPr>
+              <a:t>長野県立大・諏訪東京理科</a:t>
+            </a:r>
+          </a:p>
+        </p:txBody>
+      </p:sp>
+      <p:sp>
+        <p:nvSpPr>
+          <p:cNvPr id="20" name="TextBox 19"/>
+          <p:cNvSpPr txBox="1"/>
+          <p:nvPr/>
+        </p:nvSpPr>
+        <p:spPr>
+          <a:xfrm>
+            <a:off x="4663440" y="4846320"/>
+            <a:ext cx="3200400" cy="1188720"/>
+          </a:xfrm>
+          <a:prstGeom prst="rect">
+            <a:avLst/>
+          </a:prstGeom>
+          <a:noFill/>
+        </p:spPr>
+        <p:txBody>
+          <a:bodyPr wrap="square" anchor="t" lIns="73152" rIns="73152">
+            <a:spAutoFit/>
+          </a:bodyPr>
+          <a:lstStyle/>
+          <a:p>
+            <a:pPr algn="l">
+              <a:spcBef>
+                <a:spcPts val="600"/>
+              </a:spcBef>
+            </a:pPr>
+            <a:r>
+              <a:rPr sz="1500" b="0">
+                <a:solidFill>
+                  <a:srgbClr val="3A2A24"/>
+                </a:solidFill>
+                <a:latin typeface="Yu Gothic"/>
+              </a:rPr>
+              <a:t>明治・芝浦工・電機大</a:t>
+            </a:r>
+          </a:p>
+          <a:p>
+            <a:pPr algn="l">
+              <a:spcBef>
+                <a:spcPts val="600"/>
+              </a:spcBef>
+            </a:pPr>
+            <a:r>
+              <a:rPr sz="1500" b="0">
+                <a:solidFill>
+                  <a:srgbClr val="3A2A24"/>
+                </a:solidFill>
+                <a:latin typeface="Yu Gothic"/>
+              </a:rPr>
+              <a:t>日大・法政・東洋</a:t>
+            </a:r>
+          </a:p>
+        </p:txBody>
+      </p:sp>
+      <p:sp>
+        <p:nvSpPr>
+          <p:cNvPr id="21" name="Rectangle 20"/>
           <p:cNvSpPr/>
           <p:nvPr/>
         </p:nvSpPr>
         <p:spPr>
           <a:xfrm>
-            <a:off x="6217920" y="1216152"/>
-            <a:ext cx="2971800" cy="914400"/>
+            <a:off x="8046720" y="822960"/>
+            <a:ext cx="3749039" cy="2377440"/>
           </a:xfrm>
           <a:prstGeom prst="rect">
             <a:avLst/>
@@ -7635,32 +7968,129 @@
           <a:effectLst/>
         </p:spPr>
         <p:txBody>
-          <a:bodyPr rtlCol="0" anchor="ctr" wrap="square" lIns="73152" rIns="73152"/>
+          <a:bodyPr rtlCol="0" anchor="ctr"/>
+          <a:lstStyle/>
+          <a:p>
+            <a:pPr algn="ctr"/>
+          </a:p>
+        </p:txBody>
+      </p:sp>
+      <p:sp>
+        <p:nvSpPr>
+          <p:cNvPr id="22" name="TextBox 21"/>
+          <p:cNvSpPr txBox="1"/>
+          <p:nvPr/>
+        </p:nvSpPr>
+        <p:spPr>
+          <a:xfrm>
+            <a:off x="8046720" y="868680"/>
+            <a:ext cx="3749039" cy="411480"/>
+          </a:xfrm>
+          <a:prstGeom prst="rect">
+            <a:avLst/>
+          </a:prstGeom>
+          <a:noFill/>
+        </p:spPr>
+        <p:txBody>
+          <a:bodyPr wrap="square" anchor="t" lIns="73152" rIns="73152">
+            <a:spAutoFit/>
+          </a:bodyPr>
           <a:lstStyle/>
           <a:p>
             <a:pPr algn="l"/>
             <a:r>
+              <a:rPr sz="1500" b="1">
+                <a:solidFill>
+                  <a:srgbClr val="F06142"/>
+                </a:solidFill>
+                <a:latin typeface="Yu Gothic"/>
+              </a:rPr>
+              <a:t>日程</a:t>
+            </a:r>
+          </a:p>
+        </p:txBody>
+      </p:sp>
+      <p:sp>
+        <p:nvSpPr>
+          <p:cNvPr id="23" name="TextBox 22"/>
+          <p:cNvSpPr txBox="1"/>
+          <p:nvPr/>
+        </p:nvSpPr>
+        <p:spPr>
+          <a:xfrm>
+            <a:off x="8046720" y="1325880"/>
+            <a:ext cx="3749039" cy="1828800"/>
+          </a:xfrm>
+          <a:prstGeom prst="rect">
+            <a:avLst/>
+          </a:prstGeom>
+          <a:noFill/>
+        </p:spPr>
+        <p:txBody>
+          <a:bodyPr wrap="square" anchor="t" lIns="73152" rIns="73152">
+            <a:spAutoFit/>
+          </a:bodyPr>
+          <a:lstStyle/>
+          <a:p>
+            <a:pPr algn="l">
+              <a:spcBef>
+                <a:spcPts val="400"/>
+              </a:spcBef>
+            </a:pPr>
+            <a:r>
               <a:rPr sz="1400" b="0">
                 <a:solidFill>
                   <a:srgbClr val="3A2A24"/>
                 </a:solidFill>
                 <a:latin typeface="Yu Gothic"/>
               </a:rPr>
-              <a:t>「銅は有限なんだ…！」</a:t>
-            </a:r>
-          </a:p>
-        </p:txBody>
-      </p:sp>
-      <p:sp>
-        <p:nvSpPr>
-          <p:cNvPr id="13" name="Rectangle 12"/>
+              <a:t>オンライン：12月中旬</a:t>
+            </a:r>
+          </a:p>
+          <a:p>
+            <a:pPr algn="l">
+              <a:spcBef>
+                <a:spcPts val="400"/>
+              </a:spcBef>
+            </a:pPr>
+            <a:r>
+              <a:rPr sz="1400" b="0">
+                <a:solidFill>
+                  <a:srgbClr val="3A2A24"/>
+                </a:solidFill>
+                <a:latin typeface="Yu Gothic"/>
+              </a:rPr>
+              <a:t>現場訪問：1月上旬〜中旬</a:t>
+            </a:r>
+          </a:p>
+          <a:p>
+            <a:pPr algn="l">
+              <a:spcBef>
+                <a:spcPts val="600"/>
+              </a:spcBef>
+            </a:pPr>
+            <a:r>
+              <a:rPr sz="1200" b="0">
+                <a:solidFill>
+                  <a:srgbClr val="7A6E66"/>
+                </a:solidFill>
+                <a:latin typeface="Yu Gothic"/>
+              </a:rPr>
+              <a:t>期末・冬季休業を避ける</a:t>
+            </a:r>
+          </a:p>
+        </p:txBody>
+      </p:sp>
+      <p:sp>
+        <p:nvSpPr>
+          <p:cNvPr id="24" name="Rectangle 23"/>
           <p:cNvSpPr/>
           <p:nvPr/>
         </p:nvSpPr>
         <p:spPr>
           <a:xfrm>
-            <a:off x="9235440" y="1216152"/>
-            <a:ext cx="2514600" cy="914400"/>
+            <a:off x="8046720" y="3337560"/>
+            <a:ext cx="3749039" cy="2926080"/>
           </a:xfrm>
           <a:prstGeom prst="rect">
             <a:avLst/>
@@ -7674,100 +8104,91 @@
           <a:effectLst/>
         </p:spPr>
         <p:txBody>
-          <a:bodyPr rtlCol="0" anchor="ctr" wrap="square" lIns="73152" rIns="73152"/>
+          <a:bodyPr rtlCol="0" anchor="ctr"/>
+          <a:lstStyle/>
+          <a:p>
+            <a:pPr algn="ctr"/>
+          </a:p>
+        </p:txBody>
+      </p:sp>
+      <p:sp>
+        <p:nvSpPr>
+          <p:cNvPr id="25" name="TextBox 24"/>
+          <p:cNvSpPr txBox="1"/>
+          <p:nvPr/>
+        </p:nvSpPr>
+        <p:spPr>
+          <a:xfrm>
+            <a:off x="8046720" y="3383279"/>
+            <a:ext cx="3749039" cy="411480"/>
+          </a:xfrm>
+          <a:prstGeom prst="rect">
+            <a:avLst/>
+          </a:prstGeom>
+          <a:noFill/>
+        </p:spPr>
+        <p:txBody>
+          <a:bodyPr wrap="square" anchor="t" lIns="73152" rIns="73152">
+            <a:spAutoFit/>
+          </a:bodyPr>
           <a:lstStyle/>
           <a:p>
             <a:pPr algn="l"/>
             <a:r>
+              <a:rPr sz="1500" b="1">
+                <a:solidFill>
+                  <a:srgbClr val="F06142"/>
+                </a:solidFill>
+                <a:latin typeface="Yu Gothic"/>
+              </a:rPr>
+              <a:t>visions検索基準</a:t>
+            </a:r>
+          </a:p>
+        </p:txBody>
+      </p:sp>
+      <p:sp>
+        <p:nvSpPr>
+          <p:cNvPr id="26" name="TextBox 25"/>
+          <p:cNvSpPr txBox="1"/>
+          <p:nvPr/>
+        </p:nvSpPr>
+        <p:spPr>
+          <a:xfrm>
+            <a:off x="8046720" y="3840480"/>
+            <a:ext cx="3749039" cy="2377440"/>
+          </a:xfrm>
+          <a:prstGeom prst="rect">
+            <a:avLst/>
+          </a:prstGeom>
+          <a:noFill/>
+        </p:spPr>
+        <p:txBody>
+          <a:bodyPr wrap="square" anchor="t" lIns="73152" rIns="73152">
+            <a:spAutoFit/>
+          </a:bodyPr>
+          <a:lstStyle/>
+          <a:p>
+            <a:pPr algn="l">
+              <a:spcBef>
+                <a:spcPts val="400"/>
+              </a:spcBef>
+            </a:pPr>
+            <a:r>
               <a:rPr sz="1400" b="0">
                 <a:solidFill>
                   <a:srgbClr val="3A2A24"/>
                 </a:solidFill>
                 <a:latin typeface="Yu Gothic"/>
               </a:rPr>
-              <a:t>事前課題・質問</a:t>
-            </a:r>
-          </a:p>
-        </p:txBody>
-      </p:sp>
-      <p:sp>
-        <p:nvSpPr>
-          <p:cNvPr id="14" name="Rectangle 13"/>
-          <p:cNvSpPr/>
-          <p:nvPr/>
-        </p:nvSpPr>
-        <p:spPr>
-          <a:xfrm>
-            <a:off x="365760" y="2194560"/>
-            <a:ext cx="2423160" cy="914400"/>
-          </a:xfrm>
-          <a:prstGeom prst="rect">
-            <a:avLst/>
-          </a:prstGeom>
-          <a:solidFill>
-            <a:srgbClr val="FFE0D0"/>
-          </a:solidFill>
-          <a:ln>
-            <a:noFill/>
-          </a:ln>
-          <a:effectLst/>
-        </p:spPr>
-        <p:txBody>
-          <a:bodyPr rtlCol="0" anchor="ctr" wrap="square" lIns="73152" rIns="73152"/>
-          <a:lstStyle/>
-          <a:p>
-            <a:pPr algn="l"/>
-            <a:r>
-              <a:rPr sz="1400" b="1">
-                <a:solidFill>
-                  <a:srgbClr val="F06142"/>
-                </a:solidFill>
-                <a:latin typeface="Yu Gothic"/>
-              </a:rPr>
-              <a:t>Part1　12月中旬</a:t>
-            </a:r>
-          </a:p>
-          <a:p>
-            <a:pPr algn="l"/>
-            <a:r>
-              <a:rPr sz="1400" b="1">
-                <a:solidFill>
-                  <a:srgbClr val="F06142"/>
-                </a:solidFill>
-                <a:latin typeface="Yu Gothic"/>
-              </a:rPr>
-              <a:t>関係者トーク</a:t>
-            </a:r>
-          </a:p>
-        </p:txBody>
-      </p:sp>
-      <p:sp>
-        <p:nvSpPr>
-          <p:cNvPr id="15" name="Rectangle 14"/>
-          <p:cNvSpPr/>
-          <p:nvPr/>
-        </p:nvSpPr>
-        <p:spPr>
-          <a:xfrm>
-            <a:off x="2834640" y="2194560"/>
-            <a:ext cx="3337560" cy="914400"/>
-          </a:xfrm>
-          <a:prstGeom prst="rect">
-            <a:avLst/>
-          </a:prstGeom>
-          <a:solidFill>
-            <a:srgbClr val="FFFFFF"/>
-          </a:solidFill>
-          <a:ln>
-            <a:noFill/>
-          </a:ln>
-          <a:effectLst/>
-        </p:spPr>
-        <p:txBody>
-          <a:bodyPr rtlCol="0" anchor="ctr" wrap="square" lIns="73152" rIns="73152"/>
-          <a:lstStyle/>
-          <a:p>
-            <a:pPr algn="l"/>
+              <a:t>自然と共生・循環型社会</a:t>
+            </a:r>
+          </a:p>
+          <a:p>
+            <a:pPr algn="l">
+              <a:spcBef>
+                <a:spcPts val="400"/>
+              </a:spcBef>
+            </a:pPr>
             <a:r>
               <a:rPr sz="1400" b="0">
                 <a:solidFill>
@@ -7775,11 +8196,15 @@
                 </a:solidFill>
                 <a:latin typeface="Yu Gothic"/>
               </a:rPr>
-              <a:t>産廃・加工・精錬所の</a:t>
-            </a:r>
-          </a:p>
-          <a:p>
-            <a:pPr algn="l"/>
+              <a:t>積み重ねる／人の役に立つ</a:t>
+            </a:r>
+          </a:p>
+          <a:p>
+            <a:pPr algn="l">
+              <a:spcBef>
+                <a:spcPts val="400"/>
+              </a:spcBef>
+            </a:pPr>
             <a:r>
               <a:rPr sz="1400" b="0">
                 <a:solidFill>
@@ -7787,38 +8212,15 @@
                 </a:solidFill>
                 <a:latin typeface="Yu Gothic"/>
               </a:rPr>
-              <a:t>方に話を聞く</a:t>
-            </a:r>
-          </a:p>
-        </p:txBody>
-      </p:sp>
-      <p:sp>
-        <p:nvSpPr>
-          <p:cNvPr id="16" name="Rectangle 15"/>
-          <p:cNvSpPr/>
-          <p:nvPr/>
-        </p:nvSpPr>
-        <p:spPr>
-          <a:xfrm>
-            <a:off x="6217920" y="2194560"/>
-            <a:ext cx="2971800" cy="914400"/>
-          </a:xfrm>
-          <a:prstGeom prst="rect">
-            <a:avLst/>
-          </a:prstGeom>
-          <a:solidFill>
-            <a:srgbClr val="FFFFFF"/>
-          </a:solidFill>
-          <a:ln>
-            <a:noFill/>
-          </a:ln>
-          <a:effectLst/>
-        </p:spPr>
-        <p:txBody>
-          <a:bodyPr rtlCol="0" anchor="ctr" wrap="square" lIns="73152" rIns="73152"/>
-          <a:lstStyle/>
-          <a:p>
-            <a:pPr algn="l"/>
+              <a:t>環境・資源・物質・農</a:t>
+            </a:r>
+          </a:p>
+          <a:p>
+            <a:pPr algn="l">
+              <a:spcBef>
+                <a:spcPts val="400"/>
+              </a:spcBef>
+            </a:pPr>
             <a:r>
               <a:rPr sz="1400" b="0">
                 <a:solidFill>
@@ -7826,538 +8228,7 @@
                 </a:solidFill>
                 <a:latin typeface="Yu Gothic"/>
               </a:rPr>
-              <a:t>「立場で景色が違う」</a:t>
-            </a:r>
-          </a:p>
-        </p:txBody>
-      </p:sp>
-      <p:sp>
-        <p:nvSpPr>
-          <p:cNvPr id="17" name="Rectangle 16"/>
-          <p:cNvSpPr/>
-          <p:nvPr/>
-        </p:nvSpPr>
-        <p:spPr>
-          <a:xfrm>
-            <a:off x="9235440" y="2194560"/>
-            <a:ext cx="2514600" cy="914400"/>
-          </a:xfrm>
-          <a:prstGeom prst="rect">
-            <a:avLst/>
-          </a:prstGeom>
-          <a:solidFill>
-            <a:srgbClr val="FFFFFF"/>
-          </a:solidFill>
-          <a:ln>
-            <a:noFill/>
-          </a:ln>
-          <a:effectLst/>
-        </p:spPr>
-        <p:txBody>
-          <a:bodyPr rtlCol="0" anchor="ctr" wrap="square" lIns="73152" rIns="73152"/>
-          <a:lstStyle/>
-          <a:p>
-            <a:pPr algn="l"/>
-            <a:r>
-              <a:rPr sz="1400" b="0">
-                <a:solidFill>
-                  <a:srgbClr val="3A2A24"/>
-                </a:solidFill>
-                <a:latin typeface="Yu Gothic"/>
-              </a:rPr>
-              <a:t>聞く力</a:t>
-            </a:r>
-          </a:p>
-        </p:txBody>
-      </p:sp>
-      <p:sp>
-        <p:nvSpPr>
-          <p:cNvPr id="18" name="Rectangle 17"/>
-          <p:cNvSpPr/>
-          <p:nvPr/>
-        </p:nvSpPr>
-        <p:spPr>
-          <a:xfrm>
-            <a:off x="365760" y="3172968"/>
-            <a:ext cx="2423160" cy="914400"/>
-          </a:xfrm>
-          <a:prstGeom prst="rect">
-            <a:avLst/>
-          </a:prstGeom>
-          <a:solidFill>
-            <a:srgbClr val="FFE0D0"/>
-          </a:solidFill>
-          <a:ln>
-            <a:noFill/>
-          </a:ln>
-          <a:effectLst/>
-        </p:spPr>
-        <p:txBody>
-          <a:bodyPr rtlCol="0" anchor="ctr" wrap="square" lIns="73152" rIns="73152"/>
-          <a:lstStyle/>
-          <a:p>
-            <a:pPr algn="l"/>
-            <a:r>
-              <a:rPr sz="1400" b="1">
-                <a:solidFill>
-                  <a:srgbClr val="F06142"/>
-                </a:solidFill>
-                <a:latin typeface="Yu Gothic"/>
-              </a:rPr>
-              <a:t>Part2　1月</a:t>
-            </a:r>
-          </a:p>
-          <a:p>
-            <a:pPr algn="l"/>
-            <a:r>
-              <a:rPr sz="1400" b="1">
-                <a:solidFill>
-                  <a:srgbClr val="F06142"/>
-                </a:solidFill>
-                <a:latin typeface="Yu Gothic"/>
-              </a:rPr>
-              <a:t>工場見学</a:t>
-            </a:r>
-          </a:p>
-        </p:txBody>
-      </p:sp>
-      <p:sp>
-        <p:nvSpPr>
-          <p:cNvPr id="19" name="Rectangle 18"/>
-          <p:cNvSpPr/>
-          <p:nvPr/>
-        </p:nvSpPr>
-        <p:spPr>
-          <a:xfrm>
-            <a:off x="2834640" y="3172968"/>
-            <a:ext cx="3337560" cy="914400"/>
-          </a:xfrm>
-          <a:prstGeom prst="rect">
-            <a:avLst/>
-          </a:prstGeom>
-          <a:solidFill>
-            <a:srgbClr val="FFFFFF"/>
-          </a:solidFill>
-          <a:ln>
-            <a:noFill/>
-          </a:ln>
-          <a:effectLst/>
-        </p:spPr>
-        <p:txBody>
-          <a:bodyPr rtlCol="0" anchor="ctr" wrap="square" lIns="73152" rIns="73152"/>
-          <a:lstStyle/>
-          <a:p>
-            <a:pPr algn="l"/>
-            <a:r>
-              <a:rPr sz="1400" b="0">
-                <a:solidFill>
-                  <a:srgbClr val="3A2A24"/>
-                </a:solidFill>
-                <a:latin typeface="Yu Gothic"/>
-              </a:rPr>
-              <a:t>もったいない</a:t>
-            </a:r>
-          </a:p>
-          <a:p>
-            <a:pPr algn="l"/>
-            <a:r>
-              <a:rPr sz="1400" b="0">
-                <a:solidFill>
-                  <a:srgbClr val="3A2A24"/>
-                </a:solidFill>
-                <a:latin typeface="Yu Gothic"/>
-              </a:rPr>
-              <a:t>ポイントを探す</a:t>
-            </a:r>
-          </a:p>
-        </p:txBody>
-      </p:sp>
-      <p:sp>
-        <p:nvSpPr>
-          <p:cNvPr id="20" name="Rectangle 19"/>
-          <p:cNvSpPr/>
-          <p:nvPr/>
-        </p:nvSpPr>
-        <p:spPr>
-          <a:xfrm>
-            <a:off x="6217920" y="3172968"/>
-            <a:ext cx="2971800" cy="914400"/>
-          </a:xfrm>
-          <a:prstGeom prst="rect">
-            <a:avLst/>
-          </a:prstGeom>
-          <a:solidFill>
-            <a:srgbClr val="FFFFFF"/>
-          </a:solidFill>
-          <a:ln>
-            <a:noFill/>
-          </a:ln>
-          <a:effectLst/>
-        </p:spPr>
-        <p:txBody>
-          <a:bodyPr rtlCol="0" anchor="ctr" wrap="square" lIns="73152" rIns="73152"/>
-          <a:lstStyle/>
-          <a:p>
-            <a:pPr algn="l"/>
-            <a:r>
-              <a:rPr sz="1400" b="0">
-                <a:solidFill>
-                  <a:srgbClr val="3A2A24"/>
-                </a:solidFill>
-                <a:latin typeface="Yu Gothic"/>
-              </a:rPr>
-              <a:t>「どこで回せる？」</a:t>
-            </a:r>
-          </a:p>
-        </p:txBody>
-      </p:sp>
-      <p:sp>
-        <p:nvSpPr>
-          <p:cNvPr id="21" name="Rectangle 20"/>
-          <p:cNvSpPr/>
-          <p:nvPr/>
-        </p:nvSpPr>
-        <p:spPr>
-          <a:xfrm>
-            <a:off x="9235440" y="3172968"/>
-            <a:ext cx="2514600" cy="914400"/>
-          </a:xfrm>
-          <a:prstGeom prst="rect">
-            <a:avLst/>
-          </a:prstGeom>
-          <a:solidFill>
-            <a:srgbClr val="FFFFFF"/>
-          </a:solidFill>
-          <a:ln>
-            <a:noFill/>
-          </a:ln>
-          <a:effectLst/>
-        </p:spPr>
-        <p:txBody>
-          <a:bodyPr rtlCol="0" anchor="ctr" wrap="square" lIns="73152" rIns="73152"/>
-          <a:lstStyle/>
-          <a:p>
-            <a:pPr algn="l"/>
-            <a:r>
-              <a:rPr sz="1400" b="0">
-                <a:solidFill>
-                  <a:srgbClr val="3A2A24"/>
-                </a:solidFill>
-                <a:latin typeface="Yu Gothic"/>
-              </a:rPr>
-              <a:t>観察の細かさ</a:t>
-            </a:r>
-          </a:p>
-        </p:txBody>
-      </p:sp>
-      <p:sp>
-        <p:nvSpPr>
-          <p:cNvPr id="22" name="Rectangle 21"/>
-          <p:cNvSpPr/>
-          <p:nvPr/>
-        </p:nvSpPr>
-        <p:spPr>
-          <a:xfrm>
-            <a:off x="365760" y="4151376"/>
-            <a:ext cx="2423160" cy="914400"/>
-          </a:xfrm>
-          <a:prstGeom prst="rect">
-            <a:avLst/>
-          </a:prstGeom>
-          <a:solidFill>
-            <a:srgbClr val="FFE0D0"/>
-          </a:solidFill>
-          <a:ln>
-            <a:noFill/>
-          </a:ln>
-          <a:effectLst/>
-        </p:spPr>
-        <p:txBody>
-          <a:bodyPr rtlCol="0" anchor="ctr" wrap="square" lIns="73152" rIns="73152"/>
-          <a:lstStyle/>
-          <a:p>
-            <a:pPr algn="l"/>
-            <a:r>
-              <a:rPr sz="1400" b="1">
-                <a:solidFill>
-                  <a:srgbClr val="F06142"/>
-                </a:solidFill>
-                <a:latin typeface="Yu Gothic"/>
-              </a:rPr>
-              <a:t>ディスカッション</a:t>
-            </a:r>
-          </a:p>
-        </p:txBody>
-      </p:sp>
-      <p:sp>
-        <p:nvSpPr>
-          <p:cNvPr id="23" name="Rectangle 22"/>
-          <p:cNvSpPr/>
-          <p:nvPr/>
-        </p:nvSpPr>
-        <p:spPr>
-          <a:xfrm>
-            <a:off x="2834640" y="4151376"/>
-            <a:ext cx="3337560" cy="914400"/>
-          </a:xfrm>
-          <a:prstGeom prst="rect">
-            <a:avLst/>
-          </a:prstGeom>
-          <a:solidFill>
-            <a:srgbClr val="FFFFFF"/>
-          </a:solidFill>
-          <a:ln>
-            <a:noFill/>
-          </a:ln>
-          <a:effectLst/>
-        </p:spPr>
-        <p:txBody>
-          <a:bodyPr rtlCol="0" anchor="ctr" wrap="square" lIns="73152" rIns="73152"/>
-          <a:lstStyle/>
-          <a:p>
-            <a:pPr algn="l"/>
-            <a:r>
-              <a:rPr sz="1400" b="0">
-                <a:solidFill>
-                  <a:srgbClr val="3A2A24"/>
-                </a:solidFill>
-                <a:latin typeface="Yu Gothic"/>
-              </a:rPr>
-              <a:t>改善案を発表</a:t>
-            </a:r>
-          </a:p>
-        </p:txBody>
-      </p:sp>
-      <p:sp>
-        <p:nvSpPr>
-          <p:cNvPr id="24" name="Rectangle 23"/>
-          <p:cNvSpPr/>
-          <p:nvPr/>
-        </p:nvSpPr>
-        <p:spPr>
-          <a:xfrm>
-            <a:off x="6217920" y="4151376"/>
-            <a:ext cx="2971800" cy="914400"/>
-          </a:xfrm>
-          <a:prstGeom prst="rect">
-            <a:avLst/>
-          </a:prstGeom>
-          <a:solidFill>
-            <a:srgbClr val="FFFFFF"/>
-          </a:solidFill>
-          <a:ln>
-            <a:noFill/>
-          </a:ln>
-          <a:effectLst/>
-        </p:spPr>
-        <p:txBody>
-          <a:bodyPr rtlCol="0" anchor="ctr" wrap="square" lIns="73152" rIns="73152"/>
-          <a:lstStyle/>
-          <a:p>
-            <a:pPr algn="l"/>
-            <a:r>
-              <a:rPr sz="1400" b="0">
-                <a:solidFill>
-                  <a:srgbClr val="3A2A24"/>
-                </a:solidFill>
-                <a:latin typeface="Yu Gothic"/>
-              </a:rPr>
-              <a:t>「回し方を提案したい」</a:t>
-            </a:r>
-          </a:p>
-        </p:txBody>
-      </p:sp>
-      <p:sp>
-        <p:nvSpPr>
-          <p:cNvPr id="25" name="Rectangle 24"/>
-          <p:cNvSpPr/>
-          <p:nvPr/>
-        </p:nvSpPr>
-        <p:spPr>
-          <a:xfrm>
-            <a:off x="9235440" y="4151376"/>
-            <a:ext cx="2514600" cy="914400"/>
-          </a:xfrm>
-          <a:prstGeom prst="rect">
-            <a:avLst/>
-          </a:prstGeom>
-          <a:solidFill>
-            <a:srgbClr val="FFFFFF"/>
-          </a:solidFill>
-          <a:ln>
-            <a:noFill/>
-          </a:ln>
-          <a:effectLst/>
-        </p:spPr>
-        <p:txBody>
-          <a:bodyPr rtlCol="0" anchor="ctr" wrap="square" lIns="73152" rIns="73152"/>
-          <a:lstStyle/>
-          <a:p>
-            <a:pPr algn="l"/>
-            <a:r>
-              <a:rPr sz="1400" b="0">
-                <a:solidFill>
-                  <a:srgbClr val="3A2A24"/>
-                </a:solidFill>
-                <a:latin typeface="Yu Gothic"/>
-              </a:rPr>
-              <a:t>仮説と巻き込み</a:t>
-            </a:r>
-          </a:p>
-        </p:txBody>
-      </p:sp>
-      <p:sp>
-        <p:nvSpPr>
-          <p:cNvPr id="26" name="Rectangle 25"/>
-          <p:cNvSpPr/>
-          <p:nvPr/>
-        </p:nvSpPr>
-        <p:spPr>
-          <a:xfrm>
-            <a:off x="365760" y="5129784"/>
-            <a:ext cx="2423160" cy="914400"/>
-          </a:xfrm>
-          <a:prstGeom prst="rect">
-            <a:avLst/>
-          </a:prstGeom>
-          <a:solidFill>
-            <a:srgbClr val="FFE0D0"/>
-          </a:solidFill>
-          <a:ln>
-            <a:noFill/>
-          </a:ln>
-          <a:effectLst/>
-        </p:spPr>
-        <p:txBody>
-          <a:bodyPr rtlCol="0" anchor="ctr" wrap="square" lIns="73152" rIns="73152"/>
-          <a:lstStyle/>
-          <a:p>
-            <a:pPr algn="l"/>
-            <a:r>
-              <a:rPr sz="1400" b="1">
-                <a:solidFill>
-                  <a:srgbClr val="F06142"/>
-                </a:solidFill>
-                <a:latin typeface="Yu Gothic"/>
-              </a:rPr>
-              <a:t>社長・社内懇親会</a:t>
-            </a:r>
-          </a:p>
-        </p:txBody>
-      </p:sp>
-      <p:sp>
-        <p:nvSpPr>
-          <p:cNvPr id="27" name="Rectangle 26"/>
-          <p:cNvSpPr/>
-          <p:nvPr/>
-        </p:nvSpPr>
-        <p:spPr>
-          <a:xfrm>
-            <a:off x="2834640" y="5129784"/>
-            <a:ext cx="3337560" cy="914400"/>
-          </a:xfrm>
-          <a:prstGeom prst="rect">
-            <a:avLst/>
-          </a:prstGeom>
-          <a:solidFill>
-            <a:srgbClr val="FFFFFF"/>
-          </a:solidFill>
-          <a:ln>
-            <a:noFill/>
-          </a:ln>
-          <a:effectLst/>
-        </p:spPr>
-        <p:txBody>
-          <a:bodyPr rtlCol="0" anchor="ctr" wrap="square" lIns="73152" rIns="73152"/>
-          <a:lstStyle/>
-          <a:p>
-            <a:pPr algn="l"/>
-            <a:r>
-              <a:rPr sz="1400" b="0">
-                <a:solidFill>
-                  <a:srgbClr val="3A2A24"/>
-                </a:solidFill>
-                <a:latin typeface="Yu Gothic"/>
-              </a:rPr>
-              <a:t>社長と問いを深める</a:t>
-            </a:r>
-          </a:p>
-        </p:txBody>
-      </p:sp>
-      <p:sp>
-        <p:nvSpPr>
-          <p:cNvPr id="28" name="Rectangle 27"/>
-          <p:cNvSpPr/>
-          <p:nvPr/>
-        </p:nvSpPr>
-        <p:spPr>
-          <a:xfrm>
-            <a:off x="6217920" y="5129784"/>
-            <a:ext cx="2971800" cy="914400"/>
-          </a:xfrm>
-          <a:prstGeom prst="rect">
-            <a:avLst/>
-          </a:prstGeom>
-          <a:solidFill>
-            <a:srgbClr val="FFFFFF"/>
-          </a:solidFill>
-          <a:ln>
-            <a:noFill/>
-          </a:ln>
-          <a:effectLst/>
-        </p:spPr>
-        <p:txBody>
-          <a:bodyPr rtlCol="0" anchor="ctr" wrap="square" lIns="73152" rIns="73152"/>
-          <a:lstStyle/>
-          <a:p>
-            <a:pPr algn="l"/>
-            <a:r>
-              <a:rPr sz="1400" b="0">
-                <a:solidFill>
-                  <a:srgbClr val="3A2A24"/>
-                </a:solidFill>
-                <a:latin typeface="Yu Gothic"/>
-              </a:rPr>
-              <a:t>「問い続けたい」</a:t>
-            </a:r>
-          </a:p>
-        </p:txBody>
-      </p:sp>
-      <p:sp>
-        <p:nvSpPr>
-          <p:cNvPr id="29" name="Rectangle 28"/>
-          <p:cNvSpPr/>
-          <p:nvPr/>
-        </p:nvSpPr>
-        <p:spPr>
-          <a:xfrm>
-            <a:off x="9235440" y="5129784"/>
-            <a:ext cx="2514600" cy="914400"/>
-          </a:xfrm>
-          <a:prstGeom prst="rect">
-            <a:avLst/>
-          </a:prstGeom>
-          <a:solidFill>
-            <a:srgbClr val="FFFFFF"/>
-          </a:solidFill>
-          <a:ln>
-            <a:noFill/>
-          </a:ln>
-          <a:effectLst/>
-        </p:spPr>
-        <p:txBody>
-          <a:bodyPr rtlCol="0" anchor="ctr" wrap="square" lIns="73152" rIns="73152"/>
-          <a:lstStyle/>
-          <a:p>
-            <a:pPr algn="l"/>
-            <a:r>
-              <a:rPr sz="1400" b="0">
-                <a:solidFill>
-                  <a:srgbClr val="3A2A24"/>
-                </a:solidFill>
-                <a:latin typeface="Yu Gothic"/>
-              </a:rPr>
-              <a:t>対話・温かさ</a:t>
+              <a:t>目標：30 → 40 → 50名</a:t>
             </a:r>
           </a:p>
         </p:txBody>
@@ -8371,6 +8242,1179 @@
 </file>
 
 <file path=ppt/slides/slide6.xml><?xml version="1.0" encoding="utf-8"?>
+<p:sld xmlns:a="http://schemas.openxmlformats.org/drawingml/2006/main" xmlns:p="http://schemas.openxmlformats.org/presentationml/2006/main" xmlns:r="http://schemas.openxmlformats.org/officeDocument/2006/relationships">
+  <p:cSld>
+    <p:bg>
+      <p:bgPr>
+        <a:solidFill>
+          <a:srgbClr val="FFEEE4"/>
+        </a:solidFill>
+        <a:effectLst/>
+      </p:bgPr>
+    </p:bg>
+    <p:spTree>
+      <p:nvGrpSpPr>
+        <p:cNvPr id="1" name=""/>
+        <p:cNvGrpSpPr/>
+        <p:nvPr/>
+      </p:nvGrpSpPr>
+      <p:grpSpPr/>
+      <p:sp>
+        <p:nvSpPr>
+          <p:cNvPr id="2" name="Rectangle 1"/>
+          <p:cNvSpPr/>
+          <p:nvPr/>
+        </p:nvSpPr>
+        <p:spPr>
+          <a:xfrm>
+            <a:off x="0" y="6675120"/>
+            <a:ext cx="12191695" cy="182880"/>
+          </a:xfrm>
+          <a:prstGeom prst="rect">
+            <a:avLst/>
+          </a:prstGeom>
+          <a:solidFill>
+            <a:srgbClr val="FF5D3B"/>
+          </a:solidFill>
+          <a:ln>
+            <a:noFill/>
+          </a:ln>
+          <a:effectLst/>
+        </p:spPr>
+        <p:txBody>
+          <a:bodyPr rtlCol="0" anchor="ctr"/>
+          <a:lstStyle/>
+          <a:p>
+            <a:pPr algn="ctr"/>
+          </a:p>
+        </p:txBody>
+      </p:sp>
+      <p:sp>
+        <p:nvSpPr>
+          <p:cNvPr id="3" name="Rectangle 2"/>
+          <p:cNvSpPr/>
+          <p:nvPr/>
+        </p:nvSpPr>
+        <p:spPr>
+          <a:xfrm>
+            <a:off x="356616" y="137160"/>
+            <a:ext cx="2103120" cy="365760"/>
+          </a:xfrm>
+          <a:prstGeom prst="rect">
+            <a:avLst/>
+          </a:prstGeom>
+          <a:solidFill>
+            <a:srgbClr val="FF5D3B"/>
+          </a:solidFill>
+          <a:ln>
+            <a:noFill/>
+          </a:ln>
+          <a:effectLst/>
+        </p:spPr>
+        <p:txBody>
+          <a:bodyPr rtlCol="0" anchor="ctr" wrap="square" lIns="73152" rIns="73152"/>
+          <a:lstStyle/>
+          <a:p>
+            <a:pPr algn="ctr"/>
+            <a:r>
+              <a:rPr sz="1300" b="1">
+                <a:solidFill>
+                  <a:srgbClr val="FFFFFF"/>
+                </a:solidFill>
+                <a:latin typeface="Yu Gothic"/>
+              </a:rPr>
+              <a:t>ツアー接点</a:t>
+            </a:r>
+          </a:p>
+        </p:txBody>
+      </p:sp>
+      <p:sp>
+        <p:nvSpPr>
+          <p:cNvPr id="4" name="TextBox 3"/>
+          <p:cNvSpPr txBox="1"/>
+          <p:nvPr/>
+        </p:nvSpPr>
+        <p:spPr>
+          <a:xfrm>
+            <a:off x="2606040" y="109728"/>
+            <a:ext cx="9144000" cy="420624"/>
+          </a:xfrm>
+          <a:prstGeom prst="rect">
+            <a:avLst/>
+          </a:prstGeom>
+          <a:noFill/>
+        </p:spPr>
+        <p:txBody>
+          <a:bodyPr wrap="square" anchor="ctr" lIns="73152" rIns="73152">
+            <a:spAutoFit/>
+          </a:bodyPr>
+          <a:lstStyle/>
+          <a:p>
+            <a:pPr algn="l"/>
+            <a:r>
+              <a:rPr sz="2000" b="1">
+                <a:solidFill>
+                  <a:srgbClr val="F06142"/>
+                </a:solidFill>
+                <a:latin typeface="Yu Gothic"/>
+              </a:rPr>
+              <a:t>ツアーでの、ぐるぐるの動きと見極め</a:t>
+            </a:r>
+          </a:p>
+        </p:txBody>
+      </p:sp>
+      <p:sp>
+        <p:nvSpPr>
+          <p:cNvPr id="5" name="TextBox 4"/>
+          <p:cNvSpPr txBox="1"/>
+          <p:nvPr/>
+        </p:nvSpPr>
+        <p:spPr>
+          <a:xfrm>
+            <a:off x="274320" y="6291072"/>
+            <a:ext cx="11612880" cy="310896"/>
+          </a:xfrm>
+          <a:prstGeom prst="rect">
+            <a:avLst/>
+          </a:prstGeom>
+          <a:noFill/>
+        </p:spPr>
+        <p:txBody>
+          <a:bodyPr wrap="square" anchor="t" lIns="73152" rIns="73152">
+            <a:spAutoFit/>
+          </a:bodyPr>
+          <a:lstStyle/>
+          <a:p>
+            <a:pPr algn="l"/>
+            <a:r>
+              <a:rPr sz="900" b="0">
+                <a:solidFill>
+                  <a:srgbClr val="7A6E66"/>
+                </a:solidFill>
+                <a:latin typeface="Yu Gothic"/>
+              </a:rPr>
+              <a:t>出典：地球資源を輝かせていくIS / 銅巡りインターン議事録・企画スライド。見極めポイントは当方の提案（案）</a:t>
+            </a:r>
+          </a:p>
+        </p:txBody>
+      </p:sp>
+      <p:sp>
+        <p:nvSpPr>
+          <p:cNvPr id="6" name="Rectangle 5"/>
+          <p:cNvSpPr/>
+          <p:nvPr/>
+        </p:nvSpPr>
+        <p:spPr>
+          <a:xfrm>
+            <a:off x="365760" y="777240"/>
+            <a:ext cx="2423160" cy="384048"/>
+          </a:xfrm>
+          <a:prstGeom prst="rect">
+            <a:avLst/>
+          </a:prstGeom>
+          <a:solidFill>
+            <a:srgbClr val="F06142"/>
+          </a:solidFill>
+          <a:ln>
+            <a:noFill/>
+          </a:ln>
+          <a:effectLst/>
+        </p:spPr>
+        <p:txBody>
+          <a:bodyPr rtlCol="0" anchor="ctr" wrap="square" lIns="73152" rIns="73152"/>
+          <a:lstStyle/>
+          <a:p>
+            <a:pPr algn="ctr"/>
+            <a:r>
+              <a:rPr sz="1300" b="1">
+                <a:solidFill>
+                  <a:srgbClr val="FFFFFF"/>
+                </a:solidFill>
+                <a:latin typeface="Yu Gothic"/>
+              </a:rPr>
+              <a:t>フェーズ</a:t>
+            </a:r>
+          </a:p>
+        </p:txBody>
+      </p:sp>
+      <p:sp>
+        <p:nvSpPr>
+          <p:cNvPr id="7" name="Rectangle 6"/>
+          <p:cNvSpPr/>
+          <p:nvPr/>
+        </p:nvSpPr>
+        <p:spPr>
+          <a:xfrm>
+            <a:off x="2834640" y="777240"/>
+            <a:ext cx="3337560" cy="384048"/>
+          </a:xfrm>
+          <a:prstGeom prst="rect">
+            <a:avLst/>
+          </a:prstGeom>
+          <a:solidFill>
+            <a:srgbClr val="F06142"/>
+          </a:solidFill>
+          <a:ln>
+            <a:noFill/>
+          </a:ln>
+          <a:effectLst/>
+        </p:spPr>
+        <p:txBody>
+          <a:bodyPr rtlCol="0" anchor="ctr" wrap="square" lIns="73152" rIns="73152"/>
+          <a:lstStyle/>
+          <a:p>
+            <a:pPr algn="ctr"/>
+            <a:r>
+              <a:rPr sz="1300" b="1">
+                <a:solidFill>
+                  <a:srgbClr val="FFFFFF"/>
+                </a:solidFill>
+                <a:latin typeface="Yu Gothic"/>
+              </a:rPr>
+              <a:t>内容</a:t>
+            </a:r>
+          </a:p>
+        </p:txBody>
+      </p:sp>
+      <p:sp>
+        <p:nvSpPr>
+          <p:cNvPr id="8" name="Rectangle 7"/>
+          <p:cNvSpPr/>
+          <p:nvPr/>
+        </p:nvSpPr>
+        <p:spPr>
+          <a:xfrm>
+            <a:off x="6217920" y="777240"/>
+            <a:ext cx="2971800" cy="384048"/>
+          </a:xfrm>
+          <a:prstGeom prst="rect">
+            <a:avLst/>
+          </a:prstGeom>
+          <a:solidFill>
+            <a:srgbClr val="F06142"/>
+          </a:solidFill>
+          <a:ln>
+            <a:noFill/>
+          </a:ln>
+          <a:effectLst/>
+        </p:spPr>
+        <p:txBody>
+          <a:bodyPr rtlCol="0" anchor="ctr" wrap="square" lIns="73152" rIns="73152"/>
+          <a:lstStyle/>
+          <a:p>
+            <a:pPr algn="ctr"/>
+            <a:r>
+              <a:rPr sz="1300" b="1">
+                <a:solidFill>
+                  <a:srgbClr val="FFFFFF"/>
+                </a:solidFill>
+                <a:latin typeface="Yu Gothic"/>
+              </a:rPr>
+              <a:t>こころの動き</a:t>
+            </a:r>
+          </a:p>
+        </p:txBody>
+      </p:sp>
+      <p:sp>
+        <p:nvSpPr>
+          <p:cNvPr id="9" name="Rectangle 8"/>
+          <p:cNvSpPr/>
+          <p:nvPr/>
+        </p:nvSpPr>
+        <p:spPr>
+          <a:xfrm>
+            <a:off x="9235440" y="777240"/>
+            <a:ext cx="2514600" cy="384048"/>
+          </a:xfrm>
+          <a:prstGeom prst="rect">
+            <a:avLst/>
+          </a:prstGeom>
+          <a:solidFill>
+            <a:srgbClr val="F06142"/>
+          </a:solidFill>
+          <a:ln>
+            <a:noFill/>
+          </a:ln>
+          <a:effectLst/>
+        </p:spPr>
+        <p:txBody>
+          <a:bodyPr rtlCol="0" anchor="ctr" wrap="square" lIns="73152" rIns="73152"/>
+          <a:lstStyle/>
+          <a:p>
+            <a:pPr algn="ctr"/>
+            <a:r>
+              <a:rPr sz="1300" b="1">
+                <a:solidFill>
+                  <a:srgbClr val="FFFFFF"/>
+                </a:solidFill>
+                <a:latin typeface="Yu Gothic"/>
+              </a:rPr>
+              <a:t>見たい行動</a:t>
+            </a:r>
+          </a:p>
+        </p:txBody>
+      </p:sp>
+      <p:sp>
+        <p:nvSpPr>
+          <p:cNvPr id="10" name="Rectangle 9"/>
+          <p:cNvSpPr/>
+          <p:nvPr/>
+        </p:nvSpPr>
+        <p:spPr>
+          <a:xfrm>
+            <a:off x="365760" y="1216152"/>
+            <a:ext cx="2423160" cy="914400"/>
+          </a:xfrm>
+          <a:prstGeom prst="rect">
+            <a:avLst/>
+          </a:prstGeom>
+          <a:solidFill>
+            <a:srgbClr val="FFE0D0"/>
+          </a:solidFill>
+          <a:ln>
+            <a:noFill/>
+          </a:ln>
+          <a:effectLst/>
+        </p:spPr>
+        <p:txBody>
+          <a:bodyPr rtlCol="0" anchor="ctr" wrap="square" lIns="73152" rIns="73152"/>
+          <a:lstStyle/>
+          <a:p>
+            <a:pPr algn="l"/>
+            <a:r>
+              <a:rPr sz="1400" b="1">
+                <a:solidFill>
+                  <a:srgbClr val="F06142"/>
+                </a:solidFill>
+                <a:latin typeface="Yu Gothic"/>
+              </a:rPr>
+              <a:t>Part0　12月</a:t>
+            </a:r>
+          </a:p>
+          <a:p>
+            <a:pPr algn="l"/>
+            <a:r>
+              <a:rPr sz="1400" b="1">
+                <a:solidFill>
+                  <a:srgbClr val="F06142"/>
+                </a:solidFill>
+                <a:latin typeface="Yu Gothic"/>
+              </a:rPr>
+              <a:t>オンライン</a:t>
+            </a:r>
+          </a:p>
+        </p:txBody>
+      </p:sp>
+      <p:sp>
+        <p:nvSpPr>
+          <p:cNvPr id="11" name="Rectangle 10"/>
+          <p:cNvSpPr/>
+          <p:nvPr/>
+        </p:nvSpPr>
+        <p:spPr>
+          <a:xfrm>
+            <a:off x="2834640" y="1216152"/>
+            <a:ext cx="3337560" cy="914400"/>
+          </a:xfrm>
+          <a:prstGeom prst="rect">
+            <a:avLst/>
+          </a:prstGeom>
+          <a:solidFill>
+            <a:srgbClr val="FFFFFF"/>
+          </a:solidFill>
+          <a:ln>
+            <a:noFill/>
+          </a:ln>
+          <a:effectLst/>
+        </p:spPr>
+        <p:txBody>
+          <a:bodyPr rtlCol="0" anchor="ctr" wrap="square" lIns="73152" rIns="73152"/>
+          <a:lstStyle/>
+          <a:p>
+            <a:pPr algn="l"/>
+            <a:r>
+              <a:rPr sz="1400" b="0">
+                <a:solidFill>
+                  <a:srgbClr val="3A2A24"/>
+                </a:solidFill>
+                <a:latin typeface="Yu Gothic"/>
+              </a:rPr>
+              <a:t>銅業界の課題</a:t>
+            </a:r>
+          </a:p>
+          <a:p>
+            <a:pPr algn="l"/>
+            <a:r>
+              <a:rPr sz="1400" b="0">
+                <a:solidFill>
+                  <a:srgbClr val="3A2A24"/>
+                </a:solidFill>
+                <a:latin typeface="Yu Gothic"/>
+              </a:rPr>
+              <a:t>価値循環モデル</a:t>
+            </a:r>
+          </a:p>
+        </p:txBody>
+      </p:sp>
+      <p:sp>
+        <p:nvSpPr>
+          <p:cNvPr id="12" name="Rectangle 11"/>
+          <p:cNvSpPr/>
+          <p:nvPr/>
+        </p:nvSpPr>
+        <p:spPr>
+          <a:xfrm>
+            <a:off x="6217920" y="1216152"/>
+            <a:ext cx="2971800" cy="914400"/>
+          </a:xfrm>
+          <a:prstGeom prst="rect">
+            <a:avLst/>
+          </a:prstGeom>
+          <a:solidFill>
+            <a:srgbClr val="FFFFFF"/>
+          </a:solidFill>
+          <a:ln>
+            <a:noFill/>
+          </a:ln>
+          <a:effectLst/>
+        </p:spPr>
+        <p:txBody>
+          <a:bodyPr rtlCol="0" anchor="ctr" wrap="square" lIns="73152" rIns="73152"/>
+          <a:lstStyle/>
+          <a:p>
+            <a:pPr algn="l"/>
+            <a:r>
+              <a:rPr sz="1400" b="0">
+                <a:solidFill>
+                  <a:srgbClr val="3A2A24"/>
+                </a:solidFill>
+                <a:latin typeface="Yu Gothic"/>
+              </a:rPr>
+              <a:t>「銅は有限なんだ…！」</a:t>
+            </a:r>
+          </a:p>
+        </p:txBody>
+      </p:sp>
+      <p:sp>
+        <p:nvSpPr>
+          <p:cNvPr id="13" name="Rectangle 12"/>
+          <p:cNvSpPr/>
+          <p:nvPr/>
+        </p:nvSpPr>
+        <p:spPr>
+          <a:xfrm>
+            <a:off x="9235440" y="1216152"/>
+            <a:ext cx="2514600" cy="914400"/>
+          </a:xfrm>
+          <a:prstGeom prst="rect">
+            <a:avLst/>
+          </a:prstGeom>
+          <a:solidFill>
+            <a:srgbClr val="FFFFFF"/>
+          </a:solidFill>
+          <a:ln>
+            <a:noFill/>
+          </a:ln>
+          <a:effectLst/>
+        </p:spPr>
+        <p:txBody>
+          <a:bodyPr rtlCol="0" anchor="ctr" wrap="square" lIns="73152" rIns="73152"/>
+          <a:lstStyle/>
+          <a:p>
+            <a:pPr algn="l"/>
+            <a:r>
+              <a:rPr sz="1400" b="0">
+                <a:solidFill>
+                  <a:srgbClr val="3A2A24"/>
+                </a:solidFill>
+                <a:latin typeface="Yu Gothic"/>
+              </a:rPr>
+              <a:t>事前課題・質問</a:t>
+            </a:r>
+          </a:p>
+        </p:txBody>
+      </p:sp>
+      <p:sp>
+        <p:nvSpPr>
+          <p:cNvPr id="14" name="Rectangle 13"/>
+          <p:cNvSpPr/>
+          <p:nvPr/>
+        </p:nvSpPr>
+        <p:spPr>
+          <a:xfrm>
+            <a:off x="365760" y="2194560"/>
+            <a:ext cx="2423160" cy="914400"/>
+          </a:xfrm>
+          <a:prstGeom prst="rect">
+            <a:avLst/>
+          </a:prstGeom>
+          <a:solidFill>
+            <a:srgbClr val="FFE0D0"/>
+          </a:solidFill>
+          <a:ln>
+            <a:noFill/>
+          </a:ln>
+          <a:effectLst/>
+        </p:spPr>
+        <p:txBody>
+          <a:bodyPr rtlCol="0" anchor="ctr" wrap="square" lIns="73152" rIns="73152"/>
+          <a:lstStyle/>
+          <a:p>
+            <a:pPr algn="l"/>
+            <a:r>
+              <a:rPr sz="1400" b="1">
+                <a:solidFill>
+                  <a:srgbClr val="F06142"/>
+                </a:solidFill>
+                <a:latin typeface="Yu Gothic"/>
+              </a:rPr>
+              <a:t>Part1　12月中旬</a:t>
+            </a:r>
+          </a:p>
+          <a:p>
+            <a:pPr algn="l"/>
+            <a:r>
+              <a:rPr sz="1400" b="1">
+                <a:solidFill>
+                  <a:srgbClr val="F06142"/>
+                </a:solidFill>
+                <a:latin typeface="Yu Gothic"/>
+              </a:rPr>
+              <a:t>関係者トーク</a:t>
+            </a:r>
+          </a:p>
+        </p:txBody>
+      </p:sp>
+      <p:sp>
+        <p:nvSpPr>
+          <p:cNvPr id="15" name="Rectangle 14"/>
+          <p:cNvSpPr/>
+          <p:nvPr/>
+        </p:nvSpPr>
+        <p:spPr>
+          <a:xfrm>
+            <a:off x="2834640" y="2194560"/>
+            <a:ext cx="3337560" cy="914400"/>
+          </a:xfrm>
+          <a:prstGeom prst="rect">
+            <a:avLst/>
+          </a:prstGeom>
+          <a:solidFill>
+            <a:srgbClr val="FFFFFF"/>
+          </a:solidFill>
+          <a:ln>
+            <a:noFill/>
+          </a:ln>
+          <a:effectLst/>
+        </p:spPr>
+        <p:txBody>
+          <a:bodyPr rtlCol="0" anchor="ctr" wrap="square" lIns="73152" rIns="73152"/>
+          <a:lstStyle/>
+          <a:p>
+            <a:pPr algn="l"/>
+            <a:r>
+              <a:rPr sz="1400" b="0">
+                <a:solidFill>
+                  <a:srgbClr val="3A2A24"/>
+                </a:solidFill>
+                <a:latin typeface="Yu Gothic"/>
+              </a:rPr>
+              <a:t>産廃・加工・精錬所の</a:t>
+            </a:r>
+          </a:p>
+          <a:p>
+            <a:pPr algn="l"/>
+            <a:r>
+              <a:rPr sz="1400" b="0">
+                <a:solidFill>
+                  <a:srgbClr val="3A2A24"/>
+                </a:solidFill>
+                <a:latin typeface="Yu Gothic"/>
+              </a:rPr>
+              <a:t>方に話を聞く</a:t>
+            </a:r>
+          </a:p>
+        </p:txBody>
+      </p:sp>
+      <p:sp>
+        <p:nvSpPr>
+          <p:cNvPr id="16" name="Rectangle 15"/>
+          <p:cNvSpPr/>
+          <p:nvPr/>
+        </p:nvSpPr>
+        <p:spPr>
+          <a:xfrm>
+            <a:off x="6217920" y="2194560"/>
+            <a:ext cx="2971800" cy="914400"/>
+          </a:xfrm>
+          <a:prstGeom prst="rect">
+            <a:avLst/>
+          </a:prstGeom>
+          <a:solidFill>
+            <a:srgbClr val="FFFFFF"/>
+          </a:solidFill>
+          <a:ln>
+            <a:noFill/>
+          </a:ln>
+          <a:effectLst/>
+        </p:spPr>
+        <p:txBody>
+          <a:bodyPr rtlCol="0" anchor="ctr" wrap="square" lIns="73152" rIns="73152"/>
+          <a:lstStyle/>
+          <a:p>
+            <a:pPr algn="l"/>
+            <a:r>
+              <a:rPr sz="1400" b="0">
+                <a:solidFill>
+                  <a:srgbClr val="3A2A24"/>
+                </a:solidFill>
+                <a:latin typeface="Yu Gothic"/>
+              </a:rPr>
+              <a:t>「立場で景色が違う」</a:t>
+            </a:r>
+          </a:p>
+        </p:txBody>
+      </p:sp>
+      <p:sp>
+        <p:nvSpPr>
+          <p:cNvPr id="17" name="Rectangle 16"/>
+          <p:cNvSpPr/>
+          <p:nvPr/>
+        </p:nvSpPr>
+        <p:spPr>
+          <a:xfrm>
+            <a:off x="9235440" y="2194560"/>
+            <a:ext cx="2514600" cy="914400"/>
+          </a:xfrm>
+          <a:prstGeom prst="rect">
+            <a:avLst/>
+          </a:prstGeom>
+          <a:solidFill>
+            <a:srgbClr val="FFFFFF"/>
+          </a:solidFill>
+          <a:ln>
+            <a:noFill/>
+          </a:ln>
+          <a:effectLst/>
+        </p:spPr>
+        <p:txBody>
+          <a:bodyPr rtlCol="0" anchor="ctr" wrap="square" lIns="73152" rIns="73152"/>
+          <a:lstStyle/>
+          <a:p>
+            <a:pPr algn="l"/>
+            <a:r>
+              <a:rPr sz="1400" b="0">
+                <a:solidFill>
+                  <a:srgbClr val="3A2A24"/>
+                </a:solidFill>
+                <a:latin typeface="Yu Gothic"/>
+              </a:rPr>
+              <a:t>聞く力</a:t>
+            </a:r>
+          </a:p>
+        </p:txBody>
+      </p:sp>
+      <p:sp>
+        <p:nvSpPr>
+          <p:cNvPr id="18" name="Rectangle 17"/>
+          <p:cNvSpPr/>
+          <p:nvPr/>
+        </p:nvSpPr>
+        <p:spPr>
+          <a:xfrm>
+            <a:off x="365760" y="3172968"/>
+            <a:ext cx="2423160" cy="914400"/>
+          </a:xfrm>
+          <a:prstGeom prst="rect">
+            <a:avLst/>
+          </a:prstGeom>
+          <a:solidFill>
+            <a:srgbClr val="FFE0D0"/>
+          </a:solidFill>
+          <a:ln>
+            <a:noFill/>
+          </a:ln>
+          <a:effectLst/>
+        </p:spPr>
+        <p:txBody>
+          <a:bodyPr rtlCol="0" anchor="ctr" wrap="square" lIns="73152" rIns="73152"/>
+          <a:lstStyle/>
+          <a:p>
+            <a:pPr algn="l"/>
+            <a:r>
+              <a:rPr sz="1400" b="1">
+                <a:solidFill>
+                  <a:srgbClr val="F06142"/>
+                </a:solidFill>
+                <a:latin typeface="Yu Gothic"/>
+              </a:rPr>
+              <a:t>Part2　1月</a:t>
+            </a:r>
+          </a:p>
+          <a:p>
+            <a:pPr algn="l"/>
+            <a:r>
+              <a:rPr sz="1400" b="1">
+                <a:solidFill>
+                  <a:srgbClr val="F06142"/>
+                </a:solidFill>
+                <a:latin typeface="Yu Gothic"/>
+              </a:rPr>
+              <a:t>工場見学</a:t>
+            </a:r>
+          </a:p>
+        </p:txBody>
+      </p:sp>
+      <p:sp>
+        <p:nvSpPr>
+          <p:cNvPr id="19" name="Rectangle 18"/>
+          <p:cNvSpPr/>
+          <p:nvPr/>
+        </p:nvSpPr>
+        <p:spPr>
+          <a:xfrm>
+            <a:off x="2834640" y="3172968"/>
+            <a:ext cx="3337560" cy="914400"/>
+          </a:xfrm>
+          <a:prstGeom prst="rect">
+            <a:avLst/>
+          </a:prstGeom>
+          <a:solidFill>
+            <a:srgbClr val="FFFFFF"/>
+          </a:solidFill>
+          <a:ln>
+            <a:noFill/>
+          </a:ln>
+          <a:effectLst/>
+        </p:spPr>
+        <p:txBody>
+          <a:bodyPr rtlCol="0" anchor="ctr" wrap="square" lIns="73152" rIns="73152"/>
+          <a:lstStyle/>
+          <a:p>
+            <a:pPr algn="l"/>
+            <a:r>
+              <a:rPr sz="1400" b="0">
+                <a:solidFill>
+                  <a:srgbClr val="3A2A24"/>
+                </a:solidFill>
+                <a:latin typeface="Yu Gothic"/>
+              </a:rPr>
+              <a:t>もったいない</a:t>
+            </a:r>
+          </a:p>
+          <a:p>
+            <a:pPr algn="l"/>
+            <a:r>
+              <a:rPr sz="1400" b="0">
+                <a:solidFill>
+                  <a:srgbClr val="3A2A24"/>
+                </a:solidFill>
+                <a:latin typeface="Yu Gothic"/>
+              </a:rPr>
+              <a:t>ポイントを探す</a:t>
+            </a:r>
+          </a:p>
+        </p:txBody>
+      </p:sp>
+      <p:sp>
+        <p:nvSpPr>
+          <p:cNvPr id="20" name="Rectangle 19"/>
+          <p:cNvSpPr/>
+          <p:nvPr/>
+        </p:nvSpPr>
+        <p:spPr>
+          <a:xfrm>
+            <a:off x="6217920" y="3172968"/>
+            <a:ext cx="2971800" cy="914400"/>
+          </a:xfrm>
+          <a:prstGeom prst="rect">
+            <a:avLst/>
+          </a:prstGeom>
+          <a:solidFill>
+            <a:srgbClr val="FFFFFF"/>
+          </a:solidFill>
+          <a:ln>
+            <a:noFill/>
+          </a:ln>
+          <a:effectLst/>
+        </p:spPr>
+        <p:txBody>
+          <a:bodyPr rtlCol="0" anchor="ctr" wrap="square" lIns="73152" rIns="73152"/>
+          <a:lstStyle/>
+          <a:p>
+            <a:pPr algn="l"/>
+            <a:r>
+              <a:rPr sz="1400" b="0">
+                <a:solidFill>
+                  <a:srgbClr val="3A2A24"/>
+                </a:solidFill>
+                <a:latin typeface="Yu Gothic"/>
+              </a:rPr>
+              <a:t>「どこで回せる？」</a:t>
+            </a:r>
+          </a:p>
+        </p:txBody>
+      </p:sp>
+      <p:sp>
+        <p:nvSpPr>
+          <p:cNvPr id="21" name="Rectangle 20"/>
+          <p:cNvSpPr/>
+          <p:nvPr/>
+        </p:nvSpPr>
+        <p:spPr>
+          <a:xfrm>
+            <a:off x="9235440" y="3172968"/>
+            <a:ext cx="2514600" cy="914400"/>
+          </a:xfrm>
+          <a:prstGeom prst="rect">
+            <a:avLst/>
+          </a:prstGeom>
+          <a:solidFill>
+            <a:srgbClr val="FFFFFF"/>
+          </a:solidFill>
+          <a:ln>
+            <a:noFill/>
+          </a:ln>
+          <a:effectLst/>
+        </p:spPr>
+        <p:txBody>
+          <a:bodyPr rtlCol="0" anchor="ctr" wrap="square" lIns="73152" rIns="73152"/>
+          <a:lstStyle/>
+          <a:p>
+            <a:pPr algn="l"/>
+            <a:r>
+              <a:rPr sz="1400" b="0">
+                <a:solidFill>
+                  <a:srgbClr val="3A2A24"/>
+                </a:solidFill>
+                <a:latin typeface="Yu Gothic"/>
+              </a:rPr>
+              <a:t>観察の細かさ</a:t>
+            </a:r>
+          </a:p>
+        </p:txBody>
+      </p:sp>
+      <p:sp>
+        <p:nvSpPr>
+          <p:cNvPr id="22" name="Rectangle 21"/>
+          <p:cNvSpPr/>
+          <p:nvPr/>
+        </p:nvSpPr>
+        <p:spPr>
+          <a:xfrm>
+            <a:off x="365760" y="4151376"/>
+            <a:ext cx="2423160" cy="914400"/>
+          </a:xfrm>
+          <a:prstGeom prst="rect">
+            <a:avLst/>
+          </a:prstGeom>
+          <a:solidFill>
+            <a:srgbClr val="FFE0D0"/>
+          </a:solidFill>
+          <a:ln>
+            <a:noFill/>
+          </a:ln>
+          <a:effectLst/>
+        </p:spPr>
+        <p:txBody>
+          <a:bodyPr rtlCol="0" anchor="ctr" wrap="square" lIns="73152" rIns="73152"/>
+          <a:lstStyle/>
+          <a:p>
+            <a:pPr algn="l"/>
+            <a:r>
+              <a:rPr sz="1400" b="1">
+                <a:solidFill>
+                  <a:srgbClr val="F06142"/>
+                </a:solidFill>
+                <a:latin typeface="Yu Gothic"/>
+              </a:rPr>
+              <a:t>ディスカッション</a:t>
+            </a:r>
+          </a:p>
+        </p:txBody>
+      </p:sp>
+      <p:sp>
+        <p:nvSpPr>
+          <p:cNvPr id="23" name="Rectangle 22"/>
+          <p:cNvSpPr/>
+          <p:nvPr/>
+        </p:nvSpPr>
+        <p:spPr>
+          <a:xfrm>
+            <a:off x="2834640" y="4151376"/>
+            <a:ext cx="3337560" cy="914400"/>
+          </a:xfrm>
+          <a:prstGeom prst="rect">
+            <a:avLst/>
+          </a:prstGeom>
+          <a:solidFill>
+            <a:srgbClr val="FFFFFF"/>
+          </a:solidFill>
+          <a:ln>
+            <a:noFill/>
+          </a:ln>
+          <a:effectLst/>
+        </p:spPr>
+        <p:txBody>
+          <a:bodyPr rtlCol="0" anchor="ctr" wrap="square" lIns="73152" rIns="73152"/>
+          <a:lstStyle/>
+          <a:p>
+            <a:pPr algn="l"/>
+            <a:r>
+              <a:rPr sz="1400" b="0">
+                <a:solidFill>
+                  <a:srgbClr val="3A2A24"/>
+                </a:solidFill>
+                <a:latin typeface="Yu Gothic"/>
+              </a:rPr>
+              <a:t>改善案を発表</a:t>
+            </a:r>
+          </a:p>
+        </p:txBody>
+      </p:sp>
+      <p:sp>
+        <p:nvSpPr>
+          <p:cNvPr id="24" name="Rectangle 23"/>
+          <p:cNvSpPr/>
+          <p:nvPr/>
+        </p:nvSpPr>
+        <p:spPr>
+          <a:xfrm>
+            <a:off x="6217920" y="4151376"/>
+            <a:ext cx="2971800" cy="914400"/>
+          </a:xfrm>
+          <a:prstGeom prst="rect">
+            <a:avLst/>
+          </a:prstGeom>
+          <a:solidFill>
+            <a:srgbClr val="FFFFFF"/>
+          </a:solidFill>
+          <a:ln>
+            <a:noFill/>
+          </a:ln>
+          <a:effectLst/>
+        </p:spPr>
+        <p:txBody>
+          <a:bodyPr rtlCol="0" anchor="ctr" wrap="square" lIns="73152" rIns="73152"/>
+          <a:lstStyle/>
+          <a:p>
+            <a:pPr algn="l"/>
+            <a:r>
+              <a:rPr sz="1400" b="0">
+                <a:solidFill>
+                  <a:srgbClr val="3A2A24"/>
+                </a:solidFill>
+                <a:latin typeface="Yu Gothic"/>
+              </a:rPr>
+              <a:t>「回し方を提案したい」</a:t>
+            </a:r>
+          </a:p>
+        </p:txBody>
+      </p:sp>
+      <p:sp>
+        <p:nvSpPr>
+          <p:cNvPr id="25" name="Rectangle 24"/>
+          <p:cNvSpPr/>
+          <p:nvPr/>
+        </p:nvSpPr>
+        <p:spPr>
+          <a:xfrm>
+            <a:off x="9235440" y="4151376"/>
+            <a:ext cx="2514600" cy="914400"/>
+          </a:xfrm>
+          <a:prstGeom prst="rect">
+            <a:avLst/>
+          </a:prstGeom>
+          <a:solidFill>
+            <a:srgbClr val="FFFFFF"/>
+          </a:solidFill>
+          <a:ln>
+            <a:noFill/>
+          </a:ln>
+          <a:effectLst/>
+        </p:spPr>
+        <p:txBody>
+          <a:bodyPr rtlCol="0" anchor="ctr" wrap="square" lIns="73152" rIns="73152"/>
+          <a:lstStyle/>
+          <a:p>
+            <a:pPr algn="l"/>
+            <a:r>
+              <a:rPr sz="1400" b="0">
+                <a:solidFill>
+                  <a:srgbClr val="3A2A24"/>
+                </a:solidFill>
+                <a:latin typeface="Yu Gothic"/>
+              </a:rPr>
+              <a:t>仮説と巻き込み</a:t>
+            </a:r>
+          </a:p>
+        </p:txBody>
+      </p:sp>
+      <p:sp>
+        <p:nvSpPr>
+          <p:cNvPr id="26" name="Rectangle 25"/>
+          <p:cNvSpPr/>
+          <p:nvPr/>
+        </p:nvSpPr>
+        <p:spPr>
+          <a:xfrm>
+            <a:off x="365760" y="5129784"/>
+            <a:ext cx="2423160" cy="914400"/>
+          </a:xfrm>
+          <a:prstGeom prst="rect">
+            <a:avLst/>
+          </a:prstGeom>
+          <a:solidFill>
+            <a:srgbClr val="FFE0D0"/>
+          </a:solidFill>
+          <a:ln>
+            <a:noFill/>
+          </a:ln>
+          <a:effectLst/>
+        </p:spPr>
+        <p:txBody>
+          <a:bodyPr rtlCol="0" anchor="ctr" wrap="square" lIns="73152" rIns="73152"/>
+          <a:lstStyle/>
+          <a:p>
+            <a:pPr algn="l"/>
+            <a:r>
+              <a:rPr sz="1400" b="1">
+                <a:solidFill>
+                  <a:srgbClr val="F06142"/>
+                </a:solidFill>
+                <a:latin typeface="Yu Gothic"/>
+              </a:rPr>
+              <a:t>社長・社内懇親会</a:t>
+            </a:r>
+          </a:p>
+        </p:txBody>
+      </p:sp>
+      <p:sp>
+        <p:nvSpPr>
+          <p:cNvPr id="27" name="Rectangle 26"/>
+          <p:cNvSpPr/>
+          <p:nvPr/>
+        </p:nvSpPr>
+        <p:spPr>
+          <a:xfrm>
+            <a:off x="2834640" y="5129784"/>
+            <a:ext cx="3337560" cy="914400"/>
+          </a:xfrm>
+          <a:prstGeom prst="rect">
+            <a:avLst/>
+          </a:prstGeom>
+          <a:solidFill>
+            <a:srgbClr val="FFFFFF"/>
+          </a:solidFill>
+          <a:ln>
+            <a:noFill/>
+          </a:ln>
+          <a:effectLst/>
+        </p:spPr>
+        <p:txBody>
+          <a:bodyPr rtlCol="0" anchor="ctr" wrap="square" lIns="73152" rIns="73152"/>
+          <a:lstStyle/>
+          <a:p>
+            <a:pPr algn="l"/>
+            <a:r>
+              <a:rPr sz="1400" b="0">
+                <a:solidFill>
+                  <a:srgbClr val="3A2A24"/>
+                </a:solidFill>
+                <a:latin typeface="Yu Gothic"/>
+              </a:rPr>
+              <a:t>社長と問いを深める</a:t>
+            </a:r>
+          </a:p>
+        </p:txBody>
+      </p:sp>
+      <p:sp>
+        <p:nvSpPr>
+          <p:cNvPr id="28" name="Rectangle 27"/>
+          <p:cNvSpPr/>
+          <p:nvPr/>
+        </p:nvSpPr>
+        <p:spPr>
+          <a:xfrm>
+            <a:off x="6217920" y="5129784"/>
+            <a:ext cx="2971800" cy="914400"/>
+          </a:xfrm>
+          <a:prstGeom prst="rect">
+            <a:avLst/>
+          </a:prstGeom>
+          <a:solidFill>
+            <a:srgbClr val="FFFFFF"/>
+          </a:solidFill>
+          <a:ln>
+            <a:noFill/>
+          </a:ln>
+          <a:effectLst/>
+        </p:spPr>
+        <p:txBody>
+          <a:bodyPr rtlCol="0" anchor="ctr" wrap="square" lIns="73152" rIns="73152"/>
+          <a:lstStyle/>
+          <a:p>
+            <a:pPr algn="l"/>
+            <a:r>
+              <a:rPr sz="1400" b="0">
+                <a:solidFill>
+                  <a:srgbClr val="3A2A24"/>
+                </a:solidFill>
+                <a:latin typeface="Yu Gothic"/>
+              </a:rPr>
+              <a:t>「問い続けたい」</a:t>
+            </a:r>
+          </a:p>
+        </p:txBody>
+      </p:sp>
+      <p:sp>
+        <p:nvSpPr>
+          <p:cNvPr id="29" name="Rectangle 28"/>
+          <p:cNvSpPr/>
+          <p:nvPr/>
+        </p:nvSpPr>
+        <p:spPr>
+          <a:xfrm>
+            <a:off x="9235440" y="5129784"/>
+            <a:ext cx="2514600" cy="914400"/>
+          </a:xfrm>
+          <a:prstGeom prst="rect">
+            <a:avLst/>
+          </a:prstGeom>
+          <a:solidFill>
+            <a:srgbClr val="FFFFFF"/>
+          </a:solidFill>
+          <a:ln>
+            <a:noFill/>
+          </a:ln>
+          <a:effectLst/>
+        </p:spPr>
+        <p:txBody>
+          <a:bodyPr rtlCol="0" anchor="ctr" wrap="square" lIns="73152" rIns="73152"/>
+          <a:lstStyle/>
+          <a:p>
+            <a:pPr algn="l"/>
+            <a:r>
+              <a:rPr sz="1400" b="0">
+                <a:solidFill>
+                  <a:srgbClr val="3A2A24"/>
+                </a:solidFill>
+                <a:latin typeface="Yu Gothic"/>
+              </a:rPr>
+              <a:t>対話・温かさ</a:t>
+            </a:r>
+          </a:p>
+        </p:txBody>
+      </p:sp>
+    </p:spTree>
+  </p:cSld>
+  <p:clrMapOvr>
+    <a:masterClrMapping/>
+  </p:clrMapOvr>
+</p:sld>
+</file>
+
+<file path=ppt/slides/slide7.xml><?xml version="1.0" encoding="utf-8"?>
 <p:sld xmlns:a="http://schemas.openxmlformats.org/drawingml/2006/main" xmlns:p="http://schemas.openxmlformats.org/presentationml/2006/main" xmlns:r="http://schemas.openxmlformats.org/officeDocument/2006/relationships">
   <p:cSld>
     <p:bg>

--- a/guruguru/guruguru_target_tour.pptx
+++ b/guruguru/guruguru_target_tour.pptx
@@ -3090,7 +3090,7 @@
     <p:bg>
       <p:bgPr>
         <a:solidFill>
-          <a:srgbClr val="FFEEE4"/>
+          <a:srgbClr val="FFFFFF"/>
         </a:solidFill>
         <a:effectLst/>
       </p:bgPr>
@@ -3110,8 +3110,8 @@
         </p:nvSpPr>
         <p:spPr>
           <a:xfrm>
-            <a:off x="0" y="6675120"/>
-            <a:ext cx="12191695" cy="182880"/>
+            <a:off x="0" y="6766560"/>
+            <a:ext cx="12191695" cy="91440"/>
           </a:xfrm>
           <a:prstGeom prst="rect">
             <a:avLst/>
@@ -3197,7 +3197,7 @@
             <a:r>
               <a:rPr sz="2000" b="1">
                 <a:solidFill>
-                  <a:srgbClr val="F06142"/>
+                  <a:srgbClr val="333333"/>
                 </a:solidFill>
                 <a:latin typeface="Yu Gothic"/>
               </a:rPr>
@@ -3267,7 +3267,7 @@
             <a:r>
               <a:rPr sz="2800" b="1">
                 <a:solidFill>
-                  <a:srgbClr val="F06142"/>
+                  <a:srgbClr val="333333"/>
                 </a:solidFill>
                 <a:latin typeface="Yu Gothic"/>
               </a:rPr>
@@ -3326,7 +3326,7 @@
             <a:avLst/>
           </a:prstGeom>
           <a:solidFill>
-            <a:srgbClr val="FFE0D0"/>
+            <a:srgbClr val="F9ECE6"/>
           </a:solidFill>
           <a:ln>
             <a:noFill/>
@@ -3399,7 +3399,7 @@
             <a:avLst/>
           </a:prstGeom>
           <a:solidFill>
-            <a:srgbClr val="FFE0D0"/>
+            <a:srgbClr val="F9ECE6"/>
           </a:solidFill>
           <a:ln>
             <a:noFill/>
@@ -3545,7 +3545,7 @@
             <a:avLst/>
           </a:prstGeom>
           <a:solidFill>
-            <a:srgbClr val="FFE0D0"/>
+            <a:srgbClr val="F9ECE6"/>
           </a:solidFill>
           <a:ln>
             <a:noFill/>
@@ -3618,7 +3618,7 @@
             <a:avLst/>
           </a:prstGeom>
           <a:solidFill>
-            <a:srgbClr val="FFE0D0"/>
+            <a:srgbClr val="F9ECE6"/>
           </a:solidFill>
           <a:ln>
             <a:noFill/>
@@ -3702,7 +3702,7 @@
             <a:r>
               <a:rPr sz="1500" b="1">
                 <a:solidFill>
-                  <a:srgbClr val="F06142"/>
+                  <a:srgbClr val="333333"/>
                 </a:solidFill>
                 <a:latin typeface="Yu Gothic"/>
               </a:rPr>
@@ -3726,7 +3726,7 @@
             <a:avLst/>
           </a:prstGeom>
           <a:solidFill>
-            <a:srgbClr val="FFFFFF"/>
+            <a:srgbClr val="F4F4F4"/>
           </a:solidFill>
           <a:ln>
             <a:noFill/>
@@ -3767,7 +3767,7 @@
             <a:r>
               <a:rPr sz="1600" b="1">
                 <a:solidFill>
-                  <a:srgbClr val="F06142"/>
+                  <a:srgbClr val="333333"/>
                 </a:solidFill>
                 <a:latin typeface="Yu Gothic"/>
               </a:rPr>
@@ -3862,7 +3862,7 @@
             <a:avLst/>
           </a:prstGeom>
           <a:solidFill>
-            <a:srgbClr val="FFFFFF"/>
+            <a:srgbClr val="F4F4F4"/>
           </a:solidFill>
           <a:ln>
             <a:noFill/>
@@ -3903,7 +3903,7 @@
             <a:r>
               <a:rPr sz="1600" b="1">
                 <a:solidFill>
-                  <a:srgbClr val="F06142"/>
+                  <a:srgbClr val="333333"/>
                 </a:solidFill>
                 <a:latin typeface="Yu Gothic"/>
               </a:rPr>
@@ -3998,7 +3998,7 @@
             <a:avLst/>
           </a:prstGeom>
           <a:solidFill>
-            <a:srgbClr val="FFFFFF"/>
+            <a:srgbClr val="F4F4F4"/>
           </a:solidFill>
           <a:ln>
             <a:noFill/>
@@ -4039,7 +4039,7 @@
             <a:r>
               <a:rPr sz="1600" b="1">
                 <a:solidFill>
-                  <a:srgbClr val="F06142"/>
+                  <a:srgbClr val="333333"/>
                 </a:solidFill>
                 <a:latin typeface="Yu Gothic"/>
               </a:rPr>
@@ -4133,7 +4133,7 @@
     <p:bg>
       <p:bgPr>
         <a:solidFill>
-          <a:srgbClr val="FFEEE4"/>
+          <a:srgbClr val="FFFFFF"/>
         </a:solidFill>
         <a:effectLst/>
       </p:bgPr>
@@ -4153,8 +4153,8 @@
         </p:nvSpPr>
         <p:spPr>
           <a:xfrm>
-            <a:off x="0" y="6675120"/>
-            <a:ext cx="12191695" cy="182880"/>
+            <a:off x="0" y="6766560"/>
+            <a:ext cx="12191695" cy="91440"/>
           </a:xfrm>
           <a:prstGeom prst="rect">
             <a:avLst/>
@@ -4240,7 +4240,7 @@
             <a:r>
               <a:rPr sz="2000" b="1">
                 <a:solidFill>
-                  <a:srgbClr val="F06142"/>
+                  <a:srgbClr val="333333"/>
                 </a:solidFill>
                 <a:latin typeface="Yu Gothic"/>
               </a:rPr>
@@ -4310,7 +4310,7 @@
             <a:r>
               <a:rPr sz="2200" b="1">
                 <a:solidFill>
-                  <a:srgbClr val="F06142"/>
+                  <a:srgbClr val="333333"/>
                 </a:solidFill>
                 <a:latin typeface="Yu Gothic"/>
               </a:rPr>
@@ -4334,7 +4334,7 @@
             <a:avLst/>
           </a:prstGeom>
           <a:solidFill>
-            <a:srgbClr val="FFFFFF"/>
+            <a:srgbClr val="F4F4F4"/>
           </a:solidFill>
           <a:ln>
             <a:noFill/>
@@ -4375,7 +4375,7 @@
             <a:r>
               <a:rPr sz="1500" b="1">
                 <a:solidFill>
-                  <a:srgbClr val="F06142"/>
+                  <a:srgbClr val="333333"/>
                 </a:solidFill>
                 <a:latin typeface="Yu Gothic"/>
               </a:rPr>
@@ -4470,7 +4470,7 @@
             <a:avLst/>
           </a:prstGeom>
           <a:solidFill>
-            <a:srgbClr val="FFFFFF"/>
+            <a:srgbClr val="F4F4F4"/>
           </a:solidFill>
           <a:ln>
             <a:noFill/>
@@ -4511,7 +4511,7 @@
             <a:r>
               <a:rPr sz="1500" b="1">
                 <a:solidFill>
-                  <a:srgbClr val="F06142"/>
+                  <a:srgbClr val="333333"/>
                 </a:solidFill>
                 <a:latin typeface="Yu Gothic"/>
               </a:rPr>
@@ -4622,7 +4622,7 @@
             <a:avLst/>
           </a:prstGeom>
           <a:solidFill>
-            <a:srgbClr val="FFFFFF"/>
+            <a:srgbClr val="F4F4F4"/>
           </a:solidFill>
           <a:ln>
             <a:noFill/>
@@ -4663,7 +4663,7 @@
             <a:r>
               <a:rPr sz="1500" b="1">
                 <a:solidFill>
-                  <a:srgbClr val="F06142"/>
+                  <a:srgbClr val="333333"/>
                 </a:solidFill>
                 <a:latin typeface="Yu Gothic"/>
               </a:rPr>
@@ -4769,7 +4769,7 @@
             <a:r>
               <a:rPr sz="1500" b="1">
                 <a:solidFill>
-                  <a:srgbClr val="F06142"/>
+                  <a:srgbClr val="333333"/>
                 </a:solidFill>
                 <a:latin typeface="Yu Gothic"/>
               </a:rPr>
@@ -4828,7 +4828,7 @@
             <a:avLst/>
           </a:prstGeom>
           <a:solidFill>
-            <a:srgbClr val="F06142"/>
+            <a:srgbClr val="333333"/>
           </a:solidFill>
           <a:ln>
             <a:noFill/>
@@ -4867,7 +4867,7 @@
             <a:avLst/>
           </a:prstGeom>
           <a:solidFill>
-            <a:srgbClr val="F06142"/>
+            <a:srgbClr val="333333"/>
           </a:solidFill>
           <a:ln>
             <a:noFill/>
@@ -4906,7 +4906,7 @@
             <a:avLst/>
           </a:prstGeom>
           <a:solidFill>
-            <a:srgbClr val="FFE0D0"/>
+            <a:srgbClr val="F9ECE6"/>
           </a:solidFill>
           <a:ln>
             <a:noFill/>
@@ -4945,7 +4945,7 @@
             <a:avLst/>
           </a:prstGeom>
           <a:solidFill>
-            <a:srgbClr val="FFFFFF"/>
+            <a:srgbClr val="F4F4F4"/>
           </a:solidFill>
           <a:ln>
             <a:noFill/>
@@ -4984,7 +4984,7 @@
             <a:avLst/>
           </a:prstGeom>
           <a:solidFill>
-            <a:srgbClr val="FFFFFF"/>
+            <a:srgbClr val="F4F4F4"/>
           </a:solidFill>
           <a:ln>
             <a:noFill/>
@@ -5023,7 +5023,7 @@
             <a:avLst/>
           </a:prstGeom>
           <a:solidFill>
-            <a:srgbClr val="FFE0D0"/>
+            <a:srgbClr val="F9ECE6"/>
           </a:solidFill>
           <a:ln>
             <a:noFill/>
@@ -5062,7 +5062,7 @@
             <a:avLst/>
           </a:prstGeom>
           <a:solidFill>
-            <a:srgbClr val="FFFFFF"/>
+            <a:srgbClr val="F4F4F4"/>
           </a:solidFill>
           <a:ln>
             <a:noFill/>
@@ -5101,7 +5101,7 @@
             <a:avLst/>
           </a:prstGeom>
           <a:solidFill>
-            <a:srgbClr val="FFFFFF"/>
+            <a:srgbClr val="F4F4F4"/>
           </a:solidFill>
           <a:ln>
             <a:noFill/>
@@ -5140,7 +5140,7 @@
             <a:avLst/>
           </a:prstGeom>
           <a:solidFill>
-            <a:srgbClr val="FFE0D0"/>
+            <a:srgbClr val="F9ECE6"/>
           </a:solidFill>
           <a:ln>
             <a:noFill/>
@@ -5179,7 +5179,7 @@
             <a:avLst/>
           </a:prstGeom>
           <a:solidFill>
-            <a:srgbClr val="FFFFFF"/>
+            <a:srgbClr val="F4F4F4"/>
           </a:solidFill>
           <a:ln>
             <a:noFill/>
@@ -5218,7 +5218,7 @@
             <a:avLst/>
           </a:prstGeom>
           <a:solidFill>
-            <a:srgbClr val="FFFFFF"/>
+            <a:srgbClr val="F4F4F4"/>
           </a:solidFill>
           <a:ln>
             <a:noFill/>
@@ -5257,7 +5257,7 @@
             <a:avLst/>
           </a:prstGeom>
           <a:solidFill>
-            <a:srgbClr val="FFE0D0"/>
+            <a:srgbClr val="F9ECE6"/>
           </a:solidFill>
           <a:ln>
             <a:noFill/>
@@ -5296,7 +5296,7 @@
             <a:avLst/>
           </a:prstGeom>
           <a:solidFill>
-            <a:srgbClr val="FFFFFF"/>
+            <a:srgbClr val="F4F4F4"/>
           </a:solidFill>
           <a:ln>
             <a:noFill/>
@@ -5335,7 +5335,7 @@
             <a:avLst/>
           </a:prstGeom>
           <a:solidFill>
-            <a:srgbClr val="FFFFFF"/>
+            <a:srgbClr val="F4F4F4"/>
           </a:solidFill>
           <a:ln>
             <a:noFill/>
@@ -5373,7 +5373,7 @@
     <p:bg>
       <p:bgPr>
         <a:solidFill>
-          <a:srgbClr val="FFEEE4"/>
+          <a:srgbClr val="FFFFFF"/>
         </a:solidFill>
         <a:effectLst/>
       </p:bgPr>
@@ -5393,8 +5393,8 @@
         </p:nvSpPr>
         <p:spPr>
           <a:xfrm>
-            <a:off x="0" y="6675120"/>
-            <a:ext cx="12191695" cy="182880"/>
+            <a:off x="0" y="6766560"/>
+            <a:ext cx="12191695" cy="91440"/>
           </a:xfrm>
           <a:prstGeom prst="rect">
             <a:avLst/>
@@ -5480,7 +5480,7 @@
             <a:r>
               <a:rPr sz="2000" b="1">
                 <a:solidFill>
-                  <a:srgbClr val="F06142"/>
+                  <a:srgbClr val="333333"/>
                 </a:solidFill>
                 <a:latin typeface="Yu Gothic"/>
               </a:rPr>
@@ -5539,7 +5539,7 @@
             <a:avLst/>
           </a:prstGeom>
           <a:solidFill>
-            <a:srgbClr val="FFFFFF"/>
+            <a:srgbClr val="F4F4F4"/>
           </a:solidFill>
           <a:ln>
             <a:noFill/>
@@ -5580,7 +5580,7 @@
             <a:r>
               <a:rPr sz="2600" b="1">
                 <a:solidFill>
-                  <a:srgbClr val="8C4A36"/>
+                  <a:srgbClr val="595959"/>
                 </a:solidFill>
                 <a:latin typeface="Yu Gothic"/>
               </a:rPr>
@@ -5686,7 +5686,7 @@
             <a:avLst/>
           </a:prstGeom>
           <a:solidFill>
-            <a:srgbClr val="FFFFFF"/>
+            <a:srgbClr val="F4F4F4"/>
           </a:solidFill>
           <a:ln>
             <a:noFill/>
@@ -5727,7 +5727,7 @@
             <a:r>
               <a:rPr sz="2600" b="1">
                 <a:solidFill>
-                  <a:srgbClr val="8C4A36"/>
+                  <a:srgbClr val="595959"/>
                 </a:solidFill>
                 <a:latin typeface="Yu Gothic"/>
               </a:rPr>
@@ -5833,7 +5833,7 @@
             <a:avLst/>
           </a:prstGeom>
           <a:solidFill>
-            <a:srgbClr val="FFFFFF"/>
+            <a:srgbClr val="F4F4F4"/>
           </a:solidFill>
           <a:ln>
             <a:noFill/>
@@ -5874,7 +5874,7 @@
             <a:r>
               <a:rPr sz="2600" b="1">
                 <a:solidFill>
-                  <a:srgbClr val="8C4A36"/>
+                  <a:srgbClr val="595959"/>
                 </a:solidFill>
                 <a:latin typeface="Yu Gothic"/>
               </a:rPr>
@@ -5980,7 +5980,7 @@
             <a:avLst/>
           </a:prstGeom>
           <a:solidFill>
-            <a:srgbClr val="FFFFFF"/>
+            <a:srgbClr val="F4F4F4"/>
           </a:solidFill>
           <a:ln>
             <a:noFill/>
@@ -6021,7 +6021,7 @@
             <a:r>
               <a:rPr sz="2600" b="1">
                 <a:solidFill>
-                  <a:srgbClr val="8C4A36"/>
+                  <a:srgbClr val="595959"/>
                 </a:solidFill>
                 <a:latin typeface="Yu Gothic"/>
               </a:rPr>
@@ -6127,7 +6127,7 @@
             <a:avLst/>
           </a:prstGeom>
           <a:solidFill>
-            <a:srgbClr val="FFE0D0"/>
+            <a:srgbClr val="F9ECE6"/>
           </a:solidFill>
           <a:ln>
             <a:noFill/>
@@ -6142,7 +6142,7 @@
             <a:r>
               <a:rPr sz="1600" b="1">
                 <a:solidFill>
-                  <a:srgbClr val="F06142"/>
+                  <a:srgbClr val="333333"/>
                 </a:solidFill>
                 <a:latin typeface="Yu Gothic"/>
               </a:rPr>
@@ -6197,7 +6197,7 @@
     <p:bg>
       <p:bgPr>
         <a:solidFill>
-          <a:srgbClr val="FFEEE4"/>
+          <a:srgbClr val="FFFFFF"/>
         </a:solidFill>
         <a:effectLst/>
       </p:bgPr>
@@ -6217,8 +6217,8 @@
         </p:nvSpPr>
         <p:spPr>
           <a:xfrm>
-            <a:off x="0" y="6675120"/>
-            <a:ext cx="12191695" cy="182880"/>
+            <a:off x="0" y="6766560"/>
+            <a:ext cx="12191695" cy="91440"/>
           </a:xfrm>
           <a:prstGeom prst="rect">
             <a:avLst/>
@@ -6304,7 +6304,7 @@
             <a:r>
               <a:rPr sz="2000" b="1">
                 <a:solidFill>
-                  <a:srgbClr val="F06142"/>
+                  <a:srgbClr val="333333"/>
                 </a:solidFill>
                 <a:latin typeface="Yu Gothic"/>
               </a:rPr>
@@ -6363,7 +6363,7 @@
             <a:avLst/>
           </a:prstGeom>
           <a:solidFill>
-            <a:srgbClr val="FFFFFF"/>
+            <a:srgbClr val="F4F4F4"/>
           </a:solidFill>
           <a:ln>
             <a:noFill/>
@@ -6393,7 +6393,7 @@
             <a:avLst/>
           </a:prstGeom>
           <a:solidFill>
-            <a:srgbClr val="F06142"/>
+            <a:srgbClr val="333333"/>
           </a:solidFill>
           <a:ln>
             <a:noFill/>
@@ -6443,7 +6443,7 @@
             <a:r>
               <a:rPr sz="1200" b="1">
                 <a:solidFill>
-                  <a:srgbClr val="F06142"/>
+                  <a:srgbClr val="333333"/>
                 </a:solidFill>
                 <a:latin typeface="Yu Gothic"/>
               </a:rPr>
@@ -6608,7 +6608,7 @@
             <a:avLst/>
           </a:prstGeom>
           <a:solidFill>
-            <a:srgbClr val="FFFFFF"/>
+            <a:srgbClr val="F4F4F4"/>
           </a:solidFill>
           <a:ln>
             <a:noFill/>
@@ -6638,7 +6638,7 @@
             <a:avLst/>
           </a:prstGeom>
           <a:solidFill>
-            <a:srgbClr val="8C4A36"/>
+            <a:srgbClr val="595959"/>
           </a:solidFill>
           <a:ln>
             <a:noFill/>
@@ -6688,7 +6688,7 @@
             <a:r>
               <a:rPr sz="1200" b="1">
                 <a:solidFill>
-                  <a:srgbClr val="8C4A36"/>
+                  <a:srgbClr val="595959"/>
                 </a:solidFill>
                 <a:latin typeface="Yu Gothic"/>
               </a:rPr>
@@ -6853,7 +6853,7 @@
             <a:avLst/>
           </a:prstGeom>
           <a:solidFill>
-            <a:srgbClr val="FFFFFF"/>
+            <a:srgbClr val="F4F4F4"/>
           </a:solidFill>
           <a:ln>
             <a:noFill/>
@@ -7098,7 +7098,7 @@
             <a:avLst/>
           </a:prstGeom>
           <a:solidFill>
-            <a:srgbClr val="FFE0D0"/>
+            <a:srgbClr val="F9ECE6"/>
           </a:solidFill>
           <a:ln>
             <a:noFill/>
@@ -7113,7 +7113,7 @@
             <a:r>
               <a:rPr sz="1400" b="1">
                 <a:solidFill>
-                  <a:srgbClr val="F06142"/>
+                  <a:srgbClr val="333333"/>
                 </a:solidFill>
                 <a:latin typeface="Yu Gothic"/>
               </a:rPr>
@@ -7152,7 +7152,7 @@
     <p:bg>
       <p:bgPr>
         <a:solidFill>
-          <a:srgbClr val="FFEEE4"/>
+          <a:srgbClr val="FFFFFF"/>
         </a:solidFill>
         <a:effectLst/>
       </p:bgPr>
@@ -7172,8 +7172,8 @@
         </p:nvSpPr>
         <p:spPr>
           <a:xfrm>
-            <a:off x="0" y="6675120"/>
-            <a:ext cx="12191695" cy="182880"/>
+            <a:off x="0" y="6766560"/>
+            <a:ext cx="12191695" cy="91440"/>
           </a:xfrm>
           <a:prstGeom prst="rect">
             <a:avLst/>
@@ -7259,7 +7259,7 @@
             <a:r>
               <a:rPr sz="2000" b="1">
                 <a:solidFill>
-                  <a:srgbClr val="F06142"/>
+                  <a:srgbClr val="333333"/>
                 </a:solidFill>
                 <a:latin typeface="Yu Gothic"/>
               </a:rPr>
@@ -7318,7 +7318,7 @@
             <a:avLst/>
           </a:prstGeom>
           <a:solidFill>
-            <a:srgbClr val="FFFFFF"/>
+            <a:srgbClr val="F4F4F4"/>
           </a:solidFill>
           <a:ln>
             <a:noFill/>
@@ -7348,7 +7348,7 @@
             <a:avLst/>
           </a:prstGeom>
           <a:solidFill>
-            <a:srgbClr val="F06142"/>
+            <a:srgbClr val="333333"/>
           </a:solidFill>
           <a:ln>
             <a:noFill/>
@@ -7398,7 +7398,7 @@
             <a:r>
               <a:rPr sz="1500" b="1">
                 <a:solidFill>
-                  <a:srgbClr val="F06142"/>
+                  <a:srgbClr val="333333"/>
                 </a:solidFill>
                 <a:latin typeface="Yu Gothic"/>
               </a:rPr>
@@ -7532,7 +7532,7 @@
             <a:avLst/>
           </a:prstGeom>
           <a:solidFill>
-            <a:srgbClr val="FFFFFF"/>
+            <a:srgbClr val="F4F4F4"/>
           </a:solidFill>
           <a:ln>
             <a:noFill/>
@@ -7562,7 +7562,7 @@
             <a:avLst/>
           </a:prstGeom>
           <a:solidFill>
-            <a:srgbClr val="8C4A36"/>
+            <a:srgbClr val="595959"/>
           </a:solidFill>
           <a:ln>
             <a:noFill/>
@@ -7612,7 +7612,7 @@
             <a:r>
               <a:rPr sz="1500" b="1">
                 <a:solidFill>
-                  <a:srgbClr val="F06142"/>
+                  <a:srgbClr val="333333"/>
                 </a:solidFill>
                 <a:latin typeface="Yu Gothic"/>
               </a:rPr>
@@ -7746,7 +7746,7 @@
             <a:avLst/>
           </a:prstGeom>
           <a:solidFill>
-            <a:srgbClr val="FFFFFF"/>
+            <a:srgbClr val="F4F4F4"/>
           </a:solidFill>
           <a:ln>
             <a:noFill/>
@@ -7826,7 +7826,7 @@
             <a:r>
               <a:rPr sz="1500" b="1">
                 <a:solidFill>
-                  <a:srgbClr val="F06142"/>
+                  <a:srgbClr val="333333"/>
                 </a:solidFill>
                 <a:latin typeface="Yu Gothic"/>
               </a:rPr>
@@ -7960,7 +7960,7 @@
             <a:avLst/>
           </a:prstGeom>
           <a:solidFill>
-            <a:srgbClr val="FFFFFF"/>
+            <a:srgbClr val="F4F4F4"/>
           </a:solidFill>
           <a:ln>
             <a:noFill/>
@@ -8001,7 +8001,7 @@
             <a:r>
               <a:rPr sz="1500" b="1">
                 <a:solidFill>
-                  <a:srgbClr val="F06142"/>
+                  <a:srgbClr val="333333"/>
                 </a:solidFill>
                 <a:latin typeface="Yu Gothic"/>
               </a:rPr>
@@ -8096,7 +8096,7 @@
             <a:avLst/>
           </a:prstGeom>
           <a:solidFill>
-            <a:srgbClr val="FFFFFF"/>
+            <a:srgbClr val="F4F4F4"/>
           </a:solidFill>
           <a:ln>
             <a:noFill/>
@@ -8137,7 +8137,7 @@
             <a:r>
               <a:rPr sz="1500" b="1">
                 <a:solidFill>
-                  <a:srgbClr val="F06142"/>
+                  <a:srgbClr val="333333"/>
                 </a:solidFill>
                 <a:latin typeface="Yu Gothic"/>
               </a:rPr>
@@ -8247,7 +8247,7 @@
     <p:bg>
       <p:bgPr>
         <a:solidFill>
-          <a:srgbClr val="FFEEE4"/>
+          <a:srgbClr val="FFFFFF"/>
         </a:solidFill>
         <a:effectLst/>
       </p:bgPr>
@@ -8267,8 +8267,8 @@
         </p:nvSpPr>
         <p:spPr>
           <a:xfrm>
-            <a:off x="0" y="6675120"/>
-            <a:ext cx="12191695" cy="182880"/>
+            <a:off x="0" y="6766560"/>
+            <a:ext cx="12191695" cy="91440"/>
           </a:xfrm>
           <a:prstGeom prst="rect">
             <a:avLst/>
@@ -8354,7 +8354,7 @@
             <a:r>
               <a:rPr sz="2000" b="1">
                 <a:solidFill>
-                  <a:srgbClr val="F06142"/>
+                  <a:srgbClr val="333333"/>
                 </a:solidFill>
                 <a:latin typeface="Yu Gothic"/>
               </a:rPr>
@@ -8413,7 +8413,7 @@
             <a:avLst/>
           </a:prstGeom>
           <a:solidFill>
-            <a:srgbClr val="F06142"/>
+            <a:srgbClr val="333333"/>
           </a:solidFill>
           <a:ln>
             <a:noFill/>
@@ -8452,7 +8452,7 @@
             <a:avLst/>
           </a:prstGeom>
           <a:solidFill>
-            <a:srgbClr val="F06142"/>
+            <a:srgbClr val="333333"/>
           </a:solidFill>
           <a:ln>
             <a:noFill/>
@@ -8491,7 +8491,7 @@
             <a:avLst/>
           </a:prstGeom>
           <a:solidFill>
-            <a:srgbClr val="F06142"/>
+            <a:srgbClr val="333333"/>
           </a:solidFill>
           <a:ln>
             <a:noFill/>
@@ -8530,7 +8530,7 @@
             <a:avLst/>
           </a:prstGeom>
           <a:solidFill>
-            <a:srgbClr val="F06142"/>
+            <a:srgbClr val="333333"/>
           </a:solidFill>
           <a:ln>
             <a:noFill/>
@@ -8569,7 +8569,7 @@
             <a:avLst/>
           </a:prstGeom>
           <a:solidFill>
-            <a:srgbClr val="FFE0D0"/>
+            <a:srgbClr val="F9ECE6"/>
           </a:solidFill>
           <a:ln>
             <a:noFill/>
@@ -8584,7 +8584,7 @@
             <a:r>
               <a:rPr sz="1400" b="1">
                 <a:solidFill>
-                  <a:srgbClr val="F06142"/>
+                  <a:srgbClr val="333333"/>
                 </a:solidFill>
                 <a:latin typeface="Yu Gothic"/>
               </a:rPr>
@@ -8596,7 +8596,7 @@
             <a:r>
               <a:rPr sz="1400" b="1">
                 <a:solidFill>
-                  <a:srgbClr val="F06142"/>
+                  <a:srgbClr val="333333"/>
                 </a:solidFill>
                 <a:latin typeface="Yu Gothic"/>
               </a:rPr>
@@ -8620,7 +8620,7 @@
             <a:avLst/>
           </a:prstGeom>
           <a:solidFill>
-            <a:srgbClr val="FFFFFF"/>
+            <a:srgbClr val="F4F4F4"/>
           </a:solidFill>
           <a:ln>
             <a:noFill/>
@@ -8671,7 +8671,7 @@
             <a:avLst/>
           </a:prstGeom>
           <a:solidFill>
-            <a:srgbClr val="FFFFFF"/>
+            <a:srgbClr val="F4F4F4"/>
           </a:solidFill>
           <a:ln>
             <a:noFill/>
@@ -8710,7 +8710,7 @@
             <a:avLst/>
           </a:prstGeom>
           <a:solidFill>
-            <a:srgbClr val="FFFFFF"/>
+            <a:srgbClr val="F4F4F4"/>
           </a:solidFill>
           <a:ln>
             <a:noFill/>
@@ -8749,7 +8749,7 @@
             <a:avLst/>
           </a:prstGeom>
           <a:solidFill>
-            <a:srgbClr val="FFE0D0"/>
+            <a:srgbClr val="F9ECE6"/>
           </a:solidFill>
           <a:ln>
             <a:noFill/>
@@ -8764,7 +8764,7 @@
             <a:r>
               <a:rPr sz="1400" b="1">
                 <a:solidFill>
-                  <a:srgbClr val="F06142"/>
+                  <a:srgbClr val="333333"/>
                 </a:solidFill>
                 <a:latin typeface="Yu Gothic"/>
               </a:rPr>
@@ -8776,7 +8776,7 @@
             <a:r>
               <a:rPr sz="1400" b="1">
                 <a:solidFill>
-                  <a:srgbClr val="F06142"/>
+                  <a:srgbClr val="333333"/>
                 </a:solidFill>
                 <a:latin typeface="Yu Gothic"/>
               </a:rPr>
@@ -8800,7 +8800,7 @@
             <a:avLst/>
           </a:prstGeom>
           <a:solidFill>
-            <a:srgbClr val="FFFFFF"/>
+            <a:srgbClr val="F4F4F4"/>
           </a:solidFill>
           <a:ln>
             <a:noFill/>
@@ -8851,7 +8851,7 @@
             <a:avLst/>
           </a:prstGeom>
           <a:solidFill>
-            <a:srgbClr val="FFFFFF"/>
+            <a:srgbClr val="F4F4F4"/>
           </a:solidFill>
           <a:ln>
             <a:noFill/>
@@ -8890,7 +8890,7 @@
             <a:avLst/>
           </a:prstGeom>
           <a:solidFill>
-            <a:srgbClr val="FFFFFF"/>
+            <a:srgbClr val="F4F4F4"/>
           </a:solidFill>
           <a:ln>
             <a:noFill/>
@@ -8929,7 +8929,7 @@
             <a:avLst/>
           </a:prstGeom>
           <a:solidFill>
-            <a:srgbClr val="FFE0D0"/>
+            <a:srgbClr val="F9ECE6"/>
           </a:solidFill>
           <a:ln>
             <a:noFill/>
@@ -8944,7 +8944,7 @@
             <a:r>
               <a:rPr sz="1400" b="1">
                 <a:solidFill>
-                  <a:srgbClr val="F06142"/>
+                  <a:srgbClr val="333333"/>
                 </a:solidFill>
                 <a:latin typeface="Yu Gothic"/>
               </a:rPr>
@@ -8956,7 +8956,7 @@
             <a:r>
               <a:rPr sz="1400" b="1">
                 <a:solidFill>
-                  <a:srgbClr val="F06142"/>
+                  <a:srgbClr val="333333"/>
                 </a:solidFill>
                 <a:latin typeface="Yu Gothic"/>
               </a:rPr>
@@ -8980,7 +8980,7 @@
             <a:avLst/>
           </a:prstGeom>
           <a:solidFill>
-            <a:srgbClr val="FFFFFF"/>
+            <a:srgbClr val="F4F4F4"/>
           </a:solidFill>
           <a:ln>
             <a:noFill/>
@@ -9031,7 +9031,7 @@
             <a:avLst/>
           </a:prstGeom>
           <a:solidFill>
-            <a:srgbClr val="FFFFFF"/>
+            <a:srgbClr val="F4F4F4"/>
           </a:solidFill>
           <a:ln>
             <a:noFill/>
@@ -9070,7 +9070,7 @@
             <a:avLst/>
           </a:prstGeom>
           <a:solidFill>
-            <a:srgbClr val="FFFFFF"/>
+            <a:srgbClr val="F4F4F4"/>
           </a:solidFill>
           <a:ln>
             <a:noFill/>
@@ -9109,7 +9109,7 @@
             <a:avLst/>
           </a:prstGeom>
           <a:solidFill>
-            <a:srgbClr val="FFE0D0"/>
+            <a:srgbClr val="F9ECE6"/>
           </a:solidFill>
           <a:ln>
             <a:noFill/>
@@ -9124,7 +9124,7 @@
             <a:r>
               <a:rPr sz="1400" b="1">
                 <a:solidFill>
-                  <a:srgbClr val="F06142"/>
+                  <a:srgbClr val="333333"/>
                 </a:solidFill>
                 <a:latin typeface="Yu Gothic"/>
               </a:rPr>
@@ -9148,7 +9148,7 @@
             <a:avLst/>
           </a:prstGeom>
           <a:solidFill>
-            <a:srgbClr val="FFFFFF"/>
+            <a:srgbClr val="F4F4F4"/>
           </a:solidFill>
           <a:ln>
             <a:noFill/>
@@ -9187,7 +9187,7 @@
             <a:avLst/>
           </a:prstGeom>
           <a:solidFill>
-            <a:srgbClr val="FFFFFF"/>
+            <a:srgbClr val="F4F4F4"/>
           </a:solidFill>
           <a:ln>
             <a:noFill/>
@@ -9226,7 +9226,7 @@
             <a:avLst/>
           </a:prstGeom>
           <a:solidFill>
-            <a:srgbClr val="FFFFFF"/>
+            <a:srgbClr val="F4F4F4"/>
           </a:solidFill>
           <a:ln>
             <a:noFill/>
@@ -9265,7 +9265,7 @@
             <a:avLst/>
           </a:prstGeom>
           <a:solidFill>
-            <a:srgbClr val="FFE0D0"/>
+            <a:srgbClr val="F9ECE6"/>
           </a:solidFill>
           <a:ln>
             <a:noFill/>
@@ -9280,7 +9280,7 @@
             <a:r>
               <a:rPr sz="1400" b="1">
                 <a:solidFill>
-                  <a:srgbClr val="F06142"/>
+                  <a:srgbClr val="333333"/>
                 </a:solidFill>
                 <a:latin typeface="Yu Gothic"/>
               </a:rPr>
@@ -9304,7 +9304,7 @@
             <a:avLst/>
           </a:prstGeom>
           <a:solidFill>
-            <a:srgbClr val="FFFFFF"/>
+            <a:srgbClr val="F4F4F4"/>
           </a:solidFill>
           <a:ln>
             <a:noFill/>
@@ -9343,7 +9343,7 @@
             <a:avLst/>
           </a:prstGeom>
           <a:solidFill>
-            <a:srgbClr val="FFFFFF"/>
+            <a:srgbClr val="F4F4F4"/>
           </a:solidFill>
           <a:ln>
             <a:noFill/>
@@ -9382,7 +9382,7 @@
             <a:avLst/>
           </a:prstGeom>
           <a:solidFill>
-            <a:srgbClr val="FFFFFF"/>
+            <a:srgbClr val="F4F4F4"/>
           </a:solidFill>
           <a:ln>
             <a:noFill/>
@@ -9420,7 +9420,7 @@
     <p:bg>
       <p:bgPr>
         <a:solidFill>
-          <a:srgbClr val="FFEEE4"/>
+          <a:srgbClr val="FFFFFF"/>
         </a:solidFill>
         <a:effectLst/>
       </p:bgPr>
@@ -9440,8 +9440,8 @@
         </p:nvSpPr>
         <p:spPr>
           <a:xfrm>
-            <a:off x="0" y="6675120"/>
-            <a:ext cx="12191695" cy="182880"/>
+            <a:off x="0" y="6766560"/>
+            <a:ext cx="12191695" cy="91440"/>
           </a:xfrm>
           <a:prstGeom prst="rect">
             <a:avLst/>
@@ -9527,7 +9527,7 @@
             <a:r>
               <a:rPr sz="2000" b="1">
                 <a:solidFill>
-                  <a:srgbClr val="F06142"/>
+                  <a:srgbClr val="333333"/>
                 </a:solidFill>
                 <a:latin typeface="Yu Gothic"/>
               </a:rPr>
@@ -9586,7 +9586,7 @@
             <a:avLst/>
           </a:prstGeom>
           <a:solidFill>
-            <a:srgbClr val="FFFFFF"/>
+            <a:srgbClr val="F4F4F4"/>
           </a:solidFill>
           <a:ln>
             <a:noFill/>
@@ -9627,7 +9627,7 @@
             <a:r>
               <a:rPr sz="1700" b="1">
                 <a:solidFill>
-                  <a:srgbClr val="F06142"/>
+                  <a:srgbClr val="333333"/>
                 </a:solidFill>
                 <a:latin typeface="Yu Gothic"/>
               </a:rPr>
@@ -9754,7 +9754,7 @@
             <a:avLst/>
           </a:prstGeom>
           <a:solidFill>
-            <a:srgbClr val="FFFFFF"/>
+            <a:srgbClr val="F4F4F4"/>
           </a:solidFill>
           <a:ln>
             <a:noFill/>
@@ -9795,7 +9795,7 @@
             <a:r>
               <a:rPr sz="1700" b="1">
                 <a:solidFill>
-                  <a:srgbClr val="F06142"/>
+                  <a:srgbClr val="333333"/>
                 </a:solidFill>
                 <a:latin typeface="Yu Gothic"/>
               </a:rPr>
@@ -9906,7 +9906,7 @@
             <a:avLst/>
           </a:prstGeom>
           <a:solidFill>
-            <a:srgbClr val="FFFFFF"/>
+            <a:srgbClr val="F4F4F4"/>
           </a:solidFill>
           <a:ln>
             <a:noFill/>
@@ -9947,7 +9947,7 @@
             <a:r>
               <a:rPr sz="1700" b="1">
                 <a:solidFill>
-                  <a:srgbClr val="F06142"/>
+                  <a:srgbClr val="333333"/>
                 </a:solidFill>
                 <a:latin typeface="Yu Gothic"/>
               </a:rPr>
@@ -10058,7 +10058,7 @@
             <a:avLst/>
           </a:prstGeom>
           <a:solidFill>
-            <a:srgbClr val="FFFFFF"/>
+            <a:srgbClr val="F4F4F4"/>
           </a:solidFill>
           <a:ln>
             <a:noFill/>
@@ -10099,7 +10099,7 @@
             <a:r>
               <a:rPr sz="1700" b="1">
                 <a:solidFill>
-                  <a:srgbClr val="F06142"/>
+                  <a:srgbClr val="333333"/>
                 </a:solidFill>
                 <a:latin typeface="Yu Gothic"/>
               </a:rPr>
